--- a/output/wordlabs-land-3day.pptx
+++ b/output/wordlabs-land-3day.pptx
@@ -4240,7 +4240,7 @@
                 <a:ea typeface="Calibri" pitchFamily="34" charset="-122"/>
                 <a:cs typeface="Calibri" pitchFamily="34" charset="-120"/>
               </a:rPr>
-              <a:t>"earth, ground, territory"</a:t>
+              <a:t>"ground, earth, territory"</a:t>
             </a:r>
             <a:endParaRPr lang="en-US" sz="2200" dirty="0"/>
           </a:p>
@@ -4279,7 +4279,7 @@
                 <a:ea typeface="Calibri" pitchFamily="34" charset="-122"/>
                 <a:cs typeface="Calibri" pitchFamily="34" charset="-120"/>
               </a:rPr>
-              <a:t>Origin: Old English: land</a:t>
+              <a:t>Origin: Latin: landa</a:t>
             </a:r>
             <a:endParaRPr lang="en-US" sz="1300" dirty="0"/>
           </a:p>
@@ -5288,7 +5288,7 @@
                 <a:ea typeface="Calibri" pitchFamily="34" charset="-122"/>
                 <a:cs typeface="Calibri" pitchFamily="34" charset="-120"/>
               </a:rPr>
-              <a:t>Word Labs  •  wordlabs.app  •  Root: 'land' = earth, ground, territory</a:t>
+              <a:t>Word Labs  •  wordlabs.app  •  Root: 'land' = ground, earth, territory</a:t>
             </a:r>
             <a:endParaRPr lang="en-US" sz="800" dirty="0"/>
           </a:p>
@@ -5928,7 +5928,7 @@
                 <a:ea typeface="Calibri" pitchFamily="34" charset="-122"/>
                 <a:cs typeface="Calibri" pitchFamily="34" charset="-120"/>
               </a:rPr>
-              <a:t>Word Labs  •  wordlabs.app  •  Root: 'land' = earth, ground, territory</a:t>
+              <a:t>Word Labs  •  wordlabs.app  •  Root: 'land' = ground, earth, territory</a:t>
             </a:r>
             <a:endParaRPr lang="en-US" sz="800" dirty="0"/>
           </a:p>
@@ -6040,7 +6040,7 @@
                 <a:ea typeface="Calibri" pitchFamily="34" charset="-122"/>
                 <a:cs typeface="Calibri" pitchFamily="34" charset="-120"/>
               </a:rPr>
-              <a:t>The </a:t>
+              <a:t>The famous </a:t>
             </a:r>
             <a:pPr algn="l" indent="0" marL="0">
               <a:buNone/>
@@ -6057,7 +6057,7 @@
                 <a:ea typeface="Calibri" pitchFamily="34" charset="-122"/>
                 <a:cs typeface="Calibri" pitchFamily="34" charset="-120"/>
               </a:rPr>
-              <a:t>landscape</a:t>
+              <a:t>landmark</a:t>
             </a:r>
             <a:pPr algn="l" indent="0" marL="0">
               <a:buNone/>
@@ -6071,7 +6071,7 @@
                 <a:ea typeface="Calibri" pitchFamily="34" charset="-122"/>
                 <a:cs typeface="Calibri" pitchFamily="34" charset="-120"/>
               </a:rPr>
-              <a:t> was beautiful, and the pilot made a safe </a:t>
+              <a:t> stood tall on the </a:t>
             </a:r>
             <a:pPr algn="l" indent="0" marL="0">
               <a:buNone/>
@@ -6088,7 +6088,7 @@
                 <a:ea typeface="Calibri" pitchFamily="34" charset="-122"/>
                 <a:cs typeface="Calibri" pitchFamily="34" charset="-120"/>
               </a:rPr>
-              <a:t>landing</a:t>
+              <a:t>farmland</a:t>
             </a:r>
             <a:pPr algn="l" indent="0" marL="0">
               <a:buNone/>
@@ -6102,7 +6102,7 @@
                 <a:ea typeface="Calibri" pitchFamily="34" charset="-122"/>
                 <a:cs typeface="Calibri" pitchFamily="34" charset="-120"/>
               </a:rPr>
-              <a:t> in the valley below.</a:t>
+              <a:t>, where sheep had grazed for generations.</a:t>
             </a:r>
             <a:endParaRPr lang="en-US" sz="1800" dirty="0"/>
           </a:p>
@@ -6257,7 +6257,7 @@
                 <a:ea typeface="Trebuchet MS" pitchFamily="34" charset="-122"/>
                 <a:cs typeface="Trebuchet MS" pitchFamily="34" charset="-120"/>
               </a:rPr>
-              <a:t>landscape</a:t>
+              <a:t>landmark</a:t>
             </a:r>
             <a:endParaRPr lang="en-US" sz="1400" dirty="0"/>
           </a:p>
@@ -6385,7 +6385,7 @@
                 <a:ea typeface="Trebuchet MS" pitchFamily="34" charset="-122"/>
                 <a:cs typeface="Trebuchet MS" pitchFamily="34" charset="-120"/>
               </a:rPr>
-              <a:t>landing</a:t>
+              <a:t>farmland</a:t>
             </a:r>
             <a:endParaRPr lang="en-US" sz="1400" dirty="0"/>
           </a:p>
@@ -6716,7 +6716,7 @@
                 <a:ea typeface="Calibri" pitchFamily="34" charset="-122"/>
                 <a:cs typeface="Calibri" pitchFamily="34" charset="-120"/>
               </a:rPr>
-              <a:t>Word Labs  •  wordlabs.app  •  Root: 'land' = earth, ground, territory</a:t>
+              <a:t>Word Labs  •  wordlabs.app  •  Root: 'land' = ground, earth, territory</a:t>
             </a:r>
             <a:endParaRPr lang="en-US" sz="800" dirty="0"/>
           </a:p>
@@ -6855,7 +6855,7 @@
                 <a:ea typeface="Trebuchet MS" pitchFamily="34" charset="-122"/>
                 <a:cs typeface="Trebuchet MS" pitchFamily="34" charset="-120"/>
               </a:rPr>
-              <a:t>landscape</a:t>
+              <a:t>landmark</a:t>
             </a:r>
             <a:endParaRPr lang="en-US" sz="2800" dirty="0"/>
           </a:p>
@@ -7543,7 +7543,7 @@
                 <a:ea typeface="Calibri" pitchFamily="34" charset="-122"/>
                 <a:cs typeface="Calibri" pitchFamily="34" charset="-120"/>
               </a:rPr>
-              <a:t>Word Labs  •  wordlabs.app  •  Root: 'land' = earth, ground, territory</a:t>
+              <a:t>Word Labs  •  wordlabs.app  •  Root: 'land' = ground, earth, territory</a:t>
             </a:r>
             <a:endParaRPr lang="en-US" sz="800" dirty="0"/>
           </a:p>
@@ -7682,7 +7682,7 @@
                 <a:ea typeface="Trebuchet MS" pitchFamily="34" charset="-122"/>
                 <a:cs typeface="Trebuchet MS" pitchFamily="34" charset="-120"/>
               </a:rPr>
-              <a:t>landscape</a:t>
+              <a:t>landmark</a:t>
             </a:r>
             <a:endParaRPr lang="en-US" sz="2800" dirty="0"/>
           </a:p>
@@ -7860,7 +7860,7 @@
                 <a:ea typeface="Calibri" pitchFamily="34" charset="-122"/>
                 <a:cs typeface="Calibri" pitchFamily="34" charset="-120"/>
               </a:rPr>
-              <a:t>ground, territory</a:t>
+              <a:t>ground, earth, territory</a:t>
             </a:r>
             <a:endParaRPr lang="en-US" sz="850" dirty="0"/>
           </a:p>
@@ -7933,7 +7933,7 @@
                 <a:ea typeface="Trebuchet MS" pitchFamily="34" charset="-122"/>
                 <a:cs typeface="Trebuchet MS" pitchFamily="34" charset="-120"/>
               </a:rPr>
-              <a:t>scape</a:t>
+              <a:t>mark</a:t>
             </a:r>
             <a:endParaRPr lang="en-US" sz="1300" dirty="0"/>
           </a:p>
@@ -7972,7 +7972,7 @@
                 <a:ea typeface="Calibri" pitchFamily="34" charset="-122"/>
                 <a:cs typeface="Calibri" pitchFamily="34" charset="-120"/>
               </a:rPr>
-              <a:t>view, scene</a:t>
+              <a:t>a sign or feature that stands out</a:t>
             </a:r>
             <a:endParaRPr lang="en-US" sz="850" dirty="0"/>
           </a:p>
@@ -8528,7 +8528,7 @@
                 <a:ea typeface="Calibri" pitchFamily="34" charset="-122"/>
                 <a:cs typeface="Calibri" pitchFamily="34" charset="-120"/>
               </a:rPr>
-              <a:t>Word Labs  •  wordlabs.app  •  Root: 'land' = earth, ground, territory</a:t>
+              <a:t>Word Labs  •  wordlabs.app  •  Root: 'land' = ground, earth, territory</a:t>
             </a:r>
             <a:endParaRPr lang="en-US" sz="800" dirty="0"/>
           </a:p>
@@ -8667,7 +8667,7 @@
                 <a:ea typeface="Trebuchet MS" pitchFamily="34" charset="-122"/>
                 <a:cs typeface="Trebuchet MS" pitchFamily="34" charset="-120"/>
               </a:rPr>
-              <a:t>landscape</a:t>
+              <a:t>landmark</a:t>
             </a:r>
             <a:endParaRPr lang="en-US" sz="2800" dirty="0"/>
           </a:p>
@@ -8845,7 +8845,7 @@
                 <a:ea typeface="Calibri" pitchFamily="34" charset="-122"/>
                 <a:cs typeface="Calibri" pitchFamily="34" charset="-120"/>
               </a:rPr>
-              <a:t>ground, territory</a:t>
+              <a:t>ground, earth, territory</a:t>
             </a:r>
             <a:endParaRPr lang="en-US" sz="850" dirty="0"/>
           </a:p>
@@ -8918,7 +8918,7 @@
                 <a:ea typeface="Trebuchet MS" pitchFamily="34" charset="-122"/>
                 <a:cs typeface="Trebuchet MS" pitchFamily="34" charset="-120"/>
               </a:rPr>
-              <a:t>scape</a:t>
+              <a:t>mark</a:t>
             </a:r>
             <a:endParaRPr lang="en-US" sz="1300" dirty="0"/>
           </a:p>
@@ -8957,7 +8957,7 @@
                 <a:ea typeface="Calibri" pitchFamily="34" charset="-122"/>
                 <a:cs typeface="Calibri" pitchFamily="34" charset="-120"/>
               </a:rPr>
-              <a:t>view, scene</a:t>
+              <a:t>a sign or feature that stands out</a:t>
             </a:r>
             <a:endParaRPr lang="en-US" sz="850" dirty="0"/>
           </a:p>
@@ -9221,7 +9221,7 @@
                 <a:ea typeface="Trebuchet MS" pitchFamily="34" charset="-122"/>
                 <a:cs typeface="Trebuchet MS" pitchFamily="34" charset="-120"/>
               </a:rPr>
-              <a:t>scape</a:t>
+              <a:t>mark</a:t>
             </a:r>
             <a:endParaRPr lang="en-US" sz="1400" dirty="0"/>
           </a:p>
@@ -9645,7 +9645,7 @@
                 <a:ea typeface="Calibri" pitchFamily="34" charset="-122"/>
                 <a:cs typeface="Calibri" pitchFamily="34" charset="-120"/>
               </a:rPr>
-              <a:t>Word Labs  •  wordlabs.app  •  Root: 'land' = earth, ground, territory</a:t>
+              <a:t>Word Labs  •  wordlabs.app  •  Root: 'land' = ground, earth, territory</a:t>
             </a:r>
             <a:endParaRPr lang="en-US" sz="800" dirty="0"/>
           </a:p>
@@ -9784,7 +9784,7 @@
                 <a:ea typeface="Trebuchet MS" pitchFamily="34" charset="-122"/>
                 <a:cs typeface="Trebuchet MS" pitchFamily="34" charset="-120"/>
               </a:rPr>
-              <a:t>landscape</a:t>
+              <a:t>landmark</a:t>
             </a:r>
             <a:endParaRPr lang="en-US" sz="2800" dirty="0"/>
           </a:p>
@@ -9962,7 +9962,7 @@
                 <a:ea typeface="Calibri" pitchFamily="34" charset="-122"/>
                 <a:cs typeface="Calibri" pitchFamily="34" charset="-120"/>
               </a:rPr>
-              <a:t>ground, territory</a:t>
+              <a:t>ground, earth, territory</a:t>
             </a:r>
             <a:endParaRPr lang="en-US" sz="850" dirty="0"/>
           </a:p>
@@ -10035,7 +10035,7 @@
                 <a:ea typeface="Trebuchet MS" pitchFamily="34" charset="-122"/>
                 <a:cs typeface="Trebuchet MS" pitchFamily="34" charset="-120"/>
               </a:rPr>
-              <a:t>scape</a:t>
+              <a:t>mark</a:t>
             </a:r>
             <a:endParaRPr lang="en-US" sz="1300" dirty="0"/>
           </a:p>
@@ -10074,7 +10074,7 @@
                 <a:ea typeface="Calibri" pitchFamily="34" charset="-122"/>
                 <a:cs typeface="Calibri" pitchFamily="34" charset="-120"/>
               </a:rPr>
-              <a:t>view, scene</a:t>
+              <a:t>a sign or feature that stands out</a:t>
             </a:r>
             <a:endParaRPr lang="en-US" sz="850" dirty="0"/>
           </a:p>
@@ -10338,7 +10338,7 @@
                 <a:ea typeface="Trebuchet MS" pitchFamily="34" charset="-122"/>
                 <a:cs typeface="Trebuchet MS" pitchFamily="34" charset="-120"/>
               </a:rPr>
-              <a:t>scape</a:t>
+              <a:t>mark</a:t>
             </a:r>
             <a:endParaRPr lang="en-US" sz="1400" dirty="0"/>
           </a:p>
@@ -10419,11 +10419,11 @@
         <p:spPr>
           <a:xfrm>
             <a:off x="1874520" y="4096512"/>
-            <a:ext cx="6903720" cy="804672"/>
+            <a:ext cx="6903720" cy="658368"/>
           </a:xfrm>
           <a:prstGeom prst="rect">
             <a:avLst>
-              <a:gd name="adj" fmla="val 6818"/>
+              <a:gd name="adj" fmla="val 8333"/>
             </a:avLst>
           </a:prstGeom>
           <a:solidFill>
@@ -10445,12 +10445,12 @@
         </p:nvSpPr>
         <p:spPr>
           <a:xfrm>
-            <a:off x="1951330" y="4169664"/>
-            <a:ext cx="676656" cy="384048"/>
+            <a:off x="2124837" y="4169664"/>
+            <a:ext cx="685800" cy="475488"/>
           </a:xfrm>
           <a:prstGeom prst="rect">
             <a:avLst>
-              <a:gd name="adj" fmla="val 9524"/>
+              <a:gd name="adj" fmla="val 7692"/>
             </a:avLst>
           </a:prstGeom>
           <a:solidFill>
@@ -10472,8 +10472,8 @@
         </p:nvSpPr>
         <p:spPr>
           <a:xfrm>
-            <a:off x="1951330" y="4169664"/>
-            <a:ext cx="676656" cy="384048"/>
+            <a:off x="2124837" y="4169664"/>
+            <a:ext cx="685800" cy="475488"/>
           </a:xfrm>
           <a:prstGeom prst="rect">
             <a:avLst/>
@@ -10511,12 +10511,12 @@
         </p:nvSpPr>
         <p:spPr>
           <a:xfrm>
-            <a:off x="2677363" y="4169664"/>
-            <a:ext cx="676656" cy="384048"/>
+            <a:off x="3033522" y="4169664"/>
+            <a:ext cx="685800" cy="475488"/>
           </a:xfrm>
           <a:prstGeom prst="rect">
             <a:avLst>
-              <a:gd name="adj" fmla="val 9524"/>
+              <a:gd name="adj" fmla="val 7692"/>
             </a:avLst>
           </a:prstGeom>
           <a:solidFill>
@@ -10538,8 +10538,8 @@
         </p:nvSpPr>
         <p:spPr>
           <a:xfrm>
-            <a:off x="2677363" y="4169664"/>
-            <a:ext cx="676656" cy="384048"/>
+            <a:off x="3033522" y="4169664"/>
+            <a:ext cx="685800" cy="475488"/>
           </a:xfrm>
           <a:prstGeom prst="rect">
             <a:avLst/>
@@ -10577,12 +10577,12 @@
         </p:nvSpPr>
         <p:spPr>
           <a:xfrm>
-            <a:off x="3403397" y="4169664"/>
-            <a:ext cx="676656" cy="384048"/>
+            <a:off x="3942207" y="4169664"/>
+            <a:ext cx="685800" cy="475488"/>
           </a:xfrm>
           <a:prstGeom prst="rect">
             <a:avLst>
-              <a:gd name="adj" fmla="val 9524"/>
+              <a:gd name="adj" fmla="val 7692"/>
             </a:avLst>
           </a:prstGeom>
           <a:solidFill>
@@ -10604,8 +10604,8 @@
         </p:nvSpPr>
         <p:spPr>
           <a:xfrm>
-            <a:off x="3403397" y="4169664"/>
-            <a:ext cx="676656" cy="384048"/>
+            <a:off x="3942207" y="4169664"/>
+            <a:ext cx="685800" cy="475488"/>
           </a:xfrm>
           <a:prstGeom prst="rect">
             <a:avLst/>
@@ -10643,12 +10643,12 @@
         </p:nvSpPr>
         <p:spPr>
           <a:xfrm>
-            <a:off x="4129430" y="4169664"/>
-            <a:ext cx="676656" cy="384048"/>
+            <a:off x="4850892" y="4169664"/>
+            <a:ext cx="685800" cy="475488"/>
           </a:xfrm>
           <a:prstGeom prst="rect">
             <a:avLst>
-              <a:gd name="adj" fmla="val 9524"/>
+              <a:gd name="adj" fmla="val 7692"/>
             </a:avLst>
           </a:prstGeom>
           <a:solidFill>
@@ -10670,8 +10670,8 @@
         </p:nvSpPr>
         <p:spPr>
           <a:xfrm>
-            <a:off x="4129430" y="4169664"/>
-            <a:ext cx="676656" cy="384048"/>
+            <a:off x="4850892" y="4169664"/>
+            <a:ext cx="685800" cy="475488"/>
           </a:xfrm>
           <a:prstGeom prst="rect">
             <a:avLst/>
@@ -10709,12 +10709,12 @@
         </p:nvSpPr>
         <p:spPr>
           <a:xfrm>
-            <a:off x="4855464" y="4169664"/>
-            <a:ext cx="676656" cy="384048"/>
+            <a:off x="5759577" y="4169664"/>
+            <a:ext cx="685800" cy="475488"/>
           </a:xfrm>
           <a:prstGeom prst="rect">
             <a:avLst>
-              <a:gd name="adj" fmla="val 9524"/>
+              <a:gd name="adj" fmla="val 7692"/>
             </a:avLst>
           </a:prstGeom>
           <a:solidFill>
@@ -10736,8 +10736,8 @@
         </p:nvSpPr>
         <p:spPr>
           <a:xfrm>
-            <a:off x="4855464" y="4169664"/>
-            <a:ext cx="676656" cy="384048"/>
+            <a:off x="5759577" y="4169664"/>
+            <a:ext cx="685800" cy="475488"/>
           </a:xfrm>
           <a:prstGeom prst="rect">
             <a:avLst/>
@@ -10761,7 +10761,7 @@
                 <a:ea typeface="Trebuchet MS" pitchFamily="34" charset="-122"/>
                 <a:cs typeface="Trebuchet MS" pitchFamily="34" charset="-120"/>
               </a:rPr>
-              <a:t>s</a:t>
+              <a:t>m</a:t>
             </a:r>
             <a:endParaRPr lang="en-US" sz="900" dirty="0"/>
           </a:p>
@@ -10775,12 +10775,12 @@
         </p:nvSpPr>
         <p:spPr>
           <a:xfrm>
-            <a:off x="5581498" y="4169664"/>
-            <a:ext cx="676656" cy="384048"/>
+            <a:off x="6668262" y="4169664"/>
+            <a:ext cx="685800" cy="475488"/>
           </a:xfrm>
           <a:prstGeom prst="rect">
             <a:avLst>
-              <a:gd name="adj" fmla="val 9524"/>
+              <a:gd name="adj" fmla="val 7692"/>
             </a:avLst>
           </a:prstGeom>
           <a:solidFill>
@@ -10802,8 +10802,8 @@
         </p:nvSpPr>
         <p:spPr>
           <a:xfrm>
-            <a:off x="5581498" y="4169664"/>
-            <a:ext cx="676656" cy="384048"/>
+            <a:off x="6668262" y="4169664"/>
+            <a:ext cx="685800" cy="475488"/>
           </a:xfrm>
           <a:prstGeom prst="rect">
             <a:avLst/>
@@ -10827,7 +10827,7 @@
                 <a:ea typeface="Trebuchet MS" pitchFamily="34" charset="-122"/>
                 <a:cs typeface="Trebuchet MS" pitchFamily="34" charset="-120"/>
               </a:rPr>
-              <a:t>c</a:t>
+              <a:t>ar</a:t>
             </a:r>
             <a:endParaRPr lang="en-US" sz="900" dirty="0"/>
           </a:p>
@@ -10835,57 +10835,18 @@
       </p:sp>
       <p:sp>
         <p:nvSpPr>
-          <p:cNvPr id="45" name="Text 43"/>
-          <p:cNvSpPr/>
-          <p:nvPr/>
-        </p:nvSpPr>
-        <p:spPr>
-          <a:xfrm>
-            <a:off x="5581498" y="4572000"/>
-            <a:ext cx="676656" cy="219456"/>
-          </a:xfrm>
-          <a:prstGeom prst="rect">
-            <a:avLst/>
-          </a:prstGeom>
-          <a:noFill/>
-          <a:ln/>
-        </p:spPr>
-        <p:txBody>
-          <a:bodyPr wrap="square" lIns="0" tIns="0" rIns="0" bIns="0" rtlCol="0" anchor="t"/>
-          <a:lstStyle/>
-          <a:p>
-            <a:pPr algn="ctr" indent="0" marL="0">
-              <a:buNone/>
-            </a:pPr>
-            <a:r>
-              <a:rPr lang="en-US" sz="750" i="1" dirty="0">
-                <a:solidFill>
-                  <a:srgbClr val="94A3B8"/>
-                </a:solidFill>
-                <a:latin typeface="Calibri" pitchFamily="34" charset="0"/>
-                <a:ea typeface="Calibri" pitchFamily="34" charset="-122"/>
-                <a:cs typeface="Calibri" pitchFamily="34" charset="-120"/>
-              </a:rPr>
-              <a:t>/k/</a:t>
-            </a:r>
-            <a:endParaRPr lang="en-US" sz="750" dirty="0"/>
-          </a:p>
-        </p:txBody>
-      </p:sp>
-      <p:sp>
-        <p:nvSpPr>
-          <p:cNvPr id="46" name="Shape 44"/>
-          <p:cNvSpPr/>
-          <p:nvPr/>
-        </p:nvSpPr>
-        <p:spPr>
-          <a:xfrm>
-            <a:off x="6307531" y="4169664"/>
-            <a:ext cx="676656" cy="384048"/>
+          <p:cNvPr id="45" name="Shape 43"/>
+          <p:cNvSpPr/>
+          <p:nvPr/>
+        </p:nvSpPr>
+        <p:spPr>
+          <a:xfrm>
+            <a:off x="7576947" y="4169664"/>
+            <a:ext cx="685800" cy="475488"/>
           </a:xfrm>
           <a:prstGeom prst="rect">
             <a:avLst>
-              <a:gd name="adj" fmla="val 9524"/>
+              <a:gd name="adj" fmla="val 7692"/>
             </a:avLst>
           </a:prstGeom>
           <a:solidFill>
@@ -10901,14 +10862,14 @@
       </p:sp>
       <p:sp>
         <p:nvSpPr>
-          <p:cNvPr id="47" name="Text 45"/>
-          <p:cNvSpPr/>
-          <p:nvPr/>
-        </p:nvSpPr>
-        <p:spPr>
-          <a:xfrm>
-            <a:off x="6307531" y="4169664"/>
-            <a:ext cx="676656" cy="384048"/>
+          <p:cNvPr id="46" name="Text 44"/>
+          <p:cNvSpPr/>
+          <p:nvPr/>
+        </p:nvSpPr>
+        <p:spPr>
+          <a:xfrm>
+            <a:off x="7576947" y="4169664"/>
+            <a:ext cx="685800" cy="475488"/>
           </a:xfrm>
           <a:prstGeom prst="rect">
             <a:avLst/>
@@ -10932,139 +10893,7 @@
                 <a:ea typeface="Trebuchet MS" pitchFamily="34" charset="-122"/>
                 <a:cs typeface="Trebuchet MS" pitchFamily="34" charset="-120"/>
               </a:rPr>
-              <a:t>a</a:t>
-            </a:r>
-            <a:endParaRPr lang="en-US" sz="900" dirty="0"/>
-          </a:p>
-        </p:txBody>
-      </p:sp>
-      <p:sp>
-        <p:nvSpPr>
-          <p:cNvPr id="48" name="Shape 46"/>
-          <p:cNvSpPr/>
-          <p:nvPr/>
-        </p:nvSpPr>
-        <p:spPr>
-          <a:xfrm>
-            <a:off x="7033565" y="4169664"/>
-            <a:ext cx="676656" cy="384048"/>
-          </a:xfrm>
-          <a:prstGeom prst="rect">
-            <a:avLst>
-              <a:gd name="adj" fmla="val 9524"/>
-            </a:avLst>
-          </a:prstGeom>
-          <a:solidFill>
-            <a:srgbClr val="FFFFFF"/>
-          </a:solidFill>
-          <a:ln w="12700">
-            <a:solidFill>
-              <a:srgbClr val="DB2777"/>
-            </a:solidFill>
-            <a:prstDash val="solid"/>
-          </a:ln>
-        </p:spPr>
-      </p:sp>
-      <p:sp>
-        <p:nvSpPr>
-          <p:cNvPr id="49" name="Text 47"/>
-          <p:cNvSpPr/>
-          <p:nvPr/>
-        </p:nvSpPr>
-        <p:spPr>
-          <a:xfrm>
-            <a:off x="7033565" y="4169664"/>
-            <a:ext cx="676656" cy="384048"/>
-          </a:xfrm>
-          <a:prstGeom prst="rect">
-            <a:avLst/>
-          </a:prstGeom>
-          <a:noFill/>
-          <a:ln/>
-        </p:spPr>
-        <p:txBody>
-          <a:bodyPr wrap="square" lIns="0" tIns="0" rIns="0" bIns="0" rtlCol="0" anchor="ctr"/>
-          <a:lstStyle/>
-          <a:p>
-            <a:pPr algn="ctr" indent="0" marL="0">
-              <a:buNone/>
-            </a:pPr>
-            <a:r>
-              <a:rPr lang="en-US" sz="900" b="1" dirty="0">
-                <a:solidFill>
-                  <a:srgbClr val="9D174D"/>
-                </a:solidFill>
-                <a:latin typeface="Trebuchet MS" pitchFamily="34" charset="0"/>
-                <a:ea typeface="Trebuchet MS" pitchFamily="34" charset="-122"/>
-                <a:cs typeface="Trebuchet MS" pitchFamily="34" charset="-120"/>
-              </a:rPr>
-              <a:t>p</a:t>
-            </a:r>
-            <a:endParaRPr lang="en-US" sz="900" dirty="0"/>
-          </a:p>
-        </p:txBody>
-      </p:sp>
-      <p:sp>
-        <p:nvSpPr>
-          <p:cNvPr id="50" name="Shape 48"/>
-          <p:cNvSpPr/>
-          <p:nvPr/>
-        </p:nvSpPr>
-        <p:spPr>
-          <a:xfrm>
-            <a:off x="7759598" y="4169664"/>
-            <a:ext cx="676656" cy="384048"/>
-          </a:xfrm>
-          <a:prstGeom prst="rect">
-            <a:avLst>
-              <a:gd name="adj" fmla="val 9524"/>
-            </a:avLst>
-          </a:prstGeom>
-          <a:solidFill>
-            <a:srgbClr val="FFFFFF"/>
-          </a:solidFill>
-          <a:ln w="12700">
-            <a:solidFill>
-              <a:srgbClr val="DB2777"/>
-            </a:solidFill>
-            <a:prstDash val="solid"/>
-          </a:ln>
-        </p:spPr>
-      </p:sp>
-      <p:sp>
-        <p:nvSpPr>
-          <p:cNvPr id="51" name="Text 49"/>
-          <p:cNvSpPr/>
-          <p:nvPr/>
-        </p:nvSpPr>
-        <p:spPr>
-          <a:xfrm>
-            <a:off x="7759598" y="4169664"/>
-            <a:ext cx="676656" cy="384048"/>
-          </a:xfrm>
-          <a:prstGeom prst="rect">
-            <a:avLst/>
-          </a:prstGeom>
-          <a:noFill/>
-          <a:ln/>
-        </p:spPr>
-        <p:txBody>
-          <a:bodyPr wrap="square" lIns="0" tIns="0" rIns="0" bIns="0" rtlCol="0" anchor="ctr"/>
-          <a:lstStyle/>
-          <a:p>
-            <a:pPr algn="ctr" indent="0" marL="0">
-              <a:buNone/>
-            </a:pPr>
-            <a:r>
-              <a:rPr lang="en-US" sz="900" b="1" dirty="0">
-                <a:solidFill>
-                  <a:srgbClr val="9D174D"/>
-                </a:solidFill>
-                <a:latin typeface="Trebuchet MS" pitchFamily="34" charset="0"/>
-                <a:ea typeface="Trebuchet MS" pitchFamily="34" charset="-122"/>
-                <a:cs typeface="Trebuchet MS" pitchFamily="34" charset="-120"/>
-              </a:rPr>
-              <a:t>e</a:t>
+              <a:t>k</a:t>
             </a:r>
             <a:endParaRPr lang="en-US" sz="900" dirty="0"/>
           </a:p>
@@ -11356,7 +11185,7 @@
                 <a:ea typeface="Calibri" pitchFamily="34" charset="-122"/>
                 <a:cs typeface="Calibri" pitchFamily="34" charset="-120"/>
               </a:rPr>
-              <a:t>Word Labs  •  wordlabs.app  •  Root: 'land' = earth, ground, territory</a:t>
+              <a:t>Word Labs  •  wordlabs.app  •  Root: 'land' = ground, earth, territory</a:t>
             </a:r>
             <a:endParaRPr lang="en-US" sz="800" dirty="0"/>
           </a:p>
@@ -11495,7 +11324,7 @@
                 <a:ea typeface="Trebuchet MS" pitchFamily="34" charset="-122"/>
                 <a:cs typeface="Trebuchet MS" pitchFamily="34" charset="-120"/>
               </a:rPr>
-              <a:t>landing</a:t>
+              <a:t>farmland</a:t>
             </a:r>
             <a:endParaRPr lang="en-US" sz="2800" dirty="0"/>
           </a:p>
@@ -12183,7 +12012,7 @@
                 <a:ea typeface="Calibri" pitchFamily="34" charset="-122"/>
                 <a:cs typeface="Calibri" pitchFamily="34" charset="-120"/>
               </a:rPr>
-              <a:t>Word Labs  •  wordlabs.app  •  Root: 'land' = earth, ground, territory</a:t>
+              <a:t>Word Labs  •  wordlabs.app  •  Root: 'land' = ground, earth, territory</a:t>
             </a:r>
             <a:endParaRPr lang="en-US" sz="800" dirty="0"/>
           </a:p>
@@ -12322,7 +12151,7 @@
                 <a:ea typeface="Trebuchet MS" pitchFamily="34" charset="-122"/>
                 <a:cs typeface="Trebuchet MS" pitchFamily="34" charset="-120"/>
               </a:rPr>
-              <a:t>landing</a:t>
+              <a:t>farmland</a:t>
             </a:r>
             <a:endParaRPr lang="en-US" sz="2800" dirty="0"/>
           </a:p>
@@ -12411,11 +12240,11 @@
             </a:avLst>
           </a:prstGeom>
           <a:solidFill>
-            <a:srgbClr val="CCFBF1"/>
+            <a:srgbClr val="DDD6FE"/>
           </a:solidFill>
           <a:ln w="19050">
             <a:solidFill>
-              <a:srgbClr val="0D9488"/>
+              <a:srgbClr val="7C3AED"/>
             </a:solidFill>
             <a:prstDash val="solid"/>
           </a:ln>
@@ -12455,13 +12284,13 @@
             <a:r>
               <a:rPr lang="en-US" sz="1300" b="1" dirty="0">
                 <a:solidFill>
-                  <a:srgbClr val="0F766E"/>
+                  <a:srgbClr val="4C1D95"/>
                 </a:solidFill>
                 <a:latin typeface="Trebuchet MS" pitchFamily="34" charset="0"/>
                 <a:ea typeface="Trebuchet MS" pitchFamily="34" charset="-122"/>
                 <a:cs typeface="Trebuchet MS" pitchFamily="34" charset="-120"/>
               </a:rPr>
-              <a:t>land</a:t>
+              <a:t>farm</a:t>
             </a:r>
             <a:endParaRPr lang="en-US" sz="1300" dirty="0"/>
           </a:p>
@@ -12500,7 +12329,7 @@
                 <a:ea typeface="Calibri" pitchFamily="34" charset="-122"/>
                 <a:cs typeface="Calibri" pitchFamily="34" charset="-120"/>
               </a:rPr>
-              <a:t>ground, territory</a:t>
+              <a:t>land used to grow food or raise animals</a:t>
             </a:r>
             <a:endParaRPr lang="en-US" sz="850" dirty="0"/>
           </a:p>
@@ -12523,11 +12352,11 @@
             </a:avLst>
           </a:prstGeom>
           <a:solidFill>
-            <a:srgbClr val="FCE7F3"/>
+            <a:srgbClr val="CCFBF1"/>
           </a:solidFill>
           <a:ln w="19050">
             <a:solidFill>
-              <a:srgbClr val="DB2777"/>
+              <a:srgbClr val="0D9488"/>
             </a:solidFill>
             <a:prstDash val="solid"/>
           </a:ln>
@@ -12567,13 +12396,13 @@
             <a:r>
               <a:rPr lang="en-US" sz="1300" b="1" dirty="0">
                 <a:solidFill>
-                  <a:srgbClr val="9D174D"/>
+                  <a:srgbClr val="0F766E"/>
                 </a:solidFill>
                 <a:latin typeface="Trebuchet MS" pitchFamily="34" charset="0"/>
                 <a:ea typeface="Trebuchet MS" pitchFamily="34" charset="-122"/>
                 <a:cs typeface="Trebuchet MS" pitchFamily="34" charset="-120"/>
               </a:rPr>
-              <a:t>ing</a:t>
+              <a:t>land</a:t>
             </a:r>
             <a:endParaRPr lang="en-US" sz="1300" dirty="0"/>
           </a:p>
@@ -12612,7 +12441,7 @@
                 <a:ea typeface="Calibri" pitchFamily="34" charset="-122"/>
                 <a:cs typeface="Calibri" pitchFamily="34" charset="-120"/>
               </a:rPr>
-              <a:t>action or process</a:t>
+              <a:t>ground, earth, territory</a:t>
             </a:r>
             <a:endParaRPr lang="en-US" sz="850" dirty="0"/>
           </a:p>
@@ -13168,7 +12997,7 @@
                 <a:ea typeface="Calibri" pitchFamily="34" charset="-122"/>
                 <a:cs typeface="Calibri" pitchFamily="34" charset="-120"/>
               </a:rPr>
-              <a:t>Word Labs  •  wordlabs.app  •  Root: 'land' = earth, ground, territory</a:t>
+              <a:t>Word Labs  •  wordlabs.app  •  Root: 'land' = ground, earth, territory</a:t>
             </a:r>
             <a:endParaRPr lang="en-US" sz="800" dirty="0"/>
           </a:p>
@@ -13307,7 +13136,7 @@
                 <a:ea typeface="Trebuchet MS" pitchFamily="34" charset="-122"/>
                 <a:cs typeface="Trebuchet MS" pitchFamily="34" charset="-120"/>
               </a:rPr>
-              <a:t>landing</a:t>
+              <a:t>farmland</a:t>
             </a:r>
             <a:endParaRPr lang="en-US" sz="2800" dirty="0"/>
           </a:p>
@@ -13396,11 +13225,11 @@
             </a:avLst>
           </a:prstGeom>
           <a:solidFill>
-            <a:srgbClr val="CCFBF1"/>
+            <a:srgbClr val="DDD6FE"/>
           </a:solidFill>
           <a:ln w="19050">
             <a:solidFill>
-              <a:srgbClr val="0D9488"/>
+              <a:srgbClr val="7C3AED"/>
             </a:solidFill>
             <a:prstDash val="solid"/>
           </a:ln>
@@ -13440,13 +13269,13 @@
             <a:r>
               <a:rPr lang="en-US" sz="1300" b="1" dirty="0">
                 <a:solidFill>
-                  <a:srgbClr val="0F766E"/>
+                  <a:srgbClr val="4C1D95"/>
                 </a:solidFill>
                 <a:latin typeface="Trebuchet MS" pitchFamily="34" charset="0"/>
                 <a:ea typeface="Trebuchet MS" pitchFamily="34" charset="-122"/>
                 <a:cs typeface="Trebuchet MS" pitchFamily="34" charset="-120"/>
               </a:rPr>
-              <a:t>land</a:t>
+              <a:t>farm</a:t>
             </a:r>
             <a:endParaRPr lang="en-US" sz="1300" dirty="0"/>
           </a:p>
@@ -13485,7 +13314,7 @@
                 <a:ea typeface="Calibri" pitchFamily="34" charset="-122"/>
                 <a:cs typeface="Calibri" pitchFamily="34" charset="-120"/>
               </a:rPr>
-              <a:t>ground, territory</a:t>
+              <a:t>land used to grow food or raise animals</a:t>
             </a:r>
             <a:endParaRPr lang="en-US" sz="850" dirty="0"/>
           </a:p>
@@ -13508,11 +13337,11 @@
             </a:avLst>
           </a:prstGeom>
           <a:solidFill>
-            <a:srgbClr val="FCE7F3"/>
+            <a:srgbClr val="CCFBF1"/>
           </a:solidFill>
           <a:ln w="19050">
             <a:solidFill>
-              <a:srgbClr val="DB2777"/>
+              <a:srgbClr val="0D9488"/>
             </a:solidFill>
             <a:prstDash val="solid"/>
           </a:ln>
@@ -13552,13 +13381,13 @@
             <a:r>
               <a:rPr lang="en-US" sz="1300" b="1" dirty="0">
                 <a:solidFill>
-                  <a:srgbClr val="9D174D"/>
+                  <a:srgbClr val="0F766E"/>
                 </a:solidFill>
                 <a:latin typeface="Trebuchet MS" pitchFamily="34" charset="0"/>
                 <a:ea typeface="Trebuchet MS" pitchFamily="34" charset="-122"/>
                 <a:cs typeface="Trebuchet MS" pitchFamily="34" charset="-120"/>
               </a:rPr>
-              <a:t>ing</a:t>
+              <a:t>land</a:t>
             </a:r>
             <a:endParaRPr lang="en-US" sz="1300" dirty="0"/>
           </a:p>
@@ -13597,7 +13426,7 @@
                 <a:ea typeface="Calibri" pitchFamily="34" charset="-122"/>
                 <a:cs typeface="Calibri" pitchFamily="34" charset="-120"/>
               </a:rPr>
-              <a:t>action or process</a:t>
+              <a:t>ground, earth, territory</a:t>
             </a:r>
             <a:endParaRPr lang="en-US" sz="850" dirty="0"/>
           </a:p>
@@ -13756,7 +13585,7 @@
                 <a:ea typeface="Trebuchet MS" pitchFamily="34" charset="-122"/>
                 <a:cs typeface="Trebuchet MS" pitchFamily="34" charset="-120"/>
               </a:rPr>
-              <a:t>land</a:t>
+              <a:t>farm</a:t>
             </a:r>
             <a:endParaRPr lang="en-US" sz="1400" dirty="0"/>
           </a:p>
@@ -13861,7 +13690,7 @@
                 <a:ea typeface="Trebuchet MS" pitchFamily="34" charset="-122"/>
                 <a:cs typeface="Trebuchet MS" pitchFamily="34" charset="-120"/>
               </a:rPr>
-              <a:t>ing</a:t>
+              <a:t>land</a:t>
             </a:r>
             <a:endParaRPr lang="en-US" sz="1400" dirty="0"/>
           </a:p>
@@ -14194,7 +14023,7 @@
                 <a:ea typeface="Calibri" pitchFamily="34" charset="-122"/>
                 <a:cs typeface="Calibri" pitchFamily="34" charset="-120"/>
               </a:rPr>
-              <a:t>Root 'land' — earth, ground, territory</a:t>
+              <a:t>Root 'land' — ground, earth, territory</a:t>
             </a:r>
             <a:endParaRPr lang="en-US" sz="1600" dirty="0"/>
           </a:p>
@@ -14550,7 +14379,7 @@
                 <a:ea typeface="Calibri" pitchFamily="34" charset="-122"/>
                 <a:cs typeface="Calibri" pitchFamily="34" charset="-120"/>
               </a:rPr>
-              <a:t>Word Labs  •  wordlabs.app  •  Root: 'land' = earth, ground, territory</a:t>
+              <a:t>Word Labs  •  wordlabs.app  •  Root: 'land' = ground, earth, territory</a:t>
             </a:r>
             <a:endParaRPr lang="en-US" sz="800" dirty="0"/>
           </a:p>
@@ -14689,7 +14518,7 @@
                 <a:ea typeface="Trebuchet MS" pitchFamily="34" charset="-122"/>
                 <a:cs typeface="Trebuchet MS" pitchFamily="34" charset="-120"/>
               </a:rPr>
-              <a:t>landing</a:t>
+              <a:t>farmland</a:t>
             </a:r>
             <a:endParaRPr lang="en-US" sz="2800" dirty="0"/>
           </a:p>
@@ -14778,11 +14607,11 @@
             </a:avLst>
           </a:prstGeom>
           <a:solidFill>
-            <a:srgbClr val="CCFBF1"/>
+            <a:srgbClr val="DDD6FE"/>
           </a:solidFill>
           <a:ln w="19050">
             <a:solidFill>
-              <a:srgbClr val="0D9488"/>
+              <a:srgbClr val="7C3AED"/>
             </a:solidFill>
             <a:prstDash val="solid"/>
           </a:ln>
@@ -14822,13 +14651,13 @@
             <a:r>
               <a:rPr lang="en-US" sz="1300" b="1" dirty="0">
                 <a:solidFill>
-                  <a:srgbClr val="0F766E"/>
+                  <a:srgbClr val="4C1D95"/>
                 </a:solidFill>
                 <a:latin typeface="Trebuchet MS" pitchFamily="34" charset="0"/>
                 <a:ea typeface="Trebuchet MS" pitchFamily="34" charset="-122"/>
                 <a:cs typeface="Trebuchet MS" pitchFamily="34" charset="-120"/>
               </a:rPr>
-              <a:t>land</a:t>
+              <a:t>farm</a:t>
             </a:r>
             <a:endParaRPr lang="en-US" sz="1300" dirty="0"/>
           </a:p>
@@ -14867,7 +14696,7 @@
                 <a:ea typeface="Calibri" pitchFamily="34" charset="-122"/>
                 <a:cs typeface="Calibri" pitchFamily="34" charset="-120"/>
               </a:rPr>
-              <a:t>ground, territory</a:t>
+              <a:t>land used to grow food or raise animals</a:t>
             </a:r>
             <a:endParaRPr lang="en-US" sz="850" dirty="0"/>
           </a:p>
@@ -14890,11 +14719,11 @@
             </a:avLst>
           </a:prstGeom>
           <a:solidFill>
-            <a:srgbClr val="FCE7F3"/>
+            <a:srgbClr val="CCFBF1"/>
           </a:solidFill>
           <a:ln w="19050">
             <a:solidFill>
-              <a:srgbClr val="DB2777"/>
+              <a:srgbClr val="0D9488"/>
             </a:solidFill>
             <a:prstDash val="solid"/>
           </a:ln>
@@ -14934,13 +14763,13 @@
             <a:r>
               <a:rPr lang="en-US" sz="1300" b="1" dirty="0">
                 <a:solidFill>
-                  <a:srgbClr val="9D174D"/>
+                  <a:srgbClr val="0F766E"/>
                 </a:solidFill>
                 <a:latin typeface="Trebuchet MS" pitchFamily="34" charset="0"/>
                 <a:ea typeface="Trebuchet MS" pitchFamily="34" charset="-122"/>
                 <a:cs typeface="Trebuchet MS" pitchFamily="34" charset="-120"/>
               </a:rPr>
-              <a:t>ing</a:t>
+              <a:t>land</a:t>
             </a:r>
             <a:endParaRPr lang="en-US" sz="1300" dirty="0"/>
           </a:p>
@@ -14979,7 +14808,7 @@
                 <a:ea typeface="Calibri" pitchFamily="34" charset="-122"/>
                 <a:cs typeface="Calibri" pitchFamily="34" charset="-120"/>
               </a:rPr>
-              <a:t>action or process</a:t>
+              <a:t>ground, earth, territory</a:t>
             </a:r>
             <a:endParaRPr lang="en-US" sz="850" dirty="0"/>
           </a:p>
@@ -15138,7 +14967,7 @@
                 <a:ea typeface="Trebuchet MS" pitchFamily="34" charset="-122"/>
                 <a:cs typeface="Trebuchet MS" pitchFamily="34" charset="-120"/>
               </a:rPr>
-              <a:t>land</a:t>
+              <a:t>farm</a:t>
             </a:r>
             <a:endParaRPr lang="en-US" sz="1400" dirty="0"/>
           </a:p>
@@ -15243,7 +15072,7 @@
                 <a:ea typeface="Trebuchet MS" pitchFamily="34" charset="-122"/>
                 <a:cs typeface="Trebuchet MS" pitchFamily="34" charset="-120"/>
               </a:rPr>
-              <a:t>ing</a:t>
+              <a:t>land</a:t>
             </a:r>
             <a:endParaRPr lang="en-US" sz="1400" dirty="0"/>
           </a:p>
@@ -15350,7 +15179,7 @@
         </p:nvSpPr>
         <p:spPr>
           <a:xfrm>
-            <a:off x="2254649" y="4169664"/>
+            <a:off x="2124837" y="4169664"/>
             <a:ext cx="685800" cy="475488"/>
           </a:xfrm>
           <a:prstGeom prst="rect">
@@ -15377,7 +15206,7 @@
         </p:nvSpPr>
         <p:spPr>
           <a:xfrm>
-            <a:off x="2254649" y="4169664"/>
+            <a:off x="2124837" y="4169664"/>
             <a:ext cx="685800" cy="475488"/>
           </a:xfrm>
           <a:prstGeom prst="rect">
@@ -15402,7 +15231,7 @@
                 <a:ea typeface="Trebuchet MS" pitchFamily="34" charset="-122"/>
                 <a:cs typeface="Trebuchet MS" pitchFamily="34" charset="-120"/>
               </a:rPr>
-              <a:t>l</a:t>
+              <a:t>f</a:t>
             </a:r>
             <a:endParaRPr lang="en-US" sz="900" dirty="0"/>
           </a:p>
@@ -15416,7 +15245,7 @@
         </p:nvSpPr>
         <p:spPr>
           <a:xfrm>
-            <a:off x="3293146" y="4169664"/>
+            <a:off x="3033522" y="4169664"/>
             <a:ext cx="685800" cy="475488"/>
           </a:xfrm>
           <a:prstGeom prst="rect">
@@ -15443,7 +15272,7 @@
         </p:nvSpPr>
         <p:spPr>
           <a:xfrm>
-            <a:off x="3293146" y="4169664"/>
+            <a:off x="3033522" y="4169664"/>
             <a:ext cx="685800" cy="475488"/>
           </a:xfrm>
           <a:prstGeom prst="rect">
@@ -15468,7 +15297,7 @@
                 <a:ea typeface="Trebuchet MS" pitchFamily="34" charset="-122"/>
                 <a:cs typeface="Trebuchet MS" pitchFamily="34" charset="-120"/>
               </a:rPr>
-              <a:t>a</a:t>
+              <a:t>ar</a:t>
             </a:r>
             <a:endParaRPr lang="en-US" sz="900" dirty="0"/>
           </a:p>
@@ -15482,7 +15311,7 @@
         </p:nvSpPr>
         <p:spPr>
           <a:xfrm>
-            <a:off x="4331643" y="4169664"/>
+            <a:off x="3942207" y="4169664"/>
             <a:ext cx="685800" cy="475488"/>
           </a:xfrm>
           <a:prstGeom prst="rect">
@@ -15509,7 +15338,7 @@
         </p:nvSpPr>
         <p:spPr>
           <a:xfrm>
-            <a:off x="4331643" y="4169664"/>
+            <a:off x="3942207" y="4169664"/>
             <a:ext cx="685800" cy="475488"/>
           </a:xfrm>
           <a:prstGeom prst="rect">
@@ -15534,7 +15363,7 @@
                 <a:ea typeface="Trebuchet MS" pitchFamily="34" charset="-122"/>
                 <a:cs typeface="Trebuchet MS" pitchFamily="34" charset="-120"/>
               </a:rPr>
-              <a:t>n</a:t>
+              <a:t>m</a:t>
             </a:r>
             <a:endParaRPr lang="en-US" sz="900" dirty="0"/>
           </a:p>
@@ -15548,7 +15377,7 @@
         </p:nvSpPr>
         <p:spPr>
           <a:xfrm>
-            <a:off x="5370141" y="4169664"/>
+            <a:off x="4850892" y="4169664"/>
             <a:ext cx="685800" cy="475488"/>
           </a:xfrm>
           <a:prstGeom prst="rect">
@@ -15575,7 +15404,7 @@
         </p:nvSpPr>
         <p:spPr>
           <a:xfrm>
-            <a:off x="5370141" y="4169664"/>
+            <a:off x="4850892" y="4169664"/>
             <a:ext cx="685800" cy="475488"/>
           </a:xfrm>
           <a:prstGeom prst="rect">
@@ -15600,7 +15429,7 @@
                 <a:ea typeface="Trebuchet MS" pitchFamily="34" charset="-122"/>
                 <a:cs typeface="Trebuchet MS" pitchFamily="34" charset="-120"/>
               </a:rPr>
-              <a:t>d</a:t>
+              <a:t>l</a:t>
             </a:r>
             <a:endParaRPr lang="en-US" sz="900" dirty="0"/>
           </a:p>
@@ -15614,7 +15443,7 @@
         </p:nvSpPr>
         <p:spPr>
           <a:xfrm>
-            <a:off x="6408638" y="4169664"/>
+            <a:off x="5759577" y="4169664"/>
             <a:ext cx="685800" cy="475488"/>
           </a:xfrm>
           <a:prstGeom prst="rect">
@@ -15641,7 +15470,7 @@
         </p:nvSpPr>
         <p:spPr>
           <a:xfrm>
-            <a:off x="6408638" y="4169664"/>
+            <a:off x="5759577" y="4169664"/>
             <a:ext cx="685800" cy="475488"/>
           </a:xfrm>
           <a:prstGeom prst="rect">
@@ -15666,7 +15495,7 @@
                 <a:ea typeface="Trebuchet MS" pitchFamily="34" charset="-122"/>
                 <a:cs typeface="Trebuchet MS" pitchFamily="34" charset="-120"/>
               </a:rPr>
-              <a:t>i</a:t>
+              <a:t>a</a:t>
             </a:r>
             <a:endParaRPr lang="en-US" sz="900" dirty="0"/>
           </a:p>
@@ -15680,7 +15509,7 @@
         </p:nvSpPr>
         <p:spPr>
           <a:xfrm>
-            <a:off x="7447135" y="4169664"/>
+            <a:off x="6668262" y="4169664"/>
             <a:ext cx="685800" cy="475488"/>
           </a:xfrm>
           <a:prstGeom prst="rect">
@@ -15707,7 +15536,7 @@
         </p:nvSpPr>
         <p:spPr>
           <a:xfrm>
-            <a:off x="7447135" y="4169664"/>
+            <a:off x="6668262" y="4169664"/>
             <a:ext cx="685800" cy="475488"/>
           </a:xfrm>
           <a:prstGeom prst="rect">
@@ -15732,7 +15561,73 @@
                 <a:ea typeface="Trebuchet MS" pitchFamily="34" charset="-122"/>
                 <a:cs typeface="Trebuchet MS" pitchFamily="34" charset="-120"/>
               </a:rPr>
-              <a:t>ng</a:t>
+              <a:t>n</a:t>
+            </a:r>
+            <a:endParaRPr lang="en-US" sz="900" dirty="0"/>
+          </a:p>
+        </p:txBody>
+      </p:sp>
+      <p:sp>
+        <p:nvSpPr>
+          <p:cNvPr id="45" name="Shape 43"/>
+          <p:cNvSpPr/>
+          <p:nvPr/>
+        </p:nvSpPr>
+        <p:spPr>
+          <a:xfrm>
+            <a:off x="7576947" y="4169664"/>
+            <a:ext cx="685800" cy="475488"/>
+          </a:xfrm>
+          <a:prstGeom prst="rect">
+            <a:avLst>
+              <a:gd name="adj" fmla="val 7692"/>
+            </a:avLst>
+          </a:prstGeom>
+          <a:solidFill>
+            <a:srgbClr val="FFFFFF"/>
+          </a:solidFill>
+          <a:ln w="12700">
+            <a:solidFill>
+              <a:srgbClr val="DB2777"/>
+            </a:solidFill>
+            <a:prstDash val="solid"/>
+          </a:ln>
+        </p:spPr>
+      </p:sp>
+      <p:sp>
+        <p:nvSpPr>
+          <p:cNvPr id="46" name="Text 44"/>
+          <p:cNvSpPr/>
+          <p:nvPr/>
+        </p:nvSpPr>
+        <p:spPr>
+          <a:xfrm>
+            <a:off x="7576947" y="4169664"/>
+            <a:ext cx="685800" cy="475488"/>
+          </a:xfrm>
+          <a:prstGeom prst="rect">
+            <a:avLst/>
+          </a:prstGeom>
+          <a:noFill/>
+          <a:ln/>
+        </p:spPr>
+        <p:txBody>
+          <a:bodyPr wrap="square" lIns="0" tIns="0" rIns="0" bIns="0" rtlCol="0" anchor="ctr"/>
+          <a:lstStyle/>
+          <a:p>
+            <a:pPr algn="ctr" indent="0" marL="0">
+              <a:buNone/>
+            </a:pPr>
+            <a:r>
+              <a:rPr lang="en-US" sz="900" b="1" dirty="0">
+                <a:solidFill>
+                  <a:srgbClr val="9D174D"/>
+                </a:solidFill>
+                <a:latin typeface="Trebuchet MS" pitchFamily="34" charset="0"/>
+                <a:ea typeface="Trebuchet MS" pitchFamily="34" charset="-122"/>
+                <a:cs typeface="Trebuchet MS" pitchFamily="34" charset="-120"/>
+              </a:rPr>
+              <a:t>d</a:t>
             </a:r>
             <a:endParaRPr lang="en-US" sz="900" dirty="0"/>
           </a:p>
@@ -16306,7 +16201,7 @@
                 <a:ea typeface="Calibri" pitchFamily="34" charset="-122"/>
                 <a:cs typeface="Calibri" pitchFamily="34" charset="-120"/>
               </a:rPr>
-              <a:t>Word Labs  •  wordlabs.app  •  Root: 'land' = earth, ground, territory</a:t>
+              <a:t>Word Labs  •  wordlabs.app  •  Root: 'land' = ground, earth, territory</a:t>
             </a:r>
             <a:endParaRPr lang="en-US" sz="800" dirty="0"/>
           </a:p>
@@ -16946,7 +16841,7 @@
                 <a:ea typeface="Calibri" pitchFamily="34" charset="-122"/>
                 <a:cs typeface="Calibri" pitchFamily="34" charset="-120"/>
               </a:rPr>
-              <a:t>Word Labs  •  wordlabs.app  •  Root: 'land' = earth, ground, territory</a:t>
+              <a:t>Word Labs  •  wordlabs.app  •  Root: 'land' = ground, earth, territory</a:t>
             </a:r>
             <a:endParaRPr lang="en-US" sz="800" dirty="0"/>
           </a:p>
@@ -17058,7 +16953,7 @@
                 <a:ea typeface="Calibri" pitchFamily="34" charset="-122"/>
                 <a:cs typeface="Calibri" pitchFamily="34" charset="-120"/>
               </a:rPr>
-              <a:t>Exploring the </a:t>
+              <a:t>The </a:t>
             </a:r>
             <a:pPr algn="l" indent="0" marL="0">
               <a:buNone/>
@@ -17075,7 +16970,7 @@
                 <a:ea typeface="Calibri" pitchFamily="34" charset="-122"/>
                 <a:cs typeface="Calibri" pitchFamily="34" charset="-120"/>
               </a:rPr>
-              <a:t>homeland</a:t>
+              <a:t>overland</a:t>
             </a:r>
             <a:pPr algn="l" indent="0" marL="0">
               <a:buNone/>
@@ -17089,7 +16984,7 @@
                 <a:ea typeface="Calibri" pitchFamily="34" charset="-122"/>
                 <a:cs typeface="Calibri" pitchFamily="34" charset="-120"/>
               </a:rPr>
-              <a:t> by an </a:t>
+              <a:t> journey took us through stunning </a:t>
             </a:r>
             <a:pPr algn="l" indent="0" marL="0">
               <a:buNone/>
@@ -17106,7 +17001,7 @@
                 <a:ea typeface="Calibri" pitchFamily="34" charset="-122"/>
                 <a:cs typeface="Calibri" pitchFamily="34" charset="-120"/>
               </a:rPr>
-              <a:t>overland</a:t>
+              <a:t>upland</a:t>
             </a:r>
             <a:pPr algn="l" indent="0" marL="0">
               <a:buNone/>
@@ -17120,7 +17015,7 @@
                 <a:ea typeface="Calibri" pitchFamily="34" charset="-122"/>
                 <a:cs typeface="Calibri" pitchFamily="34" charset="-120"/>
               </a:rPr>
-              <a:t> route, the travellers admired the </a:t>
+              <a:t> scenery, and we watched the plane's </a:t>
             </a:r>
             <a:pPr algn="l" indent="0" marL="0">
               <a:buNone/>
@@ -17137,7 +17032,7 @@
                 <a:ea typeface="Calibri" pitchFamily="34" charset="-122"/>
                 <a:cs typeface="Calibri" pitchFamily="34" charset="-120"/>
               </a:rPr>
-              <a:t>farmland</a:t>
+              <a:t>landing</a:t>
             </a:r>
             <a:pPr algn="l" indent="0" marL="0">
               <a:buNone/>
@@ -17151,7 +17046,7 @@
                 <a:ea typeface="Calibri" pitchFamily="34" charset="-122"/>
                 <a:cs typeface="Calibri" pitchFamily="34" charset="-120"/>
               </a:rPr>
-              <a:t> spread across the valley.</a:t>
+              <a:t> in the valley below.</a:t>
             </a:r>
             <a:endParaRPr lang="en-US" sz="1800" dirty="0"/>
           </a:p>
@@ -17306,7 +17201,7 @@
                 <a:ea typeface="Trebuchet MS" pitchFamily="34" charset="-122"/>
                 <a:cs typeface="Trebuchet MS" pitchFamily="34" charset="-120"/>
               </a:rPr>
-              <a:t>homeland</a:t>
+              <a:t>overland</a:t>
             </a:r>
             <a:endParaRPr lang="en-US" sz="1400" dirty="0"/>
           </a:p>
@@ -17434,7 +17329,7 @@
                 <a:ea typeface="Trebuchet MS" pitchFamily="34" charset="-122"/>
                 <a:cs typeface="Trebuchet MS" pitchFamily="34" charset="-120"/>
               </a:rPr>
-              <a:t>overland</a:t>
+              <a:t>upland</a:t>
             </a:r>
             <a:endParaRPr lang="en-US" sz="1400" dirty="0"/>
           </a:p>
@@ -17562,7 +17457,7 @@
                 <a:ea typeface="Trebuchet MS" pitchFamily="34" charset="-122"/>
                 <a:cs typeface="Trebuchet MS" pitchFamily="34" charset="-120"/>
               </a:rPr>
-              <a:t>farmland</a:t>
+              <a:t>landing</a:t>
             </a:r>
             <a:endParaRPr lang="en-US" sz="1400" dirty="0"/>
           </a:p>
@@ -17893,7 +17788,7 @@
                 <a:ea typeface="Calibri" pitchFamily="34" charset="-122"/>
                 <a:cs typeface="Calibri" pitchFamily="34" charset="-120"/>
               </a:rPr>
-              <a:t>Word Labs  •  wordlabs.app  •  Root: 'land' = earth, ground, territory</a:t>
+              <a:t>Word Labs  •  wordlabs.app  •  Root: 'land' = ground, earth, territory</a:t>
             </a:r>
             <a:endParaRPr lang="en-US" sz="800" dirty="0"/>
           </a:p>
@@ -18032,7 +17927,7 @@
                 <a:ea typeface="Trebuchet MS" pitchFamily="34" charset="-122"/>
                 <a:cs typeface="Trebuchet MS" pitchFamily="34" charset="-120"/>
               </a:rPr>
-              <a:t>homeland</a:t>
+              <a:t>overland</a:t>
             </a:r>
             <a:endParaRPr lang="en-US" sz="2800" dirty="0"/>
           </a:p>
@@ -18720,7 +18615,7 @@
                 <a:ea typeface="Calibri" pitchFamily="34" charset="-122"/>
                 <a:cs typeface="Calibri" pitchFamily="34" charset="-120"/>
               </a:rPr>
-              <a:t>Word Labs  •  wordlabs.app  •  Root: 'land' = earth, ground, territory</a:t>
+              <a:t>Word Labs  •  wordlabs.app  •  Root: 'land' = ground, earth, territory</a:t>
             </a:r>
             <a:endParaRPr lang="en-US" sz="800" dirty="0"/>
           </a:p>
@@ -18859,7 +18754,7 @@
                 <a:ea typeface="Trebuchet MS" pitchFamily="34" charset="-122"/>
                 <a:cs typeface="Trebuchet MS" pitchFamily="34" charset="-120"/>
               </a:rPr>
-              <a:t>homeland</a:t>
+              <a:t>overland</a:t>
             </a:r>
             <a:endParaRPr lang="en-US" sz="2800" dirty="0"/>
           </a:p>
@@ -18998,7 +18893,7 @@
                 <a:ea typeface="Trebuchet MS" pitchFamily="34" charset="-122"/>
                 <a:cs typeface="Trebuchet MS" pitchFamily="34" charset="-120"/>
               </a:rPr>
-              <a:t>home</a:t>
+              <a:t>over</a:t>
             </a:r>
             <a:endParaRPr lang="en-US" sz="1300" dirty="0"/>
           </a:p>
@@ -19037,7 +18932,7 @@
                 <a:ea typeface="Calibri" pitchFamily="34" charset="-122"/>
                 <a:cs typeface="Calibri" pitchFamily="34" charset="-120"/>
               </a:rPr>
-              <a:t>place where one lives</a:t>
+              <a:t>across or above</a:t>
             </a:r>
             <a:endParaRPr lang="en-US" sz="850" dirty="0"/>
           </a:p>
@@ -19149,7 +19044,7 @@
                 <a:ea typeface="Calibri" pitchFamily="34" charset="-122"/>
                 <a:cs typeface="Calibri" pitchFamily="34" charset="-120"/>
               </a:rPr>
-              <a:t>ground, territory</a:t>
+              <a:t>ground, earth, territory</a:t>
             </a:r>
             <a:endParaRPr lang="en-US" sz="850" dirty="0"/>
           </a:p>
@@ -19705,7 +19600,7 @@
                 <a:ea typeface="Calibri" pitchFamily="34" charset="-122"/>
                 <a:cs typeface="Calibri" pitchFamily="34" charset="-120"/>
               </a:rPr>
-              <a:t>Word Labs  •  wordlabs.app  •  Root: 'land' = earth, ground, territory</a:t>
+              <a:t>Word Labs  •  wordlabs.app  •  Root: 'land' = ground, earth, territory</a:t>
             </a:r>
             <a:endParaRPr lang="en-US" sz="800" dirty="0"/>
           </a:p>
@@ -19844,7 +19739,7 @@
                 <a:ea typeface="Trebuchet MS" pitchFamily="34" charset="-122"/>
                 <a:cs typeface="Trebuchet MS" pitchFamily="34" charset="-120"/>
               </a:rPr>
-              <a:t>homeland</a:t>
+              <a:t>overland</a:t>
             </a:r>
             <a:endParaRPr lang="en-US" sz="2800" dirty="0"/>
           </a:p>
@@ -19983,7 +19878,7 @@
                 <a:ea typeface="Trebuchet MS" pitchFamily="34" charset="-122"/>
                 <a:cs typeface="Trebuchet MS" pitchFamily="34" charset="-120"/>
               </a:rPr>
-              <a:t>home</a:t>
+              <a:t>over</a:t>
             </a:r>
             <a:endParaRPr lang="en-US" sz="1300" dirty="0"/>
           </a:p>
@@ -20022,7 +19917,7 @@
                 <a:ea typeface="Calibri" pitchFamily="34" charset="-122"/>
                 <a:cs typeface="Calibri" pitchFamily="34" charset="-120"/>
               </a:rPr>
-              <a:t>place where one lives</a:t>
+              <a:t>across or above</a:t>
             </a:r>
             <a:endParaRPr lang="en-US" sz="850" dirty="0"/>
           </a:p>
@@ -20134,7 +20029,7 @@
                 <a:ea typeface="Calibri" pitchFamily="34" charset="-122"/>
                 <a:cs typeface="Calibri" pitchFamily="34" charset="-120"/>
               </a:rPr>
-              <a:t>ground, territory</a:t>
+              <a:t>ground, earth, territory</a:t>
             </a:r>
             <a:endParaRPr lang="en-US" sz="850" dirty="0"/>
           </a:p>
@@ -20241,7 +20136,7 @@
         </p:nvSpPr>
         <p:spPr>
           <a:xfrm>
-            <a:off x="2999232" y="3364992"/>
+            <a:off x="2313432" y="3364992"/>
             <a:ext cx="1645920" cy="475488"/>
           </a:xfrm>
           <a:prstGeom prst="rect">
@@ -20268,7 +20163,7 @@
         </p:nvSpPr>
         <p:spPr>
           <a:xfrm>
-            <a:off x="2999232" y="3364992"/>
+            <a:off x="2313432" y="3364992"/>
             <a:ext cx="1645920" cy="475488"/>
           </a:xfrm>
           <a:prstGeom prst="rect">
@@ -20293,7 +20188,7 @@
                 <a:ea typeface="Trebuchet MS" pitchFamily="34" charset="-122"/>
                 <a:cs typeface="Trebuchet MS" pitchFamily="34" charset="-120"/>
               </a:rPr>
-              <a:t>home</a:t>
+              <a:t>o</a:t>
             </a:r>
             <a:endParaRPr lang="en-US" sz="1400" dirty="0"/>
           </a:p>
@@ -20307,8 +20202,8 @@
         </p:nvSpPr>
         <p:spPr>
           <a:xfrm>
-            <a:off x="4645152" y="3364992"/>
-            <a:ext cx="1097280" cy="475488"/>
+            <a:off x="3959352" y="3364992"/>
+            <a:ext cx="411480" cy="475488"/>
           </a:xfrm>
           <a:prstGeom prst="rect">
             <a:avLst/>
@@ -20346,7 +20241,7 @@
         </p:nvSpPr>
         <p:spPr>
           <a:xfrm>
-            <a:off x="5742432" y="3364992"/>
+            <a:off x="4370832" y="3364992"/>
             <a:ext cx="1645920" cy="475488"/>
           </a:xfrm>
           <a:prstGeom prst="rect">
@@ -20373,7 +20268,7 @@
         </p:nvSpPr>
         <p:spPr>
           <a:xfrm>
-            <a:off x="5742432" y="3364992"/>
+            <a:off x="4370832" y="3364992"/>
             <a:ext cx="1645920" cy="475488"/>
           </a:xfrm>
           <a:prstGeom prst="rect">
@@ -20398,6 +20293,111 @@
                 <a:ea typeface="Trebuchet MS" pitchFamily="34" charset="-122"/>
                 <a:cs typeface="Trebuchet MS" pitchFamily="34" charset="-120"/>
               </a:rPr>
+              <a:t>ver</a:t>
+            </a:r>
+            <a:endParaRPr lang="en-US" sz="1400" dirty="0"/>
+          </a:p>
+        </p:txBody>
+      </p:sp>
+      <p:sp>
+        <p:nvSpPr>
+          <p:cNvPr id="30" name="Text 28"/>
+          <p:cNvSpPr/>
+          <p:nvPr/>
+        </p:nvSpPr>
+        <p:spPr>
+          <a:xfrm>
+            <a:off x="6016752" y="3364992"/>
+            <a:ext cx="411480" cy="475488"/>
+          </a:xfrm>
+          <a:prstGeom prst="rect">
+            <a:avLst/>
+          </a:prstGeom>
+          <a:noFill/>
+          <a:ln/>
+        </p:spPr>
+        <p:txBody>
+          <a:bodyPr wrap="square" lIns="0" tIns="0" rIns="0" bIns="0" rtlCol="0" anchor="ctr"/>
+          <a:lstStyle/>
+          <a:p>
+            <a:pPr algn="ctr" indent="0" marL="0">
+              <a:buNone/>
+            </a:pPr>
+            <a:r>
+              <a:rPr lang="en-US" sz="1600" b="1" dirty="0">
+                <a:solidFill>
+                  <a:srgbClr val="0D9488"/>
+                </a:solidFill>
+                <a:latin typeface="Trebuchet MS" pitchFamily="34" charset="0"/>
+                <a:ea typeface="Trebuchet MS" pitchFamily="34" charset="-122"/>
+                <a:cs typeface="Trebuchet MS" pitchFamily="34" charset="-120"/>
+              </a:rPr>
+              <a:t>·</a:t>
+            </a:r>
+            <a:endParaRPr lang="en-US" sz="1600" dirty="0"/>
+          </a:p>
+        </p:txBody>
+      </p:sp>
+      <p:sp>
+        <p:nvSpPr>
+          <p:cNvPr id="31" name="Shape 29"/>
+          <p:cNvSpPr/>
+          <p:nvPr/>
+        </p:nvSpPr>
+        <p:spPr>
+          <a:xfrm>
+            <a:off x="6428232" y="3364992"/>
+            <a:ext cx="1645920" cy="475488"/>
+          </a:xfrm>
+          <a:prstGeom prst="rect">
+            <a:avLst>
+              <a:gd name="adj" fmla="val 9615"/>
+            </a:avLst>
+          </a:prstGeom>
+          <a:solidFill>
+            <a:srgbClr val="FFFFFF"/>
+          </a:solidFill>
+          <a:ln w="12700">
+            <a:solidFill>
+              <a:srgbClr val="0D9488"/>
+            </a:solidFill>
+            <a:prstDash val="solid"/>
+          </a:ln>
+        </p:spPr>
+      </p:sp>
+      <p:sp>
+        <p:nvSpPr>
+          <p:cNvPr id="32" name="Text 30"/>
+          <p:cNvSpPr/>
+          <p:nvPr/>
+        </p:nvSpPr>
+        <p:spPr>
+          <a:xfrm>
+            <a:off x="6428232" y="3364992"/>
+            <a:ext cx="1645920" cy="475488"/>
+          </a:xfrm>
+          <a:prstGeom prst="rect">
+            <a:avLst/>
+          </a:prstGeom>
+          <a:noFill/>
+          <a:ln/>
+        </p:spPr>
+        <p:txBody>
+          <a:bodyPr wrap="square" lIns="0" tIns="0" rIns="0" bIns="0" rtlCol="0" anchor="ctr"/>
+          <a:lstStyle/>
+          <a:p>
+            <a:pPr algn="ctr" indent="0" marL="0">
+              <a:buNone/>
+            </a:pPr>
+            <a:r>
+              <a:rPr lang="en-US" sz="1400" b="1" dirty="0">
+                <a:solidFill>
+                  <a:srgbClr val="0D9488"/>
+                </a:solidFill>
+                <a:latin typeface="Trebuchet MS" pitchFamily="34" charset="0"/>
+                <a:ea typeface="Trebuchet MS" pitchFamily="34" charset="-122"/>
+                <a:cs typeface="Trebuchet MS" pitchFamily="34" charset="-120"/>
+              </a:rPr>
               <a:t>land</a:t>
             </a:r>
             <a:endParaRPr lang="en-US" sz="1400" dirty="0"/>
@@ -20406,7 +20406,7 @@
       </p:sp>
       <p:sp>
         <p:nvSpPr>
-          <p:cNvPr id="30" name="Shape 28"/>
+          <p:cNvPr id="33" name="Shape 31"/>
           <p:cNvSpPr/>
           <p:nvPr/>
         </p:nvSpPr>
@@ -20433,7 +20433,7 @@
       </p:sp>
       <p:sp>
         <p:nvSpPr>
-          <p:cNvPr id="31" name="Text 29"/>
+          <p:cNvPr id="34" name="Text 32"/>
           <p:cNvSpPr/>
           <p:nvPr/>
         </p:nvSpPr>
@@ -20472,7 +20472,7 @@
       </p:sp>
       <p:sp>
         <p:nvSpPr>
-          <p:cNvPr id="32" name="Shape 30"/>
+          <p:cNvPr id="35" name="Shape 33"/>
           <p:cNvSpPr/>
           <p:nvPr/>
         </p:nvSpPr>
@@ -20499,7 +20499,7 @@
       </p:sp>
       <p:sp>
         <p:nvSpPr>
-          <p:cNvPr id="33" name="Text 31"/>
+          <p:cNvPr id="36" name="Text 34"/>
           <p:cNvSpPr/>
           <p:nvPr/>
         </p:nvSpPr>
@@ -20822,7 +20822,7 @@
                 <a:ea typeface="Calibri" pitchFamily="34" charset="-122"/>
                 <a:cs typeface="Calibri" pitchFamily="34" charset="-120"/>
               </a:rPr>
-              <a:t>Word Labs  •  wordlabs.app  •  Root: 'land' = earth, ground, territory</a:t>
+              <a:t>Word Labs  •  wordlabs.app  •  Root: 'land' = ground, earth, territory</a:t>
             </a:r>
             <a:endParaRPr lang="en-US" sz="800" dirty="0"/>
           </a:p>
@@ -20961,7 +20961,7 @@
                 <a:ea typeface="Trebuchet MS" pitchFamily="34" charset="-122"/>
                 <a:cs typeface="Trebuchet MS" pitchFamily="34" charset="-120"/>
               </a:rPr>
-              <a:t>homeland</a:t>
+              <a:t>overland</a:t>
             </a:r>
             <a:endParaRPr lang="en-US" sz="2800" dirty="0"/>
           </a:p>
@@ -21100,7 +21100,7 @@
                 <a:ea typeface="Trebuchet MS" pitchFamily="34" charset="-122"/>
                 <a:cs typeface="Trebuchet MS" pitchFamily="34" charset="-120"/>
               </a:rPr>
-              <a:t>home</a:t>
+              <a:t>over</a:t>
             </a:r>
             <a:endParaRPr lang="en-US" sz="1300" dirty="0"/>
           </a:p>
@@ -21139,7 +21139,7 @@
                 <a:ea typeface="Calibri" pitchFamily="34" charset="-122"/>
                 <a:cs typeface="Calibri" pitchFamily="34" charset="-120"/>
               </a:rPr>
-              <a:t>place where one lives</a:t>
+              <a:t>across or above</a:t>
             </a:r>
             <a:endParaRPr lang="en-US" sz="850" dirty="0"/>
           </a:p>
@@ -21251,7 +21251,7 @@
                 <a:ea typeface="Calibri" pitchFamily="34" charset="-122"/>
                 <a:cs typeface="Calibri" pitchFamily="34" charset="-120"/>
               </a:rPr>
-              <a:t>ground, territory</a:t>
+              <a:t>ground, earth, territory</a:t>
             </a:r>
             <a:endParaRPr lang="en-US" sz="850" dirty="0"/>
           </a:p>
@@ -21358,7 +21358,7 @@
         </p:nvSpPr>
         <p:spPr>
           <a:xfrm>
-            <a:off x="2999232" y="3364992"/>
+            <a:off x="2313432" y="3364992"/>
             <a:ext cx="1645920" cy="475488"/>
           </a:xfrm>
           <a:prstGeom prst="rect">
@@ -21385,7 +21385,7 @@
         </p:nvSpPr>
         <p:spPr>
           <a:xfrm>
-            <a:off x="2999232" y="3364992"/>
+            <a:off x="2313432" y="3364992"/>
             <a:ext cx="1645920" cy="475488"/>
           </a:xfrm>
           <a:prstGeom prst="rect">
@@ -21410,7 +21410,7 @@
                 <a:ea typeface="Trebuchet MS" pitchFamily="34" charset="-122"/>
                 <a:cs typeface="Trebuchet MS" pitchFamily="34" charset="-120"/>
               </a:rPr>
-              <a:t>home</a:t>
+              <a:t>o</a:t>
             </a:r>
             <a:endParaRPr lang="en-US" sz="1400" dirty="0"/>
           </a:p>
@@ -21424,8 +21424,8 @@
         </p:nvSpPr>
         <p:spPr>
           <a:xfrm>
-            <a:off x="4645152" y="3364992"/>
-            <a:ext cx="1097280" cy="475488"/>
+            <a:off x="3959352" y="3364992"/>
+            <a:ext cx="411480" cy="475488"/>
           </a:xfrm>
           <a:prstGeom prst="rect">
             <a:avLst/>
@@ -21463,7 +21463,7 @@
         </p:nvSpPr>
         <p:spPr>
           <a:xfrm>
-            <a:off x="5742432" y="3364992"/>
+            <a:off x="4370832" y="3364992"/>
             <a:ext cx="1645920" cy="475488"/>
           </a:xfrm>
           <a:prstGeom prst="rect">
@@ -21490,7 +21490,7 @@
         </p:nvSpPr>
         <p:spPr>
           <a:xfrm>
-            <a:off x="5742432" y="3364992"/>
+            <a:off x="4370832" y="3364992"/>
             <a:ext cx="1645920" cy="475488"/>
           </a:xfrm>
           <a:prstGeom prst="rect">
@@ -21515,6 +21515,111 @@
                 <a:ea typeface="Trebuchet MS" pitchFamily="34" charset="-122"/>
                 <a:cs typeface="Trebuchet MS" pitchFamily="34" charset="-120"/>
               </a:rPr>
+              <a:t>ver</a:t>
+            </a:r>
+            <a:endParaRPr lang="en-US" sz="1400" dirty="0"/>
+          </a:p>
+        </p:txBody>
+      </p:sp>
+      <p:sp>
+        <p:nvSpPr>
+          <p:cNvPr id="30" name="Text 28"/>
+          <p:cNvSpPr/>
+          <p:nvPr/>
+        </p:nvSpPr>
+        <p:spPr>
+          <a:xfrm>
+            <a:off x="6016752" y="3364992"/>
+            <a:ext cx="411480" cy="475488"/>
+          </a:xfrm>
+          <a:prstGeom prst="rect">
+            <a:avLst/>
+          </a:prstGeom>
+          <a:noFill/>
+          <a:ln/>
+        </p:spPr>
+        <p:txBody>
+          <a:bodyPr wrap="square" lIns="0" tIns="0" rIns="0" bIns="0" rtlCol="0" anchor="ctr"/>
+          <a:lstStyle/>
+          <a:p>
+            <a:pPr algn="ctr" indent="0" marL="0">
+              <a:buNone/>
+            </a:pPr>
+            <a:r>
+              <a:rPr lang="en-US" sz="1600" b="1" dirty="0">
+                <a:solidFill>
+                  <a:srgbClr val="0D9488"/>
+                </a:solidFill>
+                <a:latin typeface="Trebuchet MS" pitchFamily="34" charset="0"/>
+                <a:ea typeface="Trebuchet MS" pitchFamily="34" charset="-122"/>
+                <a:cs typeface="Trebuchet MS" pitchFamily="34" charset="-120"/>
+              </a:rPr>
+              <a:t>·</a:t>
+            </a:r>
+            <a:endParaRPr lang="en-US" sz="1600" dirty="0"/>
+          </a:p>
+        </p:txBody>
+      </p:sp>
+      <p:sp>
+        <p:nvSpPr>
+          <p:cNvPr id="31" name="Shape 29"/>
+          <p:cNvSpPr/>
+          <p:nvPr/>
+        </p:nvSpPr>
+        <p:spPr>
+          <a:xfrm>
+            <a:off x="6428232" y="3364992"/>
+            <a:ext cx="1645920" cy="475488"/>
+          </a:xfrm>
+          <a:prstGeom prst="rect">
+            <a:avLst>
+              <a:gd name="adj" fmla="val 9615"/>
+            </a:avLst>
+          </a:prstGeom>
+          <a:solidFill>
+            <a:srgbClr val="FFFFFF"/>
+          </a:solidFill>
+          <a:ln w="12700">
+            <a:solidFill>
+              <a:srgbClr val="0D9488"/>
+            </a:solidFill>
+            <a:prstDash val="solid"/>
+          </a:ln>
+        </p:spPr>
+      </p:sp>
+      <p:sp>
+        <p:nvSpPr>
+          <p:cNvPr id="32" name="Text 30"/>
+          <p:cNvSpPr/>
+          <p:nvPr/>
+        </p:nvSpPr>
+        <p:spPr>
+          <a:xfrm>
+            <a:off x="6428232" y="3364992"/>
+            <a:ext cx="1645920" cy="475488"/>
+          </a:xfrm>
+          <a:prstGeom prst="rect">
+            <a:avLst/>
+          </a:prstGeom>
+          <a:noFill/>
+          <a:ln/>
+        </p:spPr>
+        <p:txBody>
+          <a:bodyPr wrap="square" lIns="0" tIns="0" rIns="0" bIns="0" rtlCol="0" anchor="ctr"/>
+          <a:lstStyle/>
+          <a:p>
+            <a:pPr algn="ctr" indent="0" marL="0">
+              <a:buNone/>
+            </a:pPr>
+            <a:r>
+              <a:rPr lang="en-US" sz="1400" b="1" dirty="0">
+                <a:solidFill>
+                  <a:srgbClr val="0D9488"/>
+                </a:solidFill>
+                <a:latin typeface="Trebuchet MS" pitchFamily="34" charset="0"/>
+                <a:ea typeface="Trebuchet MS" pitchFamily="34" charset="-122"/>
+                <a:cs typeface="Trebuchet MS" pitchFamily="34" charset="-120"/>
+              </a:rPr>
               <a:t>land</a:t>
             </a:r>
             <a:endParaRPr lang="en-US" sz="1400" dirty="0"/>
@@ -21523,7 +21628,7 @@
       </p:sp>
       <p:sp>
         <p:nvSpPr>
-          <p:cNvPr id="30" name="Shape 28"/>
+          <p:cNvPr id="33" name="Shape 31"/>
           <p:cNvSpPr/>
           <p:nvPr/>
         </p:nvSpPr>
@@ -21550,7 +21655,7 @@
       </p:sp>
       <p:sp>
         <p:nvSpPr>
-          <p:cNvPr id="31" name="Text 29"/>
+          <p:cNvPr id="34" name="Text 32"/>
           <p:cNvSpPr/>
           <p:nvPr/>
         </p:nvSpPr>
@@ -21589,7 +21694,7 @@
       </p:sp>
       <p:sp>
         <p:nvSpPr>
-          <p:cNvPr id="32" name="Shape 30"/>
+          <p:cNvPr id="35" name="Shape 33"/>
           <p:cNvSpPr/>
           <p:nvPr/>
         </p:nvSpPr>
@@ -21616,13 +21721,13 @@
       </p:sp>
       <p:sp>
         <p:nvSpPr>
-          <p:cNvPr id="33" name="Shape 31"/>
-          <p:cNvSpPr/>
-          <p:nvPr/>
-        </p:nvSpPr>
-        <p:spPr>
-          <a:xfrm>
-            <a:off x="2023872" y="4169664"/>
+          <p:cNvPr id="36" name="Shape 34"/>
+          <p:cNvSpPr/>
+          <p:nvPr/>
+        </p:nvSpPr>
+        <p:spPr>
+          <a:xfrm>
+            <a:off x="2124837" y="4169664"/>
             <a:ext cx="685800" cy="475488"/>
           </a:xfrm>
           <a:prstGeom prst="rect">
@@ -21643,13 +21748,13 @@
       </p:sp>
       <p:sp>
         <p:nvSpPr>
-          <p:cNvPr id="34" name="Text 32"/>
-          <p:cNvSpPr/>
-          <p:nvPr/>
-        </p:nvSpPr>
-        <p:spPr>
-          <a:xfrm>
-            <a:off x="2023872" y="4169664"/>
+          <p:cNvPr id="37" name="Text 35"/>
+          <p:cNvSpPr/>
+          <p:nvPr/>
+        </p:nvSpPr>
+        <p:spPr>
+          <a:xfrm>
+            <a:off x="2124837" y="4169664"/>
             <a:ext cx="685800" cy="475488"/>
           </a:xfrm>
           <a:prstGeom prst="rect">
@@ -21674,7 +21779,7 @@
                 <a:ea typeface="Trebuchet MS" pitchFamily="34" charset="-122"/>
                 <a:cs typeface="Trebuchet MS" pitchFamily="34" charset="-120"/>
               </a:rPr>
-              <a:t>h</a:t>
+              <a:t>o</a:t>
             </a:r>
             <a:endParaRPr lang="en-US" sz="900" dirty="0"/>
           </a:p>
@@ -21682,13 +21787,13 @@
       </p:sp>
       <p:sp>
         <p:nvSpPr>
-          <p:cNvPr id="35" name="Shape 33"/>
-          <p:cNvSpPr/>
-          <p:nvPr/>
-        </p:nvSpPr>
-        <p:spPr>
-          <a:xfrm>
-            <a:off x="2831592" y="4169664"/>
+          <p:cNvPr id="38" name="Shape 36"/>
+          <p:cNvSpPr/>
+          <p:nvPr/>
+        </p:nvSpPr>
+        <p:spPr>
+          <a:xfrm>
+            <a:off x="3033522" y="4169664"/>
             <a:ext cx="685800" cy="475488"/>
           </a:xfrm>
           <a:prstGeom prst="rect">
@@ -21709,13 +21814,13 @@
       </p:sp>
       <p:sp>
         <p:nvSpPr>
-          <p:cNvPr id="36" name="Text 34"/>
-          <p:cNvSpPr/>
-          <p:nvPr/>
-        </p:nvSpPr>
-        <p:spPr>
-          <a:xfrm>
-            <a:off x="2831592" y="4169664"/>
+          <p:cNvPr id="39" name="Text 37"/>
+          <p:cNvSpPr/>
+          <p:nvPr/>
+        </p:nvSpPr>
+        <p:spPr>
+          <a:xfrm>
+            <a:off x="3033522" y="4169664"/>
             <a:ext cx="685800" cy="475488"/>
           </a:xfrm>
           <a:prstGeom prst="rect">
@@ -21740,7 +21845,7 @@
                 <a:ea typeface="Trebuchet MS" pitchFamily="34" charset="-122"/>
                 <a:cs typeface="Trebuchet MS" pitchFamily="34" charset="-120"/>
               </a:rPr>
-              <a:t>o</a:t>
+              <a:t>v</a:t>
             </a:r>
             <a:endParaRPr lang="en-US" sz="900" dirty="0"/>
           </a:p>
@@ -21748,13 +21853,13 @@
       </p:sp>
       <p:sp>
         <p:nvSpPr>
-          <p:cNvPr id="37" name="Shape 35"/>
-          <p:cNvSpPr/>
-          <p:nvPr/>
-        </p:nvSpPr>
-        <p:spPr>
-          <a:xfrm>
-            <a:off x="3639312" y="4169664"/>
+          <p:cNvPr id="40" name="Shape 38"/>
+          <p:cNvSpPr/>
+          <p:nvPr/>
+        </p:nvSpPr>
+        <p:spPr>
+          <a:xfrm>
+            <a:off x="3942207" y="4169664"/>
             <a:ext cx="685800" cy="475488"/>
           </a:xfrm>
           <a:prstGeom prst="rect">
@@ -21775,13 +21880,13 @@
       </p:sp>
       <p:sp>
         <p:nvSpPr>
-          <p:cNvPr id="38" name="Text 36"/>
-          <p:cNvSpPr/>
-          <p:nvPr/>
-        </p:nvSpPr>
-        <p:spPr>
-          <a:xfrm>
-            <a:off x="3639312" y="4169664"/>
+          <p:cNvPr id="41" name="Text 39"/>
+          <p:cNvSpPr/>
+          <p:nvPr/>
+        </p:nvSpPr>
+        <p:spPr>
+          <a:xfrm>
+            <a:off x="3942207" y="4169664"/>
             <a:ext cx="685800" cy="475488"/>
           </a:xfrm>
           <a:prstGeom prst="rect">
@@ -21806,7 +21911,7 @@
                 <a:ea typeface="Trebuchet MS" pitchFamily="34" charset="-122"/>
                 <a:cs typeface="Trebuchet MS" pitchFamily="34" charset="-120"/>
               </a:rPr>
-              <a:t>m</a:t>
+              <a:t>er</a:t>
             </a:r>
             <a:endParaRPr lang="en-US" sz="900" dirty="0"/>
           </a:p>
@@ -21814,13 +21919,13 @@
       </p:sp>
       <p:sp>
         <p:nvSpPr>
-          <p:cNvPr id="39" name="Shape 37"/>
-          <p:cNvSpPr/>
-          <p:nvPr/>
-        </p:nvSpPr>
-        <p:spPr>
-          <a:xfrm>
-            <a:off x="4447032" y="4169664"/>
+          <p:cNvPr id="42" name="Shape 40"/>
+          <p:cNvSpPr/>
+          <p:nvPr/>
+        </p:nvSpPr>
+        <p:spPr>
+          <a:xfrm>
+            <a:off x="4850892" y="4169664"/>
             <a:ext cx="685800" cy="475488"/>
           </a:xfrm>
           <a:prstGeom prst="rect">
@@ -21841,13 +21946,13 @@
       </p:sp>
       <p:sp>
         <p:nvSpPr>
-          <p:cNvPr id="40" name="Text 38"/>
-          <p:cNvSpPr/>
-          <p:nvPr/>
-        </p:nvSpPr>
-        <p:spPr>
-          <a:xfrm>
-            <a:off x="4447032" y="4169664"/>
+          <p:cNvPr id="43" name="Text 41"/>
+          <p:cNvSpPr/>
+          <p:nvPr/>
+        </p:nvSpPr>
+        <p:spPr>
+          <a:xfrm>
+            <a:off x="4850892" y="4169664"/>
             <a:ext cx="685800" cy="475488"/>
           </a:xfrm>
           <a:prstGeom prst="rect">
@@ -21872,7 +21977,7 @@
                 <a:ea typeface="Trebuchet MS" pitchFamily="34" charset="-122"/>
                 <a:cs typeface="Trebuchet MS" pitchFamily="34" charset="-120"/>
               </a:rPr>
-              <a:t>e</a:t>
+              <a:t>l</a:t>
             </a:r>
             <a:endParaRPr lang="en-US" sz="900" dirty="0"/>
           </a:p>
@@ -21880,13 +21985,13 @@
       </p:sp>
       <p:sp>
         <p:nvSpPr>
-          <p:cNvPr id="41" name="Shape 39"/>
-          <p:cNvSpPr/>
-          <p:nvPr/>
-        </p:nvSpPr>
-        <p:spPr>
-          <a:xfrm>
-            <a:off x="5254752" y="4169664"/>
+          <p:cNvPr id="44" name="Shape 42"/>
+          <p:cNvSpPr/>
+          <p:nvPr/>
+        </p:nvSpPr>
+        <p:spPr>
+          <a:xfrm>
+            <a:off x="5759577" y="4169664"/>
             <a:ext cx="685800" cy="475488"/>
           </a:xfrm>
           <a:prstGeom prst="rect">
@@ -21907,13 +22012,13 @@
       </p:sp>
       <p:sp>
         <p:nvSpPr>
-          <p:cNvPr id="42" name="Text 40"/>
-          <p:cNvSpPr/>
-          <p:nvPr/>
-        </p:nvSpPr>
-        <p:spPr>
-          <a:xfrm>
-            <a:off x="5254752" y="4169664"/>
+          <p:cNvPr id="45" name="Text 43"/>
+          <p:cNvSpPr/>
+          <p:nvPr/>
+        </p:nvSpPr>
+        <p:spPr>
+          <a:xfrm>
+            <a:off x="5759577" y="4169664"/>
             <a:ext cx="685800" cy="475488"/>
           </a:xfrm>
           <a:prstGeom prst="rect">
@@ -21938,7 +22043,7 @@
                 <a:ea typeface="Trebuchet MS" pitchFamily="34" charset="-122"/>
                 <a:cs typeface="Trebuchet MS" pitchFamily="34" charset="-120"/>
               </a:rPr>
-              <a:t>l</a:t>
+              <a:t>a</a:t>
             </a:r>
             <a:endParaRPr lang="en-US" sz="900" dirty="0"/>
           </a:p>
@@ -21946,13 +22051,13 @@
       </p:sp>
       <p:sp>
         <p:nvSpPr>
-          <p:cNvPr id="43" name="Shape 41"/>
-          <p:cNvSpPr/>
-          <p:nvPr/>
-        </p:nvSpPr>
-        <p:spPr>
-          <a:xfrm>
-            <a:off x="6062472" y="4169664"/>
+          <p:cNvPr id="46" name="Shape 44"/>
+          <p:cNvSpPr/>
+          <p:nvPr/>
+        </p:nvSpPr>
+        <p:spPr>
+          <a:xfrm>
+            <a:off x="6668262" y="4169664"/>
             <a:ext cx="685800" cy="475488"/>
           </a:xfrm>
           <a:prstGeom prst="rect">
@@ -21973,13 +22078,13 @@
       </p:sp>
       <p:sp>
         <p:nvSpPr>
-          <p:cNvPr id="44" name="Text 42"/>
-          <p:cNvSpPr/>
-          <p:nvPr/>
-        </p:nvSpPr>
-        <p:spPr>
-          <a:xfrm>
-            <a:off x="6062472" y="4169664"/>
+          <p:cNvPr id="47" name="Text 45"/>
+          <p:cNvSpPr/>
+          <p:nvPr/>
+        </p:nvSpPr>
+        <p:spPr>
+          <a:xfrm>
+            <a:off x="6668262" y="4169664"/>
             <a:ext cx="685800" cy="475488"/>
           </a:xfrm>
           <a:prstGeom prst="rect">
@@ -22004,7 +22109,7 @@
                 <a:ea typeface="Trebuchet MS" pitchFamily="34" charset="-122"/>
                 <a:cs typeface="Trebuchet MS" pitchFamily="34" charset="-120"/>
               </a:rPr>
-              <a:t>a</a:t>
+              <a:t>n</a:t>
             </a:r>
             <a:endParaRPr lang="en-US" sz="900" dirty="0"/>
           </a:p>
@@ -22012,13 +22117,13 @@
       </p:sp>
       <p:sp>
         <p:nvSpPr>
-          <p:cNvPr id="45" name="Shape 43"/>
-          <p:cNvSpPr/>
-          <p:nvPr/>
-        </p:nvSpPr>
-        <p:spPr>
-          <a:xfrm>
-            <a:off x="6870192" y="4169664"/>
+          <p:cNvPr id="48" name="Shape 46"/>
+          <p:cNvSpPr/>
+          <p:nvPr/>
+        </p:nvSpPr>
+        <p:spPr>
+          <a:xfrm>
+            <a:off x="7576947" y="4169664"/>
             <a:ext cx="685800" cy="475488"/>
           </a:xfrm>
           <a:prstGeom prst="rect">
@@ -22039,79 +22144,13 @@
       </p:sp>
       <p:sp>
         <p:nvSpPr>
-          <p:cNvPr id="46" name="Text 44"/>
-          <p:cNvSpPr/>
-          <p:nvPr/>
-        </p:nvSpPr>
-        <p:spPr>
-          <a:xfrm>
-            <a:off x="6870192" y="4169664"/>
-            <a:ext cx="685800" cy="475488"/>
-          </a:xfrm>
-          <a:prstGeom prst="rect">
-            <a:avLst/>
-          </a:prstGeom>
-          <a:noFill/>
-          <a:ln/>
-        </p:spPr>
-        <p:txBody>
-          <a:bodyPr wrap="square" lIns="0" tIns="0" rIns="0" bIns="0" rtlCol="0" anchor="ctr"/>
-          <a:lstStyle/>
-          <a:p>
-            <a:pPr algn="ctr" indent="0" marL="0">
-              <a:buNone/>
-            </a:pPr>
-            <a:r>
-              <a:rPr lang="en-US" sz="900" b="1" dirty="0">
-                <a:solidFill>
-                  <a:srgbClr val="9D174D"/>
-                </a:solidFill>
-                <a:latin typeface="Trebuchet MS" pitchFamily="34" charset="0"/>
-                <a:ea typeface="Trebuchet MS" pitchFamily="34" charset="-122"/>
-                <a:cs typeface="Trebuchet MS" pitchFamily="34" charset="-120"/>
-              </a:rPr>
-              <a:t>n</a:t>
-            </a:r>
-            <a:endParaRPr lang="en-US" sz="900" dirty="0"/>
-          </a:p>
-        </p:txBody>
-      </p:sp>
-      <p:sp>
-        <p:nvSpPr>
-          <p:cNvPr id="47" name="Shape 45"/>
-          <p:cNvSpPr/>
-          <p:nvPr/>
-        </p:nvSpPr>
-        <p:spPr>
-          <a:xfrm>
-            <a:off x="7677912" y="4169664"/>
-            <a:ext cx="685800" cy="475488"/>
-          </a:xfrm>
-          <a:prstGeom prst="rect">
-            <a:avLst>
-              <a:gd name="adj" fmla="val 7692"/>
-            </a:avLst>
-          </a:prstGeom>
-          <a:solidFill>
-            <a:srgbClr val="FFFFFF"/>
-          </a:solidFill>
-          <a:ln w="12700">
-            <a:solidFill>
-              <a:srgbClr val="DB2777"/>
-            </a:solidFill>
-            <a:prstDash val="solid"/>
-          </a:ln>
-        </p:spPr>
-      </p:sp>
-      <p:sp>
-        <p:nvSpPr>
-          <p:cNvPr id="48" name="Text 46"/>
-          <p:cNvSpPr/>
-          <p:nvPr/>
-        </p:nvSpPr>
-        <p:spPr>
-          <a:xfrm>
-            <a:off x="7677912" y="4169664"/>
+          <p:cNvPr id="49" name="Text 47"/>
+          <p:cNvSpPr/>
+          <p:nvPr/>
+        </p:nvSpPr>
+        <p:spPr>
+          <a:xfrm>
+            <a:off x="7576947" y="4169664"/>
             <a:ext cx="685800" cy="475488"/>
           </a:xfrm>
           <a:prstGeom prst="rect">
@@ -22428,7 +22467,7 @@
                 <a:ea typeface="Calibri" pitchFamily="34" charset="-122"/>
                 <a:cs typeface="Calibri" pitchFamily="34" charset="-120"/>
               </a:rPr>
-              <a:t>Word Labs  •  wordlabs.app  •  Root: 'land' = earth, ground, territory</a:t>
+              <a:t>Word Labs  •  wordlabs.app  •  Root: 'land' = ground, earth, territory</a:t>
             </a:r>
             <a:endParaRPr lang="en-US" sz="800" dirty="0"/>
           </a:p>
@@ -22567,7 +22606,7 @@
                 <a:ea typeface="Trebuchet MS" pitchFamily="34" charset="-122"/>
                 <a:cs typeface="Trebuchet MS" pitchFamily="34" charset="-120"/>
               </a:rPr>
-              <a:t>overland</a:t>
+              <a:t>upland</a:t>
             </a:r>
             <a:endParaRPr lang="en-US" sz="2800" dirty="0"/>
           </a:p>
@@ -23255,7 +23294,7 @@
                 <a:ea typeface="Calibri" pitchFamily="34" charset="-122"/>
                 <a:cs typeface="Calibri" pitchFamily="34" charset="-120"/>
               </a:rPr>
-              <a:t>Word Labs  •  wordlabs.app  •  Root: 'land' = earth, ground, territory</a:t>
+              <a:t>Word Labs  •  wordlabs.app  •  Root: 'land' = ground, earth, territory</a:t>
             </a:r>
             <a:endParaRPr lang="en-US" sz="800" dirty="0"/>
           </a:p>
@@ -23394,7 +23433,7 @@
                 <a:ea typeface="Trebuchet MS" pitchFamily="34" charset="-122"/>
                 <a:cs typeface="Trebuchet MS" pitchFamily="34" charset="-120"/>
               </a:rPr>
-              <a:t>overland</a:t>
+              <a:t>upland</a:t>
             </a:r>
             <a:endParaRPr lang="en-US" sz="2800" dirty="0"/>
           </a:p>
@@ -23533,7 +23572,7 @@
                 <a:ea typeface="Trebuchet MS" pitchFamily="34" charset="-122"/>
                 <a:cs typeface="Trebuchet MS" pitchFamily="34" charset="-120"/>
               </a:rPr>
-              <a:t>over</a:t>
+              <a:t>up</a:t>
             </a:r>
             <a:endParaRPr lang="en-US" sz="1300" dirty="0"/>
           </a:p>
@@ -23572,7 +23611,7 @@
                 <a:ea typeface="Calibri" pitchFamily="34" charset="-122"/>
                 <a:cs typeface="Calibri" pitchFamily="34" charset="-120"/>
               </a:rPr>
-              <a:t>across, above</a:t>
+              <a:t>high or above</a:t>
             </a:r>
             <a:endParaRPr lang="en-US" sz="850" dirty="0"/>
           </a:p>
@@ -23684,7 +23723,7 @@
                 <a:ea typeface="Calibri" pitchFamily="34" charset="-122"/>
                 <a:cs typeface="Calibri" pitchFamily="34" charset="-120"/>
               </a:rPr>
-              <a:t>ground, territory</a:t>
+              <a:t>ground, earth, territory</a:t>
             </a:r>
             <a:endParaRPr lang="en-US" sz="850" dirty="0"/>
           </a:p>
@@ -24240,7 +24279,7 @@
                 <a:ea typeface="Calibri" pitchFamily="34" charset="-122"/>
                 <a:cs typeface="Calibri" pitchFamily="34" charset="-120"/>
               </a:rPr>
-              <a:t>Word Labs  •  wordlabs.app  •  Root: 'land' = earth, ground, territory</a:t>
+              <a:t>Word Labs  •  wordlabs.app  •  Root: 'land' = ground, earth, territory</a:t>
             </a:r>
             <a:endParaRPr lang="en-US" sz="800" dirty="0"/>
           </a:p>
@@ -24313,7 +24352,7 @@
                 <a:ea typeface="Trebuchet MS" pitchFamily="34" charset="-122"/>
                 <a:cs typeface="Trebuchet MS" pitchFamily="34" charset="-120"/>
               </a:rPr>
-              <a:t>We are learning that the root 'land' means 'earth, ground, territory'.</a:t>
+              <a:t>We are learning that the root 'land' means 'ground, earth, territory'.</a:t>
             </a:r>
             <a:endParaRPr lang="en-US" sz="2000" dirty="0"/>
           </a:p>
@@ -24959,7 +24998,7 @@
                 <a:ea typeface="Calibri" pitchFamily="34" charset="-122"/>
                 <a:cs typeface="Calibri" pitchFamily="34" charset="-120"/>
               </a:rPr>
-              <a:t>Word Labs  •  wordlabs.app  •  Root: 'land' = earth, ground, territory</a:t>
+              <a:t>Word Labs  •  wordlabs.app  •  Root: 'land' = ground, earth, territory</a:t>
             </a:r>
             <a:endParaRPr lang="en-US" sz="800" dirty="0"/>
           </a:p>
@@ -25098,7 +25137,7 @@
                 <a:ea typeface="Trebuchet MS" pitchFamily="34" charset="-122"/>
                 <a:cs typeface="Trebuchet MS" pitchFamily="34" charset="-120"/>
               </a:rPr>
-              <a:t>overland</a:t>
+              <a:t>upland</a:t>
             </a:r>
             <a:endParaRPr lang="en-US" sz="2800" dirty="0"/>
           </a:p>
@@ -25237,7 +25276,7 @@
                 <a:ea typeface="Trebuchet MS" pitchFamily="34" charset="-122"/>
                 <a:cs typeface="Trebuchet MS" pitchFamily="34" charset="-120"/>
               </a:rPr>
-              <a:t>over</a:t>
+              <a:t>up</a:t>
             </a:r>
             <a:endParaRPr lang="en-US" sz="1300" dirty="0"/>
           </a:p>
@@ -25276,7 +25315,7 @@
                 <a:ea typeface="Calibri" pitchFamily="34" charset="-122"/>
                 <a:cs typeface="Calibri" pitchFamily="34" charset="-120"/>
               </a:rPr>
-              <a:t>across, above</a:t>
+              <a:t>high or above</a:t>
             </a:r>
             <a:endParaRPr lang="en-US" sz="850" dirty="0"/>
           </a:p>
@@ -25388,7 +25427,7 @@
                 <a:ea typeface="Calibri" pitchFamily="34" charset="-122"/>
                 <a:cs typeface="Calibri" pitchFamily="34" charset="-120"/>
               </a:rPr>
-              <a:t>ground, territory</a:t>
+              <a:t>ground, earth, territory</a:t>
             </a:r>
             <a:endParaRPr lang="en-US" sz="850" dirty="0"/>
           </a:p>
@@ -25495,7 +25534,7 @@
         </p:nvSpPr>
         <p:spPr>
           <a:xfrm>
-            <a:off x="2313432" y="3364992"/>
+            <a:off x="2999232" y="3364992"/>
             <a:ext cx="1645920" cy="475488"/>
           </a:xfrm>
           <a:prstGeom prst="rect">
@@ -25522,7 +25561,7 @@
         </p:nvSpPr>
         <p:spPr>
           <a:xfrm>
-            <a:off x="2313432" y="3364992"/>
+            <a:off x="2999232" y="3364992"/>
             <a:ext cx="1645920" cy="475488"/>
           </a:xfrm>
           <a:prstGeom prst="rect">
@@ -25547,7 +25586,7 @@
                 <a:ea typeface="Trebuchet MS" pitchFamily="34" charset="-122"/>
                 <a:cs typeface="Trebuchet MS" pitchFamily="34" charset="-120"/>
               </a:rPr>
-              <a:t>o</a:t>
+              <a:t>up</a:t>
             </a:r>
             <a:endParaRPr lang="en-US" sz="1400" dirty="0"/>
           </a:p>
@@ -25561,8 +25600,8 @@
         </p:nvSpPr>
         <p:spPr>
           <a:xfrm>
-            <a:off x="3959352" y="3364992"/>
-            <a:ext cx="411480" cy="475488"/>
+            <a:off x="4645152" y="3364992"/>
+            <a:ext cx="1097280" cy="475488"/>
           </a:xfrm>
           <a:prstGeom prst="rect">
             <a:avLst/>
@@ -25600,7 +25639,7 @@
         </p:nvSpPr>
         <p:spPr>
           <a:xfrm>
-            <a:off x="4370832" y="3364992"/>
+            <a:off x="5742432" y="3364992"/>
             <a:ext cx="1645920" cy="475488"/>
           </a:xfrm>
           <a:prstGeom prst="rect">
@@ -25627,7 +25666,7 @@
         </p:nvSpPr>
         <p:spPr>
           <a:xfrm>
-            <a:off x="4370832" y="3364992"/>
+            <a:off x="5742432" y="3364992"/>
             <a:ext cx="1645920" cy="475488"/>
           </a:xfrm>
           <a:prstGeom prst="rect">
@@ -25652,7 +25691,7 @@
                 <a:ea typeface="Trebuchet MS" pitchFamily="34" charset="-122"/>
                 <a:cs typeface="Trebuchet MS" pitchFamily="34" charset="-120"/>
               </a:rPr>
-              <a:t>ver</a:t>
+              <a:t>land</a:t>
             </a:r>
             <a:endParaRPr lang="en-US" sz="1400" dirty="0"/>
           </a:p>
@@ -25660,14 +25699,41 @@
       </p:sp>
       <p:sp>
         <p:nvSpPr>
-          <p:cNvPr id="30" name="Text 28"/>
-          <p:cNvSpPr/>
-          <p:nvPr/>
-        </p:nvSpPr>
-        <p:spPr>
-          <a:xfrm>
-            <a:off x="6016752" y="3364992"/>
-            <a:ext cx="411480" cy="475488"/>
+          <p:cNvPr id="30" name="Shape 28"/>
+          <p:cNvSpPr/>
+          <p:nvPr/>
+        </p:nvSpPr>
+        <p:spPr>
+          <a:xfrm>
+            <a:off x="365760" y="4096512"/>
+            <a:ext cx="1371600" cy="804672"/>
+          </a:xfrm>
+          <a:prstGeom prst="rect">
+            <a:avLst>
+              <a:gd name="adj" fmla="val 6818"/>
+            </a:avLst>
+          </a:prstGeom>
+          <a:solidFill>
+            <a:srgbClr val="E2E8F0"/>
+          </a:solidFill>
+          <a:ln w="12700">
+            <a:solidFill>
+              <a:srgbClr val="E2E8F0"/>
+            </a:solidFill>
+            <a:prstDash val="solid"/>
+          </a:ln>
+        </p:spPr>
+      </p:sp>
+      <p:sp>
+        <p:nvSpPr>
+          <p:cNvPr id="31" name="Text 29"/>
+          <p:cNvSpPr/>
+          <p:nvPr/>
+        </p:nvSpPr>
+        <p:spPr>
+          <a:xfrm>
+            <a:off x="365760" y="4096512"/>
+            <a:ext cx="1371600" cy="804672"/>
           </a:xfrm>
           <a:prstGeom prst="rect">
             <a:avLst/>
@@ -25683,96 +25749,30 @@
               <a:buNone/>
             </a:pPr>
             <a:r>
-              <a:rPr lang="en-US" sz="1600" b="1" dirty="0">
-                <a:solidFill>
-                  <a:srgbClr val="0D9488"/>
+              <a:rPr lang="en-US" sz="1100" b="1" dirty="0">
+                <a:solidFill>
+                  <a:srgbClr val="475569"/>
                 </a:solidFill>
                 <a:latin typeface="Trebuchet MS" pitchFamily="34" charset="0"/>
                 <a:ea typeface="Trebuchet MS" pitchFamily="34" charset="-122"/>
                 <a:cs typeface="Trebuchet MS" pitchFamily="34" charset="-120"/>
               </a:rPr>
-              <a:t>·</a:t>
-            </a:r>
-            <a:endParaRPr lang="en-US" sz="1600" dirty="0"/>
-          </a:p>
-        </p:txBody>
-      </p:sp>
-      <p:sp>
-        <p:nvSpPr>
-          <p:cNvPr id="31" name="Shape 29"/>
-          <p:cNvSpPr/>
-          <p:nvPr/>
-        </p:nvSpPr>
-        <p:spPr>
-          <a:xfrm>
-            <a:off x="6428232" y="3364992"/>
-            <a:ext cx="1645920" cy="475488"/>
-          </a:xfrm>
-          <a:prstGeom prst="rect">
-            <a:avLst>
-              <a:gd name="adj" fmla="val 9615"/>
-            </a:avLst>
-          </a:prstGeom>
-          <a:solidFill>
-            <a:srgbClr val="FFFFFF"/>
-          </a:solidFill>
-          <a:ln w="12700">
-            <a:solidFill>
-              <a:srgbClr val="0D9488"/>
-            </a:solidFill>
-            <a:prstDash val="solid"/>
-          </a:ln>
-        </p:spPr>
-      </p:sp>
-      <p:sp>
-        <p:nvSpPr>
-          <p:cNvPr id="32" name="Text 30"/>
-          <p:cNvSpPr/>
-          <p:nvPr/>
-        </p:nvSpPr>
-        <p:spPr>
-          <a:xfrm>
-            <a:off x="6428232" y="3364992"/>
-            <a:ext cx="1645920" cy="475488"/>
-          </a:xfrm>
-          <a:prstGeom prst="rect">
-            <a:avLst/>
-          </a:prstGeom>
-          <a:noFill/>
-          <a:ln/>
-        </p:spPr>
-        <p:txBody>
-          <a:bodyPr wrap="square" lIns="0" tIns="0" rIns="0" bIns="0" rtlCol="0" anchor="ctr"/>
-          <a:lstStyle/>
-          <a:p>
-            <a:pPr algn="ctr" indent="0" marL="0">
-              <a:buNone/>
-            </a:pPr>
-            <a:r>
-              <a:rPr lang="en-US" sz="1400" b="1" dirty="0">
-                <a:solidFill>
-                  <a:srgbClr val="0D9488"/>
-                </a:solidFill>
-                <a:latin typeface="Trebuchet MS" pitchFamily="34" charset="0"/>
-                <a:ea typeface="Trebuchet MS" pitchFamily="34" charset="-122"/>
-                <a:cs typeface="Trebuchet MS" pitchFamily="34" charset="-120"/>
-              </a:rPr>
-              <a:t>land</a:t>
-            </a:r>
-            <a:endParaRPr lang="en-US" sz="1400" dirty="0"/>
-          </a:p>
-        </p:txBody>
-      </p:sp>
-      <p:sp>
-        <p:nvSpPr>
-          <p:cNvPr id="33" name="Shape 31"/>
-          <p:cNvSpPr/>
-          <p:nvPr/>
-        </p:nvSpPr>
-        <p:spPr>
-          <a:xfrm>
-            <a:off x="365760" y="4096512"/>
-            <a:ext cx="1371600" cy="804672"/>
+              <a:t>Phonemes</a:t>
+            </a:r>
+            <a:endParaRPr lang="en-US" sz="1100" dirty="0"/>
+          </a:p>
+        </p:txBody>
+      </p:sp>
+      <p:sp>
+        <p:nvSpPr>
+          <p:cNvPr id="32" name="Shape 30"/>
+          <p:cNvSpPr/>
+          <p:nvPr/>
+        </p:nvSpPr>
+        <p:spPr>
+          <a:xfrm>
+            <a:off x="1874520" y="4096512"/>
+            <a:ext cx="6903720" cy="804672"/>
           </a:xfrm>
           <a:prstGeom prst="rect">
             <a:avLst>
@@ -25780,85 +25780,19 @@
             </a:avLst>
           </a:prstGeom>
           <a:solidFill>
-            <a:srgbClr val="E2E8F0"/>
+            <a:srgbClr val="F8FAFC"/>
           </a:solidFill>
           <a:ln w="12700">
             <a:solidFill>
               <a:srgbClr val="E2E8F0"/>
             </a:solidFill>
-            <a:prstDash val="solid"/>
-          </a:ln>
-        </p:spPr>
-      </p:sp>
-      <p:sp>
-        <p:nvSpPr>
-          <p:cNvPr id="34" name="Text 32"/>
-          <p:cNvSpPr/>
-          <p:nvPr/>
-        </p:nvSpPr>
-        <p:spPr>
-          <a:xfrm>
-            <a:off x="365760" y="4096512"/>
-            <a:ext cx="1371600" cy="804672"/>
-          </a:xfrm>
-          <a:prstGeom prst="rect">
-            <a:avLst/>
-          </a:prstGeom>
-          <a:noFill/>
-          <a:ln/>
-        </p:spPr>
-        <p:txBody>
-          <a:bodyPr wrap="square" lIns="0" tIns="0" rIns="0" bIns="0" rtlCol="0" anchor="ctr"/>
-          <a:lstStyle/>
-          <a:p>
-            <a:pPr algn="ctr" indent="0" marL="0">
-              <a:buNone/>
-            </a:pPr>
-            <a:r>
-              <a:rPr lang="en-US" sz="1100" b="1" dirty="0">
-                <a:solidFill>
-                  <a:srgbClr val="475569"/>
-                </a:solidFill>
-                <a:latin typeface="Trebuchet MS" pitchFamily="34" charset="0"/>
-                <a:ea typeface="Trebuchet MS" pitchFamily="34" charset="-122"/>
-                <a:cs typeface="Trebuchet MS" pitchFamily="34" charset="-120"/>
-              </a:rPr>
-              <a:t>Phonemes</a:t>
-            </a:r>
-            <a:endParaRPr lang="en-US" sz="1100" dirty="0"/>
-          </a:p>
-        </p:txBody>
-      </p:sp>
-      <p:sp>
-        <p:nvSpPr>
-          <p:cNvPr id="35" name="Shape 33"/>
-          <p:cNvSpPr/>
-          <p:nvPr/>
-        </p:nvSpPr>
-        <p:spPr>
-          <a:xfrm>
-            <a:off x="1874520" y="4096512"/>
-            <a:ext cx="6903720" cy="804672"/>
-          </a:xfrm>
-          <a:prstGeom prst="rect">
-            <a:avLst>
-              <a:gd name="adj" fmla="val 6818"/>
-            </a:avLst>
-          </a:prstGeom>
-          <a:solidFill>
-            <a:srgbClr val="F8FAFC"/>
-          </a:solidFill>
-          <a:ln w="12700">
-            <a:solidFill>
-              <a:srgbClr val="E2E8F0"/>
-            </a:solidFill>
             <a:prstDash val="dash"/>
           </a:ln>
         </p:spPr>
       </p:sp>
       <p:sp>
         <p:nvSpPr>
-          <p:cNvPr id="36" name="Text 34"/>
+          <p:cNvPr id="33" name="Text 31"/>
           <p:cNvSpPr/>
           <p:nvPr/>
         </p:nvSpPr>
@@ -26181,7 +26115,7 @@
                 <a:ea typeface="Calibri" pitchFamily="34" charset="-122"/>
                 <a:cs typeface="Calibri" pitchFamily="34" charset="-120"/>
               </a:rPr>
-              <a:t>Word Labs  •  wordlabs.app  •  Root: 'land' = earth, ground, territory</a:t>
+              <a:t>Word Labs  •  wordlabs.app  •  Root: 'land' = ground, earth, territory</a:t>
             </a:r>
             <a:endParaRPr lang="en-US" sz="800" dirty="0"/>
           </a:p>
@@ -26320,7 +26254,7 @@
                 <a:ea typeface="Trebuchet MS" pitchFamily="34" charset="-122"/>
                 <a:cs typeface="Trebuchet MS" pitchFamily="34" charset="-120"/>
               </a:rPr>
-              <a:t>overland</a:t>
+              <a:t>upland</a:t>
             </a:r>
             <a:endParaRPr lang="en-US" sz="2800" dirty="0"/>
           </a:p>
@@ -26459,7 +26393,7 @@
                 <a:ea typeface="Trebuchet MS" pitchFamily="34" charset="-122"/>
                 <a:cs typeface="Trebuchet MS" pitchFamily="34" charset="-120"/>
               </a:rPr>
-              <a:t>over</a:t>
+              <a:t>up</a:t>
             </a:r>
             <a:endParaRPr lang="en-US" sz="1300" dirty="0"/>
           </a:p>
@@ -26498,7 +26432,7 @@
                 <a:ea typeface="Calibri" pitchFamily="34" charset="-122"/>
                 <a:cs typeface="Calibri" pitchFamily="34" charset="-120"/>
               </a:rPr>
-              <a:t>across, above</a:t>
+              <a:t>high or above</a:t>
             </a:r>
             <a:endParaRPr lang="en-US" sz="850" dirty="0"/>
           </a:p>
@@ -26610,7 +26544,7 @@
                 <a:ea typeface="Calibri" pitchFamily="34" charset="-122"/>
                 <a:cs typeface="Calibri" pitchFamily="34" charset="-120"/>
               </a:rPr>
-              <a:t>ground, territory</a:t>
+              <a:t>ground, earth, territory</a:t>
             </a:r>
             <a:endParaRPr lang="en-US" sz="850" dirty="0"/>
           </a:p>
@@ -26717,7 +26651,7 @@
         </p:nvSpPr>
         <p:spPr>
           <a:xfrm>
-            <a:off x="2313432" y="3364992"/>
+            <a:off x="2999232" y="3364992"/>
             <a:ext cx="1645920" cy="475488"/>
           </a:xfrm>
           <a:prstGeom prst="rect">
@@ -26744,7 +26678,7 @@
         </p:nvSpPr>
         <p:spPr>
           <a:xfrm>
-            <a:off x="2313432" y="3364992"/>
+            <a:off x="2999232" y="3364992"/>
             <a:ext cx="1645920" cy="475488"/>
           </a:xfrm>
           <a:prstGeom prst="rect">
@@ -26769,7 +26703,7 @@
                 <a:ea typeface="Trebuchet MS" pitchFamily="34" charset="-122"/>
                 <a:cs typeface="Trebuchet MS" pitchFamily="34" charset="-120"/>
               </a:rPr>
-              <a:t>o</a:t>
+              <a:t>up</a:t>
             </a:r>
             <a:endParaRPr lang="en-US" sz="1400" dirty="0"/>
           </a:p>
@@ -26783,8 +26717,8 @@
         </p:nvSpPr>
         <p:spPr>
           <a:xfrm>
-            <a:off x="3959352" y="3364992"/>
-            <a:ext cx="411480" cy="475488"/>
+            <a:off x="4645152" y="3364992"/>
+            <a:ext cx="1097280" cy="475488"/>
           </a:xfrm>
           <a:prstGeom prst="rect">
             <a:avLst/>
@@ -26822,7 +26756,7 @@
         </p:nvSpPr>
         <p:spPr>
           <a:xfrm>
-            <a:off x="4370832" y="3364992"/>
+            <a:off x="5742432" y="3364992"/>
             <a:ext cx="1645920" cy="475488"/>
           </a:xfrm>
           <a:prstGeom prst="rect">
@@ -26849,7 +26783,7 @@
         </p:nvSpPr>
         <p:spPr>
           <a:xfrm>
-            <a:off x="4370832" y="3364992"/>
+            <a:off x="5742432" y="3364992"/>
             <a:ext cx="1645920" cy="475488"/>
           </a:xfrm>
           <a:prstGeom prst="rect">
@@ -26874,7 +26808,7 @@
                 <a:ea typeface="Trebuchet MS" pitchFamily="34" charset="-122"/>
                 <a:cs typeface="Trebuchet MS" pitchFamily="34" charset="-120"/>
               </a:rPr>
-              <a:t>ver</a:t>
+              <a:t>land</a:t>
             </a:r>
             <a:endParaRPr lang="en-US" sz="1400" dirty="0"/>
           </a:p>
@@ -26882,14 +26816,41 @@
       </p:sp>
       <p:sp>
         <p:nvSpPr>
-          <p:cNvPr id="30" name="Text 28"/>
-          <p:cNvSpPr/>
-          <p:nvPr/>
-        </p:nvSpPr>
-        <p:spPr>
-          <a:xfrm>
-            <a:off x="6016752" y="3364992"/>
-            <a:ext cx="411480" cy="475488"/>
+          <p:cNvPr id="30" name="Shape 28"/>
+          <p:cNvSpPr/>
+          <p:nvPr/>
+        </p:nvSpPr>
+        <p:spPr>
+          <a:xfrm>
+            <a:off x="365760" y="4096512"/>
+            <a:ext cx="1371600" cy="804672"/>
+          </a:xfrm>
+          <a:prstGeom prst="rect">
+            <a:avLst>
+              <a:gd name="adj" fmla="val 6818"/>
+            </a:avLst>
+          </a:prstGeom>
+          <a:solidFill>
+            <a:srgbClr val="E2E8F0"/>
+          </a:solidFill>
+          <a:ln w="12700">
+            <a:solidFill>
+              <a:srgbClr val="E2E8F0"/>
+            </a:solidFill>
+            <a:prstDash val="solid"/>
+          </a:ln>
+        </p:spPr>
+      </p:sp>
+      <p:sp>
+        <p:nvSpPr>
+          <p:cNvPr id="31" name="Text 29"/>
+          <p:cNvSpPr/>
+          <p:nvPr/>
+        </p:nvSpPr>
+        <p:spPr>
+          <a:xfrm>
+            <a:off x="365760" y="4096512"/>
+            <a:ext cx="1371600" cy="804672"/>
           </a:xfrm>
           <a:prstGeom prst="rect">
             <a:avLst/>
@@ -26905,57 +26866,84 @@
               <a:buNone/>
             </a:pPr>
             <a:r>
-              <a:rPr lang="en-US" sz="1600" b="1" dirty="0">
-                <a:solidFill>
-                  <a:srgbClr val="0D9488"/>
+              <a:rPr lang="en-US" sz="1100" b="1" dirty="0">
+                <a:solidFill>
+                  <a:srgbClr val="475569"/>
                 </a:solidFill>
                 <a:latin typeface="Trebuchet MS" pitchFamily="34" charset="0"/>
                 <a:ea typeface="Trebuchet MS" pitchFamily="34" charset="-122"/>
                 <a:cs typeface="Trebuchet MS" pitchFamily="34" charset="-120"/>
               </a:rPr>
-              <a:t>·</a:t>
-            </a:r>
-            <a:endParaRPr lang="en-US" sz="1600" dirty="0"/>
-          </a:p>
-        </p:txBody>
-      </p:sp>
-      <p:sp>
-        <p:nvSpPr>
-          <p:cNvPr id="31" name="Shape 29"/>
-          <p:cNvSpPr/>
-          <p:nvPr/>
-        </p:nvSpPr>
-        <p:spPr>
-          <a:xfrm>
-            <a:off x="6428232" y="3364992"/>
-            <a:ext cx="1645920" cy="475488"/>
+              <a:t>Phonemes</a:t>
+            </a:r>
+            <a:endParaRPr lang="en-US" sz="1100" dirty="0"/>
+          </a:p>
+        </p:txBody>
+      </p:sp>
+      <p:sp>
+        <p:nvSpPr>
+          <p:cNvPr id="32" name="Shape 30"/>
+          <p:cNvSpPr/>
+          <p:nvPr/>
+        </p:nvSpPr>
+        <p:spPr>
+          <a:xfrm>
+            <a:off x="1874520" y="4096512"/>
+            <a:ext cx="6903720" cy="658368"/>
           </a:xfrm>
           <a:prstGeom prst="rect">
             <a:avLst>
-              <a:gd name="adj" fmla="val 9615"/>
+              <a:gd name="adj" fmla="val 8333"/>
             </a:avLst>
           </a:prstGeom>
           <a:solidFill>
+            <a:srgbClr val="FCE7F3"/>
+          </a:solidFill>
+          <a:ln w="12700">
+            <a:solidFill>
+              <a:srgbClr val="DB2777"/>
+            </a:solidFill>
+            <a:prstDash val="solid"/>
+          </a:ln>
+        </p:spPr>
+      </p:sp>
+      <p:sp>
+        <p:nvSpPr>
+          <p:cNvPr id="33" name="Shape 31"/>
+          <p:cNvSpPr/>
+          <p:nvPr/>
+        </p:nvSpPr>
+        <p:spPr>
+          <a:xfrm>
+            <a:off x="2254649" y="4169664"/>
+            <a:ext cx="685800" cy="475488"/>
+          </a:xfrm>
+          <a:prstGeom prst="rect">
+            <a:avLst>
+              <a:gd name="adj" fmla="val 7692"/>
+            </a:avLst>
+          </a:prstGeom>
+          <a:solidFill>
             <a:srgbClr val="FFFFFF"/>
           </a:solidFill>
           <a:ln w="12700">
             <a:solidFill>
-              <a:srgbClr val="0D9488"/>
-            </a:solidFill>
-            <a:prstDash val="solid"/>
-          </a:ln>
-        </p:spPr>
-      </p:sp>
-      <p:sp>
-        <p:nvSpPr>
-          <p:cNvPr id="32" name="Text 30"/>
-          <p:cNvSpPr/>
-          <p:nvPr/>
-        </p:nvSpPr>
-        <p:spPr>
-          <a:xfrm>
-            <a:off x="6428232" y="3364992"/>
-            <a:ext cx="1645920" cy="475488"/>
+              <a:srgbClr val="DB2777"/>
+            </a:solidFill>
+            <a:prstDash val="solid"/>
+          </a:ln>
+        </p:spPr>
+      </p:sp>
+      <p:sp>
+        <p:nvSpPr>
+          <p:cNvPr id="34" name="Text 32"/>
+          <p:cNvSpPr/>
+          <p:nvPr/>
+        </p:nvSpPr>
+        <p:spPr>
+          <a:xfrm>
+            <a:off x="2254649" y="4169664"/>
+            <a:ext cx="685800" cy="475488"/>
           </a:xfrm>
           <a:prstGeom prst="rect">
             <a:avLst/>
@@ -26971,57 +26959,57 @@
               <a:buNone/>
             </a:pPr>
             <a:r>
-              <a:rPr lang="en-US" sz="1400" b="1" dirty="0">
-                <a:solidFill>
-                  <a:srgbClr val="0D9488"/>
+              <a:rPr lang="en-US" sz="900" b="1" dirty="0">
+                <a:solidFill>
+                  <a:srgbClr val="9D174D"/>
                 </a:solidFill>
                 <a:latin typeface="Trebuchet MS" pitchFamily="34" charset="0"/>
                 <a:ea typeface="Trebuchet MS" pitchFamily="34" charset="-122"/>
                 <a:cs typeface="Trebuchet MS" pitchFamily="34" charset="-120"/>
               </a:rPr>
-              <a:t>land</a:t>
-            </a:r>
-            <a:endParaRPr lang="en-US" sz="1400" dirty="0"/>
-          </a:p>
-        </p:txBody>
-      </p:sp>
-      <p:sp>
-        <p:nvSpPr>
-          <p:cNvPr id="33" name="Shape 31"/>
-          <p:cNvSpPr/>
-          <p:nvPr/>
-        </p:nvSpPr>
-        <p:spPr>
-          <a:xfrm>
-            <a:off x="365760" y="4096512"/>
-            <a:ext cx="1371600" cy="804672"/>
+              <a:t>u</a:t>
+            </a:r>
+            <a:endParaRPr lang="en-US" sz="900" dirty="0"/>
+          </a:p>
+        </p:txBody>
+      </p:sp>
+      <p:sp>
+        <p:nvSpPr>
+          <p:cNvPr id="35" name="Shape 33"/>
+          <p:cNvSpPr/>
+          <p:nvPr/>
+        </p:nvSpPr>
+        <p:spPr>
+          <a:xfrm>
+            <a:off x="3293146" y="4169664"/>
+            <a:ext cx="685800" cy="475488"/>
           </a:xfrm>
           <a:prstGeom prst="rect">
             <a:avLst>
-              <a:gd name="adj" fmla="val 6818"/>
+              <a:gd name="adj" fmla="val 7692"/>
             </a:avLst>
           </a:prstGeom>
           <a:solidFill>
-            <a:srgbClr val="E2E8F0"/>
-          </a:solidFill>
-          <a:ln w="12700">
-            <a:solidFill>
-              <a:srgbClr val="E2E8F0"/>
-            </a:solidFill>
-            <a:prstDash val="solid"/>
-          </a:ln>
-        </p:spPr>
-      </p:sp>
-      <p:sp>
-        <p:nvSpPr>
-          <p:cNvPr id="34" name="Text 32"/>
-          <p:cNvSpPr/>
-          <p:nvPr/>
-        </p:nvSpPr>
-        <p:spPr>
-          <a:xfrm>
-            <a:off x="365760" y="4096512"/>
-            <a:ext cx="1371600" cy="804672"/>
+            <a:srgbClr val="FFFFFF"/>
+          </a:solidFill>
+          <a:ln w="12700">
+            <a:solidFill>
+              <a:srgbClr val="DB2777"/>
+            </a:solidFill>
+            <a:prstDash val="solid"/>
+          </a:ln>
+        </p:spPr>
+      </p:sp>
+      <p:sp>
+        <p:nvSpPr>
+          <p:cNvPr id="36" name="Text 34"/>
+          <p:cNvSpPr/>
+          <p:nvPr/>
+        </p:nvSpPr>
+        <p:spPr>
+          <a:xfrm>
+            <a:off x="3293146" y="4169664"/>
+            <a:ext cx="685800" cy="475488"/>
           </a:xfrm>
           <a:prstGeom prst="rect">
             <a:avLst/>
@@ -27037,56 +27025,29 @@
               <a:buNone/>
             </a:pPr>
             <a:r>
-              <a:rPr lang="en-US" sz="1100" b="1" dirty="0">
-                <a:solidFill>
-                  <a:srgbClr val="475569"/>
+              <a:rPr lang="en-US" sz="900" b="1" dirty="0">
+                <a:solidFill>
+                  <a:srgbClr val="9D174D"/>
                 </a:solidFill>
                 <a:latin typeface="Trebuchet MS" pitchFamily="34" charset="0"/>
                 <a:ea typeface="Trebuchet MS" pitchFamily="34" charset="-122"/>
                 <a:cs typeface="Trebuchet MS" pitchFamily="34" charset="-120"/>
               </a:rPr>
-              <a:t>Phonemes</a:t>
-            </a:r>
-            <a:endParaRPr lang="en-US" sz="1100" dirty="0"/>
-          </a:p>
-        </p:txBody>
-      </p:sp>
-      <p:sp>
-        <p:nvSpPr>
-          <p:cNvPr id="35" name="Shape 33"/>
-          <p:cNvSpPr/>
-          <p:nvPr/>
-        </p:nvSpPr>
-        <p:spPr>
-          <a:xfrm>
-            <a:off x="1874520" y="4096512"/>
-            <a:ext cx="6903720" cy="658368"/>
-          </a:xfrm>
-          <a:prstGeom prst="rect">
-            <a:avLst>
-              <a:gd name="adj" fmla="val 8333"/>
-            </a:avLst>
-          </a:prstGeom>
-          <a:solidFill>
-            <a:srgbClr val="FCE7F3"/>
-          </a:solidFill>
-          <a:ln w="12700">
-            <a:solidFill>
-              <a:srgbClr val="DB2777"/>
-            </a:solidFill>
-            <a:prstDash val="solid"/>
-          </a:ln>
-        </p:spPr>
-      </p:sp>
-      <p:sp>
-        <p:nvSpPr>
-          <p:cNvPr id="36" name="Shape 34"/>
-          <p:cNvSpPr/>
-          <p:nvPr/>
-        </p:nvSpPr>
-        <p:spPr>
-          <a:xfrm>
-            <a:off x="2124837" y="4169664"/>
+              <a:t>p</a:t>
+            </a:r>
+            <a:endParaRPr lang="en-US" sz="900" dirty="0"/>
+          </a:p>
+        </p:txBody>
+      </p:sp>
+      <p:sp>
+        <p:nvSpPr>
+          <p:cNvPr id="37" name="Shape 35"/>
+          <p:cNvSpPr/>
+          <p:nvPr/>
+        </p:nvSpPr>
+        <p:spPr>
+          <a:xfrm>
+            <a:off x="4331643" y="4169664"/>
             <a:ext cx="685800" cy="475488"/>
           </a:xfrm>
           <a:prstGeom prst="rect">
@@ -27107,13 +27068,13 @@
       </p:sp>
       <p:sp>
         <p:nvSpPr>
-          <p:cNvPr id="37" name="Text 35"/>
-          <p:cNvSpPr/>
-          <p:nvPr/>
-        </p:nvSpPr>
-        <p:spPr>
-          <a:xfrm>
-            <a:off x="2124837" y="4169664"/>
+          <p:cNvPr id="38" name="Text 36"/>
+          <p:cNvSpPr/>
+          <p:nvPr/>
+        </p:nvSpPr>
+        <p:spPr>
+          <a:xfrm>
+            <a:off x="4331643" y="4169664"/>
             <a:ext cx="685800" cy="475488"/>
           </a:xfrm>
           <a:prstGeom prst="rect">
@@ -27138,7 +27099,7 @@
                 <a:ea typeface="Trebuchet MS" pitchFamily="34" charset="-122"/>
                 <a:cs typeface="Trebuchet MS" pitchFamily="34" charset="-120"/>
               </a:rPr>
-              <a:t>o</a:t>
+              <a:t>l</a:t>
             </a:r>
             <a:endParaRPr lang="en-US" sz="900" dirty="0"/>
           </a:p>
@@ -27146,13 +27107,13 @@
       </p:sp>
       <p:sp>
         <p:nvSpPr>
-          <p:cNvPr id="38" name="Shape 36"/>
-          <p:cNvSpPr/>
-          <p:nvPr/>
-        </p:nvSpPr>
-        <p:spPr>
-          <a:xfrm>
-            <a:off x="3033522" y="4169664"/>
+          <p:cNvPr id="39" name="Shape 37"/>
+          <p:cNvSpPr/>
+          <p:nvPr/>
+        </p:nvSpPr>
+        <p:spPr>
+          <a:xfrm>
+            <a:off x="5370141" y="4169664"/>
             <a:ext cx="685800" cy="475488"/>
           </a:xfrm>
           <a:prstGeom prst="rect">
@@ -27173,13 +27134,13 @@
       </p:sp>
       <p:sp>
         <p:nvSpPr>
-          <p:cNvPr id="39" name="Text 37"/>
-          <p:cNvSpPr/>
-          <p:nvPr/>
-        </p:nvSpPr>
-        <p:spPr>
-          <a:xfrm>
-            <a:off x="3033522" y="4169664"/>
+          <p:cNvPr id="40" name="Text 38"/>
+          <p:cNvSpPr/>
+          <p:nvPr/>
+        </p:nvSpPr>
+        <p:spPr>
+          <a:xfrm>
+            <a:off x="5370141" y="4169664"/>
             <a:ext cx="685800" cy="475488"/>
           </a:xfrm>
           <a:prstGeom prst="rect">
@@ -27204,7 +27165,7 @@
                 <a:ea typeface="Trebuchet MS" pitchFamily="34" charset="-122"/>
                 <a:cs typeface="Trebuchet MS" pitchFamily="34" charset="-120"/>
               </a:rPr>
-              <a:t>v</a:t>
+              <a:t>a</a:t>
             </a:r>
             <a:endParaRPr lang="en-US" sz="900" dirty="0"/>
           </a:p>
@@ -27212,13 +27173,13 @@
       </p:sp>
       <p:sp>
         <p:nvSpPr>
-          <p:cNvPr id="40" name="Shape 38"/>
-          <p:cNvSpPr/>
-          <p:nvPr/>
-        </p:nvSpPr>
-        <p:spPr>
-          <a:xfrm>
-            <a:off x="3942207" y="4169664"/>
+          <p:cNvPr id="41" name="Shape 39"/>
+          <p:cNvSpPr/>
+          <p:nvPr/>
+        </p:nvSpPr>
+        <p:spPr>
+          <a:xfrm>
+            <a:off x="6408638" y="4169664"/>
             <a:ext cx="685800" cy="475488"/>
           </a:xfrm>
           <a:prstGeom prst="rect">
@@ -27239,13 +27200,13 @@
       </p:sp>
       <p:sp>
         <p:nvSpPr>
-          <p:cNvPr id="41" name="Text 39"/>
-          <p:cNvSpPr/>
-          <p:nvPr/>
-        </p:nvSpPr>
-        <p:spPr>
-          <a:xfrm>
-            <a:off x="3942207" y="4169664"/>
+          <p:cNvPr id="42" name="Text 40"/>
+          <p:cNvSpPr/>
+          <p:nvPr/>
+        </p:nvSpPr>
+        <p:spPr>
+          <a:xfrm>
+            <a:off x="6408638" y="4169664"/>
             <a:ext cx="685800" cy="475488"/>
           </a:xfrm>
           <a:prstGeom prst="rect">
@@ -27270,7 +27231,7 @@
                 <a:ea typeface="Trebuchet MS" pitchFamily="34" charset="-122"/>
                 <a:cs typeface="Trebuchet MS" pitchFamily="34" charset="-120"/>
               </a:rPr>
-              <a:t>er</a:t>
+              <a:t>n</a:t>
             </a:r>
             <a:endParaRPr lang="en-US" sz="900" dirty="0"/>
           </a:p>
@@ -27278,13 +27239,13 @@
       </p:sp>
       <p:sp>
         <p:nvSpPr>
-          <p:cNvPr id="42" name="Shape 40"/>
-          <p:cNvSpPr/>
-          <p:nvPr/>
-        </p:nvSpPr>
-        <p:spPr>
-          <a:xfrm>
-            <a:off x="4850892" y="4169664"/>
+          <p:cNvPr id="43" name="Shape 41"/>
+          <p:cNvSpPr/>
+          <p:nvPr/>
+        </p:nvSpPr>
+        <p:spPr>
+          <a:xfrm>
+            <a:off x="7447135" y="4169664"/>
             <a:ext cx="685800" cy="475488"/>
           </a:xfrm>
           <a:prstGeom prst="rect">
@@ -27305,211 +27266,13 @@
       </p:sp>
       <p:sp>
         <p:nvSpPr>
-          <p:cNvPr id="43" name="Text 41"/>
-          <p:cNvSpPr/>
-          <p:nvPr/>
-        </p:nvSpPr>
-        <p:spPr>
-          <a:xfrm>
-            <a:off x="4850892" y="4169664"/>
-            <a:ext cx="685800" cy="475488"/>
-          </a:xfrm>
-          <a:prstGeom prst="rect">
-            <a:avLst/>
-          </a:prstGeom>
-          <a:noFill/>
-          <a:ln/>
-        </p:spPr>
-        <p:txBody>
-          <a:bodyPr wrap="square" lIns="0" tIns="0" rIns="0" bIns="0" rtlCol="0" anchor="ctr"/>
-          <a:lstStyle/>
-          <a:p>
-            <a:pPr algn="ctr" indent="0" marL="0">
-              <a:buNone/>
-            </a:pPr>
-            <a:r>
-              <a:rPr lang="en-US" sz="900" b="1" dirty="0">
-                <a:solidFill>
-                  <a:srgbClr val="9D174D"/>
-                </a:solidFill>
-                <a:latin typeface="Trebuchet MS" pitchFamily="34" charset="0"/>
-                <a:ea typeface="Trebuchet MS" pitchFamily="34" charset="-122"/>
-                <a:cs typeface="Trebuchet MS" pitchFamily="34" charset="-120"/>
-              </a:rPr>
-              <a:t>l</a:t>
-            </a:r>
-            <a:endParaRPr lang="en-US" sz="900" dirty="0"/>
-          </a:p>
-        </p:txBody>
-      </p:sp>
-      <p:sp>
-        <p:nvSpPr>
-          <p:cNvPr id="44" name="Shape 42"/>
-          <p:cNvSpPr/>
-          <p:nvPr/>
-        </p:nvSpPr>
-        <p:spPr>
-          <a:xfrm>
-            <a:off x="5759577" y="4169664"/>
-            <a:ext cx="685800" cy="475488"/>
-          </a:xfrm>
-          <a:prstGeom prst="rect">
-            <a:avLst>
-              <a:gd name="adj" fmla="val 7692"/>
-            </a:avLst>
-          </a:prstGeom>
-          <a:solidFill>
-            <a:srgbClr val="FFFFFF"/>
-          </a:solidFill>
-          <a:ln w="12700">
-            <a:solidFill>
-              <a:srgbClr val="DB2777"/>
-            </a:solidFill>
-            <a:prstDash val="solid"/>
-          </a:ln>
-        </p:spPr>
-      </p:sp>
-      <p:sp>
-        <p:nvSpPr>
-          <p:cNvPr id="45" name="Text 43"/>
-          <p:cNvSpPr/>
-          <p:nvPr/>
-        </p:nvSpPr>
-        <p:spPr>
-          <a:xfrm>
-            <a:off x="5759577" y="4169664"/>
-            <a:ext cx="685800" cy="475488"/>
-          </a:xfrm>
-          <a:prstGeom prst="rect">
-            <a:avLst/>
-          </a:prstGeom>
-          <a:noFill/>
-          <a:ln/>
-        </p:spPr>
-        <p:txBody>
-          <a:bodyPr wrap="square" lIns="0" tIns="0" rIns="0" bIns="0" rtlCol="0" anchor="ctr"/>
-          <a:lstStyle/>
-          <a:p>
-            <a:pPr algn="ctr" indent="0" marL="0">
-              <a:buNone/>
-            </a:pPr>
-            <a:r>
-              <a:rPr lang="en-US" sz="900" b="1" dirty="0">
-                <a:solidFill>
-                  <a:srgbClr val="9D174D"/>
-                </a:solidFill>
-                <a:latin typeface="Trebuchet MS" pitchFamily="34" charset="0"/>
-                <a:ea typeface="Trebuchet MS" pitchFamily="34" charset="-122"/>
-                <a:cs typeface="Trebuchet MS" pitchFamily="34" charset="-120"/>
-              </a:rPr>
-              <a:t>a</a:t>
-            </a:r>
-            <a:endParaRPr lang="en-US" sz="900" dirty="0"/>
-          </a:p>
-        </p:txBody>
-      </p:sp>
-      <p:sp>
-        <p:nvSpPr>
-          <p:cNvPr id="46" name="Shape 44"/>
-          <p:cNvSpPr/>
-          <p:nvPr/>
-        </p:nvSpPr>
-        <p:spPr>
-          <a:xfrm>
-            <a:off x="6668262" y="4169664"/>
-            <a:ext cx="685800" cy="475488"/>
-          </a:xfrm>
-          <a:prstGeom prst="rect">
-            <a:avLst>
-              <a:gd name="adj" fmla="val 7692"/>
-            </a:avLst>
-          </a:prstGeom>
-          <a:solidFill>
-            <a:srgbClr val="FFFFFF"/>
-          </a:solidFill>
-          <a:ln w="12700">
-            <a:solidFill>
-              <a:srgbClr val="DB2777"/>
-            </a:solidFill>
-            <a:prstDash val="solid"/>
-          </a:ln>
-        </p:spPr>
-      </p:sp>
-      <p:sp>
-        <p:nvSpPr>
-          <p:cNvPr id="47" name="Text 45"/>
-          <p:cNvSpPr/>
-          <p:nvPr/>
-        </p:nvSpPr>
-        <p:spPr>
-          <a:xfrm>
-            <a:off x="6668262" y="4169664"/>
-            <a:ext cx="685800" cy="475488"/>
-          </a:xfrm>
-          <a:prstGeom prst="rect">
-            <a:avLst/>
-          </a:prstGeom>
-          <a:noFill/>
-          <a:ln/>
-        </p:spPr>
-        <p:txBody>
-          <a:bodyPr wrap="square" lIns="0" tIns="0" rIns="0" bIns="0" rtlCol="0" anchor="ctr"/>
-          <a:lstStyle/>
-          <a:p>
-            <a:pPr algn="ctr" indent="0" marL="0">
-              <a:buNone/>
-            </a:pPr>
-            <a:r>
-              <a:rPr lang="en-US" sz="900" b="1" dirty="0">
-                <a:solidFill>
-                  <a:srgbClr val="9D174D"/>
-                </a:solidFill>
-                <a:latin typeface="Trebuchet MS" pitchFamily="34" charset="0"/>
-                <a:ea typeface="Trebuchet MS" pitchFamily="34" charset="-122"/>
-                <a:cs typeface="Trebuchet MS" pitchFamily="34" charset="-120"/>
-              </a:rPr>
-              <a:t>n</a:t>
-            </a:r>
-            <a:endParaRPr lang="en-US" sz="900" dirty="0"/>
-          </a:p>
-        </p:txBody>
-      </p:sp>
-      <p:sp>
-        <p:nvSpPr>
-          <p:cNvPr id="48" name="Shape 46"/>
-          <p:cNvSpPr/>
-          <p:nvPr/>
-        </p:nvSpPr>
-        <p:spPr>
-          <a:xfrm>
-            <a:off x="7576947" y="4169664"/>
-            <a:ext cx="685800" cy="475488"/>
-          </a:xfrm>
-          <a:prstGeom prst="rect">
-            <a:avLst>
-              <a:gd name="adj" fmla="val 7692"/>
-            </a:avLst>
-          </a:prstGeom>
-          <a:solidFill>
-            <a:srgbClr val="FFFFFF"/>
-          </a:solidFill>
-          <a:ln w="12700">
-            <a:solidFill>
-              <a:srgbClr val="DB2777"/>
-            </a:solidFill>
-            <a:prstDash val="solid"/>
-          </a:ln>
-        </p:spPr>
-      </p:sp>
-      <p:sp>
-        <p:nvSpPr>
-          <p:cNvPr id="49" name="Text 47"/>
-          <p:cNvSpPr/>
-          <p:nvPr/>
-        </p:nvSpPr>
-        <p:spPr>
-          <a:xfrm>
-            <a:off x="7576947" y="4169664"/>
+          <p:cNvPr id="44" name="Text 42"/>
+          <p:cNvSpPr/>
+          <p:nvPr/>
+        </p:nvSpPr>
+        <p:spPr>
+          <a:xfrm>
+            <a:off x="7447135" y="4169664"/>
             <a:ext cx="685800" cy="475488"/>
           </a:xfrm>
           <a:prstGeom prst="rect">
@@ -27826,7 +27589,7 @@
                 <a:ea typeface="Calibri" pitchFamily="34" charset="-122"/>
                 <a:cs typeface="Calibri" pitchFamily="34" charset="-120"/>
               </a:rPr>
-              <a:t>Word Labs  •  wordlabs.app  •  Root: 'land' = earth, ground, territory</a:t>
+              <a:t>Word Labs  •  wordlabs.app  •  Root: 'land' = ground, earth, territory</a:t>
             </a:r>
             <a:endParaRPr lang="en-US" sz="800" dirty="0"/>
           </a:p>
@@ -27965,7 +27728,7 @@
                 <a:ea typeface="Trebuchet MS" pitchFamily="34" charset="-122"/>
                 <a:cs typeface="Trebuchet MS" pitchFamily="34" charset="-120"/>
               </a:rPr>
-              <a:t>farmland</a:t>
+              <a:t>landing</a:t>
             </a:r>
             <a:endParaRPr lang="en-US" sz="2800" dirty="0"/>
           </a:p>
@@ -28653,7 +28416,7 @@
                 <a:ea typeface="Calibri" pitchFamily="34" charset="-122"/>
                 <a:cs typeface="Calibri" pitchFamily="34" charset="-120"/>
               </a:rPr>
-              <a:t>Word Labs  •  wordlabs.app  •  Root: 'land' = earth, ground, territory</a:t>
+              <a:t>Word Labs  •  wordlabs.app  •  Root: 'land' = ground, earth, territory</a:t>
             </a:r>
             <a:endParaRPr lang="en-US" sz="800" dirty="0"/>
           </a:p>
@@ -28792,7 +28555,7 @@
                 <a:ea typeface="Trebuchet MS" pitchFamily="34" charset="-122"/>
                 <a:cs typeface="Trebuchet MS" pitchFamily="34" charset="-120"/>
               </a:rPr>
-              <a:t>farmland</a:t>
+              <a:t>landing</a:t>
             </a:r>
             <a:endParaRPr lang="en-US" sz="2800" dirty="0"/>
           </a:p>
@@ -28881,11 +28644,11 @@
             </a:avLst>
           </a:prstGeom>
           <a:solidFill>
-            <a:srgbClr val="DDD6FE"/>
+            <a:srgbClr val="CCFBF1"/>
           </a:solidFill>
           <a:ln w="19050">
             <a:solidFill>
-              <a:srgbClr val="7C3AED"/>
+              <a:srgbClr val="0D9488"/>
             </a:solidFill>
             <a:prstDash val="solid"/>
           </a:ln>
@@ -28925,13 +28688,13 @@
             <a:r>
               <a:rPr lang="en-US" sz="1300" b="1" dirty="0">
                 <a:solidFill>
-                  <a:srgbClr val="4C1D95"/>
+                  <a:srgbClr val="0F766E"/>
                 </a:solidFill>
                 <a:latin typeface="Trebuchet MS" pitchFamily="34" charset="0"/>
                 <a:ea typeface="Trebuchet MS" pitchFamily="34" charset="-122"/>
                 <a:cs typeface="Trebuchet MS" pitchFamily="34" charset="-120"/>
               </a:rPr>
-              <a:t>farm</a:t>
+              <a:t>land</a:t>
             </a:r>
             <a:endParaRPr lang="en-US" sz="1300" dirty="0"/>
           </a:p>
@@ -28970,7 +28733,7 @@
                 <a:ea typeface="Calibri" pitchFamily="34" charset="-122"/>
                 <a:cs typeface="Calibri" pitchFamily="34" charset="-120"/>
               </a:rPr>
-              <a:t>agricultural place</a:t>
+              <a:t>ground, earth, territory</a:t>
             </a:r>
             <a:endParaRPr lang="en-US" sz="850" dirty="0"/>
           </a:p>
@@ -28993,11 +28756,11 @@
             </a:avLst>
           </a:prstGeom>
           <a:solidFill>
-            <a:srgbClr val="CCFBF1"/>
+            <a:srgbClr val="FCE7F3"/>
           </a:solidFill>
           <a:ln w="19050">
             <a:solidFill>
-              <a:srgbClr val="0D9488"/>
+              <a:srgbClr val="DB2777"/>
             </a:solidFill>
             <a:prstDash val="solid"/>
           </a:ln>
@@ -29037,13 +28800,13 @@
             <a:r>
               <a:rPr lang="en-US" sz="1300" b="1" dirty="0">
                 <a:solidFill>
-                  <a:srgbClr val="0F766E"/>
+                  <a:srgbClr val="9D174D"/>
                 </a:solidFill>
                 <a:latin typeface="Trebuchet MS" pitchFamily="34" charset="0"/>
                 <a:ea typeface="Trebuchet MS" pitchFamily="34" charset="-122"/>
                 <a:cs typeface="Trebuchet MS" pitchFamily="34" charset="-120"/>
               </a:rPr>
-              <a:t>land</a:t>
+              <a:t>ing</a:t>
             </a:r>
             <a:endParaRPr lang="en-US" sz="1300" dirty="0"/>
           </a:p>
@@ -29082,7 +28845,7 @@
                 <a:ea typeface="Calibri" pitchFamily="34" charset="-122"/>
                 <a:cs typeface="Calibri" pitchFamily="34" charset="-120"/>
               </a:rPr>
-              <a:t>ground, territory</a:t>
+              <a:t>action happening now or ongoing</a:t>
             </a:r>
             <a:endParaRPr lang="en-US" sz="850" dirty="0"/>
           </a:p>
@@ -29638,7 +29401,7 @@
                 <a:ea typeface="Calibri" pitchFamily="34" charset="-122"/>
                 <a:cs typeface="Calibri" pitchFamily="34" charset="-120"/>
               </a:rPr>
-              <a:t>Word Labs  •  wordlabs.app  •  Root: 'land' = earth, ground, territory</a:t>
+              <a:t>Word Labs  •  wordlabs.app  •  Root: 'land' = ground, earth, territory</a:t>
             </a:r>
             <a:endParaRPr lang="en-US" sz="800" dirty="0"/>
           </a:p>
@@ -29777,7 +29540,7 @@
                 <a:ea typeface="Trebuchet MS" pitchFamily="34" charset="-122"/>
                 <a:cs typeface="Trebuchet MS" pitchFamily="34" charset="-120"/>
               </a:rPr>
-              <a:t>farmland</a:t>
+              <a:t>landing</a:t>
             </a:r>
             <a:endParaRPr lang="en-US" sz="2800" dirty="0"/>
           </a:p>
@@ -29866,11 +29629,11 @@
             </a:avLst>
           </a:prstGeom>
           <a:solidFill>
-            <a:srgbClr val="DDD6FE"/>
+            <a:srgbClr val="CCFBF1"/>
           </a:solidFill>
           <a:ln w="19050">
             <a:solidFill>
-              <a:srgbClr val="7C3AED"/>
+              <a:srgbClr val="0D9488"/>
             </a:solidFill>
             <a:prstDash val="solid"/>
           </a:ln>
@@ -29910,13 +29673,13 @@
             <a:r>
               <a:rPr lang="en-US" sz="1300" b="1" dirty="0">
                 <a:solidFill>
-                  <a:srgbClr val="4C1D95"/>
+                  <a:srgbClr val="0F766E"/>
                 </a:solidFill>
                 <a:latin typeface="Trebuchet MS" pitchFamily="34" charset="0"/>
                 <a:ea typeface="Trebuchet MS" pitchFamily="34" charset="-122"/>
                 <a:cs typeface="Trebuchet MS" pitchFamily="34" charset="-120"/>
               </a:rPr>
-              <a:t>farm</a:t>
+              <a:t>land</a:t>
             </a:r>
             <a:endParaRPr lang="en-US" sz="1300" dirty="0"/>
           </a:p>
@@ -29955,7 +29718,7 @@
                 <a:ea typeface="Calibri" pitchFamily="34" charset="-122"/>
                 <a:cs typeface="Calibri" pitchFamily="34" charset="-120"/>
               </a:rPr>
-              <a:t>agricultural place</a:t>
+              <a:t>ground, earth, territory</a:t>
             </a:r>
             <a:endParaRPr lang="en-US" sz="850" dirty="0"/>
           </a:p>
@@ -29978,11 +29741,11 @@
             </a:avLst>
           </a:prstGeom>
           <a:solidFill>
-            <a:srgbClr val="CCFBF1"/>
+            <a:srgbClr val="FCE7F3"/>
           </a:solidFill>
           <a:ln w="19050">
             <a:solidFill>
-              <a:srgbClr val="0D9488"/>
+              <a:srgbClr val="DB2777"/>
             </a:solidFill>
             <a:prstDash val="solid"/>
           </a:ln>
@@ -30022,13 +29785,13 @@
             <a:r>
               <a:rPr lang="en-US" sz="1300" b="1" dirty="0">
                 <a:solidFill>
-                  <a:srgbClr val="0F766E"/>
+                  <a:srgbClr val="9D174D"/>
                 </a:solidFill>
                 <a:latin typeface="Trebuchet MS" pitchFamily="34" charset="0"/>
                 <a:ea typeface="Trebuchet MS" pitchFamily="34" charset="-122"/>
                 <a:cs typeface="Trebuchet MS" pitchFamily="34" charset="-120"/>
               </a:rPr>
-              <a:t>land</a:t>
+              <a:t>ing</a:t>
             </a:r>
             <a:endParaRPr lang="en-US" sz="1300" dirty="0"/>
           </a:p>
@@ -30067,7 +29830,7 @@
                 <a:ea typeface="Calibri" pitchFamily="34" charset="-122"/>
                 <a:cs typeface="Calibri" pitchFamily="34" charset="-120"/>
               </a:rPr>
-              <a:t>ground, territory</a:t>
+              <a:t>action happening now or ongoing</a:t>
             </a:r>
             <a:endParaRPr lang="en-US" sz="850" dirty="0"/>
           </a:p>
@@ -30226,7 +29989,7 @@
                 <a:ea typeface="Trebuchet MS" pitchFamily="34" charset="-122"/>
                 <a:cs typeface="Trebuchet MS" pitchFamily="34" charset="-120"/>
               </a:rPr>
-              <a:t>farm</a:t>
+              <a:t>land</a:t>
             </a:r>
             <a:endParaRPr lang="en-US" sz="1400" dirty="0"/>
           </a:p>
@@ -30331,7 +30094,7 @@
                 <a:ea typeface="Trebuchet MS" pitchFamily="34" charset="-122"/>
                 <a:cs typeface="Trebuchet MS" pitchFamily="34" charset="-120"/>
               </a:rPr>
-              <a:t>land</a:t>
+              <a:t>ing</a:t>
             </a:r>
             <a:endParaRPr lang="en-US" sz="1400" dirty="0"/>
           </a:p>
@@ -30755,7 +30518,7 @@
                 <a:ea typeface="Calibri" pitchFamily="34" charset="-122"/>
                 <a:cs typeface="Calibri" pitchFamily="34" charset="-120"/>
               </a:rPr>
-              <a:t>Word Labs  •  wordlabs.app  •  Root: 'land' = earth, ground, territory</a:t>
+              <a:t>Word Labs  •  wordlabs.app  •  Root: 'land' = ground, earth, territory</a:t>
             </a:r>
             <a:endParaRPr lang="en-US" sz="800" dirty="0"/>
           </a:p>
@@ -30894,7 +30657,7 @@
                 <a:ea typeface="Trebuchet MS" pitchFamily="34" charset="-122"/>
                 <a:cs typeface="Trebuchet MS" pitchFamily="34" charset="-120"/>
               </a:rPr>
-              <a:t>farmland</a:t>
+              <a:t>landing</a:t>
             </a:r>
             <a:endParaRPr lang="en-US" sz="2800" dirty="0"/>
           </a:p>
@@ -30983,11 +30746,11 @@
             </a:avLst>
           </a:prstGeom>
           <a:solidFill>
-            <a:srgbClr val="DDD6FE"/>
+            <a:srgbClr val="CCFBF1"/>
           </a:solidFill>
           <a:ln w="19050">
             <a:solidFill>
-              <a:srgbClr val="7C3AED"/>
+              <a:srgbClr val="0D9488"/>
             </a:solidFill>
             <a:prstDash val="solid"/>
           </a:ln>
@@ -31027,13 +30790,13 @@
             <a:r>
               <a:rPr lang="en-US" sz="1300" b="1" dirty="0">
                 <a:solidFill>
-                  <a:srgbClr val="4C1D95"/>
+                  <a:srgbClr val="0F766E"/>
                 </a:solidFill>
                 <a:latin typeface="Trebuchet MS" pitchFamily="34" charset="0"/>
                 <a:ea typeface="Trebuchet MS" pitchFamily="34" charset="-122"/>
                 <a:cs typeface="Trebuchet MS" pitchFamily="34" charset="-120"/>
               </a:rPr>
-              <a:t>farm</a:t>
+              <a:t>land</a:t>
             </a:r>
             <a:endParaRPr lang="en-US" sz="1300" dirty="0"/>
           </a:p>
@@ -31072,7 +30835,7 @@
                 <a:ea typeface="Calibri" pitchFamily="34" charset="-122"/>
                 <a:cs typeface="Calibri" pitchFamily="34" charset="-120"/>
               </a:rPr>
-              <a:t>agricultural place</a:t>
+              <a:t>ground, earth, territory</a:t>
             </a:r>
             <a:endParaRPr lang="en-US" sz="850" dirty="0"/>
           </a:p>
@@ -31095,11 +30858,11 @@
             </a:avLst>
           </a:prstGeom>
           <a:solidFill>
-            <a:srgbClr val="CCFBF1"/>
+            <a:srgbClr val="FCE7F3"/>
           </a:solidFill>
           <a:ln w="19050">
             <a:solidFill>
-              <a:srgbClr val="0D9488"/>
+              <a:srgbClr val="DB2777"/>
             </a:solidFill>
             <a:prstDash val="solid"/>
           </a:ln>
@@ -31139,13 +30902,13 @@
             <a:r>
               <a:rPr lang="en-US" sz="1300" b="1" dirty="0">
                 <a:solidFill>
-                  <a:srgbClr val="0F766E"/>
+                  <a:srgbClr val="9D174D"/>
                 </a:solidFill>
                 <a:latin typeface="Trebuchet MS" pitchFamily="34" charset="0"/>
                 <a:ea typeface="Trebuchet MS" pitchFamily="34" charset="-122"/>
                 <a:cs typeface="Trebuchet MS" pitchFamily="34" charset="-120"/>
               </a:rPr>
-              <a:t>land</a:t>
+              <a:t>ing</a:t>
             </a:r>
             <a:endParaRPr lang="en-US" sz="1300" dirty="0"/>
           </a:p>
@@ -31184,7 +30947,7 @@
                 <a:ea typeface="Calibri" pitchFamily="34" charset="-122"/>
                 <a:cs typeface="Calibri" pitchFamily="34" charset="-120"/>
               </a:rPr>
-              <a:t>ground, territory</a:t>
+              <a:t>action happening now or ongoing</a:t>
             </a:r>
             <a:endParaRPr lang="en-US" sz="850" dirty="0"/>
           </a:p>
@@ -31343,7 +31106,7 @@
                 <a:ea typeface="Trebuchet MS" pitchFamily="34" charset="-122"/>
                 <a:cs typeface="Trebuchet MS" pitchFamily="34" charset="-120"/>
               </a:rPr>
-              <a:t>farm</a:t>
+              <a:t>land</a:t>
             </a:r>
             <a:endParaRPr lang="en-US" sz="1400" dirty="0"/>
           </a:p>
@@ -31448,7 +31211,7 @@
                 <a:ea typeface="Trebuchet MS" pitchFamily="34" charset="-122"/>
                 <a:cs typeface="Trebuchet MS" pitchFamily="34" charset="-120"/>
               </a:rPr>
-              <a:t>land</a:t>
+              <a:t>ing</a:t>
             </a:r>
             <a:endParaRPr lang="en-US" sz="1400" dirty="0"/>
           </a:p>
@@ -31555,7 +31318,7 @@
         </p:nvSpPr>
         <p:spPr>
           <a:xfrm>
-            <a:off x="2124837" y="4169664"/>
+            <a:off x="2254649" y="4169664"/>
             <a:ext cx="685800" cy="475488"/>
           </a:xfrm>
           <a:prstGeom prst="rect">
@@ -31582,7 +31345,7 @@
         </p:nvSpPr>
         <p:spPr>
           <a:xfrm>
-            <a:off x="2124837" y="4169664"/>
+            <a:off x="2254649" y="4169664"/>
             <a:ext cx="685800" cy="475488"/>
           </a:xfrm>
           <a:prstGeom prst="rect">
@@ -31607,7 +31370,7 @@
                 <a:ea typeface="Trebuchet MS" pitchFamily="34" charset="-122"/>
                 <a:cs typeface="Trebuchet MS" pitchFamily="34" charset="-120"/>
               </a:rPr>
-              <a:t>f</a:t>
+              <a:t>l</a:t>
             </a:r>
             <a:endParaRPr lang="en-US" sz="900" dirty="0"/>
           </a:p>
@@ -31621,7 +31384,7 @@
         </p:nvSpPr>
         <p:spPr>
           <a:xfrm>
-            <a:off x="3033522" y="4169664"/>
+            <a:off x="3293146" y="4169664"/>
             <a:ext cx="685800" cy="475488"/>
           </a:xfrm>
           <a:prstGeom prst="rect">
@@ -31648,7 +31411,7 @@
         </p:nvSpPr>
         <p:spPr>
           <a:xfrm>
-            <a:off x="3033522" y="4169664"/>
+            <a:off x="3293146" y="4169664"/>
             <a:ext cx="685800" cy="475488"/>
           </a:xfrm>
           <a:prstGeom prst="rect">
@@ -31673,7 +31436,7 @@
                 <a:ea typeface="Trebuchet MS" pitchFamily="34" charset="-122"/>
                 <a:cs typeface="Trebuchet MS" pitchFamily="34" charset="-120"/>
               </a:rPr>
-              <a:t>ar</a:t>
+              <a:t>a</a:t>
             </a:r>
             <a:endParaRPr lang="en-US" sz="900" dirty="0"/>
           </a:p>
@@ -31687,7 +31450,7 @@
         </p:nvSpPr>
         <p:spPr>
           <a:xfrm>
-            <a:off x="3942207" y="4169664"/>
+            <a:off x="4331643" y="4169664"/>
             <a:ext cx="685800" cy="475488"/>
           </a:xfrm>
           <a:prstGeom prst="rect">
@@ -31714,7 +31477,7 @@
         </p:nvSpPr>
         <p:spPr>
           <a:xfrm>
-            <a:off x="3942207" y="4169664"/>
+            <a:off x="4331643" y="4169664"/>
             <a:ext cx="685800" cy="475488"/>
           </a:xfrm>
           <a:prstGeom prst="rect">
@@ -31739,7 +31502,7 @@
                 <a:ea typeface="Trebuchet MS" pitchFamily="34" charset="-122"/>
                 <a:cs typeface="Trebuchet MS" pitchFamily="34" charset="-120"/>
               </a:rPr>
-              <a:t>m</a:t>
+              <a:t>n</a:t>
             </a:r>
             <a:endParaRPr lang="en-US" sz="900" dirty="0"/>
           </a:p>
@@ -31753,7 +31516,7 @@
         </p:nvSpPr>
         <p:spPr>
           <a:xfrm>
-            <a:off x="4850892" y="4169664"/>
+            <a:off x="5370141" y="4169664"/>
             <a:ext cx="685800" cy="475488"/>
           </a:xfrm>
           <a:prstGeom prst="rect">
@@ -31780,7 +31543,7 @@
         </p:nvSpPr>
         <p:spPr>
           <a:xfrm>
-            <a:off x="4850892" y="4169664"/>
+            <a:off x="5370141" y="4169664"/>
             <a:ext cx="685800" cy="475488"/>
           </a:xfrm>
           <a:prstGeom prst="rect">
@@ -31805,7 +31568,7 @@
                 <a:ea typeface="Trebuchet MS" pitchFamily="34" charset="-122"/>
                 <a:cs typeface="Trebuchet MS" pitchFamily="34" charset="-120"/>
               </a:rPr>
-              <a:t>l</a:t>
+              <a:t>d</a:t>
             </a:r>
             <a:endParaRPr lang="en-US" sz="900" dirty="0"/>
           </a:p>
@@ -31819,7 +31582,7 @@
         </p:nvSpPr>
         <p:spPr>
           <a:xfrm>
-            <a:off x="5759577" y="4169664"/>
+            <a:off x="6408638" y="4169664"/>
             <a:ext cx="685800" cy="475488"/>
           </a:xfrm>
           <a:prstGeom prst="rect">
@@ -31846,7 +31609,7 @@
         </p:nvSpPr>
         <p:spPr>
           <a:xfrm>
-            <a:off x="5759577" y="4169664"/>
+            <a:off x="6408638" y="4169664"/>
             <a:ext cx="685800" cy="475488"/>
           </a:xfrm>
           <a:prstGeom prst="rect">
@@ -31871,7 +31634,7 @@
                 <a:ea typeface="Trebuchet MS" pitchFamily="34" charset="-122"/>
                 <a:cs typeface="Trebuchet MS" pitchFamily="34" charset="-120"/>
               </a:rPr>
-              <a:t>a</a:t>
+              <a:t>i</a:t>
             </a:r>
             <a:endParaRPr lang="en-US" sz="900" dirty="0"/>
           </a:p>
@@ -31885,7 +31648,7 @@
         </p:nvSpPr>
         <p:spPr>
           <a:xfrm>
-            <a:off x="6668262" y="4169664"/>
+            <a:off x="7447135" y="4169664"/>
             <a:ext cx="685800" cy="475488"/>
           </a:xfrm>
           <a:prstGeom prst="rect">
@@ -31912,7 +31675,7 @@
         </p:nvSpPr>
         <p:spPr>
           <a:xfrm>
-            <a:off x="6668262" y="4169664"/>
+            <a:off x="7447135" y="4169664"/>
             <a:ext cx="685800" cy="475488"/>
           </a:xfrm>
           <a:prstGeom prst="rect">
@@ -31937,73 +31700,7 @@
                 <a:ea typeface="Trebuchet MS" pitchFamily="34" charset="-122"/>
                 <a:cs typeface="Trebuchet MS" pitchFamily="34" charset="-120"/>
               </a:rPr>
-              <a:t>n</a:t>
-            </a:r>
-            <a:endParaRPr lang="en-US" sz="900" dirty="0"/>
-          </a:p>
-        </p:txBody>
-      </p:sp>
-      <p:sp>
-        <p:nvSpPr>
-          <p:cNvPr id="45" name="Shape 43"/>
-          <p:cNvSpPr/>
-          <p:nvPr/>
-        </p:nvSpPr>
-        <p:spPr>
-          <a:xfrm>
-            <a:off x="7576947" y="4169664"/>
-            <a:ext cx="685800" cy="475488"/>
-          </a:xfrm>
-          <a:prstGeom prst="rect">
-            <a:avLst>
-              <a:gd name="adj" fmla="val 7692"/>
-            </a:avLst>
-          </a:prstGeom>
-          <a:solidFill>
-            <a:srgbClr val="FFFFFF"/>
-          </a:solidFill>
-          <a:ln w="12700">
-            <a:solidFill>
-              <a:srgbClr val="DB2777"/>
-            </a:solidFill>
-            <a:prstDash val="solid"/>
-          </a:ln>
-        </p:spPr>
-      </p:sp>
-      <p:sp>
-        <p:nvSpPr>
-          <p:cNvPr id="46" name="Text 44"/>
-          <p:cNvSpPr/>
-          <p:nvPr/>
-        </p:nvSpPr>
-        <p:spPr>
-          <a:xfrm>
-            <a:off x="7576947" y="4169664"/>
-            <a:ext cx="685800" cy="475488"/>
-          </a:xfrm>
-          <a:prstGeom prst="rect">
-            <a:avLst/>
-          </a:prstGeom>
-          <a:noFill/>
-          <a:ln/>
-        </p:spPr>
-        <p:txBody>
-          <a:bodyPr wrap="square" lIns="0" tIns="0" rIns="0" bIns="0" rtlCol="0" anchor="ctr"/>
-          <a:lstStyle/>
-          <a:p>
-            <a:pPr algn="ctr" indent="0" marL="0">
-              <a:buNone/>
-            </a:pPr>
-            <a:r>
-              <a:rPr lang="en-US" sz="900" b="1" dirty="0">
-                <a:solidFill>
-                  <a:srgbClr val="9D174D"/>
-                </a:solidFill>
-                <a:latin typeface="Trebuchet MS" pitchFamily="34" charset="0"/>
-                <a:ea typeface="Trebuchet MS" pitchFamily="34" charset="-122"/>
-                <a:cs typeface="Trebuchet MS" pitchFamily="34" charset="-120"/>
-              </a:rPr>
-              <a:t>d</a:t>
+              <a:t>ng</a:t>
             </a:r>
             <a:endParaRPr lang="en-US" sz="900" dirty="0"/>
           </a:p>
@@ -32295,7 +31992,7 @@
                 <a:ea typeface="Calibri" pitchFamily="34" charset="-122"/>
                 <a:cs typeface="Calibri" pitchFamily="34" charset="-120"/>
               </a:rPr>
-              <a:t>Word Labs  •  wordlabs.app  •  Root: 'land' = earth, ground, territory</a:t>
+              <a:t>Word Labs  •  wordlabs.app  •  Root: 'land' = ground, earth, territory</a:t>
             </a:r>
             <a:endParaRPr lang="en-US" sz="800" dirty="0"/>
           </a:p>
@@ -33464,7 +33161,7 @@
                 <a:ea typeface="Calibri" pitchFamily="34" charset="-122"/>
                 <a:cs typeface="Calibri" pitchFamily="34" charset="-120"/>
               </a:rPr>
-              <a:t>Word Labs  •  wordlabs.app  •  Root: 'land' = earth, ground, territory</a:t>
+              <a:t>Word Labs  •  wordlabs.app  •  Root: 'land' = ground, earth, territory</a:t>
             </a:r>
             <a:endParaRPr lang="en-US" sz="800" dirty="0"/>
           </a:p>
@@ -33893,7 +33590,7 @@
                 <a:ea typeface="Trebuchet MS" pitchFamily="34" charset="-122"/>
                 <a:cs typeface="Trebuchet MS" pitchFamily="34" charset="-120"/>
               </a:rPr>
-              <a:t>-ing</a:t>
+              <a:t>-ed</a:t>
             </a:r>
             <a:endParaRPr lang="en-US" sz="1300" dirty="0"/>
           </a:p>
@@ -33957,7 +33654,7 @@
                 <a:ea typeface="Trebuchet MS" pitchFamily="34" charset="-122"/>
                 <a:cs typeface="Trebuchet MS" pitchFamily="34" charset="-120"/>
               </a:rPr>
-              <a:t>farm-</a:t>
+              <a:t>out-</a:t>
             </a:r>
             <a:endParaRPr lang="en-US" sz="1300" dirty="0"/>
           </a:p>
@@ -34046,7 +33743,7 @@
                 <a:ea typeface="Trebuchet MS" pitchFamily="34" charset="-122"/>
                 <a:cs typeface="Trebuchet MS" pitchFamily="34" charset="-120"/>
               </a:rPr>
-              <a:t>-ed</a:t>
+              <a:t>-ing</a:t>
             </a:r>
             <a:endParaRPr lang="en-US" sz="1300" dirty="0"/>
           </a:p>
@@ -34110,7 +33807,7 @@
                 <a:ea typeface="Trebuchet MS" pitchFamily="34" charset="-122"/>
                 <a:cs typeface="Trebuchet MS" pitchFamily="34" charset="-120"/>
               </a:rPr>
-              <a:t>home-</a:t>
+              <a:t>up-</a:t>
             </a:r>
             <a:endParaRPr lang="en-US" sz="1300" dirty="0"/>
           </a:p>
@@ -34263,7 +33960,7 @@
                 <a:ea typeface="Trebuchet MS" pitchFamily="34" charset="-122"/>
                 <a:cs typeface="Trebuchet MS" pitchFamily="34" charset="-120"/>
               </a:rPr>
-              <a:t>out-</a:t>
+              <a:t>waste-</a:t>
             </a:r>
             <a:endParaRPr lang="en-US" sz="1300" dirty="0"/>
           </a:p>
@@ -34416,7 +34113,7 @@
                 <a:ea typeface="Trebuchet MS" pitchFamily="34" charset="-122"/>
                 <a:cs typeface="Trebuchet MS" pitchFamily="34" charset="-120"/>
               </a:rPr>
-              <a:t>in-</a:t>
+              <a:t>farm-</a:t>
             </a:r>
             <a:endParaRPr lang="en-US" sz="1300" dirty="0"/>
           </a:p>
@@ -34610,7 +34307,7 @@
                 <a:ea typeface="Trebuchet MS" pitchFamily="34" charset="-122"/>
                 <a:cs typeface="Trebuchet MS" pitchFamily="34" charset="-120"/>
               </a:rPr>
-              <a:t>landing</a:t>
+              <a:t>landlord</a:t>
             </a:r>
             <a:endParaRPr lang="en-US" sz="1200" dirty="0"/>
           </a:p>
@@ -34676,7 +34373,7 @@
                 <a:ea typeface="Trebuchet MS" pitchFamily="34" charset="-122"/>
                 <a:cs typeface="Trebuchet MS" pitchFamily="34" charset="-120"/>
               </a:rPr>
-              <a:t>landlord</a:t>
+              <a:t>landmark</a:t>
             </a:r>
             <a:endParaRPr lang="en-US" sz="1200" dirty="0"/>
           </a:p>
@@ -34742,7 +34439,7 @@
                 <a:ea typeface="Trebuchet MS" pitchFamily="34" charset="-122"/>
                 <a:cs typeface="Trebuchet MS" pitchFamily="34" charset="-120"/>
               </a:rPr>
-              <a:t>landmark</a:t>
+              <a:t>landscape</a:t>
             </a:r>
             <a:endParaRPr lang="en-US" sz="1200" dirty="0"/>
           </a:p>
@@ -34808,7 +34505,7 @@
                 <a:ea typeface="Trebuchet MS" pitchFamily="34" charset="-122"/>
                 <a:cs typeface="Trebuchet MS" pitchFamily="34" charset="-120"/>
               </a:rPr>
-              <a:t>landscape</a:t>
+              <a:t>overland</a:t>
             </a:r>
             <a:endParaRPr lang="en-US" sz="1200" dirty="0"/>
           </a:p>
@@ -34874,7 +34571,7 @@
                 <a:ea typeface="Trebuchet MS" pitchFamily="34" charset="-122"/>
                 <a:cs typeface="Trebuchet MS" pitchFamily="34" charset="-120"/>
               </a:rPr>
-              <a:t>overland</a:t>
+              <a:t>upland</a:t>
             </a:r>
             <a:endParaRPr lang="en-US" sz="1200" dirty="0"/>
           </a:p>
@@ -34940,7 +34637,7 @@
                 <a:ea typeface="Trebuchet MS" pitchFamily="34" charset="-122"/>
                 <a:cs typeface="Trebuchet MS" pitchFamily="34" charset="-120"/>
               </a:rPr>
-              <a:t>homeland</a:t>
+              <a:t>landing</a:t>
             </a:r>
             <a:endParaRPr lang="en-US" sz="1200" dirty="0"/>
           </a:p>
@@ -35006,7 +34703,7 @@
                 <a:ea typeface="Trebuchet MS" pitchFamily="34" charset="-122"/>
                 <a:cs typeface="Trebuchet MS" pitchFamily="34" charset="-120"/>
               </a:rPr>
-              <a:t>farmland</a:t>
+              <a:t>lowland</a:t>
             </a:r>
             <a:endParaRPr lang="en-US" sz="1200" dirty="0"/>
           </a:p>
@@ -35072,7 +34769,7 @@
                 <a:ea typeface="Trebuchet MS" pitchFamily="34" charset="-122"/>
                 <a:cs typeface="Trebuchet MS" pitchFamily="34" charset="-120"/>
               </a:rPr>
-              <a:t>outlandish</a:t>
+              <a:t>farmland</a:t>
             </a:r>
             <a:endParaRPr lang="en-US" sz="1200" dirty="0"/>
           </a:p>
@@ -35364,7 +35061,7 @@
                 <a:ea typeface="Calibri" pitchFamily="34" charset="-122"/>
                 <a:cs typeface="Calibri" pitchFamily="34" charset="-120"/>
               </a:rPr>
-              <a:t>Word Labs  •  wordlabs.app  •  Root: 'land' = earth, ground, territory</a:t>
+              <a:t>Word Labs  •  wordlabs.app  •  Root: 'land' = ground, earth, territory</a:t>
             </a:r>
             <a:endParaRPr lang="en-US" sz="800" dirty="0"/>
           </a:p>
@@ -35528,7 +35225,7 @@
                 <a:ea typeface="Calibri" pitchFamily="34" charset="-122"/>
                 <a:cs typeface="Calibri" pitchFamily="34" charset="-120"/>
               </a:rPr>
-              <a:t>The core part of a word carrying its basic meaning. For example, 'land' means 'earth, ground, territory'.</a:t>
+              <a:t>The core part of a word carrying its basic meaning. For example, 'land' means 'ground, earth, territory'.</a:t>
             </a:r>
             <a:endParaRPr lang="en-US" sz="1350" dirty="0"/>
           </a:p>
@@ -36148,7 +35845,7 @@
                 <a:ea typeface="Calibri" pitchFamily="34" charset="-122"/>
                 <a:cs typeface="Calibri" pitchFamily="34" charset="-120"/>
               </a:rPr>
-              <a:t>Word Labs  •  wordlabs.app  •  Root: 'land' = earth, ground, territory</a:t>
+              <a:t>Word Labs  •  wordlabs.app  •  Root: 'land' = ground, earth, territory</a:t>
             </a:r>
             <a:endParaRPr lang="en-US" sz="800" dirty="0"/>
           </a:p>
@@ -36260,7 +35957,7 @@
                 <a:ea typeface="Calibri" pitchFamily="34" charset="-122"/>
                 <a:cs typeface="Calibri" pitchFamily="34" charset="-120"/>
               </a:rPr>
-              <a:t>1.  The word 'landmark' contains the root 'land' meaning ground or territory.</a:t>
+              <a:t>1.  The word 'landscape' contains the root 'land'.</a:t>
             </a:r>
             <a:endParaRPr lang="en-US" sz="1300" dirty="0"/>
           </a:p>
@@ -36399,7 +36096,7 @@
                 <a:ea typeface="Calibri" pitchFamily="34" charset="-122"/>
                 <a:cs typeface="Calibri" pitchFamily="34" charset="-120"/>
               </a:rPr>
-              <a:t>2.  The root 'land' comes from ancient Greek.</a:t>
+              <a:t>2.  The morpheme 'land' can be found in the word 'landmark'.</a:t>
             </a:r>
             <a:endParaRPr lang="en-US" sz="1300" dirty="0"/>
           </a:p>
@@ -36422,11 +36119,11 @@
             </a:avLst>
           </a:prstGeom>
           <a:solidFill>
-            <a:srgbClr val="FEE2E2"/>
-          </a:solidFill>
-          <a:ln w="12700">
-            <a:solidFill>
-              <a:srgbClr val="DC2626"/>
+            <a:srgbClr val="DCFCE7"/>
+          </a:solidFill>
+          <a:ln w="12700">
+            <a:solidFill>
+              <a:srgbClr val="16A34A"/>
             </a:solidFill>
             <a:prstDash val="solid"/>
           </a:ln>
@@ -36459,13 +36156,13 @@
             <a:r>
               <a:rPr lang="en-US" sz="1100" b="1" dirty="0">
                 <a:solidFill>
-                  <a:srgbClr val="DC2626"/>
+                  <a:srgbClr val="16A34A"/>
                 </a:solidFill>
                 <a:latin typeface="Trebuchet MS" pitchFamily="34" charset="0"/>
                 <a:ea typeface="Trebuchet MS" pitchFamily="34" charset="-122"/>
                 <a:cs typeface="Trebuchet MS" pitchFamily="34" charset="-120"/>
               </a:rPr>
-              <a:t>FALSE</a:t>
+              <a:t>TRUE</a:t>
             </a:r>
             <a:endParaRPr lang="en-US" sz="1100" dirty="0"/>
           </a:p>
@@ -36538,7 +36235,7 @@
                 <a:ea typeface="Calibri" pitchFamily="34" charset="-122"/>
                 <a:cs typeface="Calibri" pitchFamily="34" charset="-120"/>
               </a:rPr>
-              <a:t>3.  The word 'landscape' uses 'land' as its base morpheme.</a:t>
+              <a:t>3.  The word 'landing' contains the root 'land' plus the suffix '-ing'.</a:t>
             </a:r>
             <a:endParaRPr lang="en-US" sz="1300" dirty="0"/>
           </a:p>
@@ -36677,7 +36374,7 @@
                 <a:ea typeface="Calibri" pitchFamily="34" charset="-122"/>
                 <a:cs typeface="Calibri" pitchFamily="34" charset="-120"/>
               </a:rPr>
-              <a:t>4.  A 'homeland' is a place that someone comes from or belongs to.</a:t>
+              <a:t>4.  The word 'planet' contains the morpheme 'land'.</a:t>
             </a:r>
             <a:endParaRPr lang="en-US" sz="1300" dirty="0"/>
           </a:p>
@@ -36700,11 +36397,11 @@
             </a:avLst>
           </a:prstGeom>
           <a:solidFill>
-            <a:srgbClr val="DCFCE7"/>
-          </a:solidFill>
-          <a:ln w="12700">
-            <a:solidFill>
-              <a:srgbClr val="16A34A"/>
+            <a:srgbClr val="FEE2E2"/>
+          </a:solidFill>
+          <a:ln w="12700">
+            <a:solidFill>
+              <a:srgbClr val="DC2626"/>
             </a:solidFill>
             <a:prstDash val="solid"/>
           </a:ln>
@@ -36737,13 +36434,13 @@
             <a:r>
               <a:rPr lang="en-US" sz="1100" b="1" dirty="0">
                 <a:solidFill>
-                  <a:srgbClr val="16A34A"/>
+                  <a:srgbClr val="DC2626"/>
                 </a:solidFill>
                 <a:latin typeface="Trebuchet MS" pitchFamily="34" charset="0"/>
                 <a:ea typeface="Trebuchet MS" pitchFamily="34" charset="-122"/>
                 <a:cs typeface="Trebuchet MS" pitchFamily="34" charset="-120"/>
               </a:rPr>
-              <a:t>TRUE</a:t>
+              <a:t>FALSE</a:t>
             </a:r>
             <a:endParaRPr lang="en-US" sz="1100" dirty="0"/>
           </a:p>
@@ -36816,7 +36513,7 @@
                 <a:ea typeface="Calibri" pitchFamily="34" charset="-122"/>
                 <a:cs typeface="Calibri" pitchFamily="34" charset="-120"/>
               </a:rPr>
-              <a:t>5.  The prefix 'over' in 'overland' means under or beneath.</a:t>
+              <a:t>5.  The morpheme 'land' comes from a Greek word meaning water.</a:t>
             </a:r>
             <a:endParaRPr lang="en-US" sz="1300" dirty="0"/>
           </a:p>
@@ -37174,7 +36871,7 @@
                 <a:ea typeface="Calibri" pitchFamily="34" charset="-122"/>
                 <a:cs typeface="Calibri" pitchFamily="34" charset="-120"/>
               </a:rPr>
-              <a:t>Word Labs  •  wordlabs.app  •  Root: 'land' = earth, ground, territory</a:t>
+              <a:t>Word Labs  •  wordlabs.app  •  Root: 'land' = ground, earth, territory</a:t>
             </a:r>
             <a:endParaRPr lang="en-US" sz="800" dirty="0"/>
           </a:p>
@@ -37311,7 +37008,7 @@
                 <a:ea typeface="Trebuchet MS" pitchFamily="34" charset="-122"/>
                 <a:cs typeface="Trebuchet MS" pitchFamily="34" charset="-120"/>
               </a:rPr>
-              <a:t>earth, ground, territory</a:t>
+              <a:t>ground, earth, territory</a:t>
             </a:r>
             <a:endParaRPr lang="en-US" sz="2000" dirty="0"/>
           </a:p>
@@ -37350,7 +37047,7 @@
                 <a:ea typeface="Calibri" pitchFamily="34" charset="-122"/>
                 <a:cs typeface="Calibri" pitchFamily="34" charset="-120"/>
               </a:rPr>
-              <a:t>Origin: Old English: land</a:t>
+              <a:t>Origin: Latin: landa</a:t>
             </a:r>
             <a:endParaRPr lang="en-US" sz="1100" dirty="0"/>
           </a:p>
@@ -37455,7 +37152,7 @@
                 <a:ea typeface="Trebuchet MS" pitchFamily="34" charset="-122"/>
                 <a:cs typeface="Trebuchet MS" pitchFamily="34" charset="-120"/>
               </a:rPr>
-              <a:t>landing</a:t>
+              <a:t>landlord</a:t>
             </a:r>
             <a:endParaRPr lang="en-US" sz="1300" dirty="0"/>
           </a:p>
@@ -37521,7 +37218,7 @@
                 <a:ea typeface="Trebuchet MS" pitchFamily="34" charset="-122"/>
                 <a:cs typeface="Trebuchet MS" pitchFamily="34" charset="-120"/>
               </a:rPr>
-              <a:t>landlord</a:t>
+              <a:t>landmark</a:t>
             </a:r>
             <a:endParaRPr lang="en-US" sz="1300" dirty="0"/>
           </a:p>
@@ -37587,7 +37284,7 @@
                 <a:ea typeface="Trebuchet MS" pitchFamily="34" charset="-122"/>
                 <a:cs typeface="Trebuchet MS" pitchFamily="34" charset="-120"/>
               </a:rPr>
-              <a:t>landmark</a:t>
+              <a:t>landscape</a:t>
             </a:r>
             <a:endParaRPr lang="en-US" sz="1300" dirty="0"/>
           </a:p>
@@ -37653,7 +37350,7 @@
                 <a:ea typeface="Trebuchet MS" pitchFamily="34" charset="-122"/>
                 <a:cs typeface="Trebuchet MS" pitchFamily="34" charset="-120"/>
               </a:rPr>
-              <a:t>landscape</a:t>
+              <a:t>overland</a:t>
             </a:r>
             <a:endParaRPr lang="en-US" sz="1300" dirty="0"/>
           </a:p>
@@ -37719,7 +37416,7 @@
                 <a:ea typeface="Trebuchet MS" pitchFamily="34" charset="-122"/>
                 <a:cs typeface="Trebuchet MS" pitchFamily="34" charset="-120"/>
               </a:rPr>
-              <a:t>overland</a:t>
+              <a:t>upland</a:t>
             </a:r>
             <a:endParaRPr lang="en-US" sz="1300" dirty="0"/>
           </a:p>
@@ -37785,7 +37482,7 @@
                 <a:ea typeface="Trebuchet MS" pitchFamily="34" charset="-122"/>
                 <a:cs typeface="Trebuchet MS" pitchFamily="34" charset="-120"/>
               </a:rPr>
-              <a:t>homeland</a:t>
+              <a:t>landing</a:t>
             </a:r>
             <a:endParaRPr lang="en-US" sz="1300" dirty="0"/>
           </a:p>
@@ -37851,7 +37548,7 @@
                 <a:ea typeface="Trebuchet MS" pitchFamily="34" charset="-122"/>
                 <a:cs typeface="Trebuchet MS" pitchFamily="34" charset="-120"/>
               </a:rPr>
-              <a:t>farmland</a:t>
+              <a:t>lowland</a:t>
             </a:r>
             <a:endParaRPr lang="en-US" sz="1300" dirty="0"/>
           </a:p>
@@ -38143,7 +37840,7 @@
                 <a:ea typeface="Calibri" pitchFamily="34" charset="-122"/>
                 <a:cs typeface="Calibri" pitchFamily="34" charset="-120"/>
               </a:rPr>
-              <a:t>Word Labs  •  wordlabs.app  •  Root: 'land' = earth, ground, territory</a:t>
+              <a:t>Word Labs  •  wordlabs.app  •  Root: 'land' = ground, earth, territory</a:t>
             </a:r>
             <a:endParaRPr lang="en-US" sz="800" dirty="0"/>
           </a:p>
@@ -38572,7 +38269,7 @@
                 <a:ea typeface="Trebuchet MS" pitchFamily="34" charset="-122"/>
                 <a:cs typeface="Trebuchet MS" pitchFamily="34" charset="-120"/>
               </a:rPr>
-              <a:t>-ing</a:t>
+              <a:t>-ed</a:t>
             </a:r>
             <a:endParaRPr lang="en-US" sz="1300" dirty="0"/>
           </a:p>
@@ -38636,7 +38333,7 @@
                 <a:ea typeface="Trebuchet MS" pitchFamily="34" charset="-122"/>
                 <a:cs typeface="Trebuchet MS" pitchFamily="34" charset="-120"/>
               </a:rPr>
-              <a:t>farm-</a:t>
+              <a:t>out-</a:t>
             </a:r>
             <a:endParaRPr lang="en-US" sz="1300" dirty="0"/>
           </a:p>
@@ -38725,7 +38422,7 @@
                 <a:ea typeface="Trebuchet MS" pitchFamily="34" charset="-122"/>
                 <a:cs typeface="Trebuchet MS" pitchFamily="34" charset="-120"/>
               </a:rPr>
-              <a:t>-ed</a:t>
+              <a:t>-ing</a:t>
             </a:r>
             <a:endParaRPr lang="en-US" sz="1300" dirty="0"/>
           </a:p>
@@ -38789,7 +38486,7 @@
                 <a:ea typeface="Trebuchet MS" pitchFamily="34" charset="-122"/>
                 <a:cs typeface="Trebuchet MS" pitchFamily="34" charset="-120"/>
               </a:rPr>
-              <a:t>home-</a:t>
+              <a:t>up-</a:t>
             </a:r>
             <a:endParaRPr lang="en-US" sz="1300" dirty="0"/>
           </a:p>
@@ -38942,7 +38639,7 @@
                 <a:ea typeface="Trebuchet MS" pitchFamily="34" charset="-122"/>
                 <a:cs typeface="Trebuchet MS" pitchFamily="34" charset="-120"/>
               </a:rPr>
-              <a:t>out-</a:t>
+              <a:t>waste-</a:t>
             </a:r>
             <a:endParaRPr lang="en-US" sz="1300" dirty="0"/>
           </a:p>
@@ -39095,7 +38792,7 @@
                 <a:ea typeface="Trebuchet MS" pitchFamily="34" charset="-122"/>
                 <a:cs typeface="Trebuchet MS" pitchFamily="34" charset="-120"/>
               </a:rPr>
-              <a:t>in-</a:t>
+              <a:t>farm-</a:t>
             </a:r>
             <a:endParaRPr lang="en-US" sz="1300" dirty="0"/>
           </a:p>
@@ -39462,7 +39159,7 @@
         <p:spPr>
           <a:xfrm>
             <a:off x="4599432" y="4178808"/>
-            <a:ext cx="950976" cy="420624"/>
+            <a:ext cx="822960" cy="420624"/>
           </a:xfrm>
           <a:prstGeom prst="rect">
             <a:avLst>
@@ -39496,7 +39193,7 @@
         <p:spPr>
           <a:xfrm>
             <a:off x="4599432" y="4178808"/>
-            <a:ext cx="950976" cy="420624"/>
+            <a:ext cx="822960" cy="420624"/>
           </a:xfrm>
           <a:prstGeom prst="rect">
             <a:avLst/>
@@ -39520,7 +39217,7 @@
                 <a:ea typeface="Trebuchet MS" pitchFamily="34" charset="-122"/>
                 <a:cs typeface="Trebuchet MS" pitchFamily="34" charset="-120"/>
               </a:rPr>
-              <a:t>-ing</a:t>
+              <a:t>-ed</a:t>
             </a:r>
             <a:endParaRPr lang="en-US" sz="1300" dirty="0"/>
           </a:p>
@@ -39534,7 +39231,7 @@
         </p:nvSpPr>
         <p:spPr>
           <a:xfrm>
-            <a:off x="5623560" y="4178808"/>
+            <a:off x="5495544" y="4178808"/>
             <a:ext cx="365760" cy="420624"/>
           </a:xfrm>
           <a:prstGeom prst="rect">
@@ -39573,7 +39270,7 @@
         </p:nvSpPr>
         <p:spPr>
           <a:xfrm>
-            <a:off x="6035040" y="4178808"/>
+            <a:off x="5907024" y="4178808"/>
             <a:ext cx="2194560" cy="420624"/>
           </a:xfrm>
           <a:prstGeom prst="rect">
@@ -39600,7 +39297,7 @@
         </p:nvSpPr>
         <p:spPr>
           <a:xfrm>
-            <a:off x="6035040" y="4178808"/>
+            <a:off x="5907024" y="4178808"/>
             <a:ext cx="2194560" cy="420624"/>
           </a:xfrm>
           <a:prstGeom prst="rect">
@@ -39625,7 +39322,7 @@
                 <a:ea typeface="Trebuchet MS" pitchFamily="34" charset="-122"/>
                 <a:cs typeface="Trebuchet MS" pitchFamily="34" charset="-120"/>
               </a:rPr>
-              <a:t>landing</a:t>
+              <a:t>landlord</a:t>
             </a:r>
             <a:endParaRPr lang="en-US" sz="1400" dirty="0"/>
           </a:p>
@@ -39917,7 +39614,7 @@
                 <a:ea typeface="Calibri" pitchFamily="34" charset="-122"/>
                 <a:cs typeface="Calibri" pitchFamily="34" charset="-120"/>
               </a:rPr>
-              <a:t>Word Labs  •  wordlabs.app  •  Root: 'land' = earth, ground, territory</a:t>
+              <a:t>Word Labs  •  wordlabs.app  •  Root: 'land' = ground, earth, territory</a:t>
             </a:r>
             <a:endParaRPr lang="en-US" sz="800" dirty="0"/>
           </a:p>
@@ -40029,7 +39726,7 @@
                 <a:ea typeface="Trebuchet MS" pitchFamily="34" charset="-122"/>
                 <a:cs typeface="Trebuchet MS" pitchFamily="34" charset="-120"/>
               </a:rPr>
-              <a:t>landing</a:t>
+              <a:t>landlord</a:t>
             </a:r>
             <a:endParaRPr lang="en-US" sz="1200" dirty="0"/>
           </a:p>
@@ -40095,7 +39792,7 @@
                 <a:ea typeface="Calibri" pitchFamily="34" charset="-122"/>
                 <a:cs typeface="Calibri" pitchFamily="34" charset="-120"/>
               </a:rPr>
-              <a:t>The act of coming down and touching the ground, like a plane landing at an airport.</a:t>
+              <a:t>A person who owns a building or land and rents it to other people.</a:t>
             </a:r>
             <a:endParaRPr lang="en-US" sz="1200" dirty="0"/>
           </a:p>
@@ -40168,7 +39865,7 @@
                 <a:ea typeface="Trebuchet MS" pitchFamily="34" charset="-122"/>
                 <a:cs typeface="Trebuchet MS" pitchFamily="34" charset="-120"/>
               </a:rPr>
-              <a:t>landlord</a:t>
+              <a:t>landmark</a:t>
             </a:r>
             <a:endParaRPr lang="en-US" sz="1200" dirty="0"/>
           </a:p>
@@ -40234,7 +39931,7 @@
                 <a:ea typeface="Calibri" pitchFamily="34" charset="-122"/>
                 <a:cs typeface="Calibri" pitchFamily="34" charset="-120"/>
               </a:rPr>
-              <a:t>Land that is used for growing crops or keeping animals on a farm.</a:t>
+              <a:t>A flat area of land that is low in height compared to the land around it.</a:t>
             </a:r>
             <a:endParaRPr lang="en-US" sz="1200" dirty="0"/>
           </a:p>
@@ -40307,7 +40004,7 @@
                 <a:ea typeface="Trebuchet MS" pitchFamily="34" charset="-122"/>
                 <a:cs typeface="Trebuchet MS" pitchFamily="34" charset="-120"/>
               </a:rPr>
-              <a:t>landmark</a:t>
+              <a:t>landscape</a:t>
             </a:r>
             <a:endParaRPr lang="en-US" sz="1200" dirty="0"/>
           </a:p>
@@ -40373,7 +40070,7 @@
                 <a:ea typeface="Calibri" pitchFamily="34" charset="-122"/>
                 <a:cs typeface="Calibri" pitchFamily="34" charset="-120"/>
               </a:rPr>
-              <a:t>A well-known place or object that helps people find their way or remember an area.</a:t>
+              <a:t>Everything you can see when you look across an area of land, like hills, trees and fields.</a:t>
             </a:r>
             <a:endParaRPr lang="en-US" sz="1200" dirty="0"/>
           </a:p>
@@ -40446,7 +40143,7 @@
                 <a:ea typeface="Trebuchet MS" pitchFamily="34" charset="-122"/>
                 <a:cs typeface="Trebuchet MS" pitchFamily="34" charset="-120"/>
               </a:rPr>
-              <a:t>landscape</a:t>
+              <a:t>overland</a:t>
             </a:r>
             <a:endParaRPr lang="en-US" sz="1200" dirty="0"/>
           </a:p>
@@ -40512,7 +40209,7 @@
                 <a:ea typeface="Calibri" pitchFamily="34" charset="-122"/>
                 <a:cs typeface="Calibri" pitchFamily="34" charset="-120"/>
               </a:rPr>
-              <a:t>Travelling across land rather than by sea or air.</a:t>
+              <a:t>An area of high ground or hills far from the sea.</a:t>
             </a:r>
             <a:endParaRPr lang="en-US" sz="1200" dirty="0"/>
           </a:p>
@@ -40585,7 +40282,7 @@
                 <a:ea typeface="Trebuchet MS" pitchFamily="34" charset="-122"/>
                 <a:cs typeface="Trebuchet MS" pitchFamily="34" charset="-120"/>
               </a:rPr>
-              <a:t>overland</a:t>
+              <a:t>upland</a:t>
             </a:r>
             <a:endParaRPr lang="en-US" sz="1200" dirty="0"/>
           </a:p>
@@ -40651,7 +40348,7 @@
                 <a:ea typeface="Calibri" pitchFamily="34" charset="-122"/>
                 <a:cs typeface="Calibri" pitchFamily="34" charset="-120"/>
               </a:rPr>
-              <a:t>A wide view of an area of land, including hills, trees, rivers, and other features.</a:t>
+              <a:t>Travelling across land rather than by sea or air.</a:t>
             </a:r>
             <a:endParaRPr lang="en-US" sz="1200" dirty="0"/>
           </a:p>
@@ -40724,7 +40421,7 @@
                 <a:ea typeface="Trebuchet MS" pitchFamily="34" charset="-122"/>
                 <a:cs typeface="Trebuchet MS" pitchFamily="34" charset="-120"/>
               </a:rPr>
-              <a:t>homeland</a:t>
+              <a:t>landing</a:t>
             </a:r>
             <a:endParaRPr lang="en-US" sz="1200" dirty="0"/>
           </a:p>
@@ -40790,7 +40487,7 @@
                 <a:ea typeface="Calibri" pitchFamily="34" charset="-122"/>
                 <a:cs typeface="Calibri" pitchFamily="34" charset="-120"/>
               </a:rPr>
-              <a:t>The country or place where a person was born or grew up.</a:t>
+              <a:t>The act of coming down and touching the ground, like a plane landing at an airport.</a:t>
             </a:r>
             <a:endParaRPr lang="en-US" sz="1200" dirty="0"/>
           </a:p>
@@ -40863,7 +40560,7 @@
                 <a:ea typeface="Trebuchet MS" pitchFamily="34" charset="-122"/>
                 <a:cs typeface="Trebuchet MS" pitchFamily="34" charset="-120"/>
               </a:rPr>
-              <a:t>farmland</a:t>
+              <a:t>lowland</a:t>
             </a:r>
             <a:endParaRPr lang="en-US" sz="1200" dirty="0"/>
           </a:p>
@@ -40929,7 +40626,7 @@
                 <a:ea typeface="Calibri" pitchFamily="34" charset="-122"/>
                 <a:cs typeface="Calibri" pitchFamily="34" charset="-120"/>
               </a:rPr>
-              <a:t>A person who owns a building or land and rents it out to other people.</a:t>
+              <a:t>A well-known feature of the landscape, like a building or hill, that helps people find their way.</a:t>
             </a:r>
             <a:endParaRPr lang="en-US" sz="1200" dirty="0"/>
           </a:p>
@@ -41221,7 +40918,7 @@
                 <a:ea typeface="Calibri" pitchFamily="34" charset="-122"/>
                 <a:cs typeface="Calibri" pitchFamily="34" charset="-120"/>
               </a:rPr>
-              <a:t>Word Labs  •  wordlabs.app  •  Root: 'land' = earth, ground, territory</a:t>
+              <a:t>Word Labs  •  wordlabs.app  •  Root: 'land' = ground, earth, territory</a:t>
             </a:r>
             <a:endParaRPr lang="en-US" sz="800" dirty="0"/>
           </a:p>
@@ -41424,7 +41121,7 @@
                 <a:ea typeface="Calibri" pitchFamily="34" charset="-122"/>
                 <a:cs typeface="Calibri" pitchFamily="34" charset="-120"/>
               </a:rPr>
-              <a:t>The pilot made a smooth landing on the runway after a long flight from Sydney.</a:t>
+              <a:t>The pilot made a smooth landing on the runway after the long flight from Sydney.</a:t>
             </a:r>
             <a:endParaRPr lang="en-US" sz="1500" dirty="0"/>
           </a:p>
@@ -41588,7 +41285,7 @@
                 <a:ea typeface="Calibri" pitchFamily="34" charset="-122"/>
                 <a:cs typeface="Calibri" pitchFamily="34" charset="-120"/>
               </a:rPr>
-              <a:t>Uluru is one of Australia's most famous landmarks and is very important to the Anangu people.</a:t>
+              <a:t>We drove overland through the outback to reach the remote cattle station.</a:t>
             </a:r>
             <a:endParaRPr lang="en-US" sz="1500" dirty="0"/>
           </a:p>
@@ -41752,7 +41449,7 @@
                 <a:ea typeface="Calibri" pitchFamily="34" charset="-122"/>
                 <a:cs typeface="Calibri" pitchFamily="34" charset="-120"/>
               </a:rPr>
-              <a:t>The farmland stretched for kilometres in every direction, covered in golden wheat.</a:t>
+              <a:t>The old lighthouse is an important landmark that sailors have used for hundreds of years.</a:t>
             </a:r>
             <a:endParaRPr lang="en-US" sz="1500" dirty="0"/>
           </a:p>

--- a/output/wordlabs-land-3day.pptx
+++ b/output/wordlabs-land-3day.pptx
@@ -4240,7 +4240,7 @@
                 <a:ea typeface="Calibri" pitchFamily="34" charset="-122"/>
                 <a:cs typeface="Calibri" pitchFamily="34" charset="-120"/>
               </a:rPr>
-              <a:t>"ground, earth, territory"</a:t>
+              <a:t>"an area of ground; to arrive"</a:t>
             </a:r>
             <a:endParaRPr lang="en-US" sz="2200" dirty="0"/>
           </a:p>
@@ -4279,7 +4279,7 @@
                 <a:ea typeface="Calibri" pitchFamily="34" charset="-122"/>
                 <a:cs typeface="Calibri" pitchFamily="34" charset="-120"/>
               </a:rPr>
-              <a:t>Origin: Latin: landa</a:t>
+              <a:t>Origin: Anglo-Saxon (Old English) root</a:t>
             </a:r>
             <a:endParaRPr lang="en-US" sz="1300" dirty="0"/>
           </a:p>
@@ -5288,7 +5288,7 @@
                 <a:ea typeface="Calibri" pitchFamily="34" charset="-122"/>
                 <a:cs typeface="Calibri" pitchFamily="34" charset="-120"/>
               </a:rPr>
-              <a:t>Word Labs  •  wordlabs.app  •  Root: 'land' = ground, earth, territory</a:t>
+              <a:t>Word Labs  •  wordlabs.app  •  Root: 'land' = an area of ground; to arrive</a:t>
             </a:r>
             <a:endParaRPr lang="en-US" sz="800" dirty="0"/>
           </a:p>
@@ -5928,7 +5928,7 @@
                 <a:ea typeface="Calibri" pitchFamily="34" charset="-122"/>
                 <a:cs typeface="Calibri" pitchFamily="34" charset="-120"/>
               </a:rPr>
-              <a:t>Word Labs  •  wordlabs.app  •  Root: 'land' = ground, earth, territory</a:t>
+              <a:t>Word Labs  •  wordlabs.app  •  Root: 'land' = an area of ground; to arrive</a:t>
             </a:r>
             <a:endParaRPr lang="en-US" sz="800" dirty="0"/>
           </a:p>
@@ -6040,7 +6040,7 @@
                 <a:ea typeface="Calibri" pitchFamily="34" charset="-122"/>
                 <a:cs typeface="Calibri" pitchFamily="34" charset="-120"/>
               </a:rPr>
-              <a:t>The famous </a:t>
+              <a:t>The pilot made a smooth </a:t>
             </a:r>
             <a:pPr algn="l" indent="0" marL="0">
               <a:buNone/>
@@ -6057,7 +6057,7 @@
                 <a:ea typeface="Calibri" pitchFamily="34" charset="-122"/>
                 <a:cs typeface="Calibri" pitchFamily="34" charset="-120"/>
               </a:rPr>
-              <a:t>landmark</a:t>
+              <a:t>landing</a:t>
             </a:r>
             <a:pPr algn="l" indent="0" marL="0">
               <a:buNone/>
@@ -6071,7 +6071,7 @@
                 <a:ea typeface="Calibri" pitchFamily="34" charset="-122"/>
                 <a:cs typeface="Calibri" pitchFamily="34" charset="-120"/>
               </a:rPr>
-              <a:t> stood tall on the </a:t>
+              <a:t> just as the storm began. The </a:t>
             </a:r>
             <a:pPr algn="l" indent="0" marL="0">
               <a:buNone/>
@@ -6088,7 +6088,7 @@
                 <a:ea typeface="Calibri" pitchFamily="34" charset="-122"/>
                 <a:cs typeface="Calibri" pitchFamily="34" charset="-120"/>
               </a:rPr>
-              <a:t>farmland</a:t>
+              <a:t>midland</a:t>
             </a:r>
             <a:pPr algn="l" indent="0" marL="0">
               <a:buNone/>
@@ -6102,7 +6102,7 @@
                 <a:ea typeface="Calibri" pitchFamily="34" charset="-122"/>
                 <a:cs typeface="Calibri" pitchFamily="34" charset="-120"/>
               </a:rPr>
-              <a:t>, where sheep had grazed for generations.</a:t>
+              <a:t> town was far from the coast, surrounded by fields and hills.</a:t>
             </a:r>
             <a:endParaRPr lang="en-US" sz="1800" dirty="0"/>
           </a:p>
@@ -6257,7 +6257,7 @@
                 <a:ea typeface="Trebuchet MS" pitchFamily="34" charset="-122"/>
                 <a:cs typeface="Trebuchet MS" pitchFamily="34" charset="-120"/>
               </a:rPr>
-              <a:t>landmark</a:t>
+              <a:t>landing</a:t>
             </a:r>
             <a:endParaRPr lang="en-US" sz="1400" dirty="0"/>
           </a:p>
@@ -6385,7 +6385,7 @@
                 <a:ea typeface="Trebuchet MS" pitchFamily="34" charset="-122"/>
                 <a:cs typeface="Trebuchet MS" pitchFamily="34" charset="-120"/>
               </a:rPr>
-              <a:t>farmland</a:t>
+              <a:t>midland</a:t>
             </a:r>
             <a:endParaRPr lang="en-US" sz="1400" dirty="0"/>
           </a:p>
@@ -6716,7 +6716,7 @@
                 <a:ea typeface="Calibri" pitchFamily="34" charset="-122"/>
                 <a:cs typeface="Calibri" pitchFamily="34" charset="-120"/>
               </a:rPr>
-              <a:t>Word Labs  •  wordlabs.app  •  Root: 'land' = ground, earth, territory</a:t>
+              <a:t>Word Labs  •  wordlabs.app  •  Root: 'land' = an area of ground; to arrive</a:t>
             </a:r>
             <a:endParaRPr lang="en-US" sz="800" dirty="0"/>
           </a:p>
@@ -6855,7 +6855,7 @@
                 <a:ea typeface="Trebuchet MS" pitchFamily="34" charset="-122"/>
                 <a:cs typeface="Trebuchet MS" pitchFamily="34" charset="-120"/>
               </a:rPr>
-              <a:t>landmark</a:t>
+              <a:t>landing</a:t>
             </a:r>
             <a:endParaRPr lang="en-US" sz="2800" dirty="0"/>
           </a:p>
@@ -7543,7 +7543,7 @@
                 <a:ea typeface="Calibri" pitchFamily="34" charset="-122"/>
                 <a:cs typeface="Calibri" pitchFamily="34" charset="-120"/>
               </a:rPr>
-              <a:t>Word Labs  •  wordlabs.app  •  Root: 'land' = ground, earth, territory</a:t>
+              <a:t>Word Labs  •  wordlabs.app  •  Root: 'land' = an area of ground; to arrive</a:t>
             </a:r>
             <a:endParaRPr lang="en-US" sz="800" dirty="0"/>
           </a:p>
@@ -7682,7 +7682,7 @@
                 <a:ea typeface="Trebuchet MS" pitchFamily="34" charset="-122"/>
                 <a:cs typeface="Trebuchet MS" pitchFamily="34" charset="-120"/>
               </a:rPr>
-              <a:t>landmark</a:t>
+              <a:t>landing</a:t>
             </a:r>
             <a:endParaRPr lang="en-US" sz="2800" dirty="0"/>
           </a:p>
@@ -7860,7 +7860,7 @@
                 <a:ea typeface="Calibri" pitchFamily="34" charset="-122"/>
                 <a:cs typeface="Calibri" pitchFamily="34" charset="-120"/>
               </a:rPr>
-              <a:t>ground, earth, territory</a:t>
+              <a:t>an area of ground; to arrive</a:t>
             </a:r>
             <a:endParaRPr lang="en-US" sz="850" dirty="0"/>
           </a:p>
@@ -7933,7 +7933,7 @@
                 <a:ea typeface="Trebuchet MS" pitchFamily="34" charset="-122"/>
                 <a:cs typeface="Trebuchet MS" pitchFamily="34" charset="-120"/>
               </a:rPr>
-              <a:t>mark</a:t>
+              <a:t>ing</a:t>
             </a:r>
             <a:endParaRPr lang="en-US" sz="1300" dirty="0"/>
           </a:p>
@@ -7972,7 +7972,7 @@
                 <a:ea typeface="Calibri" pitchFamily="34" charset="-122"/>
                 <a:cs typeface="Calibri" pitchFamily="34" charset="-120"/>
               </a:rPr>
-              <a:t>a sign or feature that stands out</a:t>
+              <a:t>happening now</a:t>
             </a:r>
             <a:endParaRPr lang="en-US" sz="850" dirty="0"/>
           </a:p>
@@ -8528,7 +8528,7 @@
                 <a:ea typeface="Calibri" pitchFamily="34" charset="-122"/>
                 <a:cs typeface="Calibri" pitchFamily="34" charset="-120"/>
               </a:rPr>
-              <a:t>Word Labs  •  wordlabs.app  •  Root: 'land' = ground, earth, territory</a:t>
+              <a:t>Word Labs  •  wordlabs.app  •  Root: 'land' = an area of ground; to arrive</a:t>
             </a:r>
             <a:endParaRPr lang="en-US" sz="800" dirty="0"/>
           </a:p>
@@ -8667,7 +8667,7 @@
                 <a:ea typeface="Trebuchet MS" pitchFamily="34" charset="-122"/>
                 <a:cs typeface="Trebuchet MS" pitchFamily="34" charset="-120"/>
               </a:rPr>
-              <a:t>landmark</a:t>
+              <a:t>landing</a:t>
             </a:r>
             <a:endParaRPr lang="en-US" sz="2800" dirty="0"/>
           </a:p>
@@ -8845,7 +8845,7 @@
                 <a:ea typeface="Calibri" pitchFamily="34" charset="-122"/>
                 <a:cs typeface="Calibri" pitchFamily="34" charset="-120"/>
               </a:rPr>
-              <a:t>ground, earth, territory</a:t>
+              <a:t>an area of ground; to arrive</a:t>
             </a:r>
             <a:endParaRPr lang="en-US" sz="850" dirty="0"/>
           </a:p>
@@ -8918,7 +8918,7 @@
                 <a:ea typeface="Trebuchet MS" pitchFamily="34" charset="-122"/>
                 <a:cs typeface="Trebuchet MS" pitchFamily="34" charset="-120"/>
               </a:rPr>
-              <a:t>mark</a:t>
+              <a:t>ing</a:t>
             </a:r>
             <a:endParaRPr lang="en-US" sz="1300" dirty="0"/>
           </a:p>
@@ -8957,7 +8957,7 @@
                 <a:ea typeface="Calibri" pitchFamily="34" charset="-122"/>
                 <a:cs typeface="Calibri" pitchFamily="34" charset="-120"/>
               </a:rPr>
-              <a:t>a sign or feature that stands out</a:t>
+              <a:t>happening now</a:t>
             </a:r>
             <a:endParaRPr lang="en-US" sz="850" dirty="0"/>
           </a:p>
@@ -9221,7 +9221,7 @@
                 <a:ea typeface="Trebuchet MS" pitchFamily="34" charset="-122"/>
                 <a:cs typeface="Trebuchet MS" pitchFamily="34" charset="-120"/>
               </a:rPr>
-              <a:t>mark</a:t>
+              <a:t>ing</a:t>
             </a:r>
             <a:endParaRPr lang="en-US" sz="1400" dirty="0"/>
           </a:p>
@@ -9645,7 +9645,7 @@
                 <a:ea typeface="Calibri" pitchFamily="34" charset="-122"/>
                 <a:cs typeface="Calibri" pitchFamily="34" charset="-120"/>
               </a:rPr>
-              <a:t>Word Labs  •  wordlabs.app  •  Root: 'land' = ground, earth, territory</a:t>
+              <a:t>Word Labs  •  wordlabs.app  •  Root: 'land' = an area of ground; to arrive</a:t>
             </a:r>
             <a:endParaRPr lang="en-US" sz="800" dirty="0"/>
           </a:p>
@@ -9784,7 +9784,7 @@
                 <a:ea typeface="Trebuchet MS" pitchFamily="34" charset="-122"/>
                 <a:cs typeface="Trebuchet MS" pitchFamily="34" charset="-120"/>
               </a:rPr>
-              <a:t>landmark</a:t>
+              <a:t>landing</a:t>
             </a:r>
             <a:endParaRPr lang="en-US" sz="2800" dirty="0"/>
           </a:p>
@@ -9962,7 +9962,7 @@
                 <a:ea typeface="Calibri" pitchFamily="34" charset="-122"/>
                 <a:cs typeface="Calibri" pitchFamily="34" charset="-120"/>
               </a:rPr>
-              <a:t>ground, earth, territory</a:t>
+              <a:t>an area of ground; to arrive</a:t>
             </a:r>
             <a:endParaRPr lang="en-US" sz="850" dirty="0"/>
           </a:p>
@@ -10035,7 +10035,7 @@
                 <a:ea typeface="Trebuchet MS" pitchFamily="34" charset="-122"/>
                 <a:cs typeface="Trebuchet MS" pitchFamily="34" charset="-120"/>
               </a:rPr>
-              <a:t>mark</a:t>
+              <a:t>ing</a:t>
             </a:r>
             <a:endParaRPr lang="en-US" sz="1300" dirty="0"/>
           </a:p>
@@ -10074,7 +10074,7 @@
                 <a:ea typeface="Calibri" pitchFamily="34" charset="-122"/>
                 <a:cs typeface="Calibri" pitchFamily="34" charset="-120"/>
               </a:rPr>
-              <a:t>a sign or feature that stands out</a:t>
+              <a:t>happening now</a:t>
             </a:r>
             <a:endParaRPr lang="en-US" sz="850" dirty="0"/>
           </a:p>
@@ -10338,7 +10338,7 @@
                 <a:ea typeface="Trebuchet MS" pitchFamily="34" charset="-122"/>
                 <a:cs typeface="Trebuchet MS" pitchFamily="34" charset="-120"/>
               </a:rPr>
-              <a:t>mark</a:t>
+              <a:t>ing</a:t>
             </a:r>
             <a:endParaRPr lang="en-US" sz="1400" dirty="0"/>
           </a:p>
@@ -10445,7 +10445,7 @@
         </p:nvSpPr>
         <p:spPr>
           <a:xfrm>
-            <a:off x="2124837" y="4169664"/>
+            <a:off x="2254649" y="4169664"/>
             <a:ext cx="685800" cy="475488"/>
           </a:xfrm>
           <a:prstGeom prst="rect">
@@ -10472,7 +10472,7 @@
         </p:nvSpPr>
         <p:spPr>
           <a:xfrm>
-            <a:off x="2124837" y="4169664"/>
+            <a:off x="2254649" y="4169664"/>
             <a:ext cx="685800" cy="475488"/>
           </a:xfrm>
           <a:prstGeom prst="rect">
@@ -10511,7 +10511,7 @@
         </p:nvSpPr>
         <p:spPr>
           <a:xfrm>
-            <a:off x="3033522" y="4169664"/>
+            <a:off x="3293146" y="4169664"/>
             <a:ext cx="685800" cy="475488"/>
           </a:xfrm>
           <a:prstGeom prst="rect">
@@ -10538,7 +10538,7 @@
         </p:nvSpPr>
         <p:spPr>
           <a:xfrm>
-            <a:off x="3033522" y="4169664"/>
+            <a:off x="3293146" y="4169664"/>
             <a:ext cx="685800" cy="475488"/>
           </a:xfrm>
           <a:prstGeom prst="rect">
@@ -10577,7 +10577,7 @@
         </p:nvSpPr>
         <p:spPr>
           <a:xfrm>
-            <a:off x="3942207" y="4169664"/>
+            <a:off x="4331643" y="4169664"/>
             <a:ext cx="685800" cy="475488"/>
           </a:xfrm>
           <a:prstGeom prst="rect">
@@ -10604,7 +10604,7 @@
         </p:nvSpPr>
         <p:spPr>
           <a:xfrm>
-            <a:off x="3942207" y="4169664"/>
+            <a:off x="4331643" y="4169664"/>
             <a:ext cx="685800" cy="475488"/>
           </a:xfrm>
           <a:prstGeom prst="rect">
@@ -10643,7 +10643,7 @@
         </p:nvSpPr>
         <p:spPr>
           <a:xfrm>
-            <a:off x="4850892" y="4169664"/>
+            <a:off x="5370141" y="4169664"/>
             <a:ext cx="685800" cy="475488"/>
           </a:xfrm>
           <a:prstGeom prst="rect">
@@ -10670,7 +10670,7 @@
         </p:nvSpPr>
         <p:spPr>
           <a:xfrm>
-            <a:off x="4850892" y="4169664"/>
+            <a:off x="5370141" y="4169664"/>
             <a:ext cx="685800" cy="475488"/>
           </a:xfrm>
           <a:prstGeom prst="rect">
@@ -10709,7 +10709,7 @@
         </p:nvSpPr>
         <p:spPr>
           <a:xfrm>
-            <a:off x="5759577" y="4169664"/>
+            <a:off x="6408638" y="4169664"/>
             <a:ext cx="685800" cy="475488"/>
           </a:xfrm>
           <a:prstGeom prst="rect">
@@ -10736,7 +10736,7 @@
         </p:nvSpPr>
         <p:spPr>
           <a:xfrm>
-            <a:off x="5759577" y="4169664"/>
+            <a:off x="6408638" y="4169664"/>
             <a:ext cx="685800" cy="475488"/>
           </a:xfrm>
           <a:prstGeom prst="rect">
@@ -10761,7 +10761,7 @@
                 <a:ea typeface="Trebuchet MS" pitchFamily="34" charset="-122"/>
                 <a:cs typeface="Trebuchet MS" pitchFamily="34" charset="-120"/>
               </a:rPr>
-              <a:t>m</a:t>
+              <a:t>i</a:t>
             </a:r>
             <a:endParaRPr lang="en-US" sz="900" dirty="0"/>
           </a:p>
@@ -10775,7 +10775,7 @@
         </p:nvSpPr>
         <p:spPr>
           <a:xfrm>
-            <a:off x="6668262" y="4169664"/>
+            <a:off x="7447135" y="4169664"/>
             <a:ext cx="685800" cy="475488"/>
           </a:xfrm>
           <a:prstGeom prst="rect">
@@ -10802,7 +10802,7 @@
         </p:nvSpPr>
         <p:spPr>
           <a:xfrm>
-            <a:off x="6668262" y="4169664"/>
+            <a:off x="7447135" y="4169664"/>
             <a:ext cx="685800" cy="475488"/>
           </a:xfrm>
           <a:prstGeom prst="rect">
@@ -10827,73 +10827,7 @@
                 <a:ea typeface="Trebuchet MS" pitchFamily="34" charset="-122"/>
                 <a:cs typeface="Trebuchet MS" pitchFamily="34" charset="-120"/>
               </a:rPr>
-              <a:t>ar</a:t>
-            </a:r>
-            <a:endParaRPr lang="en-US" sz="900" dirty="0"/>
-          </a:p>
-        </p:txBody>
-      </p:sp>
-      <p:sp>
-        <p:nvSpPr>
-          <p:cNvPr id="45" name="Shape 43"/>
-          <p:cNvSpPr/>
-          <p:nvPr/>
-        </p:nvSpPr>
-        <p:spPr>
-          <a:xfrm>
-            <a:off x="7576947" y="4169664"/>
-            <a:ext cx="685800" cy="475488"/>
-          </a:xfrm>
-          <a:prstGeom prst="rect">
-            <a:avLst>
-              <a:gd name="adj" fmla="val 7692"/>
-            </a:avLst>
-          </a:prstGeom>
-          <a:solidFill>
-            <a:srgbClr val="FFFFFF"/>
-          </a:solidFill>
-          <a:ln w="12700">
-            <a:solidFill>
-              <a:srgbClr val="DB2777"/>
-            </a:solidFill>
-            <a:prstDash val="solid"/>
-          </a:ln>
-        </p:spPr>
-      </p:sp>
-      <p:sp>
-        <p:nvSpPr>
-          <p:cNvPr id="46" name="Text 44"/>
-          <p:cNvSpPr/>
-          <p:nvPr/>
-        </p:nvSpPr>
-        <p:spPr>
-          <a:xfrm>
-            <a:off x="7576947" y="4169664"/>
-            <a:ext cx="685800" cy="475488"/>
-          </a:xfrm>
-          <a:prstGeom prst="rect">
-            <a:avLst/>
-          </a:prstGeom>
-          <a:noFill/>
-          <a:ln/>
-        </p:spPr>
-        <p:txBody>
-          <a:bodyPr wrap="square" lIns="0" tIns="0" rIns="0" bIns="0" rtlCol="0" anchor="ctr"/>
-          <a:lstStyle/>
-          <a:p>
-            <a:pPr algn="ctr" indent="0" marL="0">
-              <a:buNone/>
-            </a:pPr>
-            <a:r>
-              <a:rPr lang="en-US" sz="900" b="1" dirty="0">
-                <a:solidFill>
-                  <a:srgbClr val="9D174D"/>
-                </a:solidFill>
-                <a:latin typeface="Trebuchet MS" pitchFamily="34" charset="0"/>
-                <a:ea typeface="Trebuchet MS" pitchFamily="34" charset="-122"/>
-                <a:cs typeface="Trebuchet MS" pitchFamily="34" charset="-120"/>
-              </a:rPr>
-              <a:t>k</a:t>
+              <a:t>ng</a:t>
             </a:r>
             <a:endParaRPr lang="en-US" sz="900" dirty="0"/>
           </a:p>
@@ -11185,7 +11119,7 @@
                 <a:ea typeface="Calibri" pitchFamily="34" charset="-122"/>
                 <a:cs typeface="Calibri" pitchFamily="34" charset="-120"/>
               </a:rPr>
-              <a:t>Word Labs  •  wordlabs.app  •  Root: 'land' = ground, earth, territory</a:t>
+              <a:t>Word Labs  •  wordlabs.app  •  Root: 'land' = an area of ground; to arrive</a:t>
             </a:r>
             <a:endParaRPr lang="en-US" sz="800" dirty="0"/>
           </a:p>
@@ -11324,7 +11258,7 @@
                 <a:ea typeface="Trebuchet MS" pitchFamily="34" charset="-122"/>
                 <a:cs typeface="Trebuchet MS" pitchFamily="34" charset="-120"/>
               </a:rPr>
-              <a:t>farmland</a:t>
+              <a:t>midland</a:t>
             </a:r>
             <a:endParaRPr lang="en-US" sz="2800" dirty="0"/>
           </a:p>
@@ -12012,7 +11946,7 @@
                 <a:ea typeface="Calibri" pitchFamily="34" charset="-122"/>
                 <a:cs typeface="Calibri" pitchFamily="34" charset="-120"/>
               </a:rPr>
-              <a:t>Word Labs  •  wordlabs.app  •  Root: 'land' = ground, earth, territory</a:t>
+              <a:t>Word Labs  •  wordlabs.app  •  Root: 'land' = an area of ground; to arrive</a:t>
             </a:r>
             <a:endParaRPr lang="en-US" sz="800" dirty="0"/>
           </a:p>
@@ -12151,7 +12085,7 @@
                 <a:ea typeface="Trebuchet MS" pitchFamily="34" charset="-122"/>
                 <a:cs typeface="Trebuchet MS" pitchFamily="34" charset="-120"/>
               </a:rPr>
-              <a:t>farmland</a:t>
+              <a:t>midland</a:t>
             </a:r>
             <a:endParaRPr lang="en-US" sz="2800" dirty="0"/>
           </a:p>
@@ -12290,7 +12224,7 @@
                 <a:ea typeface="Trebuchet MS" pitchFamily="34" charset="-122"/>
                 <a:cs typeface="Trebuchet MS" pitchFamily="34" charset="-120"/>
               </a:rPr>
-              <a:t>farm</a:t>
+              <a:t>mid</a:t>
             </a:r>
             <a:endParaRPr lang="en-US" sz="1300" dirty="0"/>
           </a:p>
@@ -12329,7 +12263,7 @@
                 <a:ea typeface="Calibri" pitchFamily="34" charset="-122"/>
                 <a:cs typeface="Calibri" pitchFamily="34" charset="-120"/>
               </a:rPr>
-              <a:t>land used to grow food or raise animals</a:t>
+              <a:t>middle</a:t>
             </a:r>
             <a:endParaRPr lang="en-US" sz="850" dirty="0"/>
           </a:p>
@@ -12441,7 +12375,7 @@
                 <a:ea typeface="Calibri" pitchFamily="34" charset="-122"/>
                 <a:cs typeface="Calibri" pitchFamily="34" charset="-120"/>
               </a:rPr>
-              <a:t>ground, earth, territory</a:t>
+              <a:t>an area of ground; to arrive</a:t>
             </a:r>
             <a:endParaRPr lang="en-US" sz="850" dirty="0"/>
           </a:p>
@@ -12997,7 +12931,7 @@
                 <a:ea typeface="Calibri" pitchFamily="34" charset="-122"/>
                 <a:cs typeface="Calibri" pitchFamily="34" charset="-120"/>
               </a:rPr>
-              <a:t>Word Labs  •  wordlabs.app  •  Root: 'land' = ground, earth, territory</a:t>
+              <a:t>Word Labs  •  wordlabs.app  •  Root: 'land' = an area of ground; to arrive</a:t>
             </a:r>
             <a:endParaRPr lang="en-US" sz="800" dirty="0"/>
           </a:p>
@@ -13136,7 +13070,7 @@
                 <a:ea typeface="Trebuchet MS" pitchFamily="34" charset="-122"/>
                 <a:cs typeface="Trebuchet MS" pitchFamily="34" charset="-120"/>
               </a:rPr>
-              <a:t>farmland</a:t>
+              <a:t>midland</a:t>
             </a:r>
             <a:endParaRPr lang="en-US" sz="2800" dirty="0"/>
           </a:p>
@@ -13275,7 +13209,7 @@
                 <a:ea typeface="Trebuchet MS" pitchFamily="34" charset="-122"/>
                 <a:cs typeface="Trebuchet MS" pitchFamily="34" charset="-120"/>
               </a:rPr>
-              <a:t>farm</a:t>
+              <a:t>mid</a:t>
             </a:r>
             <a:endParaRPr lang="en-US" sz="1300" dirty="0"/>
           </a:p>
@@ -13314,7 +13248,7 @@
                 <a:ea typeface="Calibri" pitchFamily="34" charset="-122"/>
                 <a:cs typeface="Calibri" pitchFamily="34" charset="-120"/>
               </a:rPr>
-              <a:t>land used to grow food or raise animals</a:t>
+              <a:t>middle</a:t>
             </a:r>
             <a:endParaRPr lang="en-US" sz="850" dirty="0"/>
           </a:p>
@@ -13426,7 +13360,7 @@
                 <a:ea typeface="Calibri" pitchFamily="34" charset="-122"/>
                 <a:cs typeface="Calibri" pitchFamily="34" charset="-120"/>
               </a:rPr>
-              <a:t>ground, earth, territory</a:t>
+              <a:t>an area of ground; to arrive</a:t>
             </a:r>
             <a:endParaRPr lang="en-US" sz="850" dirty="0"/>
           </a:p>
@@ -13585,7 +13519,7 @@
                 <a:ea typeface="Trebuchet MS" pitchFamily="34" charset="-122"/>
                 <a:cs typeface="Trebuchet MS" pitchFamily="34" charset="-120"/>
               </a:rPr>
-              <a:t>farm</a:t>
+              <a:t>mid</a:t>
             </a:r>
             <a:endParaRPr lang="en-US" sz="1400" dirty="0"/>
           </a:p>
@@ -14023,7 +13957,7 @@
                 <a:ea typeface="Calibri" pitchFamily="34" charset="-122"/>
                 <a:cs typeface="Calibri" pitchFamily="34" charset="-120"/>
               </a:rPr>
-              <a:t>Root 'land' — ground, earth, territory</a:t>
+              <a:t>Root 'land' — an area of ground; to arrive</a:t>
             </a:r>
             <a:endParaRPr lang="en-US" sz="1600" dirty="0"/>
           </a:p>
@@ -14379,7 +14313,7 @@
                 <a:ea typeface="Calibri" pitchFamily="34" charset="-122"/>
                 <a:cs typeface="Calibri" pitchFamily="34" charset="-120"/>
               </a:rPr>
-              <a:t>Word Labs  •  wordlabs.app  •  Root: 'land' = ground, earth, territory</a:t>
+              <a:t>Word Labs  •  wordlabs.app  •  Root: 'land' = an area of ground; to arrive</a:t>
             </a:r>
             <a:endParaRPr lang="en-US" sz="800" dirty="0"/>
           </a:p>
@@ -14518,7 +14452,7 @@
                 <a:ea typeface="Trebuchet MS" pitchFamily="34" charset="-122"/>
                 <a:cs typeface="Trebuchet MS" pitchFamily="34" charset="-120"/>
               </a:rPr>
-              <a:t>farmland</a:t>
+              <a:t>midland</a:t>
             </a:r>
             <a:endParaRPr lang="en-US" sz="2800" dirty="0"/>
           </a:p>
@@ -14657,7 +14591,7 @@
                 <a:ea typeface="Trebuchet MS" pitchFamily="34" charset="-122"/>
                 <a:cs typeface="Trebuchet MS" pitchFamily="34" charset="-120"/>
               </a:rPr>
-              <a:t>farm</a:t>
+              <a:t>mid</a:t>
             </a:r>
             <a:endParaRPr lang="en-US" sz="1300" dirty="0"/>
           </a:p>
@@ -14696,7 +14630,7 @@
                 <a:ea typeface="Calibri" pitchFamily="34" charset="-122"/>
                 <a:cs typeface="Calibri" pitchFamily="34" charset="-120"/>
               </a:rPr>
-              <a:t>land used to grow food or raise animals</a:t>
+              <a:t>middle</a:t>
             </a:r>
             <a:endParaRPr lang="en-US" sz="850" dirty="0"/>
           </a:p>
@@ -14808,7 +14742,7 @@
                 <a:ea typeface="Calibri" pitchFamily="34" charset="-122"/>
                 <a:cs typeface="Calibri" pitchFamily="34" charset="-120"/>
               </a:rPr>
-              <a:t>ground, earth, territory</a:t>
+              <a:t>an area of ground; to arrive</a:t>
             </a:r>
             <a:endParaRPr lang="en-US" sz="850" dirty="0"/>
           </a:p>
@@ -14967,7 +14901,7 @@
                 <a:ea typeface="Trebuchet MS" pitchFamily="34" charset="-122"/>
                 <a:cs typeface="Trebuchet MS" pitchFamily="34" charset="-120"/>
               </a:rPr>
-              <a:t>farm</a:t>
+              <a:t>mid</a:t>
             </a:r>
             <a:endParaRPr lang="en-US" sz="1400" dirty="0"/>
           </a:p>
@@ -15231,7 +15165,7 @@
                 <a:ea typeface="Trebuchet MS" pitchFamily="34" charset="-122"/>
                 <a:cs typeface="Trebuchet MS" pitchFamily="34" charset="-120"/>
               </a:rPr>
-              <a:t>f</a:t>
+              <a:t>m</a:t>
             </a:r>
             <a:endParaRPr lang="en-US" sz="900" dirty="0"/>
           </a:p>
@@ -15297,7 +15231,7 @@
                 <a:ea typeface="Trebuchet MS" pitchFamily="34" charset="-122"/>
                 <a:cs typeface="Trebuchet MS" pitchFamily="34" charset="-120"/>
               </a:rPr>
-              <a:t>ar</a:t>
+              <a:t>i</a:t>
             </a:r>
             <a:endParaRPr lang="en-US" sz="900" dirty="0"/>
           </a:p>
@@ -15363,7 +15297,7 @@
                 <a:ea typeface="Trebuchet MS" pitchFamily="34" charset="-122"/>
                 <a:cs typeface="Trebuchet MS" pitchFamily="34" charset="-120"/>
               </a:rPr>
-              <a:t>m</a:t>
+              <a:t>d</a:t>
             </a:r>
             <a:endParaRPr lang="en-US" sz="900" dirty="0"/>
           </a:p>
@@ -16201,7 +16135,7 @@
                 <a:ea typeface="Calibri" pitchFamily="34" charset="-122"/>
                 <a:cs typeface="Calibri" pitchFamily="34" charset="-120"/>
               </a:rPr>
-              <a:t>Word Labs  •  wordlabs.app  •  Root: 'land' = ground, earth, territory</a:t>
+              <a:t>Word Labs  •  wordlabs.app  •  Root: 'land' = an area of ground; to arrive</a:t>
             </a:r>
             <a:endParaRPr lang="en-US" sz="800" dirty="0"/>
           </a:p>
@@ -16535,7 +16469,7 @@
                 <a:ea typeface="Trebuchet MS" pitchFamily="34" charset="-122"/>
                 <a:cs typeface="Trebuchet MS" pitchFamily="34" charset="-120"/>
               </a:rPr>
-              <a:t>2</a:t>
+              <a:t>0</a:t>
             </a:r>
             <a:pPr algn="ctr" indent="0" marL="0">
               <a:buNone/>
@@ -16549,7 +16483,7 @@
                 <a:ea typeface="Trebuchet MS" pitchFamily="34" charset="-122"/>
                 <a:cs typeface="Trebuchet MS" pitchFamily="34" charset="-120"/>
               </a:rPr>
-              <a:t>  punctuation marks</a:t>
+              <a:t>  punctuation mark</a:t>
             </a:r>
             <a:endParaRPr lang="en-US" sz="2800" dirty="0"/>
           </a:p>
@@ -16841,7 +16775,7 @@
                 <a:ea typeface="Calibri" pitchFamily="34" charset="-122"/>
                 <a:cs typeface="Calibri" pitchFamily="34" charset="-120"/>
               </a:rPr>
-              <a:t>Word Labs  •  wordlabs.app  •  Root: 'land' = ground, earth, territory</a:t>
+              <a:t>Word Labs  •  wordlabs.app  •  Root: 'land' = an area of ground; to arrive</a:t>
             </a:r>
             <a:endParaRPr lang="en-US" sz="800" dirty="0"/>
           </a:p>
@@ -16953,7 +16887,7 @@
                 <a:ea typeface="Calibri" pitchFamily="34" charset="-122"/>
                 <a:cs typeface="Calibri" pitchFamily="34" charset="-120"/>
               </a:rPr>
-              <a:t>The </a:t>
+              <a:t>The airport recorded over two hundred </a:t>
             </a:r>
             <a:pPr algn="l" indent="0" marL="0">
               <a:buNone/>
@@ -16970,7 +16904,7 @@
                 <a:ea typeface="Calibri" pitchFamily="34" charset="-122"/>
                 <a:cs typeface="Calibri" pitchFamily="34" charset="-120"/>
               </a:rPr>
-              <a:t>overland</a:t>
+              <a:t>landings</a:t>
             </a:r>
             <a:pPr algn="l" indent="0" marL="0">
               <a:buNone/>
@@ -16984,7 +16918,7 @@
                 <a:ea typeface="Calibri" pitchFamily="34" charset="-122"/>
                 <a:cs typeface="Calibri" pitchFamily="34" charset="-120"/>
               </a:rPr>
-              <a:t> journey took us through stunning </a:t>
+              <a:t> that day. Birmingham is a big city in the </a:t>
             </a:r>
             <a:pPr algn="l" indent="0" marL="0">
               <a:buNone/>
@@ -17001,7 +16935,7 @@
                 <a:ea typeface="Calibri" pitchFamily="34" charset="-122"/>
                 <a:cs typeface="Calibri" pitchFamily="34" charset="-120"/>
               </a:rPr>
-              <a:t>upland</a:t>
+              <a:t>midlands</a:t>
             </a:r>
             <a:pPr algn="l" indent="0" marL="0">
               <a:buNone/>
@@ -17015,7 +16949,7 @@
                 <a:ea typeface="Calibri" pitchFamily="34" charset="-122"/>
                 <a:cs typeface="Calibri" pitchFamily="34" charset="-120"/>
               </a:rPr>
-              <a:t> scenery, and we watched the plane's </a:t>
+              <a:t> of England. They travelled </a:t>
             </a:r>
             <a:pPr algn="l" indent="0" marL="0">
               <a:buNone/>
@@ -17032,7 +16966,7 @@
                 <a:ea typeface="Calibri" pitchFamily="34" charset="-122"/>
                 <a:cs typeface="Calibri" pitchFamily="34" charset="-120"/>
               </a:rPr>
-              <a:t>landing</a:t>
+              <a:t>overland</a:t>
             </a:r>
             <a:pPr algn="l" indent="0" marL="0">
               <a:buNone/>
@@ -17046,7 +16980,7 @@
                 <a:ea typeface="Calibri" pitchFamily="34" charset="-122"/>
                 <a:cs typeface="Calibri" pitchFamily="34" charset="-120"/>
               </a:rPr>
-              <a:t> in the valley below.</a:t>
+              <a:t> from London to India by bus and train.</a:t>
             </a:r>
             <a:endParaRPr lang="en-US" sz="1800" dirty="0"/>
           </a:p>
@@ -17201,7 +17135,7 @@
                 <a:ea typeface="Trebuchet MS" pitchFamily="34" charset="-122"/>
                 <a:cs typeface="Trebuchet MS" pitchFamily="34" charset="-120"/>
               </a:rPr>
-              <a:t>overland</a:t>
+              <a:t>landings</a:t>
             </a:r>
             <a:endParaRPr lang="en-US" sz="1400" dirty="0"/>
           </a:p>
@@ -17329,7 +17263,7 @@
                 <a:ea typeface="Trebuchet MS" pitchFamily="34" charset="-122"/>
                 <a:cs typeface="Trebuchet MS" pitchFamily="34" charset="-120"/>
               </a:rPr>
-              <a:t>upland</a:t>
+              <a:t>midlands</a:t>
             </a:r>
             <a:endParaRPr lang="en-US" sz="1400" dirty="0"/>
           </a:p>
@@ -17457,7 +17391,7 @@
                 <a:ea typeface="Trebuchet MS" pitchFamily="34" charset="-122"/>
                 <a:cs typeface="Trebuchet MS" pitchFamily="34" charset="-120"/>
               </a:rPr>
-              <a:t>landing</a:t>
+              <a:t>overland</a:t>
             </a:r>
             <a:endParaRPr lang="en-US" sz="1400" dirty="0"/>
           </a:p>
@@ -17788,7 +17722,7 @@
                 <a:ea typeface="Calibri" pitchFamily="34" charset="-122"/>
                 <a:cs typeface="Calibri" pitchFamily="34" charset="-120"/>
               </a:rPr>
-              <a:t>Word Labs  •  wordlabs.app  •  Root: 'land' = ground, earth, territory</a:t>
+              <a:t>Word Labs  •  wordlabs.app  •  Root: 'land' = an area of ground; to arrive</a:t>
             </a:r>
             <a:endParaRPr lang="en-US" sz="800" dirty="0"/>
           </a:p>
@@ -17927,7 +17861,7 @@
                 <a:ea typeface="Trebuchet MS" pitchFamily="34" charset="-122"/>
                 <a:cs typeface="Trebuchet MS" pitchFamily="34" charset="-120"/>
               </a:rPr>
-              <a:t>overland</a:t>
+              <a:t>landings</a:t>
             </a:r>
             <a:endParaRPr lang="en-US" sz="2800" dirty="0"/>
           </a:p>
@@ -18615,7 +18549,7 @@
                 <a:ea typeface="Calibri" pitchFamily="34" charset="-122"/>
                 <a:cs typeface="Calibri" pitchFamily="34" charset="-120"/>
               </a:rPr>
-              <a:t>Word Labs  •  wordlabs.app  •  Root: 'land' = ground, earth, territory</a:t>
+              <a:t>Word Labs  •  wordlabs.app  •  Root: 'land' = an area of ground; to arrive</a:t>
             </a:r>
             <a:endParaRPr lang="en-US" sz="800" dirty="0"/>
           </a:p>
@@ -18754,7 +18688,7 @@
                 <a:ea typeface="Trebuchet MS" pitchFamily="34" charset="-122"/>
                 <a:cs typeface="Trebuchet MS" pitchFamily="34" charset="-120"/>
               </a:rPr>
-              <a:t>overland</a:t>
+              <a:t>landings</a:t>
             </a:r>
             <a:endParaRPr lang="en-US" sz="2800" dirty="0"/>
           </a:p>
@@ -18834,7 +18768,7 @@
         </p:nvSpPr>
         <p:spPr>
           <a:xfrm>
-            <a:off x="2938272" y="2258568"/>
+            <a:off x="2221992" y="2258568"/>
             <a:ext cx="1828800" cy="292608"/>
           </a:xfrm>
           <a:prstGeom prst="rect">
@@ -18843,11 +18777,11 @@
             </a:avLst>
           </a:prstGeom>
           <a:solidFill>
-            <a:srgbClr val="DDD6FE"/>
+            <a:srgbClr val="CCFBF1"/>
           </a:solidFill>
           <a:ln w="19050">
             <a:solidFill>
-              <a:srgbClr val="7C3AED"/>
+              <a:srgbClr val="0D9488"/>
             </a:solidFill>
             <a:prstDash val="solid"/>
           </a:ln>
@@ -18868,7 +18802,7 @@
         </p:nvSpPr>
         <p:spPr>
           <a:xfrm>
-            <a:off x="2938272" y="2258568"/>
+            <a:off x="2221992" y="2258568"/>
             <a:ext cx="1828800" cy="292608"/>
           </a:xfrm>
           <a:prstGeom prst="rect">
@@ -18887,13 +18821,13 @@
             <a:r>
               <a:rPr lang="en-US" sz="1300" b="1" dirty="0">
                 <a:solidFill>
-                  <a:srgbClr val="4C1D95"/>
+                  <a:srgbClr val="0F766E"/>
                 </a:solidFill>
                 <a:latin typeface="Trebuchet MS" pitchFamily="34" charset="0"/>
                 <a:ea typeface="Trebuchet MS" pitchFamily="34" charset="-122"/>
                 <a:cs typeface="Trebuchet MS" pitchFamily="34" charset="-120"/>
               </a:rPr>
-              <a:t>over</a:t>
+              <a:t>land</a:t>
             </a:r>
             <a:endParaRPr lang="en-US" sz="1300" dirty="0"/>
           </a:p>
@@ -18907,7 +18841,7 @@
         </p:nvSpPr>
         <p:spPr>
           <a:xfrm>
-            <a:off x="2938272" y="2569464"/>
+            <a:off x="2221992" y="2569464"/>
             <a:ext cx="1828800" cy="201168"/>
           </a:xfrm>
           <a:prstGeom prst="rect">
@@ -18932,7 +18866,7 @@
                 <a:ea typeface="Calibri" pitchFamily="34" charset="-122"/>
                 <a:cs typeface="Calibri" pitchFamily="34" charset="-120"/>
               </a:rPr>
-              <a:t>across or above</a:t>
+              <a:t>an area of ground; to arrive</a:t>
             </a:r>
             <a:endParaRPr lang="en-US" sz="850" dirty="0"/>
           </a:p>
@@ -18946,7 +18880,7 @@
         </p:nvSpPr>
         <p:spPr>
           <a:xfrm>
-            <a:off x="5803392" y="2258568"/>
+            <a:off x="4370832" y="2258568"/>
             <a:ext cx="1828800" cy="292608"/>
           </a:xfrm>
           <a:prstGeom prst="rect">
@@ -18955,11 +18889,11 @@
             </a:avLst>
           </a:prstGeom>
           <a:solidFill>
-            <a:srgbClr val="CCFBF1"/>
+            <a:srgbClr val="FCE7F3"/>
           </a:solidFill>
           <a:ln w="19050">
             <a:solidFill>
-              <a:srgbClr val="0D9488"/>
+              <a:srgbClr val="DB2777"/>
             </a:solidFill>
             <a:prstDash val="solid"/>
           </a:ln>
@@ -18980,7 +18914,7 @@
         </p:nvSpPr>
         <p:spPr>
           <a:xfrm>
-            <a:off x="5803392" y="2258568"/>
+            <a:off x="4370832" y="2258568"/>
             <a:ext cx="1828800" cy="292608"/>
           </a:xfrm>
           <a:prstGeom prst="rect">
@@ -18999,13 +18933,13 @@
             <a:r>
               <a:rPr lang="en-US" sz="1300" b="1" dirty="0">
                 <a:solidFill>
-                  <a:srgbClr val="0F766E"/>
+                  <a:srgbClr val="9D174D"/>
                 </a:solidFill>
                 <a:latin typeface="Trebuchet MS" pitchFamily="34" charset="0"/>
                 <a:ea typeface="Trebuchet MS" pitchFamily="34" charset="-122"/>
                 <a:cs typeface="Trebuchet MS" pitchFamily="34" charset="-120"/>
               </a:rPr>
-              <a:t>land</a:t>
+              <a:t>ing</a:t>
             </a:r>
             <a:endParaRPr lang="en-US" sz="1300" dirty="0"/>
           </a:p>
@@ -19019,7 +18953,7 @@
         </p:nvSpPr>
         <p:spPr>
           <a:xfrm>
-            <a:off x="5803392" y="2569464"/>
+            <a:off x="4370832" y="2569464"/>
             <a:ext cx="1828800" cy="201168"/>
           </a:xfrm>
           <a:prstGeom prst="rect">
@@ -19044,7 +18978,7 @@
                 <a:ea typeface="Calibri" pitchFamily="34" charset="-122"/>
                 <a:cs typeface="Calibri" pitchFamily="34" charset="-120"/>
               </a:rPr>
-              <a:t>ground, earth, territory</a:t>
+              <a:t>happening now</a:t>
             </a:r>
             <a:endParaRPr lang="en-US" sz="850" dirty="0"/>
           </a:p>
@@ -19053,6 +18987,118 @@
       <p:sp>
         <p:nvSpPr>
           <p:cNvPr id="22" name="Shape 20"/>
+          <p:cNvSpPr/>
+          <p:nvPr/>
+        </p:nvSpPr>
+        <p:spPr>
+          <a:xfrm>
+            <a:off x="6519672" y="2258568"/>
+            <a:ext cx="1828800" cy="292608"/>
+          </a:xfrm>
+          <a:prstGeom prst="rect">
+            <a:avLst>
+              <a:gd name="adj" fmla="val 25000"/>
+            </a:avLst>
+          </a:prstGeom>
+          <a:solidFill>
+            <a:srgbClr val="FCE7F3"/>
+          </a:solidFill>
+          <a:ln w="19050">
+            <a:solidFill>
+              <a:srgbClr val="DB2777"/>
+            </a:solidFill>
+            <a:prstDash val="solid"/>
+          </a:ln>
+          <a:effectLst>
+            <a:outerShdw sx="100000" sy="100000" kx="0" ky="0" algn="bl" rotWithShape="0" blurRad="101600" dist="38100" dir="8100000">
+              <a:srgbClr val="000000">
+                <a:alpha val="12000"/>
+              </a:srgbClr>
+            </a:outerShdw>
+          </a:effectLst>
+        </p:spPr>
+      </p:sp>
+      <p:sp>
+        <p:nvSpPr>
+          <p:cNvPr id="23" name="Text 21"/>
+          <p:cNvSpPr/>
+          <p:nvPr/>
+        </p:nvSpPr>
+        <p:spPr>
+          <a:xfrm>
+            <a:off x="6519672" y="2258568"/>
+            <a:ext cx="1828800" cy="292608"/>
+          </a:xfrm>
+          <a:prstGeom prst="rect">
+            <a:avLst/>
+          </a:prstGeom>
+          <a:noFill/>
+          <a:ln/>
+        </p:spPr>
+        <p:txBody>
+          <a:bodyPr wrap="square" lIns="0" tIns="0" rIns="0" bIns="0" rtlCol="0" anchor="ctr"/>
+          <a:lstStyle/>
+          <a:p>
+            <a:pPr algn="ctr" indent="0" marL="0">
+              <a:buNone/>
+            </a:pPr>
+            <a:r>
+              <a:rPr lang="en-US" sz="1300" b="1" dirty="0">
+                <a:solidFill>
+                  <a:srgbClr val="9D174D"/>
+                </a:solidFill>
+                <a:latin typeface="Trebuchet MS" pitchFamily="34" charset="0"/>
+                <a:ea typeface="Trebuchet MS" pitchFamily="34" charset="-122"/>
+                <a:cs typeface="Trebuchet MS" pitchFamily="34" charset="-120"/>
+              </a:rPr>
+              <a:t>s</a:t>
+            </a:r>
+            <a:endParaRPr lang="en-US" sz="1300" dirty="0"/>
+          </a:p>
+        </p:txBody>
+      </p:sp>
+      <p:sp>
+        <p:nvSpPr>
+          <p:cNvPr id="24" name="Text 22"/>
+          <p:cNvSpPr/>
+          <p:nvPr/>
+        </p:nvSpPr>
+        <p:spPr>
+          <a:xfrm>
+            <a:off x="6519672" y="2569464"/>
+            <a:ext cx="1828800" cy="201168"/>
+          </a:xfrm>
+          <a:prstGeom prst="rect">
+            <a:avLst/>
+          </a:prstGeom>
+          <a:noFill/>
+          <a:ln/>
+        </p:spPr>
+        <p:txBody>
+          <a:bodyPr wrap="square" lIns="0" tIns="0" rIns="0" bIns="0" rtlCol="0" anchor="t"/>
+          <a:lstStyle/>
+          <a:p>
+            <a:pPr algn="ctr" indent="0" marL="0">
+              <a:buNone/>
+            </a:pPr>
+            <a:r>
+              <a:rPr lang="en-US" sz="850" dirty="0">
+                <a:solidFill>
+                  <a:srgbClr val="475569"/>
+                </a:solidFill>
+                <a:latin typeface="Calibri" pitchFamily="34" charset="0"/>
+                <a:ea typeface="Calibri" pitchFamily="34" charset="-122"/>
+                <a:cs typeface="Calibri" pitchFamily="34" charset="-120"/>
+              </a:rPr>
+              <a:t>plural or present tense</a:t>
+            </a:r>
+            <a:endParaRPr lang="en-US" sz="850" dirty="0"/>
+          </a:p>
+        </p:txBody>
+      </p:sp>
+      <p:sp>
+        <p:nvSpPr>
+          <p:cNvPr id="25" name="Shape 23"/>
           <p:cNvSpPr/>
           <p:nvPr/>
         </p:nvSpPr>
@@ -19079,7 +19125,7 @@
       </p:sp>
       <p:sp>
         <p:nvSpPr>
-          <p:cNvPr id="23" name="Text 21"/>
+          <p:cNvPr id="26" name="Text 24"/>
           <p:cNvSpPr/>
           <p:nvPr/>
         </p:nvSpPr>
@@ -19118,7 +19164,7 @@
       </p:sp>
       <p:sp>
         <p:nvSpPr>
-          <p:cNvPr id="24" name="Shape 22"/>
+          <p:cNvPr id="27" name="Shape 25"/>
           <p:cNvSpPr/>
           <p:nvPr/>
         </p:nvSpPr>
@@ -19145,7 +19191,7 @@
       </p:sp>
       <p:sp>
         <p:nvSpPr>
-          <p:cNvPr id="25" name="Text 23"/>
+          <p:cNvPr id="28" name="Text 26"/>
           <p:cNvSpPr/>
           <p:nvPr/>
         </p:nvSpPr>
@@ -19184,7 +19230,7 @@
       </p:sp>
       <p:sp>
         <p:nvSpPr>
-          <p:cNvPr id="26" name="Shape 24"/>
+          <p:cNvPr id="29" name="Shape 27"/>
           <p:cNvSpPr/>
           <p:nvPr/>
         </p:nvSpPr>
@@ -19211,7 +19257,7 @@
       </p:sp>
       <p:sp>
         <p:nvSpPr>
-          <p:cNvPr id="27" name="Text 25"/>
+          <p:cNvPr id="30" name="Text 28"/>
           <p:cNvSpPr/>
           <p:nvPr/>
         </p:nvSpPr>
@@ -19250,7 +19296,7 @@
       </p:sp>
       <p:sp>
         <p:nvSpPr>
-          <p:cNvPr id="28" name="Shape 26"/>
+          <p:cNvPr id="31" name="Shape 29"/>
           <p:cNvSpPr/>
           <p:nvPr/>
         </p:nvSpPr>
@@ -19277,7 +19323,7 @@
       </p:sp>
       <p:sp>
         <p:nvSpPr>
-          <p:cNvPr id="29" name="Text 27"/>
+          <p:cNvPr id="32" name="Text 30"/>
           <p:cNvSpPr/>
           <p:nvPr/>
         </p:nvSpPr>
@@ -19600,7 +19646,7 @@
                 <a:ea typeface="Calibri" pitchFamily="34" charset="-122"/>
                 <a:cs typeface="Calibri" pitchFamily="34" charset="-120"/>
               </a:rPr>
-              <a:t>Word Labs  •  wordlabs.app  •  Root: 'land' = ground, earth, territory</a:t>
+              <a:t>Word Labs  •  wordlabs.app  •  Root: 'land' = an area of ground; to arrive</a:t>
             </a:r>
             <a:endParaRPr lang="en-US" sz="800" dirty="0"/>
           </a:p>
@@ -19739,7 +19785,7 @@
                 <a:ea typeface="Trebuchet MS" pitchFamily="34" charset="-122"/>
                 <a:cs typeface="Trebuchet MS" pitchFamily="34" charset="-120"/>
               </a:rPr>
-              <a:t>overland</a:t>
+              <a:t>landings</a:t>
             </a:r>
             <a:endParaRPr lang="en-US" sz="2800" dirty="0"/>
           </a:p>
@@ -19819,7 +19865,7 @@
         </p:nvSpPr>
         <p:spPr>
           <a:xfrm>
-            <a:off x="2938272" y="2258568"/>
+            <a:off x="2221992" y="2258568"/>
             <a:ext cx="1828800" cy="292608"/>
           </a:xfrm>
           <a:prstGeom prst="rect">
@@ -19828,11 +19874,11 @@
             </a:avLst>
           </a:prstGeom>
           <a:solidFill>
-            <a:srgbClr val="DDD6FE"/>
+            <a:srgbClr val="CCFBF1"/>
           </a:solidFill>
           <a:ln w="19050">
             <a:solidFill>
-              <a:srgbClr val="7C3AED"/>
+              <a:srgbClr val="0D9488"/>
             </a:solidFill>
             <a:prstDash val="solid"/>
           </a:ln>
@@ -19853,7 +19899,7 @@
         </p:nvSpPr>
         <p:spPr>
           <a:xfrm>
-            <a:off x="2938272" y="2258568"/>
+            <a:off x="2221992" y="2258568"/>
             <a:ext cx="1828800" cy="292608"/>
           </a:xfrm>
           <a:prstGeom prst="rect">
@@ -19872,13 +19918,13 @@
             <a:r>
               <a:rPr lang="en-US" sz="1300" b="1" dirty="0">
                 <a:solidFill>
-                  <a:srgbClr val="4C1D95"/>
+                  <a:srgbClr val="0F766E"/>
                 </a:solidFill>
                 <a:latin typeface="Trebuchet MS" pitchFamily="34" charset="0"/>
                 <a:ea typeface="Trebuchet MS" pitchFamily="34" charset="-122"/>
                 <a:cs typeface="Trebuchet MS" pitchFamily="34" charset="-120"/>
               </a:rPr>
-              <a:t>over</a:t>
+              <a:t>land</a:t>
             </a:r>
             <a:endParaRPr lang="en-US" sz="1300" dirty="0"/>
           </a:p>
@@ -19892,7 +19938,7 @@
         </p:nvSpPr>
         <p:spPr>
           <a:xfrm>
-            <a:off x="2938272" y="2569464"/>
+            <a:off x="2221992" y="2569464"/>
             <a:ext cx="1828800" cy="201168"/>
           </a:xfrm>
           <a:prstGeom prst="rect">
@@ -19917,7 +19963,7 @@
                 <a:ea typeface="Calibri" pitchFamily="34" charset="-122"/>
                 <a:cs typeface="Calibri" pitchFamily="34" charset="-120"/>
               </a:rPr>
-              <a:t>across or above</a:t>
+              <a:t>an area of ground; to arrive</a:t>
             </a:r>
             <a:endParaRPr lang="en-US" sz="850" dirty="0"/>
           </a:p>
@@ -19931,7 +19977,7 @@
         </p:nvSpPr>
         <p:spPr>
           <a:xfrm>
-            <a:off x="5803392" y="2258568"/>
+            <a:off x="4370832" y="2258568"/>
             <a:ext cx="1828800" cy="292608"/>
           </a:xfrm>
           <a:prstGeom prst="rect">
@@ -19940,11 +19986,11 @@
             </a:avLst>
           </a:prstGeom>
           <a:solidFill>
-            <a:srgbClr val="CCFBF1"/>
+            <a:srgbClr val="FCE7F3"/>
           </a:solidFill>
           <a:ln w="19050">
             <a:solidFill>
-              <a:srgbClr val="0D9488"/>
+              <a:srgbClr val="DB2777"/>
             </a:solidFill>
             <a:prstDash val="solid"/>
           </a:ln>
@@ -19965,7 +20011,7 @@
         </p:nvSpPr>
         <p:spPr>
           <a:xfrm>
-            <a:off x="5803392" y="2258568"/>
+            <a:off x="4370832" y="2258568"/>
             <a:ext cx="1828800" cy="292608"/>
           </a:xfrm>
           <a:prstGeom prst="rect">
@@ -19984,13 +20030,13 @@
             <a:r>
               <a:rPr lang="en-US" sz="1300" b="1" dirty="0">
                 <a:solidFill>
-                  <a:srgbClr val="0F766E"/>
+                  <a:srgbClr val="9D174D"/>
                 </a:solidFill>
                 <a:latin typeface="Trebuchet MS" pitchFamily="34" charset="0"/>
                 <a:ea typeface="Trebuchet MS" pitchFamily="34" charset="-122"/>
                 <a:cs typeface="Trebuchet MS" pitchFamily="34" charset="-120"/>
               </a:rPr>
-              <a:t>land</a:t>
+              <a:t>ing</a:t>
             </a:r>
             <a:endParaRPr lang="en-US" sz="1300" dirty="0"/>
           </a:p>
@@ -20004,7 +20050,7 @@
         </p:nvSpPr>
         <p:spPr>
           <a:xfrm>
-            <a:off x="5803392" y="2569464"/>
+            <a:off x="4370832" y="2569464"/>
             <a:ext cx="1828800" cy="201168"/>
           </a:xfrm>
           <a:prstGeom prst="rect">
@@ -20029,7 +20075,7 @@
                 <a:ea typeface="Calibri" pitchFamily="34" charset="-122"/>
                 <a:cs typeface="Calibri" pitchFamily="34" charset="-120"/>
               </a:rPr>
-              <a:t>ground, earth, territory</a:t>
+              <a:t>happening now</a:t>
             </a:r>
             <a:endParaRPr lang="en-US" sz="850" dirty="0"/>
           </a:p>
@@ -20038,6 +20084,118 @@
       <p:sp>
         <p:nvSpPr>
           <p:cNvPr id="22" name="Shape 20"/>
+          <p:cNvSpPr/>
+          <p:nvPr/>
+        </p:nvSpPr>
+        <p:spPr>
+          <a:xfrm>
+            <a:off x="6519672" y="2258568"/>
+            <a:ext cx="1828800" cy="292608"/>
+          </a:xfrm>
+          <a:prstGeom prst="rect">
+            <a:avLst>
+              <a:gd name="adj" fmla="val 25000"/>
+            </a:avLst>
+          </a:prstGeom>
+          <a:solidFill>
+            <a:srgbClr val="FCE7F3"/>
+          </a:solidFill>
+          <a:ln w="19050">
+            <a:solidFill>
+              <a:srgbClr val="DB2777"/>
+            </a:solidFill>
+            <a:prstDash val="solid"/>
+          </a:ln>
+          <a:effectLst>
+            <a:outerShdw sx="100000" sy="100000" kx="0" ky="0" algn="bl" rotWithShape="0" blurRad="101600" dist="38100" dir="8100000">
+              <a:srgbClr val="000000">
+                <a:alpha val="12000"/>
+              </a:srgbClr>
+            </a:outerShdw>
+          </a:effectLst>
+        </p:spPr>
+      </p:sp>
+      <p:sp>
+        <p:nvSpPr>
+          <p:cNvPr id="23" name="Text 21"/>
+          <p:cNvSpPr/>
+          <p:nvPr/>
+        </p:nvSpPr>
+        <p:spPr>
+          <a:xfrm>
+            <a:off x="6519672" y="2258568"/>
+            <a:ext cx="1828800" cy="292608"/>
+          </a:xfrm>
+          <a:prstGeom prst="rect">
+            <a:avLst/>
+          </a:prstGeom>
+          <a:noFill/>
+          <a:ln/>
+        </p:spPr>
+        <p:txBody>
+          <a:bodyPr wrap="square" lIns="0" tIns="0" rIns="0" bIns="0" rtlCol="0" anchor="ctr"/>
+          <a:lstStyle/>
+          <a:p>
+            <a:pPr algn="ctr" indent="0" marL="0">
+              <a:buNone/>
+            </a:pPr>
+            <a:r>
+              <a:rPr lang="en-US" sz="1300" b="1" dirty="0">
+                <a:solidFill>
+                  <a:srgbClr val="9D174D"/>
+                </a:solidFill>
+                <a:latin typeface="Trebuchet MS" pitchFamily="34" charset="0"/>
+                <a:ea typeface="Trebuchet MS" pitchFamily="34" charset="-122"/>
+                <a:cs typeface="Trebuchet MS" pitchFamily="34" charset="-120"/>
+              </a:rPr>
+              <a:t>s</a:t>
+            </a:r>
+            <a:endParaRPr lang="en-US" sz="1300" dirty="0"/>
+          </a:p>
+        </p:txBody>
+      </p:sp>
+      <p:sp>
+        <p:nvSpPr>
+          <p:cNvPr id="24" name="Text 22"/>
+          <p:cNvSpPr/>
+          <p:nvPr/>
+        </p:nvSpPr>
+        <p:spPr>
+          <a:xfrm>
+            <a:off x="6519672" y="2569464"/>
+            <a:ext cx="1828800" cy="201168"/>
+          </a:xfrm>
+          <a:prstGeom prst="rect">
+            <a:avLst/>
+          </a:prstGeom>
+          <a:noFill/>
+          <a:ln/>
+        </p:spPr>
+        <p:txBody>
+          <a:bodyPr wrap="square" lIns="0" tIns="0" rIns="0" bIns="0" rtlCol="0" anchor="t"/>
+          <a:lstStyle/>
+          <a:p>
+            <a:pPr algn="ctr" indent="0" marL="0">
+              <a:buNone/>
+            </a:pPr>
+            <a:r>
+              <a:rPr lang="en-US" sz="850" dirty="0">
+                <a:solidFill>
+                  <a:srgbClr val="475569"/>
+                </a:solidFill>
+                <a:latin typeface="Calibri" pitchFamily="34" charset="0"/>
+                <a:ea typeface="Calibri" pitchFamily="34" charset="-122"/>
+                <a:cs typeface="Calibri" pitchFamily="34" charset="-120"/>
+              </a:rPr>
+              <a:t>plural or present tense</a:t>
+            </a:r>
+            <a:endParaRPr lang="en-US" sz="850" dirty="0"/>
+          </a:p>
+        </p:txBody>
+      </p:sp>
+      <p:sp>
+        <p:nvSpPr>
+          <p:cNvPr id="25" name="Shape 23"/>
           <p:cNvSpPr/>
           <p:nvPr/>
         </p:nvSpPr>
@@ -20064,7 +20222,7 @@
       </p:sp>
       <p:sp>
         <p:nvSpPr>
-          <p:cNvPr id="23" name="Text 21"/>
+          <p:cNvPr id="26" name="Text 24"/>
           <p:cNvSpPr/>
           <p:nvPr/>
         </p:nvSpPr>
@@ -20103,7 +20261,7 @@
       </p:sp>
       <p:sp>
         <p:nvSpPr>
-          <p:cNvPr id="24" name="Shape 22"/>
+          <p:cNvPr id="27" name="Shape 25"/>
           <p:cNvSpPr/>
           <p:nvPr/>
         </p:nvSpPr>
@@ -20130,13 +20288,13 @@
       </p:sp>
       <p:sp>
         <p:nvSpPr>
-          <p:cNvPr id="25" name="Shape 23"/>
-          <p:cNvSpPr/>
-          <p:nvPr/>
-        </p:nvSpPr>
-        <p:spPr>
-          <a:xfrm>
-            <a:off x="2313432" y="3364992"/>
+          <p:cNvPr id="28" name="Shape 26"/>
+          <p:cNvSpPr/>
+          <p:nvPr/>
+        </p:nvSpPr>
+        <p:spPr>
+          <a:xfrm>
+            <a:off x="2999232" y="3364992"/>
             <a:ext cx="1645920" cy="475488"/>
           </a:xfrm>
           <a:prstGeom prst="rect">
@@ -20157,13 +20315,13 @@
       </p:sp>
       <p:sp>
         <p:nvSpPr>
-          <p:cNvPr id="26" name="Text 24"/>
-          <p:cNvSpPr/>
-          <p:nvPr/>
-        </p:nvSpPr>
-        <p:spPr>
-          <a:xfrm>
-            <a:off x="2313432" y="3364992"/>
+          <p:cNvPr id="29" name="Text 27"/>
+          <p:cNvSpPr/>
+          <p:nvPr/>
+        </p:nvSpPr>
+        <p:spPr>
+          <a:xfrm>
+            <a:off x="2999232" y="3364992"/>
             <a:ext cx="1645920" cy="475488"/>
           </a:xfrm>
           <a:prstGeom prst="rect">
@@ -20188,7 +20346,7 @@
                 <a:ea typeface="Trebuchet MS" pitchFamily="34" charset="-122"/>
                 <a:cs typeface="Trebuchet MS" pitchFamily="34" charset="-120"/>
               </a:rPr>
-              <a:t>o</a:t>
+              <a:t>land</a:t>
             </a:r>
             <a:endParaRPr lang="en-US" sz="1400" dirty="0"/>
           </a:p>
@@ -20196,14 +20354,14 @@
       </p:sp>
       <p:sp>
         <p:nvSpPr>
-          <p:cNvPr id="27" name="Text 25"/>
-          <p:cNvSpPr/>
-          <p:nvPr/>
-        </p:nvSpPr>
-        <p:spPr>
-          <a:xfrm>
-            <a:off x="3959352" y="3364992"/>
-            <a:ext cx="411480" cy="475488"/>
+          <p:cNvPr id="30" name="Text 28"/>
+          <p:cNvSpPr/>
+          <p:nvPr/>
+        </p:nvSpPr>
+        <p:spPr>
+          <a:xfrm>
+            <a:off x="4645152" y="3364992"/>
+            <a:ext cx="1097280" cy="475488"/>
           </a:xfrm>
           <a:prstGeom prst="rect">
             <a:avLst/>
@@ -20235,13 +20393,13 @@
       </p:sp>
       <p:sp>
         <p:nvSpPr>
-          <p:cNvPr id="28" name="Shape 26"/>
-          <p:cNvSpPr/>
-          <p:nvPr/>
-        </p:nvSpPr>
-        <p:spPr>
-          <a:xfrm>
-            <a:off x="4370832" y="3364992"/>
+          <p:cNvPr id="31" name="Shape 29"/>
+          <p:cNvSpPr/>
+          <p:nvPr/>
+        </p:nvSpPr>
+        <p:spPr>
+          <a:xfrm>
+            <a:off x="5742432" y="3364992"/>
             <a:ext cx="1645920" cy="475488"/>
           </a:xfrm>
           <a:prstGeom prst="rect">
@@ -20262,13 +20420,13 @@
       </p:sp>
       <p:sp>
         <p:nvSpPr>
-          <p:cNvPr id="29" name="Text 27"/>
-          <p:cNvSpPr/>
-          <p:nvPr/>
-        </p:nvSpPr>
-        <p:spPr>
-          <a:xfrm>
-            <a:off x="4370832" y="3364992"/>
+          <p:cNvPr id="32" name="Text 30"/>
+          <p:cNvSpPr/>
+          <p:nvPr/>
+        </p:nvSpPr>
+        <p:spPr>
+          <a:xfrm>
+            <a:off x="5742432" y="3364992"/>
             <a:ext cx="1645920" cy="475488"/>
           </a:xfrm>
           <a:prstGeom prst="rect">
@@ -20293,112 +20451,7 @@
                 <a:ea typeface="Trebuchet MS" pitchFamily="34" charset="-122"/>
                 <a:cs typeface="Trebuchet MS" pitchFamily="34" charset="-120"/>
               </a:rPr>
-              <a:t>ver</a:t>
-            </a:r>
-            <a:endParaRPr lang="en-US" sz="1400" dirty="0"/>
-          </a:p>
-        </p:txBody>
-      </p:sp>
-      <p:sp>
-        <p:nvSpPr>
-          <p:cNvPr id="30" name="Text 28"/>
-          <p:cNvSpPr/>
-          <p:nvPr/>
-        </p:nvSpPr>
-        <p:spPr>
-          <a:xfrm>
-            <a:off x="6016752" y="3364992"/>
-            <a:ext cx="411480" cy="475488"/>
-          </a:xfrm>
-          <a:prstGeom prst="rect">
-            <a:avLst/>
-          </a:prstGeom>
-          <a:noFill/>
-          <a:ln/>
-        </p:spPr>
-        <p:txBody>
-          <a:bodyPr wrap="square" lIns="0" tIns="0" rIns="0" bIns="0" rtlCol="0" anchor="ctr"/>
-          <a:lstStyle/>
-          <a:p>
-            <a:pPr algn="ctr" indent="0" marL="0">
-              <a:buNone/>
-            </a:pPr>
-            <a:r>
-              <a:rPr lang="en-US" sz="1600" b="1" dirty="0">
-                <a:solidFill>
-                  <a:srgbClr val="0D9488"/>
-                </a:solidFill>
-                <a:latin typeface="Trebuchet MS" pitchFamily="34" charset="0"/>
-                <a:ea typeface="Trebuchet MS" pitchFamily="34" charset="-122"/>
-                <a:cs typeface="Trebuchet MS" pitchFamily="34" charset="-120"/>
-              </a:rPr>
-              <a:t>·</a:t>
-            </a:r>
-            <a:endParaRPr lang="en-US" sz="1600" dirty="0"/>
-          </a:p>
-        </p:txBody>
-      </p:sp>
-      <p:sp>
-        <p:nvSpPr>
-          <p:cNvPr id="31" name="Shape 29"/>
-          <p:cNvSpPr/>
-          <p:nvPr/>
-        </p:nvSpPr>
-        <p:spPr>
-          <a:xfrm>
-            <a:off x="6428232" y="3364992"/>
-            <a:ext cx="1645920" cy="475488"/>
-          </a:xfrm>
-          <a:prstGeom prst="rect">
-            <a:avLst>
-              <a:gd name="adj" fmla="val 9615"/>
-            </a:avLst>
-          </a:prstGeom>
-          <a:solidFill>
-            <a:srgbClr val="FFFFFF"/>
-          </a:solidFill>
-          <a:ln w="12700">
-            <a:solidFill>
-              <a:srgbClr val="0D9488"/>
-            </a:solidFill>
-            <a:prstDash val="solid"/>
-          </a:ln>
-        </p:spPr>
-      </p:sp>
-      <p:sp>
-        <p:nvSpPr>
-          <p:cNvPr id="32" name="Text 30"/>
-          <p:cNvSpPr/>
-          <p:nvPr/>
-        </p:nvSpPr>
-        <p:spPr>
-          <a:xfrm>
-            <a:off x="6428232" y="3364992"/>
-            <a:ext cx="1645920" cy="475488"/>
-          </a:xfrm>
-          <a:prstGeom prst="rect">
-            <a:avLst/>
-          </a:prstGeom>
-          <a:noFill/>
-          <a:ln/>
-        </p:spPr>
-        <p:txBody>
-          <a:bodyPr wrap="square" lIns="0" tIns="0" rIns="0" bIns="0" rtlCol="0" anchor="ctr"/>
-          <a:lstStyle/>
-          <a:p>
-            <a:pPr algn="ctr" indent="0" marL="0">
-              <a:buNone/>
-            </a:pPr>
-            <a:r>
-              <a:rPr lang="en-US" sz="1400" b="1" dirty="0">
-                <a:solidFill>
-                  <a:srgbClr val="0D9488"/>
-                </a:solidFill>
-                <a:latin typeface="Trebuchet MS" pitchFamily="34" charset="0"/>
-                <a:ea typeface="Trebuchet MS" pitchFamily="34" charset="-122"/>
-                <a:cs typeface="Trebuchet MS" pitchFamily="34" charset="-120"/>
-              </a:rPr>
-              <a:t>land</a:t>
+              <a:t>ings</a:t>
             </a:r>
             <a:endParaRPr lang="en-US" sz="1400" dirty="0"/>
           </a:p>
@@ -20822,7 +20875,7 @@
                 <a:ea typeface="Calibri" pitchFamily="34" charset="-122"/>
                 <a:cs typeface="Calibri" pitchFamily="34" charset="-120"/>
               </a:rPr>
-              <a:t>Word Labs  •  wordlabs.app  •  Root: 'land' = ground, earth, territory</a:t>
+              <a:t>Word Labs  •  wordlabs.app  •  Root: 'land' = an area of ground; to arrive</a:t>
             </a:r>
             <a:endParaRPr lang="en-US" sz="800" dirty="0"/>
           </a:p>
@@ -20961,7 +21014,7 @@
                 <a:ea typeface="Trebuchet MS" pitchFamily="34" charset="-122"/>
                 <a:cs typeface="Trebuchet MS" pitchFamily="34" charset="-120"/>
               </a:rPr>
-              <a:t>overland</a:t>
+              <a:t>landings</a:t>
             </a:r>
             <a:endParaRPr lang="en-US" sz="2800" dirty="0"/>
           </a:p>
@@ -21041,7 +21094,7 @@
         </p:nvSpPr>
         <p:spPr>
           <a:xfrm>
-            <a:off x="2938272" y="2258568"/>
+            <a:off x="2221992" y="2258568"/>
             <a:ext cx="1828800" cy="292608"/>
           </a:xfrm>
           <a:prstGeom prst="rect">
@@ -21050,11 +21103,11 @@
             </a:avLst>
           </a:prstGeom>
           <a:solidFill>
-            <a:srgbClr val="DDD6FE"/>
+            <a:srgbClr val="CCFBF1"/>
           </a:solidFill>
           <a:ln w="19050">
             <a:solidFill>
-              <a:srgbClr val="7C3AED"/>
+              <a:srgbClr val="0D9488"/>
             </a:solidFill>
             <a:prstDash val="solid"/>
           </a:ln>
@@ -21075,7 +21128,7 @@
         </p:nvSpPr>
         <p:spPr>
           <a:xfrm>
-            <a:off x="2938272" y="2258568"/>
+            <a:off x="2221992" y="2258568"/>
             <a:ext cx="1828800" cy="292608"/>
           </a:xfrm>
           <a:prstGeom prst="rect">
@@ -21094,13 +21147,13 @@
             <a:r>
               <a:rPr lang="en-US" sz="1300" b="1" dirty="0">
                 <a:solidFill>
-                  <a:srgbClr val="4C1D95"/>
+                  <a:srgbClr val="0F766E"/>
                 </a:solidFill>
                 <a:latin typeface="Trebuchet MS" pitchFamily="34" charset="0"/>
                 <a:ea typeface="Trebuchet MS" pitchFamily="34" charset="-122"/>
                 <a:cs typeface="Trebuchet MS" pitchFamily="34" charset="-120"/>
               </a:rPr>
-              <a:t>over</a:t>
+              <a:t>land</a:t>
             </a:r>
             <a:endParaRPr lang="en-US" sz="1300" dirty="0"/>
           </a:p>
@@ -21114,7 +21167,7 @@
         </p:nvSpPr>
         <p:spPr>
           <a:xfrm>
-            <a:off x="2938272" y="2569464"/>
+            <a:off x="2221992" y="2569464"/>
             <a:ext cx="1828800" cy="201168"/>
           </a:xfrm>
           <a:prstGeom prst="rect">
@@ -21139,7 +21192,7 @@
                 <a:ea typeface="Calibri" pitchFamily="34" charset="-122"/>
                 <a:cs typeface="Calibri" pitchFamily="34" charset="-120"/>
               </a:rPr>
-              <a:t>across or above</a:t>
+              <a:t>an area of ground; to arrive</a:t>
             </a:r>
             <a:endParaRPr lang="en-US" sz="850" dirty="0"/>
           </a:p>
@@ -21153,7 +21206,7 @@
         </p:nvSpPr>
         <p:spPr>
           <a:xfrm>
-            <a:off x="5803392" y="2258568"/>
+            <a:off x="4370832" y="2258568"/>
             <a:ext cx="1828800" cy="292608"/>
           </a:xfrm>
           <a:prstGeom prst="rect">
@@ -21162,11 +21215,11 @@
             </a:avLst>
           </a:prstGeom>
           <a:solidFill>
-            <a:srgbClr val="CCFBF1"/>
+            <a:srgbClr val="FCE7F3"/>
           </a:solidFill>
           <a:ln w="19050">
             <a:solidFill>
-              <a:srgbClr val="0D9488"/>
+              <a:srgbClr val="DB2777"/>
             </a:solidFill>
             <a:prstDash val="solid"/>
           </a:ln>
@@ -21187,7 +21240,7 @@
         </p:nvSpPr>
         <p:spPr>
           <a:xfrm>
-            <a:off x="5803392" y="2258568"/>
+            <a:off x="4370832" y="2258568"/>
             <a:ext cx="1828800" cy="292608"/>
           </a:xfrm>
           <a:prstGeom prst="rect">
@@ -21206,13 +21259,13 @@
             <a:r>
               <a:rPr lang="en-US" sz="1300" b="1" dirty="0">
                 <a:solidFill>
-                  <a:srgbClr val="0F766E"/>
+                  <a:srgbClr val="9D174D"/>
                 </a:solidFill>
                 <a:latin typeface="Trebuchet MS" pitchFamily="34" charset="0"/>
                 <a:ea typeface="Trebuchet MS" pitchFamily="34" charset="-122"/>
                 <a:cs typeface="Trebuchet MS" pitchFamily="34" charset="-120"/>
               </a:rPr>
-              <a:t>land</a:t>
+              <a:t>ing</a:t>
             </a:r>
             <a:endParaRPr lang="en-US" sz="1300" dirty="0"/>
           </a:p>
@@ -21226,7 +21279,7 @@
         </p:nvSpPr>
         <p:spPr>
           <a:xfrm>
-            <a:off x="5803392" y="2569464"/>
+            <a:off x="4370832" y="2569464"/>
             <a:ext cx="1828800" cy="201168"/>
           </a:xfrm>
           <a:prstGeom prst="rect">
@@ -21251,7 +21304,7 @@
                 <a:ea typeface="Calibri" pitchFamily="34" charset="-122"/>
                 <a:cs typeface="Calibri" pitchFamily="34" charset="-120"/>
               </a:rPr>
-              <a:t>ground, earth, territory</a:t>
+              <a:t>happening now</a:t>
             </a:r>
             <a:endParaRPr lang="en-US" sz="850" dirty="0"/>
           </a:p>
@@ -21260,6 +21313,118 @@
       <p:sp>
         <p:nvSpPr>
           <p:cNvPr id="22" name="Shape 20"/>
+          <p:cNvSpPr/>
+          <p:nvPr/>
+        </p:nvSpPr>
+        <p:spPr>
+          <a:xfrm>
+            <a:off x="6519672" y="2258568"/>
+            <a:ext cx="1828800" cy="292608"/>
+          </a:xfrm>
+          <a:prstGeom prst="rect">
+            <a:avLst>
+              <a:gd name="adj" fmla="val 25000"/>
+            </a:avLst>
+          </a:prstGeom>
+          <a:solidFill>
+            <a:srgbClr val="FCE7F3"/>
+          </a:solidFill>
+          <a:ln w="19050">
+            <a:solidFill>
+              <a:srgbClr val="DB2777"/>
+            </a:solidFill>
+            <a:prstDash val="solid"/>
+          </a:ln>
+          <a:effectLst>
+            <a:outerShdw sx="100000" sy="100000" kx="0" ky="0" algn="bl" rotWithShape="0" blurRad="101600" dist="38100" dir="8100000">
+              <a:srgbClr val="000000">
+                <a:alpha val="12000"/>
+              </a:srgbClr>
+            </a:outerShdw>
+          </a:effectLst>
+        </p:spPr>
+      </p:sp>
+      <p:sp>
+        <p:nvSpPr>
+          <p:cNvPr id="23" name="Text 21"/>
+          <p:cNvSpPr/>
+          <p:nvPr/>
+        </p:nvSpPr>
+        <p:spPr>
+          <a:xfrm>
+            <a:off x="6519672" y="2258568"/>
+            <a:ext cx="1828800" cy="292608"/>
+          </a:xfrm>
+          <a:prstGeom prst="rect">
+            <a:avLst/>
+          </a:prstGeom>
+          <a:noFill/>
+          <a:ln/>
+        </p:spPr>
+        <p:txBody>
+          <a:bodyPr wrap="square" lIns="0" tIns="0" rIns="0" bIns="0" rtlCol="0" anchor="ctr"/>
+          <a:lstStyle/>
+          <a:p>
+            <a:pPr algn="ctr" indent="0" marL="0">
+              <a:buNone/>
+            </a:pPr>
+            <a:r>
+              <a:rPr lang="en-US" sz="1300" b="1" dirty="0">
+                <a:solidFill>
+                  <a:srgbClr val="9D174D"/>
+                </a:solidFill>
+                <a:latin typeface="Trebuchet MS" pitchFamily="34" charset="0"/>
+                <a:ea typeface="Trebuchet MS" pitchFamily="34" charset="-122"/>
+                <a:cs typeface="Trebuchet MS" pitchFamily="34" charset="-120"/>
+              </a:rPr>
+              <a:t>s</a:t>
+            </a:r>
+            <a:endParaRPr lang="en-US" sz="1300" dirty="0"/>
+          </a:p>
+        </p:txBody>
+      </p:sp>
+      <p:sp>
+        <p:nvSpPr>
+          <p:cNvPr id="24" name="Text 22"/>
+          <p:cNvSpPr/>
+          <p:nvPr/>
+        </p:nvSpPr>
+        <p:spPr>
+          <a:xfrm>
+            <a:off x="6519672" y="2569464"/>
+            <a:ext cx="1828800" cy="201168"/>
+          </a:xfrm>
+          <a:prstGeom prst="rect">
+            <a:avLst/>
+          </a:prstGeom>
+          <a:noFill/>
+          <a:ln/>
+        </p:spPr>
+        <p:txBody>
+          <a:bodyPr wrap="square" lIns="0" tIns="0" rIns="0" bIns="0" rtlCol="0" anchor="t"/>
+          <a:lstStyle/>
+          <a:p>
+            <a:pPr algn="ctr" indent="0" marL="0">
+              <a:buNone/>
+            </a:pPr>
+            <a:r>
+              <a:rPr lang="en-US" sz="850" dirty="0">
+                <a:solidFill>
+                  <a:srgbClr val="475569"/>
+                </a:solidFill>
+                <a:latin typeface="Calibri" pitchFamily="34" charset="0"/>
+                <a:ea typeface="Calibri" pitchFamily="34" charset="-122"/>
+                <a:cs typeface="Calibri" pitchFamily="34" charset="-120"/>
+              </a:rPr>
+              <a:t>plural or present tense</a:t>
+            </a:r>
+            <a:endParaRPr lang="en-US" sz="850" dirty="0"/>
+          </a:p>
+        </p:txBody>
+      </p:sp>
+      <p:sp>
+        <p:nvSpPr>
+          <p:cNvPr id="25" name="Shape 23"/>
           <p:cNvSpPr/>
           <p:nvPr/>
         </p:nvSpPr>
@@ -21286,7 +21451,7 @@
       </p:sp>
       <p:sp>
         <p:nvSpPr>
-          <p:cNvPr id="23" name="Text 21"/>
+          <p:cNvPr id="26" name="Text 24"/>
           <p:cNvSpPr/>
           <p:nvPr/>
         </p:nvSpPr>
@@ -21325,7 +21490,7 @@
       </p:sp>
       <p:sp>
         <p:nvSpPr>
-          <p:cNvPr id="24" name="Shape 22"/>
+          <p:cNvPr id="27" name="Shape 25"/>
           <p:cNvSpPr/>
           <p:nvPr/>
         </p:nvSpPr>
@@ -21352,13 +21517,13 @@
       </p:sp>
       <p:sp>
         <p:nvSpPr>
-          <p:cNvPr id="25" name="Shape 23"/>
-          <p:cNvSpPr/>
-          <p:nvPr/>
-        </p:nvSpPr>
-        <p:spPr>
-          <a:xfrm>
-            <a:off x="2313432" y="3364992"/>
+          <p:cNvPr id="28" name="Shape 26"/>
+          <p:cNvSpPr/>
+          <p:nvPr/>
+        </p:nvSpPr>
+        <p:spPr>
+          <a:xfrm>
+            <a:off x="2999232" y="3364992"/>
             <a:ext cx="1645920" cy="475488"/>
           </a:xfrm>
           <a:prstGeom prst="rect">
@@ -21379,13 +21544,13 @@
       </p:sp>
       <p:sp>
         <p:nvSpPr>
-          <p:cNvPr id="26" name="Text 24"/>
-          <p:cNvSpPr/>
-          <p:nvPr/>
-        </p:nvSpPr>
-        <p:spPr>
-          <a:xfrm>
-            <a:off x="2313432" y="3364992"/>
+          <p:cNvPr id="29" name="Text 27"/>
+          <p:cNvSpPr/>
+          <p:nvPr/>
+        </p:nvSpPr>
+        <p:spPr>
+          <a:xfrm>
+            <a:off x="2999232" y="3364992"/>
             <a:ext cx="1645920" cy="475488"/>
           </a:xfrm>
           <a:prstGeom prst="rect">
@@ -21410,7 +21575,7 @@
                 <a:ea typeface="Trebuchet MS" pitchFamily="34" charset="-122"/>
                 <a:cs typeface="Trebuchet MS" pitchFamily="34" charset="-120"/>
               </a:rPr>
-              <a:t>o</a:t>
+              <a:t>land</a:t>
             </a:r>
             <a:endParaRPr lang="en-US" sz="1400" dirty="0"/>
           </a:p>
@@ -21418,14 +21583,14 @@
       </p:sp>
       <p:sp>
         <p:nvSpPr>
-          <p:cNvPr id="27" name="Text 25"/>
-          <p:cNvSpPr/>
-          <p:nvPr/>
-        </p:nvSpPr>
-        <p:spPr>
-          <a:xfrm>
-            <a:off x="3959352" y="3364992"/>
-            <a:ext cx="411480" cy="475488"/>
+          <p:cNvPr id="30" name="Text 28"/>
+          <p:cNvSpPr/>
+          <p:nvPr/>
+        </p:nvSpPr>
+        <p:spPr>
+          <a:xfrm>
+            <a:off x="4645152" y="3364992"/>
+            <a:ext cx="1097280" cy="475488"/>
           </a:xfrm>
           <a:prstGeom prst="rect">
             <a:avLst/>
@@ -21457,13 +21622,13 @@
       </p:sp>
       <p:sp>
         <p:nvSpPr>
-          <p:cNvPr id="28" name="Shape 26"/>
-          <p:cNvSpPr/>
-          <p:nvPr/>
-        </p:nvSpPr>
-        <p:spPr>
-          <a:xfrm>
-            <a:off x="4370832" y="3364992"/>
+          <p:cNvPr id="31" name="Shape 29"/>
+          <p:cNvSpPr/>
+          <p:nvPr/>
+        </p:nvSpPr>
+        <p:spPr>
+          <a:xfrm>
+            <a:off x="5742432" y="3364992"/>
             <a:ext cx="1645920" cy="475488"/>
           </a:xfrm>
           <a:prstGeom prst="rect">
@@ -21484,13 +21649,13 @@
       </p:sp>
       <p:sp>
         <p:nvSpPr>
-          <p:cNvPr id="29" name="Text 27"/>
-          <p:cNvSpPr/>
-          <p:nvPr/>
-        </p:nvSpPr>
-        <p:spPr>
-          <a:xfrm>
-            <a:off x="4370832" y="3364992"/>
+          <p:cNvPr id="32" name="Text 30"/>
+          <p:cNvSpPr/>
+          <p:nvPr/>
+        </p:nvSpPr>
+        <p:spPr>
+          <a:xfrm>
+            <a:off x="5742432" y="3364992"/>
             <a:ext cx="1645920" cy="475488"/>
           </a:xfrm>
           <a:prstGeom prst="rect">
@@ -21515,7 +21680,7 @@
                 <a:ea typeface="Trebuchet MS" pitchFamily="34" charset="-122"/>
                 <a:cs typeface="Trebuchet MS" pitchFamily="34" charset="-120"/>
               </a:rPr>
-              <a:t>ver</a:t>
+              <a:t>ings</a:t>
             </a:r>
             <a:endParaRPr lang="en-US" sz="1400" dirty="0"/>
           </a:p>
@@ -21523,14 +21688,41 @@
       </p:sp>
       <p:sp>
         <p:nvSpPr>
-          <p:cNvPr id="30" name="Text 28"/>
-          <p:cNvSpPr/>
-          <p:nvPr/>
-        </p:nvSpPr>
-        <p:spPr>
-          <a:xfrm>
-            <a:off x="6016752" y="3364992"/>
-            <a:ext cx="411480" cy="475488"/>
+          <p:cNvPr id="33" name="Shape 31"/>
+          <p:cNvSpPr/>
+          <p:nvPr/>
+        </p:nvSpPr>
+        <p:spPr>
+          <a:xfrm>
+            <a:off x="365760" y="4096512"/>
+            <a:ext cx="1371600" cy="804672"/>
+          </a:xfrm>
+          <a:prstGeom prst="rect">
+            <a:avLst>
+              <a:gd name="adj" fmla="val 6818"/>
+            </a:avLst>
+          </a:prstGeom>
+          <a:solidFill>
+            <a:srgbClr val="E2E8F0"/>
+          </a:solidFill>
+          <a:ln w="12700">
+            <a:solidFill>
+              <a:srgbClr val="E2E8F0"/>
+            </a:solidFill>
+            <a:prstDash val="solid"/>
+          </a:ln>
+        </p:spPr>
+      </p:sp>
+      <p:sp>
+        <p:nvSpPr>
+          <p:cNvPr id="34" name="Text 32"/>
+          <p:cNvSpPr/>
+          <p:nvPr/>
+        </p:nvSpPr>
+        <p:spPr>
+          <a:xfrm>
+            <a:off x="365760" y="4096512"/>
+            <a:ext cx="1371600" cy="804672"/>
           </a:xfrm>
           <a:prstGeom prst="rect">
             <a:avLst/>
@@ -21546,57 +21738,84 @@
               <a:buNone/>
             </a:pPr>
             <a:r>
-              <a:rPr lang="en-US" sz="1600" b="1" dirty="0">
-                <a:solidFill>
-                  <a:srgbClr val="0D9488"/>
+              <a:rPr lang="en-US" sz="1100" b="1" dirty="0">
+                <a:solidFill>
+                  <a:srgbClr val="475569"/>
                 </a:solidFill>
                 <a:latin typeface="Trebuchet MS" pitchFamily="34" charset="0"/>
                 <a:ea typeface="Trebuchet MS" pitchFamily="34" charset="-122"/>
                 <a:cs typeface="Trebuchet MS" pitchFamily="34" charset="-120"/>
               </a:rPr>
-              <a:t>·</a:t>
-            </a:r>
-            <a:endParaRPr lang="en-US" sz="1600" dirty="0"/>
-          </a:p>
-        </p:txBody>
-      </p:sp>
-      <p:sp>
-        <p:nvSpPr>
-          <p:cNvPr id="31" name="Shape 29"/>
-          <p:cNvSpPr/>
-          <p:nvPr/>
-        </p:nvSpPr>
-        <p:spPr>
-          <a:xfrm>
-            <a:off x="6428232" y="3364992"/>
-            <a:ext cx="1645920" cy="475488"/>
+              <a:t>Phonemes</a:t>
+            </a:r>
+            <a:endParaRPr lang="en-US" sz="1100" dirty="0"/>
+          </a:p>
+        </p:txBody>
+      </p:sp>
+      <p:sp>
+        <p:nvSpPr>
+          <p:cNvPr id="35" name="Shape 33"/>
+          <p:cNvSpPr/>
+          <p:nvPr/>
+        </p:nvSpPr>
+        <p:spPr>
+          <a:xfrm>
+            <a:off x="1874520" y="4096512"/>
+            <a:ext cx="6903720" cy="658368"/>
           </a:xfrm>
           <a:prstGeom prst="rect">
             <a:avLst>
-              <a:gd name="adj" fmla="val 9615"/>
+              <a:gd name="adj" fmla="val 8333"/>
             </a:avLst>
           </a:prstGeom>
           <a:solidFill>
+            <a:srgbClr val="FCE7F3"/>
+          </a:solidFill>
+          <a:ln w="12700">
+            <a:solidFill>
+              <a:srgbClr val="DB2777"/>
+            </a:solidFill>
+            <a:prstDash val="solid"/>
+          </a:ln>
+        </p:spPr>
+      </p:sp>
+      <p:sp>
+        <p:nvSpPr>
+          <p:cNvPr id="36" name="Shape 34"/>
+          <p:cNvSpPr/>
+          <p:nvPr/>
+        </p:nvSpPr>
+        <p:spPr>
+          <a:xfrm>
+            <a:off x="2124837" y="4169664"/>
+            <a:ext cx="685800" cy="475488"/>
+          </a:xfrm>
+          <a:prstGeom prst="rect">
+            <a:avLst>
+              <a:gd name="adj" fmla="val 7692"/>
+            </a:avLst>
+          </a:prstGeom>
+          <a:solidFill>
             <a:srgbClr val="FFFFFF"/>
           </a:solidFill>
           <a:ln w="12700">
             <a:solidFill>
-              <a:srgbClr val="0D9488"/>
-            </a:solidFill>
-            <a:prstDash val="solid"/>
-          </a:ln>
-        </p:spPr>
-      </p:sp>
-      <p:sp>
-        <p:nvSpPr>
-          <p:cNvPr id="32" name="Text 30"/>
-          <p:cNvSpPr/>
-          <p:nvPr/>
-        </p:nvSpPr>
-        <p:spPr>
-          <a:xfrm>
-            <a:off x="6428232" y="3364992"/>
-            <a:ext cx="1645920" cy="475488"/>
+              <a:srgbClr val="DB2777"/>
+            </a:solidFill>
+            <a:prstDash val="solid"/>
+          </a:ln>
+        </p:spPr>
+      </p:sp>
+      <p:sp>
+        <p:nvSpPr>
+          <p:cNvPr id="37" name="Text 35"/>
+          <p:cNvSpPr/>
+          <p:nvPr/>
+        </p:nvSpPr>
+        <p:spPr>
+          <a:xfrm>
+            <a:off x="2124837" y="4169664"/>
+            <a:ext cx="685800" cy="475488"/>
           </a:xfrm>
           <a:prstGeom prst="rect">
             <a:avLst/>
@@ -21612,57 +21831,57 @@
               <a:buNone/>
             </a:pPr>
             <a:r>
-              <a:rPr lang="en-US" sz="1400" b="1" dirty="0">
-                <a:solidFill>
-                  <a:srgbClr val="0D9488"/>
+              <a:rPr lang="en-US" sz="900" b="1" dirty="0">
+                <a:solidFill>
+                  <a:srgbClr val="9D174D"/>
                 </a:solidFill>
                 <a:latin typeface="Trebuchet MS" pitchFamily="34" charset="0"/>
                 <a:ea typeface="Trebuchet MS" pitchFamily="34" charset="-122"/>
                 <a:cs typeface="Trebuchet MS" pitchFamily="34" charset="-120"/>
               </a:rPr>
-              <a:t>land</a:t>
-            </a:r>
-            <a:endParaRPr lang="en-US" sz="1400" dirty="0"/>
-          </a:p>
-        </p:txBody>
-      </p:sp>
-      <p:sp>
-        <p:nvSpPr>
-          <p:cNvPr id="33" name="Shape 31"/>
-          <p:cNvSpPr/>
-          <p:nvPr/>
-        </p:nvSpPr>
-        <p:spPr>
-          <a:xfrm>
-            <a:off x="365760" y="4096512"/>
-            <a:ext cx="1371600" cy="804672"/>
+              <a:t>l</a:t>
+            </a:r>
+            <a:endParaRPr lang="en-US" sz="900" dirty="0"/>
+          </a:p>
+        </p:txBody>
+      </p:sp>
+      <p:sp>
+        <p:nvSpPr>
+          <p:cNvPr id="38" name="Shape 36"/>
+          <p:cNvSpPr/>
+          <p:nvPr/>
+        </p:nvSpPr>
+        <p:spPr>
+          <a:xfrm>
+            <a:off x="3033522" y="4169664"/>
+            <a:ext cx="685800" cy="475488"/>
           </a:xfrm>
           <a:prstGeom prst="rect">
             <a:avLst>
-              <a:gd name="adj" fmla="val 6818"/>
+              <a:gd name="adj" fmla="val 7692"/>
             </a:avLst>
           </a:prstGeom>
           <a:solidFill>
-            <a:srgbClr val="E2E8F0"/>
-          </a:solidFill>
-          <a:ln w="12700">
-            <a:solidFill>
-              <a:srgbClr val="E2E8F0"/>
-            </a:solidFill>
-            <a:prstDash val="solid"/>
-          </a:ln>
-        </p:spPr>
-      </p:sp>
-      <p:sp>
-        <p:nvSpPr>
-          <p:cNvPr id="34" name="Text 32"/>
-          <p:cNvSpPr/>
-          <p:nvPr/>
-        </p:nvSpPr>
-        <p:spPr>
-          <a:xfrm>
-            <a:off x="365760" y="4096512"/>
-            <a:ext cx="1371600" cy="804672"/>
+            <a:srgbClr val="FFFFFF"/>
+          </a:solidFill>
+          <a:ln w="12700">
+            <a:solidFill>
+              <a:srgbClr val="DB2777"/>
+            </a:solidFill>
+            <a:prstDash val="solid"/>
+          </a:ln>
+        </p:spPr>
+      </p:sp>
+      <p:sp>
+        <p:nvSpPr>
+          <p:cNvPr id="39" name="Text 37"/>
+          <p:cNvSpPr/>
+          <p:nvPr/>
+        </p:nvSpPr>
+        <p:spPr>
+          <a:xfrm>
+            <a:off x="3033522" y="4169664"/>
+            <a:ext cx="685800" cy="475488"/>
           </a:xfrm>
           <a:prstGeom prst="rect">
             <a:avLst/>
@@ -21678,56 +21897,29 @@
               <a:buNone/>
             </a:pPr>
             <a:r>
-              <a:rPr lang="en-US" sz="1100" b="1" dirty="0">
-                <a:solidFill>
-                  <a:srgbClr val="475569"/>
+              <a:rPr lang="en-US" sz="900" b="1" dirty="0">
+                <a:solidFill>
+                  <a:srgbClr val="9D174D"/>
                 </a:solidFill>
                 <a:latin typeface="Trebuchet MS" pitchFamily="34" charset="0"/>
                 <a:ea typeface="Trebuchet MS" pitchFamily="34" charset="-122"/>
                 <a:cs typeface="Trebuchet MS" pitchFamily="34" charset="-120"/>
               </a:rPr>
-              <a:t>Phonemes</a:t>
-            </a:r>
-            <a:endParaRPr lang="en-US" sz="1100" dirty="0"/>
-          </a:p>
-        </p:txBody>
-      </p:sp>
-      <p:sp>
-        <p:nvSpPr>
-          <p:cNvPr id="35" name="Shape 33"/>
-          <p:cNvSpPr/>
-          <p:nvPr/>
-        </p:nvSpPr>
-        <p:spPr>
-          <a:xfrm>
-            <a:off x="1874520" y="4096512"/>
-            <a:ext cx="6903720" cy="658368"/>
-          </a:xfrm>
-          <a:prstGeom prst="rect">
-            <a:avLst>
-              <a:gd name="adj" fmla="val 8333"/>
-            </a:avLst>
-          </a:prstGeom>
-          <a:solidFill>
-            <a:srgbClr val="FCE7F3"/>
-          </a:solidFill>
-          <a:ln w="12700">
-            <a:solidFill>
-              <a:srgbClr val="DB2777"/>
-            </a:solidFill>
-            <a:prstDash val="solid"/>
-          </a:ln>
-        </p:spPr>
-      </p:sp>
-      <p:sp>
-        <p:nvSpPr>
-          <p:cNvPr id="36" name="Shape 34"/>
-          <p:cNvSpPr/>
-          <p:nvPr/>
-        </p:nvSpPr>
-        <p:spPr>
-          <a:xfrm>
-            <a:off x="2124837" y="4169664"/>
+              <a:t>a</a:t>
+            </a:r>
+            <a:endParaRPr lang="en-US" sz="900" dirty="0"/>
+          </a:p>
+        </p:txBody>
+      </p:sp>
+      <p:sp>
+        <p:nvSpPr>
+          <p:cNvPr id="40" name="Shape 38"/>
+          <p:cNvSpPr/>
+          <p:nvPr/>
+        </p:nvSpPr>
+        <p:spPr>
+          <a:xfrm>
+            <a:off x="3942207" y="4169664"/>
             <a:ext cx="685800" cy="475488"/>
           </a:xfrm>
           <a:prstGeom prst="rect">
@@ -21748,13 +21940,13 @@
       </p:sp>
       <p:sp>
         <p:nvSpPr>
-          <p:cNvPr id="37" name="Text 35"/>
-          <p:cNvSpPr/>
-          <p:nvPr/>
-        </p:nvSpPr>
-        <p:spPr>
-          <a:xfrm>
-            <a:off x="2124837" y="4169664"/>
+          <p:cNvPr id="41" name="Text 39"/>
+          <p:cNvSpPr/>
+          <p:nvPr/>
+        </p:nvSpPr>
+        <p:spPr>
+          <a:xfrm>
+            <a:off x="3942207" y="4169664"/>
             <a:ext cx="685800" cy="475488"/>
           </a:xfrm>
           <a:prstGeom prst="rect">
@@ -21779,7 +21971,7 @@
                 <a:ea typeface="Trebuchet MS" pitchFamily="34" charset="-122"/>
                 <a:cs typeface="Trebuchet MS" pitchFamily="34" charset="-120"/>
               </a:rPr>
-              <a:t>o</a:t>
+              <a:t>n</a:t>
             </a:r>
             <a:endParaRPr lang="en-US" sz="900" dirty="0"/>
           </a:p>
@@ -21787,13 +21979,13 @@
       </p:sp>
       <p:sp>
         <p:nvSpPr>
-          <p:cNvPr id="38" name="Shape 36"/>
-          <p:cNvSpPr/>
-          <p:nvPr/>
-        </p:nvSpPr>
-        <p:spPr>
-          <a:xfrm>
-            <a:off x="3033522" y="4169664"/>
+          <p:cNvPr id="42" name="Shape 40"/>
+          <p:cNvSpPr/>
+          <p:nvPr/>
+        </p:nvSpPr>
+        <p:spPr>
+          <a:xfrm>
+            <a:off x="4850892" y="4169664"/>
             <a:ext cx="685800" cy="475488"/>
           </a:xfrm>
           <a:prstGeom prst="rect">
@@ -21814,13 +22006,13 @@
       </p:sp>
       <p:sp>
         <p:nvSpPr>
-          <p:cNvPr id="39" name="Text 37"/>
-          <p:cNvSpPr/>
-          <p:nvPr/>
-        </p:nvSpPr>
-        <p:spPr>
-          <a:xfrm>
-            <a:off x="3033522" y="4169664"/>
+          <p:cNvPr id="43" name="Text 41"/>
+          <p:cNvSpPr/>
+          <p:nvPr/>
+        </p:nvSpPr>
+        <p:spPr>
+          <a:xfrm>
+            <a:off x="4850892" y="4169664"/>
             <a:ext cx="685800" cy="475488"/>
           </a:xfrm>
           <a:prstGeom prst="rect">
@@ -21845,7 +22037,7 @@
                 <a:ea typeface="Trebuchet MS" pitchFamily="34" charset="-122"/>
                 <a:cs typeface="Trebuchet MS" pitchFamily="34" charset="-120"/>
               </a:rPr>
-              <a:t>v</a:t>
+              <a:t>d</a:t>
             </a:r>
             <a:endParaRPr lang="en-US" sz="900" dirty="0"/>
           </a:p>
@@ -21853,13 +22045,13 @@
       </p:sp>
       <p:sp>
         <p:nvSpPr>
-          <p:cNvPr id="40" name="Shape 38"/>
-          <p:cNvSpPr/>
-          <p:nvPr/>
-        </p:nvSpPr>
-        <p:spPr>
-          <a:xfrm>
-            <a:off x="3942207" y="4169664"/>
+          <p:cNvPr id="44" name="Shape 42"/>
+          <p:cNvSpPr/>
+          <p:nvPr/>
+        </p:nvSpPr>
+        <p:spPr>
+          <a:xfrm>
+            <a:off x="5759577" y="4169664"/>
             <a:ext cx="685800" cy="475488"/>
           </a:xfrm>
           <a:prstGeom prst="rect">
@@ -21880,13 +22072,13 @@
       </p:sp>
       <p:sp>
         <p:nvSpPr>
-          <p:cNvPr id="41" name="Text 39"/>
-          <p:cNvSpPr/>
-          <p:nvPr/>
-        </p:nvSpPr>
-        <p:spPr>
-          <a:xfrm>
-            <a:off x="3942207" y="4169664"/>
+          <p:cNvPr id="45" name="Text 43"/>
+          <p:cNvSpPr/>
+          <p:nvPr/>
+        </p:nvSpPr>
+        <p:spPr>
+          <a:xfrm>
+            <a:off x="5759577" y="4169664"/>
             <a:ext cx="685800" cy="475488"/>
           </a:xfrm>
           <a:prstGeom prst="rect">
@@ -21911,7 +22103,7 @@
                 <a:ea typeface="Trebuchet MS" pitchFamily="34" charset="-122"/>
                 <a:cs typeface="Trebuchet MS" pitchFamily="34" charset="-120"/>
               </a:rPr>
-              <a:t>er</a:t>
+              <a:t>i</a:t>
             </a:r>
             <a:endParaRPr lang="en-US" sz="900" dirty="0"/>
           </a:p>
@@ -21919,13 +22111,13 @@
       </p:sp>
       <p:sp>
         <p:nvSpPr>
-          <p:cNvPr id="42" name="Shape 40"/>
-          <p:cNvSpPr/>
-          <p:nvPr/>
-        </p:nvSpPr>
-        <p:spPr>
-          <a:xfrm>
-            <a:off x="4850892" y="4169664"/>
+          <p:cNvPr id="46" name="Shape 44"/>
+          <p:cNvSpPr/>
+          <p:nvPr/>
+        </p:nvSpPr>
+        <p:spPr>
+          <a:xfrm>
+            <a:off x="6668262" y="4169664"/>
             <a:ext cx="685800" cy="475488"/>
           </a:xfrm>
           <a:prstGeom prst="rect">
@@ -21946,13 +22138,13 @@
       </p:sp>
       <p:sp>
         <p:nvSpPr>
-          <p:cNvPr id="43" name="Text 41"/>
-          <p:cNvSpPr/>
-          <p:nvPr/>
-        </p:nvSpPr>
-        <p:spPr>
-          <a:xfrm>
-            <a:off x="4850892" y="4169664"/>
+          <p:cNvPr id="47" name="Text 45"/>
+          <p:cNvSpPr/>
+          <p:nvPr/>
+        </p:nvSpPr>
+        <p:spPr>
+          <a:xfrm>
+            <a:off x="6668262" y="4169664"/>
             <a:ext cx="685800" cy="475488"/>
           </a:xfrm>
           <a:prstGeom prst="rect">
@@ -21977,7 +22169,7 @@
                 <a:ea typeface="Trebuchet MS" pitchFamily="34" charset="-122"/>
                 <a:cs typeface="Trebuchet MS" pitchFamily="34" charset="-120"/>
               </a:rPr>
-              <a:t>l</a:t>
+              <a:t>ng</a:t>
             </a:r>
             <a:endParaRPr lang="en-US" sz="900" dirty="0"/>
           </a:p>
@@ -21985,13 +22177,13 @@
       </p:sp>
       <p:sp>
         <p:nvSpPr>
-          <p:cNvPr id="44" name="Shape 42"/>
-          <p:cNvSpPr/>
-          <p:nvPr/>
-        </p:nvSpPr>
-        <p:spPr>
-          <a:xfrm>
-            <a:off x="5759577" y="4169664"/>
+          <p:cNvPr id="48" name="Shape 46"/>
+          <p:cNvSpPr/>
+          <p:nvPr/>
+        </p:nvSpPr>
+        <p:spPr>
+          <a:xfrm>
+            <a:off x="7576947" y="4169664"/>
             <a:ext cx="685800" cy="475488"/>
           </a:xfrm>
           <a:prstGeom prst="rect">
@@ -22012,13 +22204,13 @@
       </p:sp>
       <p:sp>
         <p:nvSpPr>
-          <p:cNvPr id="45" name="Text 43"/>
-          <p:cNvSpPr/>
-          <p:nvPr/>
-        </p:nvSpPr>
-        <p:spPr>
-          <a:xfrm>
-            <a:off x="5759577" y="4169664"/>
+          <p:cNvPr id="49" name="Text 47"/>
+          <p:cNvSpPr/>
+          <p:nvPr/>
+        </p:nvSpPr>
+        <p:spPr>
+          <a:xfrm>
+            <a:off x="7576947" y="4169664"/>
             <a:ext cx="685800" cy="475488"/>
           </a:xfrm>
           <a:prstGeom prst="rect">
@@ -22043,139 +22235,7 @@
                 <a:ea typeface="Trebuchet MS" pitchFamily="34" charset="-122"/>
                 <a:cs typeface="Trebuchet MS" pitchFamily="34" charset="-120"/>
               </a:rPr>
-              <a:t>a</a:t>
-            </a:r>
-            <a:endParaRPr lang="en-US" sz="900" dirty="0"/>
-          </a:p>
-        </p:txBody>
-      </p:sp>
-      <p:sp>
-        <p:nvSpPr>
-          <p:cNvPr id="46" name="Shape 44"/>
-          <p:cNvSpPr/>
-          <p:nvPr/>
-        </p:nvSpPr>
-        <p:spPr>
-          <a:xfrm>
-            <a:off x="6668262" y="4169664"/>
-            <a:ext cx="685800" cy="475488"/>
-          </a:xfrm>
-          <a:prstGeom prst="rect">
-            <a:avLst>
-              <a:gd name="adj" fmla="val 7692"/>
-            </a:avLst>
-          </a:prstGeom>
-          <a:solidFill>
-            <a:srgbClr val="FFFFFF"/>
-          </a:solidFill>
-          <a:ln w="12700">
-            <a:solidFill>
-              <a:srgbClr val="DB2777"/>
-            </a:solidFill>
-            <a:prstDash val="solid"/>
-          </a:ln>
-        </p:spPr>
-      </p:sp>
-      <p:sp>
-        <p:nvSpPr>
-          <p:cNvPr id="47" name="Text 45"/>
-          <p:cNvSpPr/>
-          <p:nvPr/>
-        </p:nvSpPr>
-        <p:spPr>
-          <a:xfrm>
-            <a:off x="6668262" y="4169664"/>
-            <a:ext cx="685800" cy="475488"/>
-          </a:xfrm>
-          <a:prstGeom prst="rect">
-            <a:avLst/>
-          </a:prstGeom>
-          <a:noFill/>
-          <a:ln/>
-        </p:spPr>
-        <p:txBody>
-          <a:bodyPr wrap="square" lIns="0" tIns="0" rIns="0" bIns="0" rtlCol="0" anchor="ctr"/>
-          <a:lstStyle/>
-          <a:p>
-            <a:pPr algn="ctr" indent="0" marL="0">
-              <a:buNone/>
-            </a:pPr>
-            <a:r>
-              <a:rPr lang="en-US" sz="900" b="1" dirty="0">
-                <a:solidFill>
-                  <a:srgbClr val="9D174D"/>
-                </a:solidFill>
-                <a:latin typeface="Trebuchet MS" pitchFamily="34" charset="0"/>
-                <a:ea typeface="Trebuchet MS" pitchFamily="34" charset="-122"/>
-                <a:cs typeface="Trebuchet MS" pitchFamily="34" charset="-120"/>
-              </a:rPr>
-              <a:t>n</a:t>
-            </a:r>
-            <a:endParaRPr lang="en-US" sz="900" dirty="0"/>
-          </a:p>
-        </p:txBody>
-      </p:sp>
-      <p:sp>
-        <p:nvSpPr>
-          <p:cNvPr id="48" name="Shape 46"/>
-          <p:cNvSpPr/>
-          <p:nvPr/>
-        </p:nvSpPr>
-        <p:spPr>
-          <a:xfrm>
-            <a:off x="7576947" y="4169664"/>
-            <a:ext cx="685800" cy="475488"/>
-          </a:xfrm>
-          <a:prstGeom prst="rect">
-            <a:avLst>
-              <a:gd name="adj" fmla="val 7692"/>
-            </a:avLst>
-          </a:prstGeom>
-          <a:solidFill>
-            <a:srgbClr val="FFFFFF"/>
-          </a:solidFill>
-          <a:ln w="12700">
-            <a:solidFill>
-              <a:srgbClr val="DB2777"/>
-            </a:solidFill>
-            <a:prstDash val="solid"/>
-          </a:ln>
-        </p:spPr>
-      </p:sp>
-      <p:sp>
-        <p:nvSpPr>
-          <p:cNvPr id="49" name="Text 47"/>
-          <p:cNvSpPr/>
-          <p:nvPr/>
-        </p:nvSpPr>
-        <p:spPr>
-          <a:xfrm>
-            <a:off x="7576947" y="4169664"/>
-            <a:ext cx="685800" cy="475488"/>
-          </a:xfrm>
-          <a:prstGeom prst="rect">
-            <a:avLst/>
-          </a:prstGeom>
-          <a:noFill/>
-          <a:ln/>
-        </p:spPr>
-        <p:txBody>
-          <a:bodyPr wrap="square" lIns="0" tIns="0" rIns="0" bIns="0" rtlCol="0" anchor="ctr"/>
-          <a:lstStyle/>
-          <a:p>
-            <a:pPr algn="ctr" indent="0" marL="0">
-              <a:buNone/>
-            </a:pPr>
-            <a:r>
-              <a:rPr lang="en-US" sz="900" b="1" dirty="0">
-                <a:solidFill>
-                  <a:srgbClr val="9D174D"/>
-                </a:solidFill>
-                <a:latin typeface="Trebuchet MS" pitchFamily="34" charset="0"/>
-                <a:ea typeface="Trebuchet MS" pitchFamily="34" charset="-122"/>
-                <a:cs typeface="Trebuchet MS" pitchFamily="34" charset="-120"/>
-              </a:rPr>
-              <a:t>d</a:t>
+              <a:t>s</a:t>
             </a:r>
             <a:endParaRPr lang="en-US" sz="900" dirty="0"/>
           </a:p>
@@ -22467,7 +22527,7 @@
                 <a:ea typeface="Calibri" pitchFamily="34" charset="-122"/>
                 <a:cs typeface="Calibri" pitchFamily="34" charset="-120"/>
               </a:rPr>
-              <a:t>Word Labs  •  wordlabs.app  •  Root: 'land' = ground, earth, territory</a:t>
+              <a:t>Word Labs  •  wordlabs.app  •  Root: 'land' = an area of ground; to arrive</a:t>
             </a:r>
             <a:endParaRPr lang="en-US" sz="800" dirty="0"/>
           </a:p>
@@ -22606,7 +22666,7 @@
                 <a:ea typeface="Trebuchet MS" pitchFamily="34" charset="-122"/>
                 <a:cs typeface="Trebuchet MS" pitchFamily="34" charset="-120"/>
               </a:rPr>
-              <a:t>upland</a:t>
+              <a:t>midlands</a:t>
             </a:r>
             <a:endParaRPr lang="en-US" sz="2800" dirty="0"/>
           </a:p>
@@ -23294,7 +23354,7 @@
                 <a:ea typeface="Calibri" pitchFamily="34" charset="-122"/>
                 <a:cs typeface="Calibri" pitchFamily="34" charset="-120"/>
               </a:rPr>
-              <a:t>Word Labs  •  wordlabs.app  •  Root: 'land' = ground, earth, territory</a:t>
+              <a:t>Word Labs  •  wordlabs.app  •  Root: 'land' = an area of ground; to arrive</a:t>
             </a:r>
             <a:endParaRPr lang="en-US" sz="800" dirty="0"/>
           </a:p>
@@ -23433,7 +23493,7 @@
                 <a:ea typeface="Trebuchet MS" pitchFamily="34" charset="-122"/>
                 <a:cs typeface="Trebuchet MS" pitchFamily="34" charset="-120"/>
               </a:rPr>
-              <a:t>upland</a:t>
+              <a:t>midlands</a:t>
             </a:r>
             <a:endParaRPr lang="en-US" sz="2800" dirty="0"/>
           </a:p>
@@ -23513,7 +23573,7 @@
         </p:nvSpPr>
         <p:spPr>
           <a:xfrm>
-            <a:off x="2938272" y="2258568"/>
+            <a:off x="2221992" y="2258568"/>
             <a:ext cx="1828800" cy="292608"/>
           </a:xfrm>
           <a:prstGeom prst="rect">
@@ -23547,7 +23607,7 @@
         </p:nvSpPr>
         <p:spPr>
           <a:xfrm>
-            <a:off x="2938272" y="2258568"/>
+            <a:off x="2221992" y="2258568"/>
             <a:ext cx="1828800" cy="292608"/>
           </a:xfrm>
           <a:prstGeom prst="rect">
@@ -23572,7 +23632,7 @@
                 <a:ea typeface="Trebuchet MS" pitchFamily="34" charset="-122"/>
                 <a:cs typeface="Trebuchet MS" pitchFamily="34" charset="-120"/>
               </a:rPr>
-              <a:t>up</a:t>
+              <a:t>mid</a:t>
             </a:r>
             <a:endParaRPr lang="en-US" sz="1300" dirty="0"/>
           </a:p>
@@ -23586,7 +23646,7 @@
         </p:nvSpPr>
         <p:spPr>
           <a:xfrm>
-            <a:off x="2938272" y="2569464"/>
+            <a:off x="2221992" y="2569464"/>
             <a:ext cx="1828800" cy="201168"/>
           </a:xfrm>
           <a:prstGeom prst="rect">
@@ -23611,7 +23671,7 @@
                 <a:ea typeface="Calibri" pitchFamily="34" charset="-122"/>
                 <a:cs typeface="Calibri" pitchFamily="34" charset="-120"/>
               </a:rPr>
-              <a:t>high or above</a:t>
+              <a:t>middle</a:t>
             </a:r>
             <a:endParaRPr lang="en-US" sz="850" dirty="0"/>
           </a:p>
@@ -23625,7 +23685,7 @@
         </p:nvSpPr>
         <p:spPr>
           <a:xfrm>
-            <a:off x="5803392" y="2258568"/>
+            <a:off x="4370832" y="2258568"/>
             <a:ext cx="1828800" cy="292608"/>
           </a:xfrm>
           <a:prstGeom prst="rect">
@@ -23659,7 +23719,7 @@
         </p:nvSpPr>
         <p:spPr>
           <a:xfrm>
-            <a:off x="5803392" y="2258568"/>
+            <a:off x="4370832" y="2258568"/>
             <a:ext cx="1828800" cy="292608"/>
           </a:xfrm>
           <a:prstGeom prst="rect">
@@ -23698,7 +23758,7 @@
         </p:nvSpPr>
         <p:spPr>
           <a:xfrm>
-            <a:off x="5803392" y="2569464"/>
+            <a:off x="4370832" y="2569464"/>
             <a:ext cx="1828800" cy="201168"/>
           </a:xfrm>
           <a:prstGeom prst="rect">
@@ -23723,7 +23783,7 @@
                 <a:ea typeface="Calibri" pitchFamily="34" charset="-122"/>
                 <a:cs typeface="Calibri" pitchFamily="34" charset="-120"/>
               </a:rPr>
-              <a:t>ground, earth, territory</a:t>
+              <a:t>an area of ground; to arrive</a:t>
             </a:r>
             <a:endParaRPr lang="en-US" sz="850" dirty="0"/>
           </a:p>
@@ -23732,6 +23792,118 @@
       <p:sp>
         <p:nvSpPr>
           <p:cNvPr id="22" name="Shape 20"/>
+          <p:cNvSpPr/>
+          <p:nvPr/>
+        </p:nvSpPr>
+        <p:spPr>
+          <a:xfrm>
+            <a:off x="6519672" y="2258568"/>
+            <a:ext cx="1828800" cy="292608"/>
+          </a:xfrm>
+          <a:prstGeom prst="rect">
+            <a:avLst>
+              <a:gd name="adj" fmla="val 25000"/>
+            </a:avLst>
+          </a:prstGeom>
+          <a:solidFill>
+            <a:srgbClr val="FCE7F3"/>
+          </a:solidFill>
+          <a:ln w="19050">
+            <a:solidFill>
+              <a:srgbClr val="DB2777"/>
+            </a:solidFill>
+            <a:prstDash val="solid"/>
+          </a:ln>
+          <a:effectLst>
+            <a:outerShdw sx="100000" sy="100000" kx="0" ky="0" algn="bl" rotWithShape="0" blurRad="101600" dist="38100" dir="8100000">
+              <a:srgbClr val="000000">
+                <a:alpha val="12000"/>
+              </a:srgbClr>
+            </a:outerShdw>
+          </a:effectLst>
+        </p:spPr>
+      </p:sp>
+      <p:sp>
+        <p:nvSpPr>
+          <p:cNvPr id="23" name="Text 21"/>
+          <p:cNvSpPr/>
+          <p:nvPr/>
+        </p:nvSpPr>
+        <p:spPr>
+          <a:xfrm>
+            <a:off x="6519672" y="2258568"/>
+            <a:ext cx="1828800" cy="292608"/>
+          </a:xfrm>
+          <a:prstGeom prst="rect">
+            <a:avLst/>
+          </a:prstGeom>
+          <a:noFill/>
+          <a:ln/>
+        </p:spPr>
+        <p:txBody>
+          <a:bodyPr wrap="square" lIns="0" tIns="0" rIns="0" bIns="0" rtlCol="0" anchor="ctr"/>
+          <a:lstStyle/>
+          <a:p>
+            <a:pPr algn="ctr" indent="0" marL="0">
+              <a:buNone/>
+            </a:pPr>
+            <a:r>
+              <a:rPr lang="en-US" sz="1300" b="1" dirty="0">
+                <a:solidFill>
+                  <a:srgbClr val="9D174D"/>
+                </a:solidFill>
+                <a:latin typeface="Trebuchet MS" pitchFamily="34" charset="0"/>
+                <a:ea typeface="Trebuchet MS" pitchFamily="34" charset="-122"/>
+                <a:cs typeface="Trebuchet MS" pitchFamily="34" charset="-120"/>
+              </a:rPr>
+              <a:t>s</a:t>
+            </a:r>
+            <a:endParaRPr lang="en-US" sz="1300" dirty="0"/>
+          </a:p>
+        </p:txBody>
+      </p:sp>
+      <p:sp>
+        <p:nvSpPr>
+          <p:cNvPr id="24" name="Text 22"/>
+          <p:cNvSpPr/>
+          <p:nvPr/>
+        </p:nvSpPr>
+        <p:spPr>
+          <a:xfrm>
+            <a:off x="6519672" y="2569464"/>
+            <a:ext cx="1828800" cy="201168"/>
+          </a:xfrm>
+          <a:prstGeom prst="rect">
+            <a:avLst/>
+          </a:prstGeom>
+          <a:noFill/>
+          <a:ln/>
+        </p:spPr>
+        <p:txBody>
+          <a:bodyPr wrap="square" lIns="0" tIns="0" rIns="0" bIns="0" rtlCol="0" anchor="t"/>
+          <a:lstStyle/>
+          <a:p>
+            <a:pPr algn="ctr" indent="0" marL="0">
+              <a:buNone/>
+            </a:pPr>
+            <a:r>
+              <a:rPr lang="en-US" sz="850" dirty="0">
+                <a:solidFill>
+                  <a:srgbClr val="475569"/>
+                </a:solidFill>
+                <a:latin typeface="Calibri" pitchFamily="34" charset="0"/>
+                <a:ea typeface="Calibri" pitchFamily="34" charset="-122"/>
+                <a:cs typeface="Calibri" pitchFamily="34" charset="-120"/>
+              </a:rPr>
+              <a:t>plural or present tense</a:t>
+            </a:r>
+            <a:endParaRPr lang="en-US" sz="850" dirty="0"/>
+          </a:p>
+        </p:txBody>
+      </p:sp>
+      <p:sp>
+        <p:nvSpPr>
+          <p:cNvPr id="25" name="Shape 23"/>
           <p:cNvSpPr/>
           <p:nvPr/>
         </p:nvSpPr>
@@ -23758,7 +23930,7 @@
       </p:sp>
       <p:sp>
         <p:nvSpPr>
-          <p:cNvPr id="23" name="Text 21"/>
+          <p:cNvPr id="26" name="Text 24"/>
           <p:cNvSpPr/>
           <p:nvPr/>
         </p:nvSpPr>
@@ -23797,7 +23969,7 @@
       </p:sp>
       <p:sp>
         <p:nvSpPr>
-          <p:cNvPr id="24" name="Shape 22"/>
+          <p:cNvPr id="27" name="Shape 25"/>
           <p:cNvSpPr/>
           <p:nvPr/>
         </p:nvSpPr>
@@ -23824,7 +23996,7 @@
       </p:sp>
       <p:sp>
         <p:nvSpPr>
-          <p:cNvPr id="25" name="Text 23"/>
+          <p:cNvPr id="28" name="Text 26"/>
           <p:cNvSpPr/>
           <p:nvPr/>
         </p:nvSpPr>
@@ -23863,7 +24035,7 @@
       </p:sp>
       <p:sp>
         <p:nvSpPr>
-          <p:cNvPr id="26" name="Shape 24"/>
+          <p:cNvPr id="29" name="Shape 27"/>
           <p:cNvSpPr/>
           <p:nvPr/>
         </p:nvSpPr>
@@ -23890,7 +24062,7 @@
       </p:sp>
       <p:sp>
         <p:nvSpPr>
-          <p:cNvPr id="27" name="Text 25"/>
+          <p:cNvPr id="30" name="Text 28"/>
           <p:cNvSpPr/>
           <p:nvPr/>
         </p:nvSpPr>
@@ -23929,7 +24101,7 @@
       </p:sp>
       <p:sp>
         <p:nvSpPr>
-          <p:cNvPr id="28" name="Shape 26"/>
+          <p:cNvPr id="31" name="Shape 29"/>
           <p:cNvSpPr/>
           <p:nvPr/>
         </p:nvSpPr>
@@ -23956,7 +24128,7 @@
       </p:sp>
       <p:sp>
         <p:nvSpPr>
-          <p:cNvPr id="29" name="Text 27"/>
+          <p:cNvPr id="32" name="Text 30"/>
           <p:cNvSpPr/>
           <p:nvPr/>
         </p:nvSpPr>
@@ -24279,7 +24451,7 @@
                 <a:ea typeface="Calibri" pitchFamily="34" charset="-122"/>
                 <a:cs typeface="Calibri" pitchFamily="34" charset="-120"/>
               </a:rPr>
-              <a:t>Word Labs  •  wordlabs.app  •  Root: 'land' = ground, earth, territory</a:t>
+              <a:t>Word Labs  •  wordlabs.app  •  Root: 'land' = an area of ground; to arrive</a:t>
             </a:r>
             <a:endParaRPr lang="en-US" sz="800" dirty="0"/>
           </a:p>
@@ -24352,7 +24524,7 @@
                 <a:ea typeface="Trebuchet MS" pitchFamily="34" charset="-122"/>
                 <a:cs typeface="Trebuchet MS" pitchFamily="34" charset="-120"/>
               </a:rPr>
-              <a:t>We are learning that the root 'land' means 'ground, earth, territory'.</a:t>
+              <a:t>We are learning that the root 'land' means 'an area of ground; to arrive'.</a:t>
             </a:r>
             <a:endParaRPr lang="en-US" sz="2000" dirty="0"/>
           </a:p>
@@ -24998,7 +25170,7 @@
                 <a:ea typeface="Calibri" pitchFamily="34" charset="-122"/>
                 <a:cs typeface="Calibri" pitchFamily="34" charset="-120"/>
               </a:rPr>
-              <a:t>Word Labs  •  wordlabs.app  •  Root: 'land' = ground, earth, territory</a:t>
+              <a:t>Word Labs  •  wordlabs.app  •  Root: 'land' = an area of ground; to arrive</a:t>
             </a:r>
             <a:endParaRPr lang="en-US" sz="800" dirty="0"/>
           </a:p>
@@ -25137,7 +25309,7 @@
                 <a:ea typeface="Trebuchet MS" pitchFamily="34" charset="-122"/>
                 <a:cs typeface="Trebuchet MS" pitchFamily="34" charset="-120"/>
               </a:rPr>
-              <a:t>upland</a:t>
+              <a:t>midlands</a:t>
             </a:r>
             <a:endParaRPr lang="en-US" sz="2800" dirty="0"/>
           </a:p>
@@ -25217,7 +25389,7 @@
         </p:nvSpPr>
         <p:spPr>
           <a:xfrm>
-            <a:off x="2938272" y="2258568"/>
+            <a:off x="2221992" y="2258568"/>
             <a:ext cx="1828800" cy="292608"/>
           </a:xfrm>
           <a:prstGeom prst="rect">
@@ -25251,7 +25423,7 @@
         </p:nvSpPr>
         <p:spPr>
           <a:xfrm>
-            <a:off x="2938272" y="2258568"/>
+            <a:off x="2221992" y="2258568"/>
             <a:ext cx="1828800" cy="292608"/>
           </a:xfrm>
           <a:prstGeom prst="rect">
@@ -25276,7 +25448,7 @@
                 <a:ea typeface="Trebuchet MS" pitchFamily="34" charset="-122"/>
                 <a:cs typeface="Trebuchet MS" pitchFamily="34" charset="-120"/>
               </a:rPr>
-              <a:t>up</a:t>
+              <a:t>mid</a:t>
             </a:r>
             <a:endParaRPr lang="en-US" sz="1300" dirty="0"/>
           </a:p>
@@ -25290,7 +25462,7 @@
         </p:nvSpPr>
         <p:spPr>
           <a:xfrm>
-            <a:off x="2938272" y="2569464"/>
+            <a:off x="2221992" y="2569464"/>
             <a:ext cx="1828800" cy="201168"/>
           </a:xfrm>
           <a:prstGeom prst="rect">
@@ -25315,7 +25487,7 @@
                 <a:ea typeface="Calibri" pitchFamily="34" charset="-122"/>
                 <a:cs typeface="Calibri" pitchFamily="34" charset="-120"/>
               </a:rPr>
-              <a:t>high or above</a:t>
+              <a:t>middle</a:t>
             </a:r>
             <a:endParaRPr lang="en-US" sz="850" dirty="0"/>
           </a:p>
@@ -25329,7 +25501,7 @@
         </p:nvSpPr>
         <p:spPr>
           <a:xfrm>
-            <a:off x="5803392" y="2258568"/>
+            <a:off x="4370832" y="2258568"/>
             <a:ext cx="1828800" cy="292608"/>
           </a:xfrm>
           <a:prstGeom prst="rect">
@@ -25363,7 +25535,7 @@
         </p:nvSpPr>
         <p:spPr>
           <a:xfrm>
-            <a:off x="5803392" y="2258568"/>
+            <a:off x="4370832" y="2258568"/>
             <a:ext cx="1828800" cy="292608"/>
           </a:xfrm>
           <a:prstGeom prst="rect">
@@ -25402,7 +25574,7 @@
         </p:nvSpPr>
         <p:spPr>
           <a:xfrm>
-            <a:off x="5803392" y="2569464"/>
+            <a:off x="4370832" y="2569464"/>
             <a:ext cx="1828800" cy="201168"/>
           </a:xfrm>
           <a:prstGeom prst="rect">
@@ -25427,7 +25599,7 @@
                 <a:ea typeface="Calibri" pitchFamily="34" charset="-122"/>
                 <a:cs typeface="Calibri" pitchFamily="34" charset="-120"/>
               </a:rPr>
-              <a:t>ground, earth, territory</a:t>
+              <a:t>an area of ground; to arrive</a:t>
             </a:r>
             <a:endParaRPr lang="en-US" sz="850" dirty="0"/>
           </a:p>
@@ -25436,6 +25608,118 @@
       <p:sp>
         <p:nvSpPr>
           <p:cNvPr id="22" name="Shape 20"/>
+          <p:cNvSpPr/>
+          <p:nvPr/>
+        </p:nvSpPr>
+        <p:spPr>
+          <a:xfrm>
+            <a:off x="6519672" y="2258568"/>
+            <a:ext cx="1828800" cy="292608"/>
+          </a:xfrm>
+          <a:prstGeom prst="rect">
+            <a:avLst>
+              <a:gd name="adj" fmla="val 25000"/>
+            </a:avLst>
+          </a:prstGeom>
+          <a:solidFill>
+            <a:srgbClr val="FCE7F3"/>
+          </a:solidFill>
+          <a:ln w="19050">
+            <a:solidFill>
+              <a:srgbClr val="DB2777"/>
+            </a:solidFill>
+            <a:prstDash val="solid"/>
+          </a:ln>
+          <a:effectLst>
+            <a:outerShdw sx="100000" sy="100000" kx="0" ky="0" algn="bl" rotWithShape="0" blurRad="101600" dist="38100" dir="8100000">
+              <a:srgbClr val="000000">
+                <a:alpha val="12000"/>
+              </a:srgbClr>
+            </a:outerShdw>
+          </a:effectLst>
+        </p:spPr>
+      </p:sp>
+      <p:sp>
+        <p:nvSpPr>
+          <p:cNvPr id="23" name="Text 21"/>
+          <p:cNvSpPr/>
+          <p:nvPr/>
+        </p:nvSpPr>
+        <p:spPr>
+          <a:xfrm>
+            <a:off x="6519672" y="2258568"/>
+            <a:ext cx="1828800" cy="292608"/>
+          </a:xfrm>
+          <a:prstGeom prst="rect">
+            <a:avLst/>
+          </a:prstGeom>
+          <a:noFill/>
+          <a:ln/>
+        </p:spPr>
+        <p:txBody>
+          <a:bodyPr wrap="square" lIns="0" tIns="0" rIns="0" bIns="0" rtlCol="0" anchor="ctr"/>
+          <a:lstStyle/>
+          <a:p>
+            <a:pPr algn="ctr" indent="0" marL="0">
+              <a:buNone/>
+            </a:pPr>
+            <a:r>
+              <a:rPr lang="en-US" sz="1300" b="1" dirty="0">
+                <a:solidFill>
+                  <a:srgbClr val="9D174D"/>
+                </a:solidFill>
+                <a:latin typeface="Trebuchet MS" pitchFamily="34" charset="0"/>
+                <a:ea typeface="Trebuchet MS" pitchFamily="34" charset="-122"/>
+                <a:cs typeface="Trebuchet MS" pitchFamily="34" charset="-120"/>
+              </a:rPr>
+              <a:t>s</a:t>
+            </a:r>
+            <a:endParaRPr lang="en-US" sz="1300" dirty="0"/>
+          </a:p>
+        </p:txBody>
+      </p:sp>
+      <p:sp>
+        <p:nvSpPr>
+          <p:cNvPr id="24" name="Text 22"/>
+          <p:cNvSpPr/>
+          <p:nvPr/>
+        </p:nvSpPr>
+        <p:spPr>
+          <a:xfrm>
+            <a:off x="6519672" y="2569464"/>
+            <a:ext cx="1828800" cy="201168"/>
+          </a:xfrm>
+          <a:prstGeom prst="rect">
+            <a:avLst/>
+          </a:prstGeom>
+          <a:noFill/>
+          <a:ln/>
+        </p:spPr>
+        <p:txBody>
+          <a:bodyPr wrap="square" lIns="0" tIns="0" rIns="0" bIns="0" rtlCol="0" anchor="t"/>
+          <a:lstStyle/>
+          <a:p>
+            <a:pPr algn="ctr" indent="0" marL="0">
+              <a:buNone/>
+            </a:pPr>
+            <a:r>
+              <a:rPr lang="en-US" sz="850" dirty="0">
+                <a:solidFill>
+                  <a:srgbClr val="475569"/>
+                </a:solidFill>
+                <a:latin typeface="Calibri" pitchFamily="34" charset="0"/>
+                <a:ea typeface="Calibri" pitchFamily="34" charset="-122"/>
+                <a:cs typeface="Calibri" pitchFamily="34" charset="-120"/>
+              </a:rPr>
+              <a:t>plural or present tense</a:t>
+            </a:r>
+            <a:endParaRPr lang="en-US" sz="850" dirty="0"/>
+          </a:p>
+        </p:txBody>
+      </p:sp>
+      <p:sp>
+        <p:nvSpPr>
+          <p:cNvPr id="25" name="Shape 23"/>
           <p:cNvSpPr/>
           <p:nvPr/>
         </p:nvSpPr>
@@ -25462,7 +25746,7 @@
       </p:sp>
       <p:sp>
         <p:nvSpPr>
-          <p:cNvPr id="23" name="Text 21"/>
+          <p:cNvPr id="26" name="Text 24"/>
           <p:cNvSpPr/>
           <p:nvPr/>
         </p:nvSpPr>
@@ -25501,7 +25785,7 @@
       </p:sp>
       <p:sp>
         <p:nvSpPr>
-          <p:cNvPr id="24" name="Shape 22"/>
+          <p:cNvPr id="27" name="Shape 25"/>
           <p:cNvSpPr/>
           <p:nvPr/>
         </p:nvSpPr>
@@ -25528,7 +25812,7 @@
       </p:sp>
       <p:sp>
         <p:nvSpPr>
-          <p:cNvPr id="25" name="Shape 23"/>
+          <p:cNvPr id="28" name="Shape 26"/>
           <p:cNvSpPr/>
           <p:nvPr/>
         </p:nvSpPr>
@@ -25555,7 +25839,7 @@
       </p:sp>
       <p:sp>
         <p:nvSpPr>
-          <p:cNvPr id="26" name="Text 24"/>
+          <p:cNvPr id="29" name="Text 27"/>
           <p:cNvSpPr/>
           <p:nvPr/>
         </p:nvSpPr>
@@ -25586,7 +25870,7 @@
                 <a:ea typeface="Trebuchet MS" pitchFamily="34" charset="-122"/>
                 <a:cs typeface="Trebuchet MS" pitchFamily="34" charset="-120"/>
               </a:rPr>
-              <a:t>up</a:t>
+              <a:t>mid</a:t>
             </a:r>
             <a:endParaRPr lang="en-US" sz="1400" dirty="0"/>
           </a:p>
@@ -25594,7 +25878,7 @@
       </p:sp>
       <p:sp>
         <p:nvSpPr>
-          <p:cNvPr id="27" name="Text 25"/>
+          <p:cNvPr id="30" name="Text 28"/>
           <p:cNvSpPr/>
           <p:nvPr/>
         </p:nvSpPr>
@@ -25633,7 +25917,7 @@
       </p:sp>
       <p:sp>
         <p:nvSpPr>
-          <p:cNvPr id="28" name="Shape 26"/>
+          <p:cNvPr id="31" name="Shape 29"/>
           <p:cNvSpPr/>
           <p:nvPr/>
         </p:nvSpPr>
@@ -25660,7 +25944,7 @@
       </p:sp>
       <p:sp>
         <p:nvSpPr>
-          <p:cNvPr id="29" name="Text 27"/>
+          <p:cNvPr id="32" name="Text 30"/>
           <p:cNvSpPr/>
           <p:nvPr/>
         </p:nvSpPr>
@@ -25691,7 +25975,7 @@
                 <a:ea typeface="Trebuchet MS" pitchFamily="34" charset="-122"/>
                 <a:cs typeface="Trebuchet MS" pitchFamily="34" charset="-120"/>
               </a:rPr>
-              <a:t>land</a:t>
+              <a:t>lands</a:t>
             </a:r>
             <a:endParaRPr lang="en-US" sz="1400" dirty="0"/>
           </a:p>
@@ -25699,7 +25983,7 @@
       </p:sp>
       <p:sp>
         <p:nvSpPr>
-          <p:cNvPr id="30" name="Shape 28"/>
+          <p:cNvPr id="33" name="Shape 31"/>
           <p:cNvSpPr/>
           <p:nvPr/>
         </p:nvSpPr>
@@ -25726,7 +26010,7 @@
       </p:sp>
       <p:sp>
         <p:nvSpPr>
-          <p:cNvPr id="31" name="Text 29"/>
+          <p:cNvPr id="34" name="Text 32"/>
           <p:cNvSpPr/>
           <p:nvPr/>
         </p:nvSpPr>
@@ -25765,7 +26049,7 @@
       </p:sp>
       <p:sp>
         <p:nvSpPr>
-          <p:cNvPr id="32" name="Shape 30"/>
+          <p:cNvPr id="35" name="Shape 33"/>
           <p:cNvSpPr/>
           <p:nvPr/>
         </p:nvSpPr>
@@ -25792,7 +26076,7 @@
       </p:sp>
       <p:sp>
         <p:nvSpPr>
-          <p:cNvPr id="33" name="Text 31"/>
+          <p:cNvPr id="36" name="Text 34"/>
           <p:cNvSpPr/>
           <p:nvPr/>
         </p:nvSpPr>
@@ -26115,7 +26399,7 @@
                 <a:ea typeface="Calibri" pitchFamily="34" charset="-122"/>
                 <a:cs typeface="Calibri" pitchFamily="34" charset="-120"/>
               </a:rPr>
-              <a:t>Word Labs  •  wordlabs.app  •  Root: 'land' = ground, earth, territory</a:t>
+              <a:t>Word Labs  •  wordlabs.app  •  Root: 'land' = an area of ground; to arrive</a:t>
             </a:r>
             <a:endParaRPr lang="en-US" sz="800" dirty="0"/>
           </a:p>
@@ -26254,7 +26538,7 @@
                 <a:ea typeface="Trebuchet MS" pitchFamily="34" charset="-122"/>
                 <a:cs typeface="Trebuchet MS" pitchFamily="34" charset="-120"/>
               </a:rPr>
-              <a:t>upland</a:t>
+              <a:t>midlands</a:t>
             </a:r>
             <a:endParaRPr lang="en-US" sz="2800" dirty="0"/>
           </a:p>
@@ -26334,7 +26618,7 @@
         </p:nvSpPr>
         <p:spPr>
           <a:xfrm>
-            <a:off x="2938272" y="2258568"/>
+            <a:off x="2221992" y="2258568"/>
             <a:ext cx="1828800" cy="292608"/>
           </a:xfrm>
           <a:prstGeom prst="rect">
@@ -26368,7 +26652,7 @@
         </p:nvSpPr>
         <p:spPr>
           <a:xfrm>
-            <a:off x="2938272" y="2258568"/>
+            <a:off x="2221992" y="2258568"/>
             <a:ext cx="1828800" cy="292608"/>
           </a:xfrm>
           <a:prstGeom prst="rect">
@@ -26393,7 +26677,7 @@
                 <a:ea typeface="Trebuchet MS" pitchFamily="34" charset="-122"/>
                 <a:cs typeface="Trebuchet MS" pitchFamily="34" charset="-120"/>
               </a:rPr>
-              <a:t>up</a:t>
+              <a:t>mid</a:t>
             </a:r>
             <a:endParaRPr lang="en-US" sz="1300" dirty="0"/>
           </a:p>
@@ -26407,7 +26691,7 @@
         </p:nvSpPr>
         <p:spPr>
           <a:xfrm>
-            <a:off x="2938272" y="2569464"/>
+            <a:off x="2221992" y="2569464"/>
             <a:ext cx="1828800" cy="201168"/>
           </a:xfrm>
           <a:prstGeom prst="rect">
@@ -26432,7 +26716,7 @@
                 <a:ea typeface="Calibri" pitchFamily="34" charset="-122"/>
                 <a:cs typeface="Calibri" pitchFamily="34" charset="-120"/>
               </a:rPr>
-              <a:t>high or above</a:t>
+              <a:t>middle</a:t>
             </a:r>
             <a:endParaRPr lang="en-US" sz="850" dirty="0"/>
           </a:p>
@@ -26446,7 +26730,7 @@
         </p:nvSpPr>
         <p:spPr>
           <a:xfrm>
-            <a:off x="5803392" y="2258568"/>
+            <a:off x="4370832" y="2258568"/>
             <a:ext cx="1828800" cy="292608"/>
           </a:xfrm>
           <a:prstGeom prst="rect">
@@ -26480,7 +26764,7 @@
         </p:nvSpPr>
         <p:spPr>
           <a:xfrm>
-            <a:off x="5803392" y="2258568"/>
+            <a:off x="4370832" y="2258568"/>
             <a:ext cx="1828800" cy="292608"/>
           </a:xfrm>
           <a:prstGeom prst="rect">
@@ -26519,7 +26803,7 @@
         </p:nvSpPr>
         <p:spPr>
           <a:xfrm>
-            <a:off x="5803392" y="2569464"/>
+            <a:off x="4370832" y="2569464"/>
             <a:ext cx="1828800" cy="201168"/>
           </a:xfrm>
           <a:prstGeom prst="rect">
@@ -26544,7 +26828,7 @@
                 <a:ea typeface="Calibri" pitchFamily="34" charset="-122"/>
                 <a:cs typeface="Calibri" pitchFamily="34" charset="-120"/>
               </a:rPr>
-              <a:t>ground, earth, territory</a:t>
+              <a:t>an area of ground; to arrive</a:t>
             </a:r>
             <a:endParaRPr lang="en-US" sz="850" dirty="0"/>
           </a:p>
@@ -26553,6 +26837,118 @@
       <p:sp>
         <p:nvSpPr>
           <p:cNvPr id="22" name="Shape 20"/>
+          <p:cNvSpPr/>
+          <p:nvPr/>
+        </p:nvSpPr>
+        <p:spPr>
+          <a:xfrm>
+            <a:off x="6519672" y="2258568"/>
+            <a:ext cx="1828800" cy="292608"/>
+          </a:xfrm>
+          <a:prstGeom prst="rect">
+            <a:avLst>
+              <a:gd name="adj" fmla="val 25000"/>
+            </a:avLst>
+          </a:prstGeom>
+          <a:solidFill>
+            <a:srgbClr val="FCE7F3"/>
+          </a:solidFill>
+          <a:ln w="19050">
+            <a:solidFill>
+              <a:srgbClr val="DB2777"/>
+            </a:solidFill>
+            <a:prstDash val="solid"/>
+          </a:ln>
+          <a:effectLst>
+            <a:outerShdw sx="100000" sy="100000" kx="0" ky="0" algn="bl" rotWithShape="0" blurRad="101600" dist="38100" dir="8100000">
+              <a:srgbClr val="000000">
+                <a:alpha val="12000"/>
+              </a:srgbClr>
+            </a:outerShdw>
+          </a:effectLst>
+        </p:spPr>
+      </p:sp>
+      <p:sp>
+        <p:nvSpPr>
+          <p:cNvPr id="23" name="Text 21"/>
+          <p:cNvSpPr/>
+          <p:nvPr/>
+        </p:nvSpPr>
+        <p:spPr>
+          <a:xfrm>
+            <a:off x="6519672" y="2258568"/>
+            <a:ext cx="1828800" cy="292608"/>
+          </a:xfrm>
+          <a:prstGeom prst="rect">
+            <a:avLst/>
+          </a:prstGeom>
+          <a:noFill/>
+          <a:ln/>
+        </p:spPr>
+        <p:txBody>
+          <a:bodyPr wrap="square" lIns="0" tIns="0" rIns="0" bIns="0" rtlCol="0" anchor="ctr"/>
+          <a:lstStyle/>
+          <a:p>
+            <a:pPr algn="ctr" indent="0" marL="0">
+              <a:buNone/>
+            </a:pPr>
+            <a:r>
+              <a:rPr lang="en-US" sz="1300" b="1" dirty="0">
+                <a:solidFill>
+                  <a:srgbClr val="9D174D"/>
+                </a:solidFill>
+                <a:latin typeface="Trebuchet MS" pitchFamily="34" charset="0"/>
+                <a:ea typeface="Trebuchet MS" pitchFamily="34" charset="-122"/>
+                <a:cs typeface="Trebuchet MS" pitchFamily="34" charset="-120"/>
+              </a:rPr>
+              <a:t>s</a:t>
+            </a:r>
+            <a:endParaRPr lang="en-US" sz="1300" dirty="0"/>
+          </a:p>
+        </p:txBody>
+      </p:sp>
+      <p:sp>
+        <p:nvSpPr>
+          <p:cNvPr id="24" name="Text 22"/>
+          <p:cNvSpPr/>
+          <p:nvPr/>
+        </p:nvSpPr>
+        <p:spPr>
+          <a:xfrm>
+            <a:off x="6519672" y="2569464"/>
+            <a:ext cx="1828800" cy="201168"/>
+          </a:xfrm>
+          <a:prstGeom prst="rect">
+            <a:avLst/>
+          </a:prstGeom>
+          <a:noFill/>
+          <a:ln/>
+        </p:spPr>
+        <p:txBody>
+          <a:bodyPr wrap="square" lIns="0" tIns="0" rIns="0" bIns="0" rtlCol="0" anchor="t"/>
+          <a:lstStyle/>
+          <a:p>
+            <a:pPr algn="ctr" indent="0" marL="0">
+              <a:buNone/>
+            </a:pPr>
+            <a:r>
+              <a:rPr lang="en-US" sz="850" dirty="0">
+                <a:solidFill>
+                  <a:srgbClr val="475569"/>
+                </a:solidFill>
+                <a:latin typeface="Calibri" pitchFamily="34" charset="0"/>
+                <a:ea typeface="Calibri" pitchFamily="34" charset="-122"/>
+                <a:cs typeface="Calibri" pitchFamily="34" charset="-120"/>
+              </a:rPr>
+              <a:t>plural or present tense</a:t>
+            </a:r>
+            <a:endParaRPr lang="en-US" sz="850" dirty="0"/>
+          </a:p>
+        </p:txBody>
+      </p:sp>
+      <p:sp>
+        <p:nvSpPr>
+          <p:cNvPr id="25" name="Shape 23"/>
           <p:cNvSpPr/>
           <p:nvPr/>
         </p:nvSpPr>
@@ -26579,7 +26975,7 @@
       </p:sp>
       <p:sp>
         <p:nvSpPr>
-          <p:cNvPr id="23" name="Text 21"/>
+          <p:cNvPr id="26" name="Text 24"/>
           <p:cNvSpPr/>
           <p:nvPr/>
         </p:nvSpPr>
@@ -26618,7 +27014,7 @@
       </p:sp>
       <p:sp>
         <p:nvSpPr>
-          <p:cNvPr id="24" name="Shape 22"/>
+          <p:cNvPr id="27" name="Shape 25"/>
           <p:cNvSpPr/>
           <p:nvPr/>
         </p:nvSpPr>
@@ -26645,7 +27041,7 @@
       </p:sp>
       <p:sp>
         <p:nvSpPr>
-          <p:cNvPr id="25" name="Shape 23"/>
+          <p:cNvPr id="28" name="Shape 26"/>
           <p:cNvSpPr/>
           <p:nvPr/>
         </p:nvSpPr>
@@ -26672,7 +27068,7 @@
       </p:sp>
       <p:sp>
         <p:nvSpPr>
-          <p:cNvPr id="26" name="Text 24"/>
+          <p:cNvPr id="29" name="Text 27"/>
           <p:cNvSpPr/>
           <p:nvPr/>
         </p:nvSpPr>
@@ -26703,7 +27099,7 @@
                 <a:ea typeface="Trebuchet MS" pitchFamily="34" charset="-122"/>
                 <a:cs typeface="Trebuchet MS" pitchFamily="34" charset="-120"/>
               </a:rPr>
-              <a:t>up</a:t>
+              <a:t>mid</a:t>
             </a:r>
             <a:endParaRPr lang="en-US" sz="1400" dirty="0"/>
           </a:p>
@@ -26711,7 +27107,7 @@
       </p:sp>
       <p:sp>
         <p:nvSpPr>
-          <p:cNvPr id="27" name="Text 25"/>
+          <p:cNvPr id="30" name="Text 28"/>
           <p:cNvSpPr/>
           <p:nvPr/>
         </p:nvSpPr>
@@ -26750,7 +27146,7 @@
       </p:sp>
       <p:sp>
         <p:nvSpPr>
-          <p:cNvPr id="28" name="Shape 26"/>
+          <p:cNvPr id="31" name="Shape 29"/>
           <p:cNvSpPr/>
           <p:nvPr/>
         </p:nvSpPr>
@@ -26777,7 +27173,7 @@
       </p:sp>
       <p:sp>
         <p:nvSpPr>
-          <p:cNvPr id="29" name="Text 27"/>
+          <p:cNvPr id="32" name="Text 30"/>
           <p:cNvSpPr/>
           <p:nvPr/>
         </p:nvSpPr>
@@ -26808,7 +27204,7 @@
                 <a:ea typeface="Trebuchet MS" pitchFamily="34" charset="-122"/>
                 <a:cs typeface="Trebuchet MS" pitchFamily="34" charset="-120"/>
               </a:rPr>
-              <a:t>land</a:t>
+              <a:t>lands</a:t>
             </a:r>
             <a:endParaRPr lang="en-US" sz="1400" dirty="0"/>
           </a:p>
@@ -26816,7 +27212,7 @@
       </p:sp>
       <p:sp>
         <p:nvSpPr>
-          <p:cNvPr id="30" name="Shape 28"/>
+          <p:cNvPr id="33" name="Shape 31"/>
           <p:cNvSpPr/>
           <p:nvPr/>
         </p:nvSpPr>
@@ -26843,7 +27239,7 @@
       </p:sp>
       <p:sp>
         <p:nvSpPr>
-          <p:cNvPr id="31" name="Text 29"/>
+          <p:cNvPr id="34" name="Text 32"/>
           <p:cNvSpPr/>
           <p:nvPr/>
         </p:nvSpPr>
@@ -26882,7 +27278,7 @@
       </p:sp>
       <p:sp>
         <p:nvSpPr>
-          <p:cNvPr id="32" name="Shape 30"/>
+          <p:cNvPr id="35" name="Shape 33"/>
           <p:cNvSpPr/>
           <p:nvPr/>
         </p:nvSpPr>
@@ -26909,13 +27305,13 @@
       </p:sp>
       <p:sp>
         <p:nvSpPr>
-          <p:cNvPr id="33" name="Shape 31"/>
-          <p:cNvSpPr/>
-          <p:nvPr/>
-        </p:nvSpPr>
-        <p:spPr>
-          <a:xfrm>
-            <a:off x="2254649" y="4169664"/>
+          <p:cNvPr id="36" name="Shape 34"/>
+          <p:cNvSpPr/>
+          <p:nvPr/>
+        </p:nvSpPr>
+        <p:spPr>
+          <a:xfrm>
+            <a:off x="2023872" y="4169664"/>
             <a:ext cx="685800" cy="475488"/>
           </a:xfrm>
           <a:prstGeom prst="rect">
@@ -26936,13 +27332,13 @@
       </p:sp>
       <p:sp>
         <p:nvSpPr>
-          <p:cNvPr id="34" name="Text 32"/>
-          <p:cNvSpPr/>
-          <p:nvPr/>
-        </p:nvSpPr>
-        <p:spPr>
-          <a:xfrm>
-            <a:off x="2254649" y="4169664"/>
+          <p:cNvPr id="37" name="Text 35"/>
+          <p:cNvSpPr/>
+          <p:nvPr/>
+        </p:nvSpPr>
+        <p:spPr>
+          <a:xfrm>
+            <a:off x="2023872" y="4169664"/>
             <a:ext cx="685800" cy="475488"/>
           </a:xfrm>
           <a:prstGeom prst="rect">
@@ -26967,7 +27363,7 @@
                 <a:ea typeface="Trebuchet MS" pitchFamily="34" charset="-122"/>
                 <a:cs typeface="Trebuchet MS" pitchFamily="34" charset="-120"/>
               </a:rPr>
-              <a:t>u</a:t>
+              <a:t>m</a:t>
             </a:r>
             <a:endParaRPr lang="en-US" sz="900" dirty="0"/>
           </a:p>
@@ -26975,13 +27371,13 @@
       </p:sp>
       <p:sp>
         <p:nvSpPr>
-          <p:cNvPr id="35" name="Shape 33"/>
-          <p:cNvSpPr/>
-          <p:nvPr/>
-        </p:nvSpPr>
-        <p:spPr>
-          <a:xfrm>
-            <a:off x="3293146" y="4169664"/>
+          <p:cNvPr id="38" name="Shape 36"/>
+          <p:cNvSpPr/>
+          <p:nvPr/>
+        </p:nvSpPr>
+        <p:spPr>
+          <a:xfrm>
+            <a:off x="2831592" y="4169664"/>
             <a:ext cx="685800" cy="475488"/>
           </a:xfrm>
           <a:prstGeom prst="rect">
@@ -27002,13 +27398,13 @@
       </p:sp>
       <p:sp>
         <p:nvSpPr>
-          <p:cNvPr id="36" name="Text 34"/>
-          <p:cNvSpPr/>
-          <p:nvPr/>
-        </p:nvSpPr>
-        <p:spPr>
-          <a:xfrm>
-            <a:off x="3293146" y="4169664"/>
+          <p:cNvPr id="39" name="Text 37"/>
+          <p:cNvSpPr/>
+          <p:nvPr/>
+        </p:nvSpPr>
+        <p:spPr>
+          <a:xfrm>
+            <a:off x="2831592" y="4169664"/>
             <a:ext cx="685800" cy="475488"/>
           </a:xfrm>
           <a:prstGeom prst="rect">
@@ -27033,7 +27429,7 @@
                 <a:ea typeface="Trebuchet MS" pitchFamily="34" charset="-122"/>
                 <a:cs typeface="Trebuchet MS" pitchFamily="34" charset="-120"/>
               </a:rPr>
-              <a:t>p</a:t>
+              <a:t>i</a:t>
             </a:r>
             <a:endParaRPr lang="en-US" sz="900" dirty="0"/>
           </a:p>
@@ -27041,13 +27437,13 @@
       </p:sp>
       <p:sp>
         <p:nvSpPr>
-          <p:cNvPr id="37" name="Shape 35"/>
-          <p:cNvSpPr/>
-          <p:nvPr/>
-        </p:nvSpPr>
-        <p:spPr>
-          <a:xfrm>
-            <a:off x="4331643" y="4169664"/>
+          <p:cNvPr id="40" name="Shape 38"/>
+          <p:cNvSpPr/>
+          <p:nvPr/>
+        </p:nvSpPr>
+        <p:spPr>
+          <a:xfrm>
+            <a:off x="3639312" y="4169664"/>
             <a:ext cx="685800" cy="475488"/>
           </a:xfrm>
           <a:prstGeom prst="rect">
@@ -27068,13 +27464,13 @@
       </p:sp>
       <p:sp>
         <p:nvSpPr>
-          <p:cNvPr id="38" name="Text 36"/>
-          <p:cNvSpPr/>
-          <p:nvPr/>
-        </p:nvSpPr>
-        <p:spPr>
-          <a:xfrm>
-            <a:off x="4331643" y="4169664"/>
+          <p:cNvPr id="41" name="Text 39"/>
+          <p:cNvSpPr/>
+          <p:nvPr/>
+        </p:nvSpPr>
+        <p:spPr>
+          <a:xfrm>
+            <a:off x="3639312" y="4169664"/>
             <a:ext cx="685800" cy="475488"/>
           </a:xfrm>
           <a:prstGeom prst="rect">
@@ -27099,7 +27495,7 @@
                 <a:ea typeface="Trebuchet MS" pitchFamily="34" charset="-122"/>
                 <a:cs typeface="Trebuchet MS" pitchFamily="34" charset="-120"/>
               </a:rPr>
-              <a:t>l</a:t>
+              <a:t>d</a:t>
             </a:r>
             <a:endParaRPr lang="en-US" sz="900" dirty="0"/>
           </a:p>
@@ -27107,13 +27503,13 @@
       </p:sp>
       <p:sp>
         <p:nvSpPr>
-          <p:cNvPr id="39" name="Shape 37"/>
-          <p:cNvSpPr/>
-          <p:nvPr/>
-        </p:nvSpPr>
-        <p:spPr>
-          <a:xfrm>
-            <a:off x="5370141" y="4169664"/>
+          <p:cNvPr id="42" name="Shape 40"/>
+          <p:cNvSpPr/>
+          <p:nvPr/>
+        </p:nvSpPr>
+        <p:spPr>
+          <a:xfrm>
+            <a:off x="4447032" y="4169664"/>
             <a:ext cx="685800" cy="475488"/>
           </a:xfrm>
           <a:prstGeom prst="rect">
@@ -27134,13 +27530,13 @@
       </p:sp>
       <p:sp>
         <p:nvSpPr>
-          <p:cNvPr id="40" name="Text 38"/>
-          <p:cNvSpPr/>
-          <p:nvPr/>
-        </p:nvSpPr>
-        <p:spPr>
-          <a:xfrm>
-            <a:off x="5370141" y="4169664"/>
+          <p:cNvPr id="43" name="Text 41"/>
+          <p:cNvSpPr/>
+          <p:nvPr/>
+        </p:nvSpPr>
+        <p:spPr>
+          <a:xfrm>
+            <a:off x="4447032" y="4169664"/>
             <a:ext cx="685800" cy="475488"/>
           </a:xfrm>
           <a:prstGeom prst="rect">
@@ -27165,7 +27561,7 @@
                 <a:ea typeface="Trebuchet MS" pitchFamily="34" charset="-122"/>
                 <a:cs typeface="Trebuchet MS" pitchFamily="34" charset="-120"/>
               </a:rPr>
-              <a:t>a</a:t>
+              <a:t>l</a:t>
             </a:r>
             <a:endParaRPr lang="en-US" sz="900" dirty="0"/>
           </a:p>
@@ -27173,13 +27569,13 @@
       </p:sp>
       <p:sp>
         <p:nvSpPr>
-          <p:cNvPr id="41" name="Shape 39"/>
-          <p:cNvSpPr/>
-          <p:nvPr/>
-        </p:nvSpPr>
-        <p:spPr>
-          <a:xfrm>
-            <a:off x="6408638" y="4169664"/>
+          <p:cNvPr id="44" name="Shape 42"/>
+          <p:cNvSpPr/>
+          <p:nvPr/>
+        </p:nvSpPr>
+        <p:spPr>
+          <a:xfrm>
+            <a:off x="5254752" y="4169664"/>
             <a:ext cx="685800" cy="475488"/>
           </a:xfrm>
           <a:prstGeom prst="rect">
@@ -27200,13 +27596,13 @@
       </p:sp>
       <p:sp>
         <p:nvSpPr>
-          <p:cNvPr id="42" name="Text 40"/>
-          <p:cNvSpPr/>
-          <p:nvPr/>
-        </p:nvSpPr>
-        <p:spPr>
-          <a:xfrm>
-            <a:off x="6408638" y="4169664"/>
+          <p:cNvPr id="45" name="Text 43"/>
+          <p:cNvSpPr/>
+          <p:nvPr/>
+        </p:nvSpPr>
+        <p:spPr>
+          <a:xfrm>
+            <a:off x="5254752" y="4169664"/>
             <a:ext cx="685800" cy="475488"/>
           </a:xfrm>
           <a:prstGeom prst="rect">
@@ -27231,7 +27627,7 @@
                 <a:ea typeface="Trebuchet MS" pitchFamily="34" charset="-122"/>
                 <a:cs typeface="Trebuchet MS" pitchFamily="34" charset="-120"/>
               </a:rPr>
-              <a:t>n</a:t>
+              <a:t>a</a:t>
             </a:r>
             <a:endParaRPr lang="en-US" sz="900" dirty="0"/>
           </a:p>
@@ -27239,13 +27635,13 @@
       </p:sp>
       <p:sp>
         <p:nvSpPr>
-          <p:cNvPr id="43" name="Shape 41"/>
-          <p:cNvSpPr/>
-          <p:nvPr/>
-        </p:nvSpPr>
-        <p:spPr>
-          <a:xfrm>
-            <a:off x="7447135" y="4169664"/>
+          <p:cNvPr id="46" name="Shape 44"/>
+          <p:cNvSpPr/>
+          <p:nvPr/>
+        </p:nvSpPr>
+        <p:spPr>
+          <a:xfrm>
+            <a:off x="6062472" y="4169664"/>
             <a:ext cx="685800" cy="475488"/>
           </a:xfrm>
           <a:prstGeom prst="rect">
@@ -27266,13 +27662,13 @@
       </p:sp>
       <p:sp>
         <p:nvSpPr>
-          <p:cNvPr id="44" name="Text 42"/>
-          <p:cNvSpPr/>
-          <p:nvPr/>
-        </p:nvSpPr>
-        <p:spPr>
-          <a:xfrm>
-            <a:off x="7447135" y="4169664"/>
+          <p:cNvPr id="47" name="Text 45"/>
+          <p:cNvSpPr/>
+          <p:nvPr/>
+        </p:nvSpPr>
+        <p:spPr>
+          <a:xfrm>
+            <a:off x="6062472" y="4169664"/>
             <a:ext cx="685800" cy="475488"/>
           </a:xfrm>
           <a:prstGeom prst="rect">
@@ -27297,7 +27693,139 @@
                 <a:ea typeface="Trebuchet MS" pitchFamily="34" charset="-122"/>
                 <a:cs typeface="Trebuchet MS" pitchFamily="34" charset="-120"/>
               </a:rPr>
+              <a:t>n</a:t>
+            </a:r>
+            <a:endParaRPr lang="en-US" sz="900" dirty="0"/>
+          </a:p>
+        </p:txBody>
+      </p:sp>
+      <p:sp>
+        <p:nvSpPr>
+          <p:cNvPr id="48" name="Shape 46"/>
+          <p:cNvSpPr/>
+          <p:nvPr/>
+        </p:nvSpPr>
+        <p:spPr>
+          <a:xfrm>
+            <a:off x="6870192" y="4169664"/>
+            <a:ext cx="685800" cy="475488"/>
+          </a:xfrm>
+          <a:prstGeom prst="rect">
+            <a:avLst>
+              <a:gd name="adj" fmla="val 7692"/>
+            </a:avLst>
+          </a:prstGeom>
+          <a:solidFill>
+            <a:srgbClr val="FFFFFF"/>
+          </a:solidFill>
+          <a:ln w="12700">
+            <a:solidFill>
+              <a:srgbClr val="DB2777"/>
+            </a:solidFill>
+            <a:prstDash val="solid"/>
+          </a:ln>
+        </p:spPr>
+      </p:sp>
+      <p:sp>
+        <p:nvSpPr>
+          <p:cNvPr id="49" name="Text 47"/>
+          <p:cNvSpPr/>
+          <p:nvPr/>
+        </p:nvSpPr>
+        <p:spPr>
+          <a:xfrm>
+            <a:off x="6870192" y="4169664"/>
+            <a:ext cx="685800" cy="475488"/>
+          </a:xfrm>
+          <a:prstGeom prst="rect">
+            <a:avLst/>
+          </a:prstGeom>
+          <a:noFill/>
+          <a:ln/>
+        </p:spPr>
+        <p:txBody>
+          <a:bodyPr wrap="square" lIns="0" tIns="0" rIns="0" bIns="0" rtlCol="0" anchor="ctr"/>
+          <a:lstStyle/>
+          <a:p>
+            <a:pPr algn="ctr" indent="0" marL="0">
+              <a:buNone/>
+            </a:pPr>
+            <a:r>
+              <a:rPr lang="en-US" sz="900" b="1" dirty="0">
+                <a:solidFill>
+                  <a:srgbClr val="9D174D"/>
+                </a:solidFill>
+                <a:latin typeface="Trebuchet MS" pitchFamily="34" charset="0"/>
+                <a:ea typeface="Trebuchet MS" pitchFamily="34" charset="-122"/>
+                <a:cs typeface="Trebuchet MS" pitchFamily="34" charset="-120"/>
+              </a:rPr>
               <a:t>d</a:t>
+            </a:r>
+            <a:endParaRPr lang="en-US" sz="900" dirty="0"/>
+          </a:p>
+        </p:txBody>
+      </p:sp>
+      <p:sp>
+        <p:nvSpPr>
+          <p:cNvPr id="50" name="Shape 48"/>
+          <p:cNvSpPr/>
+          <p:nvPr/>
+        </p:nvSpPr>
+        <p:spPr>
+          <a:xfrm>
+            <a:off x="7677912" y="4169664"/>
+            <a:ext cx="685800" cy="475488"/>
+          </a:xfrm>
+          <a:prstGeom prst="rect">
+            <a:avLst>
+              <a:gd name="adj" fmla="val 7692"/>
+            </a:avLst>
+          </a:prstGeom>
+          <a:solidFill>
+            <a:srgbClr val="FFFFFF"/>
+          </a:solidFill>
+          <a:ln w="12700">
+            <a:solidFill>
+              <a:srgbClr val="DB2777"/>
+            </a:solidFill>
+            <a:prstDash val="solid"/>
+          </a:ln>
+        </p:spPr>
+      </p:sp>
+      <p:sp>
+        <p:nvSpPr>
+          <p:cNvPr id="51" name="Text 49"/>
+          <p:cNvSpPr/>
+          <p:nvPr/>
+        </p:nvSpPr>
+        <p:spPr>
+          <a:xfrm>
+            <a:off x="7677912" y="4169664"/>
+            <a:ext cx="685800" cy="475488"/>
+          </a:xfrm>
+          <a:prstGeom prst="rect">
+            <a:avLst/>
+          </a:prstGeom>
+          <a:noFill/>
+          <a:ln/>
+        </p:spPr>
+        <p:txBody>
+          <a:bodyPr wrap="square" lIns="0" tIns="0" rIns="0" bIns="0" rtlCol="0" anchor="ctr"/>
+          <a:lstStyle/>
+          <a:p>
+            <a:pPr algn="ctr" indent="0" marL="0">
+              <a:buNone/>
+            </a:pPr>
+            <a:r>
+              <a:rPr lang="en-US" sz="900" b="1" dirty="0">
+                <a:solidFill>
+                  <a:srgbClr val="9D174D"/>
+                </a:solidFill>
+                <a:latin typeface="Trebuchet MS" pitchFamily="34" charset="0"/>
+                <a:ea typeface="Trebuchet MS" pitchFamily="34" charset="-122"/>
+                <a:cs typeface="Trebuchet MS" pitchFamily="34" charset="-120"/>
+              </a:rPr>
+              <a:t>s</a:t>
             </a:r>
             <a:endParaRPr lang="en-US" sz="900" dirty="0"/>
           </a:p>
@@ -27589,7 +28117,7 @@
                 <a:ea typeface="Calibri" pitchFamily="34" charset="-122"/>
                 <a:cs typeface="Calibri" pitchFamily="34" charset="-120"/>
               </a:rPr>
-              <a:t>Word Labs  •  wordlabs.app  •  Root: 'land' = ground, earth, territory</a:t>
+              <a:t>Word Labs  •  wordlabs.app  •  Root: 'land' = an area of ground; to arrive</a:t>
             </a:r>
             <a:endParaRPr lang="en-US" sz="800" dirty="0"/>
           </a:p>
@@ -27728,7 +28256,7 @@
                 <a:ea typeface="Trebuchet MS" pitchFamily="34" charset="-122"/>
                 <a:cs typeface="Trebuchet MS" pitchFamily="34" charset="-120"/>
               </a:rPr>
-              <a:t>landing</a:t>
+              <a:t>overland</a:t>
             </a:r>
             <a:endParaRPr lang="en-US" sz="2800" dirty="0"/>
           </a:p>
@@ -28416,7 +28944,7 @@
                 <a:ea typeface="Calibri" pitchFamily="34" charset="-122"/>
                 <a:cs typeface="Calibri" pitchFamily="34" charset="-120"/>
               </a:rPr>
-              <a:t>Word Labs  •  wordlabs.app  •  Root: 'land' = ground, earth, territory</a:t>
+              <a:t>Word Labs  •  wordlabs.app  •  Root: 'land' = an area of ground; to arrive</a:t>
             </a:r>
             <a:endParaRPr lang="en-US" sz="800" dirty="0"/>
           </a:p>
@@ -28555,7 +29083,7 @@
                 <a:ea typeface="Trebuchet MS" pitchFamily="34" charset="-122"/>
                 <a:cs typeface="Trebuchet MS" pitchFamily="34" charset="-120"/>
               </a:rPr>
-              <a:t>landing</a:t>
+              <a:t>overland</a:t>
             </a:r>
             <a:endParaRPr lang="en-US" sz="2800" dirty="0"/>
           </a:p>
@@ -28644,11 +29172,11 @@
             </a:avLst>
           </a:prstGeom>
           <a:solidFill>
-            <a:srgbClr val="CCFBF1"/>
+            <a:srgbClr val="DDD6FE"/>
           </a:solidFill>
           <a:ln w="19050">
             <a:solidFill>
-              <a:srgbClr val="0D9488"/>
+              <a:srgbClr val="7C3AED"/>
             </a:solidFill>
             <a:prstDash val="solid"/>
           </a:ln>
@@ -28688,13 +29216,13 @@
             <a:r>
               <a:rPr lang="en-US" sz="1300" b="1" dirty="0">
                 <a:solidFill>
-                  <a:srgbClr val="0F766E"/>
+                  <a:srgbClr val="4C1D95"/>
                 </a:solidFill>
                 <a:latin typeface="Trebuchet MS" pitchFamily="34" charset="0"/>
                 <a:ea typeface="Trebuchet MS" pitchFamily="34" charset="-122"/>
                 <a:cs typeface="Trebuchet MS" pitchFamily="34" charset="-120"/>
               </a:rPr>
-              <a:t>land</a:t>
+              <a:t>over</a:t>
             </a:r>
             <a:endParaRPr lang="en-US" sz="1300" dirty="0"/>
           </a:p>
@@ -28733,7 +29261,7 @@
                 <a:ea typeface="Calibri" pitchFamily="34" charset="-122"/>
                 <a:cs typeface="Calibri" pitchFamily="34" charset="-120"/>
               </a:rPr>
-              <a:t>ground, earth, territory</a:t>
+              <a:t>too much</a:t>
             </a:r>
             <a:endParaRPr lang="en-US" sz="850" dirty="0"/>
           </a:p>
@@ -28756,11 +29284,11 @@
             </a:avLst>
           </a:prstGeom>
           <a:solidFill>
-            <a:srgbClr val="FCE7F3"/>
+            <a:srgbClr val="CCFBF1"/>
           </a:solidFill>
           <a:ln w="19050">
             <a:solidFill>
-              <a:srgbClr val="DB2777"/>
+              <a:srgbClr val="0D9488"/>
             </a:solidFill>
             <a:prstDash val="solid"/>
           </a:ln>
@@ -28800,13 +29328,13 @@
             <a:r>
               <a:rPr lang="en-US" sz="1300" b="1" dirty="0">
                 <a:solidFill>
-                  <a:srgbClr val="9D174D"/>
+                  <a:srgbClr val="0F766E"/>
                 </a:solidFill>
                 <a:latin typeface="Trebuchet MS" pitchFamily="34" charset="0"/>
                 <a:ea typeface="Trebuchet MS" pitchFamily="34" charset="-122"/>
                 <a:cs typeface="Trebuchet MS" pitchFamily="34" charset="-120"/>
               </a:rPr>
-              <a:t>ing</a:t>
+              <a:t>land</a:t>
             </a:r>
             <a:endParaRPr lang="en-US" sz="1300" dirty="0"/>
           </a:p>
@@ -28845,7 +29373,7 @@
                 <a:ea typeface="Calibri" pitchFamily="34" charset="-122"/>
                 <a:cs typeface="Calibri" pitchFamily="34" charset="-120"/>
               </a:rPr>
-              <a:t>action happening now or ongoing</a:t>
+              <a:t>an area of ground; to arrive</a:t>
             </a:r>
             <a:endParaRPr lang="en-US" sz="850" dirty="0"/>
           </a:p>
@@ -29401,7 +29929,7 @@
                 <a:ea typeface="Calibri" pitchFamily="34" charset="-122"/>
                 <a:cs typeface="Calibri" pitchFamily="34" charset="-120"/>
               </a:rPr>
-              <a:t>Word Labs  •  wordlabs.app  •  Root: 'land' = ground, earth, territory</a:t>
+              <a:t>Word Labs  •  wordlabs.app  •  Root: 'land' = an area of ground; to arrive</a:t>
             </a:r>
             <a:endParaRPr lang="en-US" sz="800" dirty="0"/>
           </a:p>
@@ -29540,7 +30068,7 @@
                 <a:ea typeface="Trebuchet MS" pitchFamily="34" charset="-122"/>
                 <a:cs typeface="Trebuchet MS" pitchFamily="34" charset="-120"/>
               </a:rPr>
-              <a:t>landing</a:t>
+              <a:t>overland</a:t>
             </a:r>
             <a:endParaRPr lang="en-US" sz="2800" dirty="0"/>
           </a:p>
@@ -29629,11 +30157,11 @@
             </a:avLst>
           </a:prstGeom>
           <a:solidFill>
-            <a:srgbClr val="CCFBF1"/>
+            <a:srgbClr val="DDD6FE"/>
           </a:solidFill>
           <a:ln w="19050">
             <a:solidFill>
-              <a:srgbClr val="0D9488"/>
+              <a:srgbClr val="7C3AED"/>
             </a:solidFill>
             <a:prstDash val="solid"/>
           </a:ln>
@@ -29673,13 +30201,13 @@
             <a:r>
               <a:rPr lang="en-US" sz="1300" b="1" dirty="0">
                 <a:solidFill>
-                  <a:srgbClr val="0F766E"/>
+                  <a:srgbClr val="4C1D95"/>
                 </a:solidFill>
                 <a:latin typeface="Trebuchet MS" pitchFamily="34" charset="0"/>
                 <a:ea typeface="Trebuchet MS" pitchFamily="34" charset="-122"/>
                 <a:cs typeface="Trebuchet MS" pitchFamily="34" charset="-120"/>
               </a:rPr>
-              <a:t>land</a:t>
+              <a:t>over</a:t>
             </a:r>
             <a:endParaRPr lang="en-US" sz="1300" dirty="0"/>
           </a:p>
@@ -29718,7 +30246,7 @@
                 <a:ea typeface="Calibri" pitchFamily="34" charset="-122"/>
                 <a:cs typeface="Calibri" pitchFamily="34" charset="-120"/>
               </a:rPr>
-              <a:t>ground, earth, territory</a:t>
+              <a:t>too much</a:t>
             </a:r>
             <a:endParaRPr lang="en-US" sz="850" dirty="0"/>
           </a:p>
@@ -29741,11 +30269,11 @@
             </a:avLst>
           </a:prstGeom>
           <a:solidFill>
-            <a:srgbClr val="FCE7F3"/>
+            <a:srgbClr val="CCFBF1"/>
           </a:solidFill>
           <a:ln w="19050">
             <a:solidFill>
-              <a:srgbClr val="DB2777"/>
+              <a:srgbClr val="0D9488"/>
             </a:solidFill>
             <a:prstDash val="solid"/>
           </a:ln>
@@ -29785,13 +30313,13 @@
             <a:r>
               <a:rPr lang="en-US" sz="1300" b="1" dirty="0">
                 <a:solidFill>
-                  <a:srgbClr val="9D174D"/>
+                  <a:srgbClr val="0F766E"/>
                 </a:solidFill>
                 <a:latin typeface="Trebuchet MS" pitchFamily="34" charset="0"/>
                 <a:ea typeface="Trebuchet MS" pitchFamily="34" charset="-122"/>
                 <a:cs typeface="Trebuchet MS" pitchFamily="34" charset="-120"/>
               </a:rPr>
-              <a:t>ing</a:t>
+              <a:t>land</a:t>
             </a:r>
             <a:endParaRPr lang="en-US" sz="1300" dirty="0"/>
           </a:p>
@@ -29830,7 +30358,7 @@
                 <a:ea typeface="Calibri" pitchFamily="34" charset="-122"/>
                 <a:cs typeface="Calibri" pitchFamily="34" charset="-120"/>
               </a:rPr>
-              <a:t>action happening now or ongoing</a:t>
+              <a:t>an area of ground; to arrive</a:t>
             </a:r>
             <a:endParaRPr lang="en-US" sz="850" dirty="0"/>
           </a:p>
@@ -29937,7 +30465,7 @@
         </p:nvSpPr>
         <p:spPr>
           <a:xfrm>
-            <a:off x="2999232" y="3364992"/>
+            <a:off x="2313432" y="3364992"/>
             <a:ext cx="1645920" cy="475488"/>
           </a:xfrm>
           <a:prstGeom prst="rect">
@@ -29964,7 +30492,7 @@
         </p:nvSpPr>
         <p:spPr>
           <a:xfrm>
-            <a:off x="2999232" y="3364992"/>
+            <a:off x="2313432" y="3364992"/>
             <a:ext cx="1645920" cy="475488"/>
           </a:xfrm>
           <a:prstGeom prst="rect">
@@ -29989,7 +30517,7 @@
                 <a:ea typeface="Trebuchet MS" pitchFamily="34" charset="-122"/>
                 <a:cs typeface="Trebuchet MS" pitchFamily="34" charset="-120"/>
               </a:rPr>
-              <a:t>land</a:t>
+              <a:t>o</a:t>
             </a:r>
             <a:endParaRPr lang="en-US" sz="1400" dirty="0"/>
           </a:p>
@@ -30003,8 +30531,8 @@
         </p:nvSpPr>
         <p:spPr>
           <a:xfrm>
-            <a:off x="4645152" y="3364992"/>
-            <a:ext cx="1097280" cy="475488"/>
+            <a:off x="3959352" y="3364992"/>
+            <a:ext cx="411480" cy="475488"/>
           </a:xfrm>
           <a:prstGeom prst="rect">
             <a:avLst/>
@@ -30042,7 +30570,7 @@
         </p:nvSpPr>
         <p:spPr>
           <a:xfrm>
-            <a:off x="5742432" y="3364992"/>
+            <a:off x="4370832" y="3364992"/>
             <a:ext cx="1645920" cy="475488"/>
           </a:xfrm>
           <a:prstGeom prst="rect">
@@ -30069,7 +30597,7 @@
         </p:nvSpPr>
         <p:spPr>
           <a:xfrm>
-            <a:off x="5742432" y="3364992"/>
+            <a:off x="4370832" y="3364992"/>
             <a:ext cx="1645920" cy="475488"/>
           </a:xfrm>
           <a:prstGeom prst="rect">
@@ -30094,7 +30622,7 @@
                 <a:ea typeface="Trebuchet MS" pitchFamily="34" charset="-122"/>
                 <a:cs typeface="Trebuchet MS" pitchFamily="34" charset="-120"/>
               </a:rPr>
-              <a:t>ing</a:t>
+              <a:t>ver</a:t>
             </a:r>
             <a:endParaRPr lang="en-US" sz="1400" dirty="0"/>
           </a:p>
@@ -30102,7 +30630,112 @@
       </p:sp>
       <p:sp>
         <p:nvSpPr>
-          <p:cNvPr id="30" name="Shape 28"/>
+          <p:cNvPr id="30" name="Text 28"/>
+          <p:cNvSpPr/>
+          <p:nvPr/>
+        </p:nvSpPr>
+        <p:spPr>
+          <a:xfrm>
+            <a:off x="6016752" y="3364992"/>
+            <a:ext cx="411480" cy="475488"/>
+          </a:xfrm>
+          <a:prstGeom prst="rect">
+            <a:avLst/>
+          </a:prstGeom>
+          <a:noFill/>
+          <a:ln/>
+        </p:spPr>
+        <p:txBody>
+          <a:bodyPr wrap="square" lIns="0" tIns="0" rIns="0" bIns="0" rtlCol="0" anchor="ctr"/>
+          <a:lstStyle/>
+          <a:p>
+            <a:pPr algn="ctr" indent="0" marL="0">
+              <a:buNone/>
+            </a:pPr>
+            <a:r>
+              <a:rPr lang="en-US" sz="1600" b="1" dirty="0">
+                <a:solidFill>
+                  <a:srgbClr val="0D9488"/>
+                </a:solidFill>
+                <a:latin typeface="Trebuchet MS" pitchFamily="34" charset="0"/>
+                <a:ea typeface="Trebuchet MS" pitchFamily="34" charset="-122"/>
+                <a:cs typeface="Trebuchet MS" pitchFamily="34" charset="-120"/>
+              </a:rPr>
+              <a:t>·</a:t>
+            </a:r>
+            <a:endParaRPr lang="en-US" sz="1600" dirty="0"/>
+          </a:p>
+        </p:txBody>
+      </p:sp>
+      <p:sp>
+        <p:nvSpPr>
+          <p:cNvPr id="31" name="Shape 29"/>
+          <p:cNvSpPr/>
+          <p:nvPr/>
+        </p:nvSpPr>
+        <p:spPr>
+          <a:xfrm>
+            <a:off x="6428232" y="3364992"/>
+            <a:ext cx="1645920" cy="475488"/>
+          </a:xfrm>
+          <a:prstGeom prst="rect">
+            <a:avLst>
+              <a:gd name="adj" fmla="val 9615"/>
+            </a:avLst>
+          </a:prstGeom>
+          <a:solidFill>
+            <a:srgbClr val="FFFFFF"/>
+          </a:solidFill>
+          <a:ln w="12700">
+            <a:solidFill>
+              <a:srgbClr val="0D9488"/>
+            </a:solidFill>
+            <a:prstDash val="solid"/>
+          </a:ln>
+        </p:spPr>
+      </p:sp>
+      <p:sp>
+        <p:nvSpPr>
+          <p:cNvPr id="32" name="Text 30"/>
+          <p:cNvSpPr/>
+          <p:nvPr/>
+        </p:nvSpPr>
+        <p:spPr>
+          <a:xfrm>
+            <a:off x="6428232" y="3364992"/>
+            <a:ext cx="1645920" cy="475488"/>
+          </a:xfrm>
+          <a:prstGeom prst="rect">
+            <a:avLst/>
+          </a:prstGeom>
+          <a:noFill/>
+          <a:ln/>
+        </p:spPr>
+        <p:txBody>
+          <a:bodyPr wrap="square" lIns="0" tIns="0" rIns="0" bIns="0" rtlCol="0" anchor="ctr"/>
+          <a:lstStyle/>
+          <a:p>
+            <a:pPr algn="ctr" indent="0" marL="0">
+              <a:buNone/>
+            </a:pPr>
+            <a:r>
+              <a:rPr lang="en-US" sz="1400" b="1" dirty="0">
+                <a:solidFill>
+                  <a:srgbClr val="0D9488"/>
+                </a:solidFill>
+                <a:latin typeface="Trebuchet MS" pitchFamily="34" charset="0"/>
+                <a:ea typeface="Trebuchet MS" pitchFamily="34" charset="-122"/>
+                <a:cs typeface="Trebuchet MS" pitchFamily="34" charset="-120"/>
+              </a:rPr>
+              <a:t>land</a:t>
+            </a:r>
+            <a:endParaRPr lang="en-US" sz="1400" dirty="0"/>
+          </a:p>
+        </p:txBody>
+      </p:sp>
+      <p:sp>
+        <p:nvSpPr>
+          <p:cNvPr id="33" name="Shape 31"/>
           <p:cNvSpPr/>
           <p:nvPr/>
         </p:nvSpPr>
@@ -30129,7 +30762,7 @@
       </p:sp>
       <p:sp>
         <p:nvSpPr>
-          <p:cNvPr id="31" name="Text 29"/>
+          <p:cNvPr id="34" name="Text 32"/>
           <p:cNvSpPr/>
           <p:nvPr/>
         </p:nvSpPr>
@@ -30168,7 +30801,7 @@
       </p:sp>
       <p:sp>
         <p:nvSpPr>
-          <p:cNvPr id="32" name="Shape 30"/>
+          <p:cNvPr id="35" name="Shape 33"/>
           <p:cNvSpPr/>
           <p:nvPr/>
         </p:nvSpPr>
@@ -30195,7 +30828,7 @@
       </p:sp>
       <p:sp>
         <p:nvSpPr>
-          <p:cNvPr id="33" name="Text 31"/>
+          <p:cNvPr id="36" name="Text 34"/>
           <p:cNvSpPr/>
           <p:nvPr/>
         </p:nvSpPr>
@@ -30518,7 +31151,7 @@
                 <a:ea typeface="Calibri" pitchFamily="34" charset="-122"/>
                 <a:cs typeface="Calibri" pitchFamily="34" charset="-120"/>
               </a:rPr>
-              <a:t>Word Labs  •  wordlabs.app  •  Root: 'land' = ground, earth, territory</a:t>
+              <a:t>Word Labs  •  wordlabs.app  •  Root: 'land' = an area of ground; to arrive</a:t>
             </a:r>
             <a:endParaRPr lang="en-US" sz="800" dirty="0"/>
           </a:p>
@@ -30657,7 +31290,7 @@
                 <a:ea typeface="Trebuchet MS" pitchFamily="34" charset="-122"/>
                 <a:cs typeface="Trebuchet MS" pitchFamily="34" charset="-120"/>
               </a:rPr>
-              <a:t>landing</a:t>
+              <a:t>overland</a:t>
             </a:r>
             <a:endParaRPr lang="en-US" sz="2800" dirty="0"/>
           </a:p>
@@ -30746,11 +31379,11 @@
             </a:avLst>
           </a:prstGeom>
           <a:solidFill>
-            <a:srgbClr val="CCFBF1"/>
+            <a:srgbClr val="DDD6FE"/>
           </a:solidFill>
           <a:ln w="19050">
             <a:solidFill>
-              <a:srgbClr val="0D9488"/>
+              <a:srgbClr val="7C3AED"/>
             </a:solidFill>
             <a:prstDash val="solid"/>
           </a:ln>
@@ -30790,13 +31423,13 @@
             <a:r>
               <a:rPr lang="en-US" sz="1300" b="1" dirty="0">
                 <a:solidFill>
-                  <a:srgbClr val="0F766E"/>
+                  <a:srgbClr val="4C1D95"/>
                 </a:solidFill>
                 <a:latin typeface="Trebuchet MS" pitchFamily="34" charset="0"/>
                 <a:ea typeface="Trebuchet MS" pitchFamily="34" charset="-122"/>
                 <a:cs typeface="Trebuchet MS" pitchFamily="34" charset="-120"/>
               </a:rPr>
-              <a:t>land</a:t>
+              <a:t>over</a:t>
             </a:r>
             <a:endParaRPr lang="en-US" sz="1300" dirty="0"/>
           </a:p>
@@ -30835,7 +31468,7 @@
                 <a:ea typeface="Calibri" pitchFamily="34" charset="-122"/>
                 <a:cs typeface="Calibri" pitchFamily="34" charset="-120"/>
               </a:rPr>
-              <a:t>ground, earth, territory</a:t>
+              <a:t>too much</a:t>
             </a:r>
             <a:endParaRPr lang="en-US" sz="850" dirty="0"/>
           </a:p>
@@ -30858,11 +31491,11 @@
             </a:avLst>
           </a:prstGeom>
           <a:solidFill>
-            <a:srgbClr val="FCE7F3"/>
+            <a:srgbClr val="CCFBF1"/>
           </a:solidFill>
           <a:ln w="19050">
             <a:solidFill>
-              <a:srgbClr val="DB2777"/>
+              <a:srgbClr val="0D9488"/>
             </a:solidFill>
             <a:prstDash val="solid"/>
           </a:ln>
@@ -30902,13 +31535,13 @@
             <a:r>
               <a:rPr lang="en-US" sz="1300" b="1" dirty="0">
                 <a:solidFill>
-                  <a:srgbClr val="9D174D"/>
+                  <a:srgbClr val="0F766E"/>
                 </a:solidFill>
                 <a:latin typeface="Trebuchet MS" pitchFamily="34" charset="0"/>
                 <a:ea typeface="Trebuchet MS" pitchFamily="34" charset="-122"/>
                 <a:cs typeface="Trebuchet MS" pitchFamily="34" charset="-120"/>
               </a:rPr>
-              <a:t>ing</a:t>
+              <a:t>land</a:t>
             </a:r>
             <a:endParaRPr lang="en-US" sz="1300" dirty="0"/>
           </a:p>
@@ -30947,7 +31580,7 @@
                 <a:ea typeface="Calibri" pitchFamily="34" charset="-122"/>
                 <a:cs typeface="Calibri" pitchFamily="34" charset="-120"/>
               </a:rPr>
-              <a:t>action happening now or ongoing</a:t>
+              <a:t>an area of ground; to arrive</a:t>
             </a:r>
             <a:endParaRPr lang="en-US" sz="850" dirty="0"/>
           </a:p>
@@ -31054,7 +31687,7 @@
         </p:nvSpPr>
         <p:spPr>
           <a:xfrm>
-            <a:off x="2999232" y="3364992"/>
+            <a:off x="2313432" y="3364992"/>
             <a:ext cx="1645920" cy="475488"/>
           </a:xfrm>
           <a:prstGeom prst="rect">
@@ -31081,7 +31714,7 @@
         </p:nvSpPr>
         <p:spPr>
           <a:xfrm>
-            <a:off x="2999232" y="3364992"/>
+            <a:off x="2313432" y="3364992"/>
             <a:ext cx="1645920" cy="475488"/>
           </a:xfrm>
           <a:prstGeom prst="rect">
@@ -31106,7 +31739,7 @@
                 <a:ea typeface="Trebuchet MS" pitchFamily="34" charset="-122"/>
                 <a:cs typeface="Trebuchet MS" pitchFamily="34" charset="-120"/>
               </a:rPr>
-              <a:t>land</a:t>
+              <a:t>o</a:t>
             </a:r>
             <a:endParaRPr lang="en-US" sz="1400" dirty="0"/>
           </a:p>
@@ -31120,8 +31753,8 @@
         </p:nvSpPr>
         <p:spPr>
           <a:xfrm>
-            <a:off x="4645152" y="3364992"/>
-            <a:ext cx="1097280" cy="475488"/>
+            <a:off x="3959352" y="3364992"/>
+            <a:ext cx="411480" cy="475488"/>
           </a:xfrm>
           <a:prstGeom prst="rect">
             <a:avLst/>
@@ -31159,7 +31792,7 @@
         </p:nvSpPr>
         <p:spPr>
           <a:xfrm>
-            <a:off x="5742432" y="3364992"/>
+            <a:off x="4370832" y="3364992"/>
             <a:ext cx="1645920" cy="475488"/>
           </a:xfrm>
           <a:prstGeom prst="rect">
@@ -31186,7 +31819,7 @@
         </p:nvSpPr>
         <p:spPr>
           <a:xfrm>
-            <a:off x="5742432" y="3364992"/>
+            <a:off x="4370832" y="3364992"/>
             <a:ext cx="1645920" cy="475488"/>
           </a:xfrm>
           <a:prstGeom prst="rect">
@@ -31211,7 +31844,7 @@
                 <a:ea typeface="Trebuchet MS" pitchFamily="34" charset="-122"/>
                 <a:cs typeface="Trebuchet MS" pitchFamily="34" charset="-120"/>
               </a:rPr>
-              <a:t>ing</a:t>
+              <a:t>ver</a:t>
             </a:r>
             <a:endParaRPr lang="en-US" sz="1400" dirty="0"/>
           </a:p>
@@ -31219,7 +31852,112 @@
       </p:sp>
       <p:sp>
         <p:nvSpPr>
-          <p:cNvPr id="30" name="Shape 28"/>
+          <p:cNvPr id="30" name="Text 28"/>
+          <p:cNvSpPr/>
+          <p:nvPr/>
+        </p:nvSpPr>
+        <p:spPr>
+          <a:xfrm>
+            <a:off x="6016752" y="3364992"/>
+            <a:ext cx="411480" cy="475488"/>
+          </a:xfrm>
+          <a:prstGeom prst="rect">
+            <a:avLst/>
+          </a:prstGeom>
+          <a:noFill/>
+          <a:ln/>
+        </p:spPr>
+        <p:txBody>
+          <a:bodyPr wrap="square" lIns="0" tIns="0" rIns="0" bIns="0" rtlCol="0" anchor="ctr"/>
+          <a:lstStyle/>
+          <a:p>
+            <a:pPr algn="ctr" indent="0" marL="0">
+              <a:buNone/>
+            </a:pPr>
+            <a:r>
+              <a:rPr lang="en-US" sz="1600" b="1" dirty="0">
+                <a:solidFill>
+                  <a:srgbClr val="0D9488"/>
+                </a:solidFill>
+                <a:latin typeface="Trebuchet MS" pitchFamily="34" charset="0"/>
+                <a:ea typeface="Trebuchet MS" pitchFamily="34" charset="-122"/>
+                <a:cs typeface="Trebuchet MS" pitchFamily="34" charset="-120"/>
+              </a:rPr>
+              <a:t>·</a:t>
+            </a:r>
+            <a:endParaRPr lang="en-US" sz="1600" dirty="0"/>
+          </a:p>
+        </p:txBody>
+      </p:sp>
+      <p:sp>
+        <p:nvSpPr>
+          <p:cNvPr id="31" name="Shape 29"/>
+          <p:cNvSpPr/>
+          <p:nvPr/>
+        </p:nvSpPr>
+        <p:spPr>
+          <a:xfrm>
+            <a:off x="6428232" y="3364992"/>
+            <a:ext cx="1645920" cy="475488"/>
+          </a:xfrm>
+          <a:prstGeom prst="rect">
+            <a:avLst>
+              <a:gd name="adj" fmla="val 9615"/>
+            </a:avLst>
+          </a:prstGeom>
+          <a:solidFill>
+            <a:srgbClr val="FFFFFF"/>
+          </a:solidFill>
+          <a:ln w="12700">
+            <a:solidFill>
+              <a:srgbClr val="0D9488"/>
+            </a:solidFill>
+            <a:prstDash val="solid"/>
+          </a:ln>
+        </p:spPr>
+      </p:sp>
+      <p:sp>
+        <p:nvSpPr>
+          <p:cNvPr id="32" name="Text 30"/>
+          <p:cNvSpPr/>
+          <p:nvPr/>
+        </p:nvSpPr>
+        <p:spPr>
+          <a:xfrm>
+            <a:off x="6428232" y="3364992"/>
+            <a:ext cx="1645920" cy="475488"/>
+          </a:xfrm>
+          <a:prstGeom prst="rect">
+            <a:avLst/>
+          </a:prstGeom>
+          <a:noFill/>
+          <a:ln/>
+        </p:spPr>
+        <p:txBody>
+          <a:bodyPr wrap="square" lIns="0" tIns="0" rIns="0" bIns="0" rtlCol="0" anchor="ctr"/>
+          <a:lstStyle/>
+          <a:p>
+            <a:pPr algn="ctr" indent="0" marL="0">
+              <a:buNone/>
+            </a:pPr>
+            <a:r>
+              <a:rPr lang="en-US" sz="1400" b="1" dirty="0">
+                <a:solidFill>
+                  <a:srgbClr val="0D9488"/>
+                </a:solidFill>
+                <a:latin typeface="Trebuchet MS" pitchFamily="34" charset="0"/>
+                <a:ea typeface="Trebuchet MS" pitchFamily="34" charset="-122"/>
+                <a:cs typeface="Trebuchet MS" pitchFamily="34" charset="-120"/>
+              </a:rPr>
+              <a:t>land</a:t>
+            </a:r>
+            <a:endParaRPr lang="en-US" sz="1400" dirty="0"/>
+          </a:p>
+        </p:txBody>
+      </p:sp>
+      <p:sp>
+        <p:nvSpPr>
+          <p:cNvPr id="33" name="Shape 31"/>
           <p:cNvSpPr/>
           <p:nvPr/>
         </p:nvSpPr>
@@ -31246,7 +31984,7 @@
       </p:sp>
       <p:sp>
         <p:nvSpPr>
-          <p:cNvPr id="31" name="Text 29"/>
+          <p:cNvPr id="34" name="Text 32"/>
           <p:cNvSpPr/>
           <p:nvPr/>
         </p:nvSpPr>
@@ -31285,7 +32023,7 @@
       </p:sp>
       <p:sp>
         <p:nvSpPr>
-          <p:cNvPr id="32" name="Shape 30"/>
+          <p:cNvPr id="35" name="Shape 33"/>
           <p:cNvSpPr/>
           <p:nvPr/>
         </p:nvSpPr>
@@ -31312,13 +32050,13 @@
       </p:sp>
       <p:sp>
         <p:nvSpPr>
-          <p:cNvPr id="33" name="Shape 31"/>
-          <p:cNvSpPr/>
-          <p:nvPr/>
-        </p:nvSpPr>
-        <p:spPr>
-          <a:xfrm>
-            <a:off x="2254649" y="4169664"/>
+          <p:cNvPr id="36" name="Shape 34"/>
+          <p:cNvSpPr/>
+          <p:nvPr/>
+        </p:nvSpPr>
+        <p:spPr>
+          <a:xfrm>
+            <a:off x="2124837" y="4169664"/>
             <a:ext cx="685800" cy="475488"/>
           </a:xfrm>
           <a:prstGeom prst="rect">
@@ -31339,13 +32077,13 @@
       </p:sp>
       <p:sp>
         <p:nvSpPr>
-          <p:cNvPr id="34" name="Text 32"/>
-          <p:cNvSpPr/>
-          <p:nvPr/>
-        </p:nvSpPr>
-        <p:spPr>
-          <a:xfrm>
-            <a:off x="2254649" y="4169664"/>
+          <p:cNvPr id="37" name="Text 35"/>
+          <p:cNvSpPr/>
+          <p:nvPr/>
+        </p:nvSpPr>
+        <p:spPr>
+          <a:xfrm>
+            <a:off x="2124837" y="4169664"/>
             <a:ext cx="685800" cy="475488"/>
           </a:xfrm>
           <a:prstGeom prst="rect">
@@ -31370,7 +32108,7 @@
                 <a:ea typeface="Trebuchet MS" pitchFamily="34" charset="-122"/>
                 <a:cs typeface="Trebuchet MS" pitchFamily="34" charset="-120"/>
               </a:rPr>
-              <a:t>l</a:t>
+              <a:t>o</a:t>
             </a:r>
             <a:endParaRPr lang="en-US" sz="900" dirty="0"/>
           </a:p>
@@ -31378,13 +32116,13 @@
       </p:sp>
       <p:sp>
         <p:nvSpPr>
-          <p:cNvPr id="35" name="Shape 33"/>
-          <p:cNvSpPr/>
-          <p:nvPr/>
-        </p:nvSpPr>
-        <p:spPr>
-          <a:xfrm>
-            <a:off x="3293146" y="4169664"/>
+          <p:cNvPr id="38" name="Shape 36"/>
+          <p:cNvSpPr/>
+          <p:nvPr/>
+        </p:nvSpPr>
+        <p:spPr>
+          <a:xfrm>
+            <a:off x="3033522" y="4169664"/>
             <a:ext cx="685800" cy="475488"/>
           </a:xfrm>
           <a:prstGeom prst="rect">
@@ -31405,13 +32143,13 @@
       </p:sp>
       <p:sp>
         <p:nvSpPr>
-          <p:cNvPr id="36" name="Text 34"/>
-          <p:cNvSpPr/>
-          <p:nvPr/>
-        </p:nvSpPr>
-        <p:spPr>
-          <a:xfrm>
-            <a:off x="3293146" y="4169664"/>
+          <p:cNvPr id="39" name="Text 37"/>
+          <p:cNvSpPr/>
+          <p:nvPr/>
+        </p:nvSpPr>
+        <p:spPr>
+          <a:xfrm>
+            <a:off x="3033522" y="4169664"/>
             <a:ext cx="685800" cy="475488"/>
           </a:xfrm>
           <a:prstGeom prst="rect">
@@ -31436,7 +32174,7 @@
                 <a:ea typeface="Trebuchet MS" pitchFamily="34" charset="-122"/>
                 <a:cs typeface="Trebuchet MS" pitchFamily="34" charset="-120"/>
               </a:rPr>
-              <a:t>a</a:t>
+              <a:t>v</a:t>
             </a:r>
             <a:endParaRPr lang="en-US" sz="900" dirty="0"/>
           </a:p>
@@ -31444,13 +32182,13 @@
       </p:sp>
       <p:sp>
         <p:nvSpPr>
-          <p:cNvPr id="37" name="Shape 35"/>
-          <p:cNvSpPr/>
-          <p:nvPr/>
-        </p:nvSpPr>
-        <p:spPr>
-          <a:xfrm>
-            <a:off x="4331643" y="4169664"/>
+          <p:cNvPr id="40" name="Shape 38"/>
+          <p:cNvSpPr/>
+          <p:nvPr/>
+        </p:nvSpPr>
+        <p:spPr>
+          <a:xfrm>
+            <a:off x="3942207" y="4169664"/>
             <a:ext cx="685800" cy="475488"/>
           </a:xfrm>
           <a:prstGeom prst="rect">
@@ -31471,13 +32209,13 @@
       </p:sp>
       <p:sp>
         <p:nvSpPr>
-          <p:cNvPr id="38" name="Text 36"/>
-          <p:cNvSpPr/>
-          <p:nvPr/>
-        </p:nvSpPr>
-        <p:spPr>
-          <a:xfrm>
-            <a:off x="4331643" y="4169664"/>
+          <p:cNvPr id="41" name="Text 39"/>
+          <p:cNvSpPr/>
+          <p:nvPr/>
+        </p:nvSpPr>
+        <p:spPr>
+          <a:xfrm>
+            <a:off x="3942207" y="4169664"/>
             <a:ext cx="685800" cy="475488"/>
           </a:xfrm>
           <a:prstGeom prst="rect">
@@ -31502,7 +32240,7 @@
                 <a:ea typeface="Trebuchet MS" pitchFamily="34" charset="-122"/>
                 <a:cs typeface="Trebuchet MS" pitchFamily="34" charset="-120"/>
               </a:rPr>
-              <a:t>n</a:t>
+              <a:t>er</a:t>
             </a:r>
             <a:endParaRPr lang="en-US" sz="900" dirty="0"/>
           </a:p>
@@ -31510,13 +32248,13 @@
       </p:sp>
       <p:sp>
         <p:nvSpPr>
-          <p:cNvPr id="39" name="Shape 37"/>
-          <p:cNvSpPr/>
-          <p:nvPr/>
-        </p:nvSpPr>
-        <p:spPr>
-          <a:xfrm>
-            <a:off x="5370141" y="4169664"/>
+          <p:cNvPr id="42" name="Shape 40"/>
+          <p:cNvSpPr/>
+          <p:nvPr/>
+        </p:nvSpPr>
+        <p:spPr>
+          <a:xfrm>
+            <a:off x="4850892" y="4169664"/>
             <a:ext cx="685800" cy="475488"/>
           </a:xfrm>
           <a:prstGeom prst="rect">
@@ -31537,13 +32275,13 @@
       </p:sp>
       <p:sp>
         <p:nvSpPr>
-          <p:cNvPr id="40" name="Text 38"/>
-          <p:cNvSpPr/>
-          <p:nvPr/>
-        </p:nvSpPr>
-        <p:spPr>
-          <a:xfrm>
-            <a:off x="5370141" y="4169664"/>
+          <p:cNvPr id="43" name="Text 41"/>
+          <p:cNvSpPr/>
+          <p:nvPr/>
+        </p:nvSpPr>
+        <p:spPr>
+          <a:xfrm>
+            <a:off x="4850892" y="4169664"/>
             <a:ext cx="685800" cy="475488"/>
           </a:xfrm>
           <a:prstGeom prst="rect">
@@ -31568,7 +32306,7 @@
                 <a:ea typeface="Trebuchet MS" pitchFamily="34" charset="-122"/>
                 <a:cs typeface="Trebuchet MS" pitchFamily="34" charset="-120"/>
               </a:rPr>
-              <a:t>d</a:t>
+              <a:t>l</a:t>
             </a:r>
             <a:endParaRPr lang="en-US" sz="900" dirty="0"/>
           </a:p>
@@ -31576,13 +32314,13 @@
       </p:sp>
       <p:sp>
         <p:nvSpPr>
-          <p:cNvPr id="41" name="Shape 39"/>
-          <p:cNvSpPr/>
-          <p:nvPr/>
-        </p:nvSpPr>
-        <p:spPr>
-          <a:xfrm>
-            <a:off x="6408638" y="4169664"/>
+          <p:cNvPr id="44" name="Shape 42"/>
+          <p:cNvSpPr/>
+          <p:nvPr/>
+        </p:nvSpPr>
+        <p:spPr>
+          <a:xfrm>
+            <a:off x="5759577" y="4169664"/>
             <a:ext cx="685800" cy="475488"/>
           </a:xfrm>
           <a:prstGeom prst="rect">
@@ -31603,13 +32341,13 @@
       </p:sp>
       <p:sp>
         <p:nvSpPr>
-          <p:cNvPr id="42" name="Text 40"/>
-          <p:cNvSpPr/>
-          <p:nvPr/>
-        </p:nvSpPr>
-        <p:spPr>
-          <a:xfrm>
-            <a:off x="6408638" y="4169664"/>
+          <p:cNvPr id="45" name="Text 43"/>
+          <p:cNvSpPr/>
+          <p:nvPr/>
+        </p:nvSpPr>
+        <p:spPr>
+          <a:xfrm>
+            <a:off x="5759577" y="4169664"/>
             <a:ext cx="685800" cy="475488"/>
           </a:xfrm>
           <a:prstGeom prst="rect">
@@ -31634,7 +32372,7 @@
                 <a:ea typeface="Trebuchet MS" pitchFamily="34" charset="-122"/>
                 <a:cs typeface="Trebuchet MS" pitchFamily="34" charset="-120"/>
               </a:rPr>
-              <a:t>i</a:t>
+              <a:t>a</a:t>
             </a:r>
             <a:endParaRPr lang="en-US" sz="900" dirty="0"/>
           </a:p>
@@ -31642,13 +32380,13 @@
       </p:sp>
       <p:sp>
         <p:nvSpPr>
-          <p:cNvPr id="43" name="Shape 41"/>
-          <p:cNvSpPr/>
-          <p:nvPr/>
-        </p:nvSpPr>
-        <p:spPr>
-          <a:xfrm>
-            <a:off x="7447135" y="4169664"/>
+          <p:cNvPr id="46" name="Shape 44"/>
+          <p:cNvSpPr/>
+          <p:nvPr/>
+        </p:nvSpPr>
+        <p:spPr>
+          <a:xfrm>
+            <a:off x="6668262" y="4169664"/>
             <a:ext cx="685800" cy="475488"/>
           </a:xfrm>
           <a:prstGeom prst="rect">
@@ -31669,13 +32407,13 @@
       </p:sp>
       <p:sp>
         <p:nvSpPr>
-          <p:cNvPr id="44" name="Text 42"/>
-          <p:cNvSpPr/>
-          <p:nvPr/>
-        </p:nvSpPr>
-        <p:spPr>
-          <a:xfrm>
-            <a:off x="7447135" y="4169664"/>
+          <p:cNvPr id="47" name="Text 45"/>
+          <p:cNvSpPr/>
+          <p:nvPr/>
+        </p:nvSpPr>
+        <p:spPr>
+          <a:xfrm>
+            <a:off x="6668262" y="4169664"/>
             <a:ext cx="685800" cy="475488"/>
           </a:xfrm>
           <a:prstGeom prst="rect">
@@ -31700,7 +32438,73 @@
                 <a:ea typeface="Trebuchet MS" pitchFamily="34" charset="-122"/>
                 <a:cs typeface="Trebuchet MS" pitchFamily="34" charset="-120"/>
               </a:rPr>
-              <a:t>ng</a:t>
+              <a:t>n</a:t>
+            </a:r>
+            <a:endParaRPr lang="en-US" sz="900" dirty="0"/>
+          </a:p>
+        </p:txBody>
+      </p:sp>
+      <p:sp>
+        <p:nvSpPr>
+          <p:cNvPr id="48" name="Shape 46"/>
+          <p:cNvSpPr/>
+          <p:nvPr/>
+        </p:nvSpPr>
+        <p:spPr>
+          <a:xfrm>
+            <a:off x="7576947" y="4169664"/>
+            <a:ext cx="685800" cy="475488"/>
+          </a:xfrm>
+          <a:prstGeom prst="rect">
+            <a:avLst>
+              <a:gd name="adj" fmla="val 7692"/>
+            </a:avLst>
+          </a:prstGeom>
+          <a:solidFill>
+            <a:srgbClr val="FFFFFF"/>
+          </a:solidFill>
+          <a:ln w="12700">
+            <a:solidFill>
+              <a:srgbClr val="DB2777"/>
+            </a:solidFill>
+            <a:prstDash val="solid"/>
+          </a:ln>
+        </p:spPr>
+      </p:sp>
+      <p:sp>
+        <p:nvSpPr>
+          <p:cNvPr id="49" name="Text 47"/>
+          <p:cNvSpPr/>
+          <p:nvPr/>
+        </p:nvSpPr>
+        <p:spPr>
+          <a:xfrm>
+            <a:off x="7576947" y="4169664"/>
+            <a:ext cx="685800" cy="475488"/>
+          </a:xfrm>
+          <a:prstGeom prst="rect">
+            <a:avLst/>
+          </a:prstGeom>
+          <a:noFill/>
+          <a:ln/>
+        </p:spPr>
+        <p:txBody>
+          <a:bodyPr wrap="square" lIns="0" tIns="0" rIns="0" bIns="0" rtlCol="0" anchor="ctr"/>
+          <a:lstStyle/>
+          <a:p>
+            <a:pPr algn="ctr" indent="0" marL="0">
+              <a:buNone/>
+            </a:pPr>
+            <a:r>
+              <a:rPr lang="en-US" sz="900" b="1" dirty="0">
+                <a:solidFill>
+                  <a:srgbClr val="9D174D"/>
+                </a:solidFill>
+                <a:latin typeface="Trebuchet MS" pitchFamily="34" charset="0"/>
+                <a:ea typeface="Trebuchet MS" pitchFamily="34" charset="-122"/>
+                <a:cs typeface="Trebuchet MS" pitchFamily="34" charset="-120"/>
+              </a:rPr>
+              <a:t>d</a:t>
             </a:r>
             <a:endParaRPr lang="en-US" sz="900" dirty="0"/>
           </a:p>
@@ -31992,7 +32796,7 @@
                 <a:ea typeface="Calibri" pitchFamily="34" charset="-122"/>
                 <a:cs typeface="Calibri" pitchFamily="34" charset="-120"/>
               </a:rPr>
-              <a:t>Word Labs  •  wordlabs.app  •  Root: 'land' = ground, earth, territory</a:t>
+              <a:t>Word Labs  •  wordlabs.app  •  Root: 'land' = an area of ground; to arrive</a:t>
             </a:r>
             <a:endParaRPr lang="en-US" sz="800" dirty="0"/>
           </a:p>
@@ -33161,7 +33965,7 @@
                 <a:ea typeface="Calibri" pitchFamily="34" charset="-122"/>
                 <a:cs typeface="Calibri" pitchFamily="34" charset="-120"/>
               </a:rPr>
-              <a:t>Word Labs  •  wordlabs.app  •  Root: 'land' = ground, earth, territory</a:t>
+              <a:t>Word Labs  •  wordlabs.app  •  Root: 'land' = an area of ground; to arrive</a:t>
             </a:r>
             <a:endParaRPr lang="en-US" sz="800" dirty="0"/>
           </a:p>
@@ -33462,7 +34266,7 @@
                 <a:ea typeface="Trebuchet MS" pitchFamily="34" charset="-122"/>
                 <a:cs typeface="Trebuchet MS" pitchFamily="34" charset="-120"/>
               </a:rPr>
-              <a:t>over-</a:t>
+              <a:t>mid-</a:t>
             </a:r>
             <a:endParaRPr lang="en-US" sz="1300" dirty="0"/>
           </a:p>
@@ -33654,7 +34458,7 @@
                 <a:ea typeface="Trebuchet MS" pitchFamily="34" charset="-122"/>
                 <a:cs typeface="Trebuchet MS" pitchFamily="34" charset="-120"/>
               </a:rPr>
-              <a:t>out-</a:t>
+              <a:t>over-</a:t>
             </a:r>
             <a:endParaRPr lang="en-US" sz="1300" dirty="0"/>
           </a:p>
@@ -33743,7 +34547,7 @@
                 <a:ea typeface="Trebuchet MS" pitchFamily="34" charset="-122"/>
                 <a:cs typeface="Trebuchet MS" pitchFamily="34" charset="-120"/>
               </a:rPr>
-              <a:t>-ing</a:t>
+              <a:t>-er</a:t>
             </a:r>
             <a:endParaRPr lang="en-US" sz="1300" dirty="0"/>
           </a:p>
@@ -33764,7 +34568,7 @@
             <a:avLst/>
           </a:prstGeom>
           <a:solidFill>
-            <a:srgbClr val="DDD6FE"/>
+            <a:srgbClr val="F8FAFC"/>
           </a:solidFill>
           <a:ln w="12700">
             <a:solidFill>
@@ -33776,14 +34580,64 @@
       </p:sp>
       <p:sp>
         <p:nvSpPr>
-          <p:cNvPr id="29" name="Text 27"/>
-          <p:cNvSpPr/>
-          <p:nvPr/>
-        </p:nvSpPr>
-        <p:spPr>
-          <a:xfrm>
-            <a:off x="365760" y="2404872"/>
-            <a:ext cx="2468880" cy="402336"/>
+          <p:cNvPr id="29" name="Shape 27"/>
+          <p:cNvSpPr/>
+          <p:nvPr/>
+        </p:nvSpPr>
+        <p:spPr>
+          <a:xfrm>
+            <a:off x="2971800" y="2404872"/>
+            <a:ext cx="2834640" cy="402336"/>
+          </a:xfrm>
+          <a:prstGeom prst="rect">
+            <a:avLst/>
+          </a:prstGeom>
+          <a:solidFill>
+            <a:srgbClr val="F8FAFC"/>
+          </a:solidFill>
+          <a:ln w="12700">
+            <a:solidFill>
+              <a:srgbClr val="E2E8F0"/>
+            </a:solidFill>
+            <a:prstDash val="solid"/>
+          </a:ln>
+        </p:spPr>
+      </p:sp>
+      <p:sp>
+        <p:nvSpPr>
+          <p:cNvPr id="30" name="Shape 28"/>
+          <p:cNvSpPr/>
+          <p:nvPr/>
+        </p:nvSpPr>
+        <p:spPr>
+          <a:xfrm>
+            <a:off x="5943600" y="2404872"/>
+            <a:ext cx="2834640" cy="402336"/>
+          </a:xfrm>
+          <a:prstGeom prst="rect">
+            <a:avLst/>
+          </a:prstGeom>
+          <a:solidFill>
+            <a:srgbClr val="FCE7F3"/>
+          </a:solidFill>
+          <a:ln w="12700">
+            <a:solidFill>
+              <a:srgbClr val="E2E8F0"/>
+            </a:solidFill>
+            <a:prstDash val="solid"/>
+          </a:ln>
+        </p:spPr>
+      </p:sp>
+      <p:sp>
+        <p:nvSpPr>
+          <p:cNvPr id="31" name="Text 29"/>
+          <p:cNvSpPr/>
+          <p:nvPr/>
+        </p:nvSpPr>
+        <p:spPr>
+          <a:xfrm>
+            <a:off x="5943600" y="2404872"/>
+            <a:ext cx="2834640" cy="402336"/>
           </a:xfrm>
           <a:prstGeom prst="rect">
             <a:avLst/>
@@ -33801,13 +34655,13 @@
             <a:r>
               <a:rPr lang="en-US" sz="1300" b="1" dirty="0">
                 <a:solidFill>
-                  <a:srgbClr val="4C1D95"/>
+                  <a:srgbClr val="9D174D"/>
                 </a:solidFill>
                 <a:latin typeface="Trebuchet MS" pitchFamily="34" charset="0"/>
                 <a:ea typeface="Trebuchet MS" pitchFamily="34" charset="-122"/>
                 <a:cs typeface="Trebuchet MS" pitchFamily="34" charset="-120"/>
               </a:rPr>
-              <a:t>up-</a:t>
+              <a:t>-ing</a:t>
             </a:r>
             <a:endParaRPr lang="en-US" sz="1300" dirty="0"/>
           </a:p>
@@ -33815,20 +34669,45 @@
       </p:sp>
       <p:sp>
         <p:nvSpPr>
-          <p:cNvPr id="30" name="Shape 28"/>
-          <p:cNvSpPr/>
-          <p:nvPr/>
-        </p:nvSpPr>
-        <p:spPr>
-          <a:xfrm>
-            <a:off x="2971800" y="2404872"/>
+          <p:cNvPr id="32" name="Shape 30"/>
+          <p:cNvSpPr/>
+          <p:nvPr/>
+        </p:nvSpPr>
+        <p:spPr>
+          <a:xfrm>
+            <a:off x="365760" y="2825496"/>
+            <a:ext cx="2468880" cy="402336"/>
+          </a:xfrm>
+          <a:prstGeom prst="rect">
+            <a:avLst/>
+          </a:prstGeom>
+          <a:solidFill>
+            <a:srgbClr val="F1F5F9"/>
+          </a:solidFill>
+          <a:ln w="12700">
+            <a:solidFill>
+              <a:srgbClr val="E2E8F0"/>
+            </a:solidFill>
+            <a:prstDash val="solid"/>
+          </a:ln>
+        </p:spPr>
+      </p:sp>
+      <p:sp>
+        <p:nvSpPr>
+          <p:cNvPr id="33" name="Shape 31"/>
+          <p:cNvSpPr/>
+          <p:nvPr/>
+        </p:nvSpPr>
+        <p:spPr>
+          <a:xfrm>
+            <a:off x="2971800" y="2825496"/>
             <a:ext cx="2834640" cy="402336"/>
           </a:xfrm>
           <a:prstGeom prst="rect">
             <a:avLst/>
           </a:prstGeom>
           <a:solidFill>
-            <a:srgbClr val="F8FAFC"/>
+            <a:srgbClr val="F1F5F9"/>
           </a:solidFill>
           <a:ln w="12700">
             <a:solidFill>
@@ -33840,13 +34719,13 @@
       </p:sp>
       <p:sp>
         <p:nvSpPr>
-          <p:cNvPr id="31" name="Shape 29"/>
-          <p:cNvSpPr/>
-          <p:nvPr/>
-        </p:nvSpPr>
-        <p:spPr>
-          <a:xfrm>
-            <a:off x="5943600" y="2404872"/>
+          <p:cNvPr id="34" name="Shape 32"/>
+          <p:cNvSpPr/>
+          <p:nvPr/>
+        </p:nvSpPr>
+        <p:spPr>
+          <a:xfrm>
+            <a:off x="5943600" y="2825496"/>
             <a:ext cx="2834640" cy="402336"/>
           </a:xfrm>
           <a:prstGeom prst="rect">
@@ -33865,13 +34744,13 @@
       </p:sp>
       <p:sp>
         <p:nvSpPr>
-          <p:cNvPr id="32" name="Text 30"/>
-          <p:cNvSpPr/>
-          <p:nvPr/>
-        </p:nvSpPr>
-        <p:spPr>
-          <a:xfrm>
-            <a:off x="5943600" y="2404872"/>
+          <p:cNvPr id="35" name="Text 33"/>
+          <p:cNvSpPr/>
+          <p:nvPr/>
+        </p:nvSpPr>
+        <p:spPr>
+          <a:xfrm>
+            <a:off x="5943600" y="2825496"/>
             <a:ext cx="2834640" cy="402336"/>
           </a:xfrm>
           <a:prstGeom prst="rect">
@@ -33896,7 +34775,7 @@
                 <a:ea typeface="Trebuchet MS" pitchFamily="34" charset="-122"/>
                 <a:cs typeface="Trebuchet MS" pitchFamily="34" charset="-120"/>
               </a:rPr>
-              <a:t>-er</a:t>
+              <a:t>-s</a:t>
             </a:r>
             <a:endParaRPr lang="en-US" sz="1300" dirty="0"/>
           </a:p>
@@ -33904,39 +34783,14 @@
       </p:sp>
       <p:sp>
         <p:nvSpPr>
-          <p:cNvPr id="33" name="Shape 31"/>
-          <p:cNvSpPr/>
-          <p:nvPr/>
-        </p:nvSpPr>
-        <p:spPr>
-          <a:xfrm>
-            <a:off x="365760" y="2825496"/>
-            <a:ext cx="2468880" cy="402336"/>
-          </a:xfrm>
-          <a:prstGeom prst="rect">
-            <a:avLst/>
-          </a:prstGeom>
-          <a:solidFill>
-            <a:srgbClr val="DDD6FE"/>
-          </a:solidFill>
-          <a:ln w="12700">
-            <a:solidFill>
-              <a:srgbClr val="E2E8F0"/>
-            </a:solidFill>
-            <a:prstDash val="solid"/>
-          </a:ln>
-        </p:spPr>
-      </p:sp>
-      <p:sp>
-        <p:nvSpPr>
-          <p:cNvPr id="34" name="Text 32"/>
-          <p:cNvSpPr/>
-          <p:nvPr/>
-        </p:nvSpPr>
-        <p:spPr>
-          <a:xfrm>
-            <a:off x="365760" y="2825496"/>
-            <a:ext cx="2468880" cy="402336"/>
+          <p:cNvPr id="36" name="Text 34"/>
+          <p:cNvSpPr/>
+          <p:nvPr/>
+        </p:nvSpPr>
+        <p:spPr>
+          <a:xfrm>
+            <a:off x="365760" y="3611880"/>
+            <a:ext cx="1828800" cy="347472"/>
           </a:xfrm>
           <a:prstGeom prst="rect">
             <a:avLst/>
@@ -33948,84 +34802,61 @@
           <a:bodyPr wrap="square" lIns="0" tIns="0" rIns="0" bIns="0" rtlCol="0" anchor="ctr"/>
           <a:lstStyle/>
           <a:p>
-            <a:pPr algn="ctr" indent="0" marL="0">
-              <a:buNone/>
-            </a:pPr>
-            <a:r>
-              <a:rPr lang="en-US" sz="1300" b="1" dirty="0">
-                <a:solidFill>
-                  <a:srgbClr val="4C1D95"/>
+            <a:pPr algn="l" indent="0" marL="0">
+              <a:buNone/>
+            </a:pPr>
+            <a:r>
+              <a:rPr lang="en-US" sz="1200" b="1" dirty="0">
+                <a:solidFill>
+                  <a:srgbClr val="0F172A"/>
                 </a:solidFill>
                 <a:latin typeface="Trebuchet MS" pitchFamily="34" charset="0"/>
                 <a:ea typeface="Trebuchet MS" pitchFamily="34" charset="-122"/>
                 <a:cs typeface="Trebuchet MS" pitchFamily="34" charset="-120"/>
               </a:rPr>
-              <a:t>waste-</a:t>
-            </a:r>
-            <a:endParaRPr lang="en-US" sz="1300" dirty="0"/>
-          </a:p>
-        </p:txBody>
-      </p:sp>
-      <p:sp>
-        <p:nvSpPr>
-          <p:cNvPr id="35" name="Shape 33"/>
-          <p:cNvSpPr/>
-          <p:nvPr/>
-        </p:nvSpPr>
-        <p:spPr>
-          <a:xfrm>
-            <a:off x="2971800" y="2825496"/>
-            <a:ext cx="2834640" cy="402336"/>
-          </a:xfrm>
-          <a:prstGeom prst="rect">
-            <a:avLst/>
-          </a:prstGeom>
-          <a:solidFill>
-            <a:srgbClr val="F1F5F9"/>
-          </a:solidFill>
-          <a:ln w="12700">
-            <a:solidFill>
-              <a:srgbClr val="E2E8F0"/>
-            </a:solidFill>
-            <a:prstDash val="solid"/>
-          </a:ln>
-        </p:spPr>
-      </p:sp>
-      <p:sp>
-        <p:nvSpPr>
-          <p:cNvPr id="36" name="Shape 34"/>
-          <p:cNvSpPr/>
-          <p:nvPr/>
-        </p:nvSpPr>
-        <p:spPr>
-          <a:xfrm>
-            <a:off x="5943600" y="2825496"/>
-            <a:ext cx="2834640" cy="402336"/>
-          </a:xfrm>
-          <a:prstGeom prst="rect">
-            <a:avLst/>
-          </a:prstGeom>
-          <a:solidFill>
-            <a:srgbClr val="FCE7F3"/>
-          </a:solidFill>
-          <a:ln w="12700">
-            <a:solidFill>
-              <a:srgbClr val="E2E8F0"/>
-            </a:solidFill>
-            <a:prstDash val="solid"/>
-          </a:ln>
-        </p:spPr>
-      </p:sp>
-      <p:sp>
-        <p:nvSpPr>
-          <p:cNvPr id="37" name="Text 35"/>
-          <p:cNvSpPr/>
-          <p:nvPr/>
-        </p:nvSpPr>
-        <p:spPr>
-          <a:xfrm>
-            <a:off x="5943600" y="2825496"/>
-            <a:ext cx="2834640" cy="402336"/>
+              <a:t>Sample words:</a:t>
+            </a:r>
+            <a:endParaRPr lang="en-US" sz="1200" dirty="0"/>
+          </a:p>
+        </p:txBody>
+      </p:sp>
+      <p:sp>
+        <p:nvSpPr>
+          <p:cNvPr id="37" name="Shape 35"/>
+          <p:cNvSpPr/>
+          <p:nvPr/>
+        </p:nvSpPr>
+        <p:spPr>
+          <a:xfrm>
+            <a:off x="365760" y="4023360"/>
+            <a:ext cx="2011680" cy="402336"/>
+          </a:xfrm>
+          <a:prstGeom prst="rect">
+            <a:avLst>
+              <a:gd name="adj" fmla="val 13636"/>
+            </a:avLst>
+          </a:prstGeom>
+          <a:solidFill>
+            <a:srgbClr val="EEF2FF"/>
+          </a:solidFill>
+          <a:ln w="12700">
+            <a:solidFill>
+              <a:srgbClr val="6366F1"/>
+            </a:solidFill>
+            <a:prstDash val="solid"/>
+          </a:ln>
+        </p:spPr>
+      </p:sp>
+      <p:sp>
+        <p:nvSpPr>
+          <p:cNvPr id="38" name="Text 36"/>
+          <p:cNvSpPr/>
+          <p:nvPr/>
+        </p:nvSpPr>
+        <p:spPr>
+          <a:xfrm>
+            <a:off x="365760" y="4023360"/>
+            <a:ext cx="2011680" cy="402336"/>
           </a:xfrm>
           <a:prstGeom prst="rect">
             <a:avLst/>
@@ -34041,55 +34872,57 @@
               <a:buNone/>
             </a:pPr>
             <a:r>
-              <a:rPr lang="en-US" sz="1300" b="1" dirty="0">
-                <a:solidFill>
-                  <a:srgbClr val="9D174D"/>
+              <a:rPr lang="en-US" sz="1200" b="1" dirty="0">
+                <a:solidFill>
+                  <a:srgbClr val="4338CA"/>
                 </a:solidFill>
                 <a:latin typeface="Trebuchet MS" pitchFamily="34" charset="0"/>
                 <a:ea typeface="Trebuchet MS" pitchFamily="34" charset="-122"/>
                 <a:cs typeface="Trebuchet MS" pitchFamily="34" charset="-120"/>
               </a:rPr>
-              <a:t>-mark</a:t>
-            </a:r>
-            <a:endParaRPr lang="en-US" sz="1300" dirty="0"/>
-          </a:p>
-        </p:txBody>
-      </p:sp>
-      <p:sp>
-        <p:nvSpPr>
-          <p:cNvPr id="38" name="Shape 36"/>
-          <p:cNvSpPr/>
-          <p:nvPr/>
-        </p:nvSpPr>
-        <p:spPr>
-          <a:xfrm>
-            <a:off x="365760" y="3246120"/>
-            <a:ext cx="2468880" cy="402336"/>
-          </a:xfrm>
-          <a:prstGeom prst="rect">
-            <a:avLst/>
-          </a:prstGeom>
-          <a:solidFill>
-            <a:srgbClr val="DDD6FE"/>
-          </a:solidFill>
-          <a:ln w="12700">
-            <a:solidFill>
-              <a:srgbClr val="E2E8F0"/>
-            </a:solidFill>
-            <a:prstDash val="solid"/>
-          </a:ln>
-        </p:spPr>
-      </p:sp>
-      <p:sp>
-        <p:nvSpPr>
-          <p:cNvPr id="39" name="Text 37"/>
-          <p:cNvSpPr/>
-          <p:nvPr/>
-        </p:nvSpPr>
-        <p:spPr>
-          <a:xfrm>
-            <a:off x="365760" y="3246120"/>
-            <a:ext cx="2468880" cy="402336"/>
+              <a:t>land</a:t>
+            </a:r>
+            <a:endParaRPr lang="en-US" sz="1200" dirty="0"/>
+          </a:p>
+        </p:txBody>
+      </p:sp>
+      <p:sp>
+        <p:nvSpPr>
+          <p:cNvPr id="39" name="Shape 37"/>
+          <p:cNvSpPr/>
+          <p:nvPr/>
+        </p:nvSpPr>
+        <p:spPr>
+          <a:xfrm>
+            <a:off x="2542032" y="4023360"/>
+            <a:ext cx="2011680" cy="402336"/>
+          </a:xfrm>
+          <a:prstGeom prst="rect">
+            <a:avLst>
+              <a:gd name="adj" fmla="val 13636"/>
+            </a:avLst>
+          </a:prstGeom>
+          <a:solidFill>
+            <a:srgbClr val="EEF2FF"/>
+          </a:solidFill>
+          <a:ln w="12700">
+            <a:solidFill>
+              <a:srgbClr val="6366F1"/>
+            </a:solidFill>
+            <a:prstDash val="solid"/>
+          </a:ln>
+        </p:spPr>
+      </p:sp>
+      <p:sp>
+        <p:nvSpPr>
+          <p:cNvPr id="40" name="Text 38"/>
+          <p:cNvSpPr/>
+          <p:nvPr/>
+        </p:nvSpPr>
+        <p:spPr>
+          <a:xfrm>
+            <a:off x="2542032" y="4023360"/>
+            <a:ext cx="2011680" cy="402336"/>
           </a:xfrm>
           <a:prstGeom prst="rect">
             <a:avLst/>
@@ -34105,44 +34938,19 @@
               <a:buNone/>
             </a:pPr>
             <a:r>
-              <a:rPr lang="en-US" sz="1300" b="1" dirty="0">
-                <a:solidFill>
-                  <a:srgbClr val="4C1D95"/>
+              <a:rPr lang="en-US" sz="1200" b="1" dirty="0">
+                <a:solidFill>
+                  <a:srgbClr val="4338CA"/>
                 </a:solidFill>
                 <a:latin typeface="Trebuchet MS" pitchFamily="34" charset="0"/>
                 <a:ea typeface="Trebuchet MS" pitchFamily="34" charset="-122"/>
                 <a:cs typeface="Trebuchet MS" pitchFamily="34" charset="-120"/>
               </a:rPr>
-              <a:t>farm-</a:t>
-            </a:r>
-            <a:endParaRPr lang="en-US" sz="1300" dirty="0"/>
-          </a:p>
-        </p:txBody>
-      </p:sp>
-      <p:sp>
-        <p:nvSpPr>
-          <p:cNvPr id="40" name="Shape 38"/>
-          <p:cNvSpPr/>
-          <p:nvPr/>
-        </p:nvSpPr>
-        <p:spPr>
-          <a:xfrm>
-            <a:off x="2971800" y="3246120"/>
-            <a:ext cx="2834640" cy="402336"/>
-          </a:xfrm>
-          <a:prstGeom prst="rect">
-            <a:avLst/>
-          </a:prstGeom>
-          <a:solidFill>
-            <a:srgbClr val="F8FAFC"/>
-          </a:solidFill>
-          <a:ln w="12700">
-            <a:solidFill>
-              <a:srgbClr val="E2E8F0"/>
-            </a:solidFill>
-            <a:prstDash val="solid"/>
-          </a:ln>
-        </p:spPr>
+              <a:t>lands</a:t>
+            </a:r>
+            <a:endParaRPr lang="en-US" sz="1200" dirty="0"/>
+          </a:p>
+        </p:txBody>
       </p:sp>
       <p:sp>
         <p:nvSpPr>
@@ -34152,18 +34960,20 @@
         </p:nvSpPr>
         <p:spPr>
           <a:xfrm>
-            <a:off x="5943600" y="3246120"/>
-            <a:ext cx="2834640" cy="402336"/>
-          </a:xfrm>
-          <a:prstGeom prst="rect">
-            <a:avLst/>
-          </a:prstGeom>
-          <a:solidFill>
-            <a:srgbClr val="FCE7F3"/>
-          </a:solidFill>
-          <a:ln w="12700">
-            <a:solidFill>
-              <a:srgbClr val="E2E8F0"/>
+            <a:off x="4718304" y="4023360"/>
+            <a:ext cx="2011680" cy="402336"/>
+          </a:xfrm>
+          <a:prstGeom prst="rect">
+            <a:avLst>
+              <a:gd name="adj" fmla="val 13636"/>
+            </a:avLst>
+          </a:prstGeom>
+          <a:solidFill>
+            <a:srgbClr val="EEF2FF"/>
+          </a:solidFill>
+          <a:ln w="12700">
+            <a:solidFill>
+              <a:srgbClr val="6366F1"/>
             </a:solidFill>
             <a:prstDash val="solid"/>
           </a:ln>
@@ -34177,8 +34987,8 @@
         </p:nvSpPr>
         <p:spPr>
           <a:xfrm>
-            <a:off x="5943600" y="3246120"/>
-            <a:ext cx="2834640" cy="402336"/>
+            <a:off x="4718304" y="4023360"/>
+            <a:ext cx="2011680" cy="402336"/>
           </a:xfrm>
           <a:prstGeom prst="rect">
             <a:avLst/>
@@ -34194,30 +35004,57 @@
               <a:buNone/>
             </a:pPr>
             <a:r>
-              <a:rPr lang="en-US" sz="1300" b="1" dirty="0">
-                <a:solidFill>
-                  <a:srgbClr val="9D174D"/>
+              <a:rPr lang="en-US" sz="1200" b="1" dirty="0">
+                <a:solidFill>
+                  <a:srgbClr val="4338CA"/>
                 </a:solidFill>
                 <a:latin typeface="Trebuchet MS" pitchFamily="34" charset="0"/>
                 <a:ea typeface="Trebuchet MS" pitchFamily="34" charset="-122"/>
                 <a:cs typeface="Trebuchet MS" pitchFamily="34" charset="-120"/>
               </a:rPr>
-              <a:t>-scape</a:t>
-            </a:r>
-            <a:endParaRPr lang="en-US" sz="1300" dirty="0"/>
-          </a:p>
-        </p:txBody>
-      </p:sp>
-      <p:sp>
-        <p:nvSpPr>
-          <p:cNvPr id="43" name="Text 41"/>
-          <p:cNvSpPr/>
-          <p:nvPr/>
-        </p:nvSpPr>
-        <p:spPr>
-          <a:xfrm>
-            <a:off x="365760" y="3611880"/>
-            <a:ext cx="1828800" cy="347472"/>
+              <a:t>landed</a:t>
+            </a:r>
+            <a:endParaRPr lang="en-US" sz="1200" dirty="0"/>
+          </a:p>
+        </p:txBody>
+      </p:sp>
+      <p:sp>
+        <p:nvSpPr>
+          <p:cNvPr id="43" name="Shape 41"/>
+          <p:cNvSpPr/>
+          <p:nvPr/>
+        </p:nvSpPr>
+        <p:spPr>
+          <a:xfrm>
+            <a:off x="6894576" y="4023360"/>
+            <a:ext cx="2011680" cy="402336"/>
+          </a:xfrm>
+          <a:prstGeom prst="rect">
+            <a:avLst>
+              <a:gd name="adj" fmla="val 13636"/>
+            </a:avLst>
+          </a:prstGeom>
+          <a:solidFill>
+            <a:srgbClr val="EEF2FF"/>
+          </a:solidFill>
+          <a:ln w="12700">
+            <a:solidFill>
+              <a:srgbClr val="6366F1"/>
+            </a:solidFill>
+            <a:prstDash val="solid"/>
+          </a:ln>
+        </p:spPr>
+      </p:sp>
+      <p:sp>
+        <p:nvSpPr>
+          <p:cNvPr id="44" name="Text 42"/>
+          <p:cNvSpPr/>
+          <p:nvPr/>
+        </p:nvSpPr>
+        <p:spPr>
+          <a:xfrm>
+            <a:off x="6894576" y="4023360"/>
+            <a:ext cx="2011680" cy="402336"/>
           </a:xfrm>
           <a:prstGeom prst="rect">
             <a:avLst/>
@@ -34229,19 +35066,19 @@
           <a:bodyPr wrap="square" lIns="0" tIns="0" rIns="0" bIns="0" rtlCol="0" anchor="ctr"/>
           <a:lstStyle/>
           <a:p>
-            <a:pPr algn="l" indent="0" marL="0">
+            <a:pPr algn="ctr" indent="0" marL="0">
               <a:buNone/>
             </a:pPr>
             <a:r>
               <a:rPr lang="en-US" sz="1200" b="1" dirty="0">
                 <a:solidFill>
-                  <a:srgbClr val="0F172A"/>
+                  <a:srgbClr val="4338CA"/>
                 </a:solidFill>
                 <a:latin typeface="Trebuchet MS" pitchFamily="34" charset="0"/>
                 <a:ea typeface="Trebuchet MS" pitchFamily="34" charset="-122"/>
                 <a:cs typeface="Trebuchet MS" pitchFamily="34" charset="-120"/>
               </a:rPr>
-              <a:t>Sample words:</a:t>
+              <a:t>lander</a:t>
             </a:r>
             <a:endParaRPr lang="en-US" sz="1200" dirty="0"/>
           </a:p>
@@ -34249,13 +35086,13 @@
       </p:sp>
       <p:sp>
         <p:nvSpPr>
-          <p:cNvPr id="44" name="Shape 42"/>
-          <p:cNvSpPr/>
-          <p:nvPr/>
-        </p:nvSpPr>
-        <p:spPr>
-          <a:xfrm>
-            <a:off x="365760" y="4023360"/>
+          <p:cNvPr id="45" name="Shape 43"/>
+          <p:cNvSpPr/>
+          <p:nvPr/>
+        </p:nvSpPr>
+        <p:spPr>
+          <a:xfrm>
+            <a:off x="365760" y="4498848"/>
             <a:ext cx="2011680" cy="402336"/>
           </a:xfrm>
           <a:prstGeom prst="rect">
@@ -34276,13 +35113,13 @@
       </p:sp>
       <p:sp>
         <p:nvSpPr>
-          <p:cNvPr id="45" name="Text 43"/>
-          <p:cNvSpPr/>
-          <p:nvPr/>
-        </p:nvSpPr>
-        <p:spPr>
-          <a:xfrm>
-            <a:off x="365760" y="4023360"/>
+          <p:cNvPr id="46" name="Text 44"/>
+          <p:cNvSpPr/>
+          <p:nvPr/>
+        </p:nvSpPr>
+        <p:spPr>
+          <a:xfrm>
+            <a:off x="365760" y="4498848"/>
             <a:ext cx="2011680" cy="402336"/>
           </a:xfrm>
           <a:prstGeom prst="rect">
@@ -34307,469 +35144,7 @@
                 <a:ea typeface="Trebuchet MS" pitchFamily="34" charset="-122"/>
                 <a:cs typeface="Trebuchet MS" pitchFamily="34" charset="-120"/>
               </a:rPr>
-              <a:t>landlord</a:t>
-            </a:r>
-            <a:endParaRPr lang="en-US" sz="1200" dirty="0"/>
-          </a:p>
-        </p:txBody>
-      </p:sp>
-      <p:sp>
-        <p:nvSpPr>
-          <p:cNvPr id="46" name="Shape 44"/>
-          <p:cNvSpPr/>
-          <p:nvPr/>
-        </p:nvSpPr>
-        <p:spPr>
-          <a:xfrm>
-            <a:off x="2542032" y="4023360"/>
-            <a:ext cx="2011680" cy="402336"/>
-          </a:xfrm>
-          <a:prstGeom prst="rect">
-            <a:avLst>
-              <a:gd name="adj" fmla="val 13636"/>
-            </a:avLst>
-          </a:prstGeom>
-          <a:solidFill>
-            <a:srgbClr val="EEF2FF"/>
-          </a:solidFill>
-          <a:ln w="12700">
-            <a:solidFill>
-              <a:srgbClr val="6366F1"/>
-            </a:solidFill>
-            <a:prstDash val="solid"/>
-          </a:ln>
-        </p:spPr>
-      </p:sp>
-      <p:sp>
-        <p:nvSpPr>
-          <p:cNvPr id="47" name="Text 45"/>
-          <p:cNvSpPr/>
-          <p:nvPr/>
-        </p:nvSpPr>
-        <p:spPr>
-          <a:xfrm>
-            <a:off x="2542032" y="4023360"/>
-            <a:ext cx="2011680" cy="402336"/>
-          </a:xfrm>
-          <a:prstGeom prst="rect">
-            <a:avLst/>
-          </a:prstGeom>
-          <a:noFill/>
-          <a:ln/>
-        </p:spPr>
-        <p:txBody>
-          <a:bodyPr wrap="square" lIns="0" tIns="0" rIns="0" bIns="0" rtlCol="0" anchor="ctr"/>
-          <a:lstStyle/>
-          <a:p>
-            <a:pPr algn="ctr" indent="0" marL="0">
-              <a:buNone/>
-            </a:pPr>
-            <a:r>
-              <a:rPr lang="en-US" sz="1200" b="1" dirty="0">
-                <a:solidFill>
-                  <a:srgbClr val="4338CA"/>
-                </a:solidFill>
-                <a:latin typeface="Trebuchet MS" pitchFamily="34" charset="0"/>
-                <a:ea typeface="Trebuchet MS" pitchFamily="34" charset="-122"/>
-                <a:cs typeface="Trebuchet MS" pitchFamily="34" charset="-120"/>
-              </a:rPr>
-              <a:t>landmark</a:t>
-            </a:r>
-            <a:endParaRPr lang="en-US" sz="1200" dirty="0"/>
-          </a:p>
-        </p:txBody>
-      </p:sp>
-      <p:sp>
-        <p:nvSpPr>
-          <p:cNvPr id="48" name="Shape 46"/>
-          <p:cNvSpPr/>
-          <p:nvPr/>
-        </p:nvSpPr>
-        <p:spPr>
-          <a:xfrm>
-            <a:off x="4718304" y="4023360"/>
-            <a:ext cx="2011680" cy="402336"/>
-          </a:xfrm>
-          <a:prstGeom prst="rect">
-            <a:avLst>
-              <a:gd name="adj" fmla="val 13636"/>
-            </a:avLst>
-          </a:prstGeom>
-          <a:solidFill>
-            <a:srgbClr val="EEF2FF"/>
-          </a:solidFill>
-          <a:ln w="12700">
-            <a:solidFill>
-              <a:srgbClr val="6366F1"/>
-            </a:solidFill>
-            <a:prstDash val="solid"/>
-          </a:ln>
-        </p:spPr>
-      </p:sp>
-      <p:sp>
-        <p:nvSpPr>
-          <p:cNvPr id="49" name="Text 47"/>
-          <p:cNvSpPr/>
-          <p:nvPr/>
-        </p:nvSpPr>
-        <p:spPr>
-          <a:xfrm>
-            <a:off x="4718304" y="4023360"/>
-            <a:ext cx="2011680" cy="402336"/>
-          </a:xfrm>
-          <a:prstGeom prst="rect">
-            <a:avLst/>
-          </a:prstGeom>
-          <a:noFill/>
-          <a:ln/>
-        </p:spPr>
-        <p:txBody>
-          <a:bodyPr wrap="square" lIns="0" tIns="0" rIns="0" bIns="0" rtlCol="0" anchor="ctr"/>
-          <a:lstStyle/>
-          <a:p>
-            <a:pPr algn="ctr" indent="0" marL="0">
-              <a:buNone/>
-            </a:pPr>
-            <a:r>
-              <a:rPr lang="en-US" sz="1200" b="1" dirty="0">
-                <a:solidFill>
-                  <a:srgbClr val="4338CA"/>
-                </a:solidFill>
-                <a:latin typeface="Trebuchet MS" pitchFamily="34" charset="0"/>
-                <a:ea typeface="Trebuchet MS" pitchFamily="34" charset="-122"/>
-                <a:cs typeface="Trebuchet MS" pitchFamily="34" charset="-120"/>
-              </a:rPr>
-              <a:t>landscape</a:t>
-            </a:r>
-            <a:endParaRPr lang="en-US" sz="1200" dirty="0"/>
-          </a:p>
-        </p:txBody>
-      </p:sp>
-      <p:sp>
-        <p:nvSpPr>
-          <p:cNvPr id="50" name="Shape 48"/>
-          <p:cNvSpPr/>
-          <p:nvPr/>
-        </p:nvSpPr>
-        <p:spPr>
-          <a:xfrm>
-            <a:off x="6894576" y="4023360"/>
-            <a:ext cx="2011680" cy="402336"/>
-          </a:xfrm>
-          <a:prstGeom prst="rect">
-            <a:avLst>
-              <a:gd name="adj" fmla="val 13636"/>
-            </a:avLst>
-          </a:prstGeom>
-          <a:solidFill>
-            <a:srgbClr val="EEF2FF"/>
-          </a:solidFill>
-          <a:ln w="12700">
-            <a:solidFill>
-              <a:srgbClr val="6366F1"/>
-            </a:solidFill>
-            <a:prstDash val="solid"/>
-          </a:ln>
-        </p:spPr>
-      </p:sp>
-      <p:sp>
-        <p:nvSpPr>
-          <p:cNvPr id="51" name="Text 49"/>
-          <p:cNvSpPr/>
-          <p:nvPr/>
-        </p:nvSpPr>
-        <p:spPr>
-          <a:xfrm>
-            <a:off x="6894576" y="4023360"/>
-            <a:ext cx="2011680" cy="402336"/>
-          </a:xfrm>
-          <a:prstGeom prst="rect">
-            <a:avLst/>
-          </a:prstGeom>
-          <a:noFill/>
-          <a:ln/>
-        </p:spPr>
-        <p:txBody>
-          <a:bodyPr wrap="square" lIns="0" tIns="0" rIns="0" bIns="0" rtlCol="0" anchor="ctr"/>
-          <a:lstStyle/>
-          <a:p>
-            <a:pPr algn="ctr" indent="0" marL="0">
-              <a:buNone/>
-            </a:pPr>
-            <a:r>
-              <a:rPr lang="en-US" sz="1200" b="1" dirty="0">
-                <a:solidFill>
-                  <a:srgbClr val="4338CA"/>
-                </a:solidFill>
-                <a:latin typeface="Trebuchet MS" pitchFamily="34" charset="0"/>
-                <a:ea typeface="Trebuchet MS" pitchFamily="34" charset="-122"/>
-                <a:cs typeface="Trebuchet MS" pitchFamily="34" charset="-120"/>
-              </a:rPr>
-              <a:t>overland</a:t>
-            </a:r>
-            <a:endParaRPr lang="en-US" sz="1200" dirty="0"/>
-          </a:p>
-        </p:txBody>
-      </p:sp>
-      <p:sp>
-        <p:nvSpPr>
-          <p:cNvPr id="52" name="Shape 50"/>
-          <p:cNvSpPr/>
-          <p:nvPr/>
-        </p:nvSpPr>
-        <p:spPr>
-          <a:xfrm>
-            <a:off x="365760" y="4498848"/>
-            <a:ext cx="2011680" cy="402336"/>
-          </a:xfrm>
-          <a:prstGeom prst="rect">
-            <a:avLst>
-              <a:gd name="adj" fmla="val 13636"/>
-            </a:avLst>
-          </a:prstGeom>
-          <a:solidFill>
-            <a:srgbClr val="EEF2FF"/>
-          </a:solidFill>
-          <a:ln w="12700">
-            <a:solidFill>
-              <a:srgbClr val="6366F1"/>
-            </a:solidFill>
-            <a:prstDash val="solid"/>
-          </a:ln>
-        </p:spPr>
-      </p:sp>
-      <p:sp>
-        <p:nvSpPr>
-          <p:cNvPr id="53" name="Text 51"/>
-          <p:cNvSpPr/>
-          <p:nvPr/>
-        </p:nvSpPr>
-        <p:spPr>
-          <a:xfrm>
-            <a:off x="365760" y="4498848"/>
-            <a:ext cx="2011680" cy="402336"/>
-          </a:xfrm>
-          <a:prstGeom prst="rect">
-            <a:avLst/>
-          </a:prstGeom>
-          <a:noFill/>
-          <a:ln/>
-        </p:spPr>
-        <p:txBody>
-          <a:bodyPr wrap="square" lIns="0" tIns="0" rIns="0" bIns="0" rtlCol="0" anchor="ctr"/>
-          <a:lstStyle/>
-          <a:p>
-            <a:pPr algn="ctr" indent="0" marL="0">
-              <a:buNone/>
-            </a:pPr>
-            <a:r>
-              <a:rPr lang="en-US" sz="1200" b="1" dirty="0">
-                <a:solidFill>
-                  <a:srgbClr val="4338CA"/>
-                </a:solidFill>
-                <a:latin typeface="Trebuchet MS" pitchFamily="34" charset="0"/>
-                <a:ea typeface="Trebuchet MS" pitchFamily="34" charset="-122"/>
-                <a:cs typeface="Trebuchet MS" pitchFamily="34" charset="-120"/>
-              </a:rPr>
-              <a:t>upland</a:t>
-            </a:r>
-            <a:endParaRPr lang="en-US" sz="1200" dirty="0"/>
-          </a:p>
-        </p:txBody>
-      </p:sp>
-      <p:sp>
-        <p:nvSpPr>
-          <p:cNvPr id="54" name="Shape 52"/>
-          <p:cNvSpPr/>
-          <p:nvPr/>
-        </p:nvSpPr>
-        <p:spPr>
-          <a:xfrm>
-            <a:off x="2542032" y="4498848"/>
-            <a:ext cx="2011680" cy="402336"/>
-          </a:xfrm>
-          <a:prstGeom prst="rect">
-            <a:avLst>
-              <a:gd name="adj" fmla="val 13636"/>
-            </a:avLst>
-          </a:prstGeom>
-          <a:solidFill>
-            <a:srgbClr val="EEF2FF"/>
-          </a:solidFill>
-          <a:ln w="12700">
-            <a:solidFill>
-              <a:srgbClr val="6366F1"/>
-            </a:solidFill>
-            <a:prstDash val="solid"/>
-          </a:ln>
-        </p:spPr>
-      </p:sp>
-      <p:sp>
-        <p:nvSpPr>
-          <p:cNvPr id="55" name="Text 53"/>
-          <p:cNvSpPr/>
-          <p:nvPr/>
-        </p:nvSpPr>
-        <p:spPr>
-          <a:xfrm>
-            <a:off x="2542032" y="4498848"/>
-            <a:ext cx="2011680" cy="402336"/>
-          </a:xfrm>
-          <a:prstGeom prst="rect">
-            <a:avLst/>
-          </a:prstGeom>
-          <a:noFill/>
-          <a:ln/>
-        </p:spPr>
-        <p:txBody>
-          <a:bodyPr wrap="square" lIns="0" tIns="0" rIns="0" bIns="0" rtlCol="0" anchor="ctr"/>
-          <a:lstStyle/>
-          <a:p>
-            <a:pPr algn="ctr" indent="0" marL="0">
-              <a:buNone/>
-            </a:pPr>
-            <a:r>
-              <a:rPr lang="en-US" sz="1200" b="1" dirty="0">
-                <a:solidFill>
-                  <a:srgbClr val="4338CA"/>
-                </a:solidFill>
-                <a:latin typeface="Trebuchet MS" pitchFamily="34" charset="0"/>
-                <a:ea typeface="Trebuchet MS" pitchFamily="34" charset="-122"/>
-                <a:cs typeface="Trebuchet MS" pitchFamily="34" charset="-120"/>
-              </a:rPr>
-              <a:t>landing</a:t>
-            </a:r>
-            <a:endParaRPr lang="en-US" sz="1200" dirty="0"/>
-          </a:p>
-        </p:txBody>
-      </p:sp>
-      <p:sp>
-        <p:nvSpPr>
-          <p:cNvPr id="56" name="Shape 54"/>
-          <p:cNvSpPr/>
-          <p:nvPr/>
-        </p:nvSpPr>
-        <p:spPr>
-          <a:xfrm>
-            <a:off x="4718304" y="4498848"/>
-            <a:ext cx="2011680" cy="402336"/>
-          </a:xfrm>
-          <a:prstGeom prst="rect">
-            <a:avLst>
-              <a:gd name="adj" fmla="val 13636"/>
-            </a:avLst>
-          </a:prstGeom>
-          <a:solidFill>
-            <a:srgbClr val="EEF2FF"/>
-          </a:solidFill>
-          <a:ln w="12700">
-            <a:solidFill>
-              <a:srgbClr val="6366F1"/>
-            </a:solidFill>
-            <a:prstDash val="solid"/>
-          </a:ln>
-        </p:spPr>
-      </p:sp>
-      <p:sp>
-        <p:nvSpPr>
-          <p:cNvPr id="57" name="Text 55"/>
-          <p:cNvSpPr/>
-          <p:nvPr/>
-        </p:nvSpPr>
-        <p:spPr>
-          <a:xfrm>
-            <a:off x="4718304" y="4498848"/>
-            <a:ext cx="2011680" cy="402336"/>
-          </a:xfrm>
-          <a:prstGeom prst="rect">
-            <a:avLst/>
-          </a:prstGeom>
-          <a:noFill/>
-          <a:ln/>
-        </p:spPr>
-        <p:txBody>
-          <a:bodyPr wrap="square" lIns="0" tIns="0" rIns="0" bIns="0" rtlCol="0" anchor="ctr"/>
-          <a:lstStyle/>
-          <a:p>
-            <a:pPr algn="ctr" indent="0" marL="0">
-              <a:buNone/>
-            </a:pPr>
-            <a:r>
-              <a:rPr lang="en-US" sz="1200" b="1" dirty="0">
-                <a:solidFill>
-                  <a:srgbClr val="4338CA"/>
-                </a:solidFill>
-                <a:latin typeface="Trebuchet MS" pitchFamily="34" charset="0"/>
-                <a:ea typeface="Trebuchet MS" pitchFamily="34" charset="-122"/>
-                <a:cs typeface="Trebuchet MS" pitchFamily="34" charset="-120"/>
-              </a:rPr>
-              <a:t>lowland</a:t>
-            </a:r>
-            <a:endParaRPr lang="en-US" sz="1200" dirty="0"/>
-          </a:p>
-        </p:txBody>
-      </p:sp>
-      <p:sp>
-        <p:nvSpPr>
-          <p:cNvPr id="58" name="Shape 56"/>
-          <p:cNvSpPr/>
-          <p:nvPr/>
-        </p:nvSpPr>
-        <p:spPr>
-          <a:xfrm>
-            <a:off x="6894576" y="4498848"/>
-            <a:ext cx="2011680" cy="402336"/>
-          </a:xfrm>
-          <a:prstGeom prst="rect">
-            <a:avLst>
-              <a:gd name="adj" fmla="val 13636"/>
-            </a:avLst>
-          </a:prstGeom>
-          <a:solidFill>
-            <a:srgbClr val="EEF2FF"/>
-          </a:solidFill>
-          <a:ln w="12700">
-            <a:solidFill>
-              <a:srgbClr val="6366F1"/>
-            </a:solidFill>
-            <a:prstDash val="solid"/>
-          </a:ln>
-        </p:spPr>
-      </p:sp>
-      <p:sp>
-        <p:nvSpPr>
-          <p:cNvPr id="59" name="Text 57"/>
-          <p:cNvSpPr/>
-          <p:nvPr/>
-        </p:nvSpPr>
-        <p:spPr>
-          <a:xfrm>
-            <a:off x="6894576" y="4498848"/>
-            <a:ext cx="2011680" cy="402336"/>
-          </a:xfrm>
-          <a:prstGeom prst="rect">
-            <a:avLst/>
-          </a:prstGeom>
-          <a:noFill/>
-          <a:ln/>
-        </p:spPr>
-        <p:txBody>
-          <a:bodyPr wrap="square" lIns="0" tIns="0" rIns="0" bIns="0" rtlCol="0" anchor="ctr"/>
-          <a:lstStyle/>
-          <a:p>
-            <a:pPr algn="ctr" indent="0" marL="0">
-              <a:buNone/>
-            </a:pPr>
-            <a:r>
-              <a:rPr lang="en-US" sz="1200" b="1" dirty="0">
-                <a:solidFill>
-                  <a:srgbClr val="4338CA"/>
-                </a:solidFill>
-                <a:latin typeface="Trebuchet MS" pitchFamily="34" charset="0"/>
-                <a:ea typeface="Trebuchet MS" pitchFamily="34" charset="-122"/>
-                <a:cs typeface="Trebuchet MS" pitchFamily="34" charset="-120"/>
-              </a:rPr>
-              <a:t>farmland</a:t>
+              <a:t>landers</a:t>
             </a:r>
             <a:endParaRPr lang="en-US" sz="1200" dirty="0"/>
           </a:p>
@@ -35061,7 +35436,7 @@
                 <a:ea typeface="Calibri" pitchFamily="34" charset="-122"/>
                 <a:cs typeface="Calibri" pitchFamily="34" charset="-120"/>
               </a:rPr>
-              <a:t>Word Labs  •  wordlabs.app  •  Root: 'land' = ground, earth, territory</a:t>
+              <a:t>Word Labs  •  wordlabs.app  •  Root: 'land' = an area of ground; to arrive</a:t>
             </a:r>
             <a:endParaRPr lang="en-US" sz="800" dirty="0"/>
           </a:p>
@@ -35225,7 +35600,7 @@
                 <a:ea typeface="Calibri" pitchFamily="34" charset="-122"/>
                 <a:cs typeface="Calibri" pitchFamily="34" charset="-120"/>
               </a:rPr>
-              <a:t>The core part of a word carrying its basic meaning. For example, 'land' means 'ground, earth, territory'.</a:t>
+              <a:t>The core part of a word carrying its basic meaning. For example, 'land' means 'an area of ground; to arrive'.</a:t>
             </a:r>
             <a:endParaRPr lang="en-US" sz="1350" dirty="0"/>
           </a:p>
@@ -35845,7 +36220,7 @@
                 <a:ea typeface="Calibri" pitchFamily="34" charset="-122"/>
                 <a:cs typeface="Calibri" pitchFamily="34" charset="-120"/>
               </a:rPr>
-              <a:t>Word Labs  •  wordlabs.app  •  Root: 'land' = ground, earth, territory</a:t>
+              <a:t>Word Labs  •  wordlabs.app  •  Root: 'land' = an area of ground; to arrive</a:t>
             </a:r>
             <a:endParaRPr lang="en-US" sz="800" dirty="0"/>
           </a:p>
@@ -35957,7 +36332,7 @@
                 <a:ea typeface="Calibri" pitchFamily="34" charset="-122"/>
                 <a:cs typeface="Calibri" pitchFamily="34" charset="-120"/>
               </a:rPr>
-              <a:t>1.  The word 'landscape' contains the root 'land'.</a:t>
+              <a:t>1.  'land' means 'the solid ground, or to come down onto the ground'.</a:t>
             </a:r>
             <a:endParaRPr lang="en-US" sz="1300" dirty="0"/>
           </a:p>
@@ -36096,7 +36471,7 @@
                 <a:ea typeface="Calibri" pitchFamily="34" charset="-122"/>
                 <a:cs typeface="Calibri" pitchFamily="34" charset="-120"/>
               </a:rPr>
-              <a:t>2.  The morpheme 'land' can be found in the word 'landmark'.</a:t>
+              <a:t>2.  'land' means 'a loud sound made by thunder'.</a:t>
             </a:r>
             <a:endParaRPr lang="en-US" sz="1300" dirty="0"/>
           </a:p>
@@ -36119,11 +36494,11 @@
             </a:avLst>
           </a:prstGeom>
           <a:solidFill>
-            <a:srgbClr val="DCFCE7"/>
-          </a:solidFill>
-          <a:ln w="12700">
-            <a:solidFill>
-              <a:srgbClr val="16A34A"/>
+            <a:srgbClr val="FEE2E2"/>
+          </a:solidFill>
+          <a:ln w="12700">
+            <a:solidFill>
+              <a:srgbClr val="DC2626"/>
             </a:solidFill>
             <a:prstDash val="solid"/>
           </a:ln>
@@ -36156,13 +36531,13 @@
             <a:r>
               <a:rPr lang="en-US" sz="1100" b="1" dirty="0">
                 <a:solidFill>
-                  <a:srgbClr val="16A34A"/>
+                  <a:srgbClr val="DC2626"/>
                 </a:solidFill>
                 <a:latin typeface="Trebuchet MS" pitchFamily="34" charset="0"/>
                 <a:ea typeface="Trebuchet MS" pitchFamily="34" charset="-122"/>
                 <a:cs typeface="Trebuchet MS" pitchFamily="34" charset="-120"/>
               </a:rPr>
-              <a:t>TRUE</a:t>
+              <a:t>FALSE</a:t>
             </a:r>
             <a:endParaRPr lang="en-US" sz="1100" dirty="0"/>
           </a:p>
@@ -36235,7 +36610,7 @@
                 <a:ea typeface="Calibri" pitchFamily="34" charset="-122"/>
                 <a:cs typeface="Calibri" pitchFamily="34" charset="-120"/>
               </a:rPr>
-              <a:t>3.  The word 'landing' contains the root 'land' plus the suffix '-ing'.</a:t>
+              <a:t>3.  'lands' means 'arrives safely on the ground after being in the air'.</a:t>
             </a:r>
             <a:endParaRPr lang="en-US" sz="1300" dirty="0"/>
           </a:p>
@@ -36374,7 +36749,7 @@
                 <a:ea typeface="Calibri" pitchFamily="34" charset="-122"/>
                 <a:cs typeface="Calibri" pitchFamily="34" charset="-120"/>
               </a:rPr>
-              <a:t>4.  The word 'planet' contains the morpheme 'land'.</a:t>
+              <a:t>4.  'lands' means 'argues loudly with someone nearby'.</a:t>
             </a:r>
             <a:endParaRPr lang="en-US" sz="1300" dirty="0"/>
           </a:p>
@@ -36513,7 +36888,7 @@
                 <a:ea typeface="Calibri" pitchFamily="34" charset="-122"/>
                 <a:cs typeface="Calibri" pitchFamily="34" charset="-120"/>
               </a:rPr>
-              <a:t>5.  The morpheme 'land' comes from a Greek word meaning water.</a:t>
+              <a:t>5.  'land' means 'an area of ground; to arrive'.</a:t>
             </a:r>
             <a:endParaRPr lang="en-US" sz="1300" dirty="0"/>
           </a:p>
@@ -36536,11 +36911,11 @@
             </a:avLst>
           </a:prstGeom>
           <a:solidFill>
-            <a:srgbClr val="FEE2E2"/>
-          </a:solidFill>
-          <a:ln w="12700">
-            <a:solidFill>
-              <a:srgbClr val="DC2626"/>
+            <a:srgbClr val="DCFCE7"/>
+          </a:solidFill>
+          <a:ln w="12700">
+            <a:solidFill>
+              <a:srgbClr val="16A34A"/>
             </a:solidFill>
             <a:prstDash val="solid"/>
           </a:ln>
@@ -36573,13 +36948,13 @@
             <a:r>
               <a:rPr lang="en-US" sz="1100" b="1" dirty="0">
                 <a:solidFill>
-                  <a:srgbClr val="DC2626"/>
+                  <a:srgbClr val="16A34A"/>
                 </a:solidFill>
                 <a:latin typeface="Trebuchet MS" pitchFamily="34" charset="0"/>
                 <a:ea typeface="Trebuchet MS" pitchFamily="34" charset="-122"/>
                 <a:cs typeface="Trebuchet MS" pitchFamily="34" charset="-120"/>
               </a:rPr>
-              <a:t>FALSE</a:t>
+              <a:t>TRUE</a:t>
             </a:r>
             <a:endParaRPr lang="en-US" sz="1100" dirty="0"/>
           </a:p>
@@ -36871,7 +37246,7 @@
                 <a:ea typeface="Calibri" pitchFamily="34" charset="-122"/>
                 <a:cs typeface="Calibri" pitchFamily="34" charset="-120"/>
               </a:rPr>
-              <a:t>Word Labs  •  wordlabs.app  •  Root: 'land' = ground, earth, territory</a:t>
+              <a:t>Word Labs  •  wordlabs.app  •  Root: 'land' = an area of ground; to arrive</a:t>
             </a:r>
             <a:endParaRPr lang="en-US" sz="800" dirty="0"/>
           </a:p>
@@ -37008,7 +37383,7 @@
                 <a:ea typeface="Trebuchet MS" pitchFamily="34" charset="-122"/>
                 <a:cs typeface="Trebuchet MS" pitchFamily="34" charset="-120"/>
               </a:rPr>
-              <a:t>ground, earth, territory</a:t>
+              <a:t>an area of ground; to arrive</a:t>
             </a:r>
             <a:endParaRPr lang="en-US" sz="2000" dirty="0"/>
           </a:p>
@@ -37047,7 +37422,7 @@
                 <a:ea typeface="Calibri" pitchFamily="34" charset="-122"/>
                 <a:cs typeface="Calibri" pitchFamily="34" charset="-120"/>
               </a:rPr>
-              <a:t>Origin: Latin: landa</a:t>
+              <a:t>Origin: Anglo-Saxon (Old English) root</a:t>
             </a:r>
             <a:endParaRPr lang="en-US" sz="1100" dirty="0"/>
           </a:p>
@@ -37152,7 +37527,7 @@
                 <a:ea typeface="Trebuchet MS" pitchFamily="34" charset="-122"/>
                 <a:cs typeface="Trebuchet MS" pitchFamily="34" charset="-120"/>
               </a:rPr>
-              <a:t>landlord</a:t>
+              <a:t>land</a:t>
             </a:r>
             <a:endParaRPr lang="en-US" sz="1300" dirty="0"/>
           </a:p>
@@ -37218,7 +37593,7 @@
                 <a:ea typeface="Trebuchet MS" pitchFamily="34" charset="-122"/>
                 <a:cs typeface="Trebuchet MS" pitchFamily="34" charset="-120"/>
               </a:rPr>
-              <a:t>landmark</a:t>
+              <a:t>lands</a:t>
             </a:r>
             <a:endParaRPr lang="en-US" sz="1300" dirty="0"/>
           </a:p>
@@ -37284,7 +37659,7 @@
                 <a:ea typeface="Trebuchet MS" pitchFamily="34" charset="-122"/>
                 <a:cs typeface="Trebuchet MS" pitchFamily="34" charset="-120"/>
               </a:rPr>
-              <a:t>landscape</a:t>
+              <a:t>landed</a:t>
             </a:r>
             <a:endParaRPr lang="en-US" sz="1300" dirty="0"/>
           </a:p>
@@ -37350,7 +37725,7 @@
                 <a:ea typeface="Trebuchet MS" pitchFamily="34" charset="-122"/>
                 <a:cs typeface="Trebuchet MS" pitchFamily="34" charset="-120"/>
               </a:rPr>
-              <a:t>overland</a:t>
+              <a:t>lander</a:t>
             </a:r>
             <a:endParaRPr lang="en-US" sz="1300" dirty="0"/>
           </a:p>
@@ -37416,139 +37791,7 @@
                 <a:ea typeface="Trebuchet MS" pitchFamily="34" charset="-122"/>
                 <a:cs typeface="Trebuchet MS" pitchFamily="34" charset="-120"/>
               </a:rPr>
-              <a:t>upland</a:t>
-            </a:r>
-            <a:endParaRPr lang="en-US" sz="1300" dirty="0"/>
-          </a:p>
-        </p:txBody>
-      </p:sp>
-      <p:sp>
-        <p:nvSpPr>
-          <p:cNvPr id="26" name="Shape 24"/>
-          <p:cNvSpPr/>
-          <p:nvPr/>
-        </p:nvSpPr>
-        <p:spPr>
-          <a:xfrm>
-            <a:off x="2514600" y="3401568"/>
-            <a:ext cx="2011680" cy="502920"/>
-          </a:xfrm>
-          <a:prstGeom prst="rect">
-            <a:avLst>
-              <a:gd name="adj" fmla="val 14545"/>
-            </a:avLst>
-          </a:prstGeom>
-          <a:solidFill>
-            <a:srgbClr val="EEF2FF"/>
-          </a:solidFill>
-          <a:ln w="12700">
-            <a:solidFill>
-              <a:srgbClr val="6366F1"/>
-            </a:solidFill>
-            <a:prstDash val="solid"/>
-          </a:ln>
-        </p:spPr>
-      </p:sp>
-      <p:sp>
-        <p:nvSpPr>
-          <p:cNvPr id="27" name="Text 25"/>
-          <p:cNvSpPr/>
-          <p:nvPr/>
-        </p:nvSpPr>
-        <p:spPr>
-          <a:xfrm>
-            <a:off x="2514600" y="3401568"/>
-            <a:ext cx="2011680" cy="502920"/>
-          </a:xfrm>
-          <a:prstGeom prst="rect">
-            <a:avLst/>
-          </a:prstGeom>
-          <a:noFill/>
-          <a:ln/>
-        </p:spPr>
-        <p:txBody>
-          <a:bodyPr wrap="square" lIns="0" tIns="0" rIns="0" bIns="0" rtlCol="0" anchor="ctr"/>
-          <a:lstStyle/>
-          <a:p>
-            <a:pPr algn="ctr" indent="0" marL="0">
-              <a:buNone/>
-            </a:pPr>
-            <a:r>
-              <a:rPr lang="en-US" sz="1300" b="1" dirty="0">
-                <a:solidFill>
-                  <a:srgbClr val="4338CA"/>
-                </a:solidFill>
-                <a:latin typeface="Trebuchet MS" pitchFamily="34" charset="0"/>
-                <a:ea typeface="Trebuchet MS" pitchFamily="34" charset="-122"/>
-                <a:cs typeface="Trebuchet MS" pitchFamily="34" charset="-120"/>
-              </a:rPr>
-              <a:t>landing</a:t>
-            </a:r>
-            <a:endParaRPr lang="en-US" sz="1300" dirty="0"/>
-          </a:p>
-        </p:txBody>
-      </p:sp>
-      <p:sp>
-        <p:nvSpPr>
-          <p:cNvPr id="28" name="Shape 26"/>
-          <p:cNvSpPr/>
-          <p:nvPr/>
-        </p:nvSpPr>
-        <p:spPr>
-          <a:xfrm>
-            <a:off x="4663440" y="3401568"/>
-            <a:ext cx="2011680" cy="502920"/>
-          </a:xfrm>
-          <a:prstGeom prst="rect">
-            <a:avLst>
-              <a:gd name="adj" fmla="val 14545"/>
-            </a:avLst>
-          </a:prstGeom>
-          <a:solidFill>
-            <a:srgbClr val="EEF2FF"/>
-          </a:solidFill>
-          <a:ln w="12700">
-            <a:solidFill>
-              <a:srgbClr val="6366F1"/>
-            </a:solidFill>
-            <a:prstDash val="solid"/>
-          </a:ln>
-        </p:spPr>
-      </p:sp>
-      <p:sp>
-        <p:nvSpPr>
-          <p:cNvPr id="29" name="Text 27"/>
-          <p:cNvSpPr/>
-          <p:nvPr/>
-        </p:nvSpPr>
-        <p:spPr>
-          <a:xfrm>
-            <a:off x="4663440" y="3401568"/>
-            <a:ext cx="2011680" cy="502920"/>
-          </a:xfrm>
-          <a:prstGeom prst="rect">
-            <a:avLst/>
-          </a:prstGeom>
-          <a:noFill/>
-          <a:ln/>
-        </p:spPr>
-        <p:txBody>
-          <a:bodyPr wrap="square" lIns="0" tIns="0" rIns="0" bIns="0" rtlCol="0" anchor="ctr"/>
-          <a:lstStyle/>
-          <a:p>
-            <a:pPr algn="ctr" indent="0" marL="0">
-              <a:buNone/>
-            </a:pPr>
-            <a:r>
-              <a:rPr lang="en-US" sz="1300" b="1" dirty="0">
-                <a:solidFill>
-                  <a:srgbClr val="4338CA"/>
-                </a:solidFill>
-                <a:latin typeface="Trebuchet MS" pitchFamily="34" charset="0"/>
-                <a:ea typeface="Trebuchet MS" pitchFamily="34" charset="-122"/>
-                <a:cs typeface="Trebuchet MS" pitchFamily="34" charset="-120"/>
-              </a:rPr>
-              <a:t>lowland</a:t>
+              <a:t>landers</a:t>
             </a:r>
             <a:endParaRPr lang="en-US" sz="1300" dirty="0"/>
           </a:p>
@@ -37840,7 +38083,7 @@
                 <a:ea typeface="Calibri" pitchFamily="34" charset="-122"/>
                 <a:cs typeface="Calibri" pitchFamily="34" charset="-120"/>
               </a:rPr>
-              <a:t>Word Labs  •  wordlabs.app  •  Root: 'land' = ground, earth, territory</a:t>
+              <a:t>Word Labs  •  wordlabs.app  •  Root: 'land' = an area of ground; to arrive</a:t>
             </a:r>
             <a:endParaRPr lang="en-US" sz="800" dirty="0"/>
           </a:p>
@@ -38141,7 +38384,7 @@
                 <a:ea typeface="Trebuchet MS" pitchFamily="34" charset="-122"/>
                 <a:cs typeface="Trebuchet MS" pitchFamily="34" charset="-120"/>
               </a:rPr>
-              <a:t>over-</a:t>
+              <a:t>mid-</a:t>
             </a:r>
             <a:endParaRPr lang="en-US" sz="1300" dirty="0"/>
           </a:p>
@@ -38333,7 +38576,7 @@
                 <a:ea typeface="Trebuchet MS" pitchFamily="34" charset="-122"/>
                 <a:cs typeface="Trebuchet MS" pitchFamily="34" charset="-120"/>
               </a:rPr>
-              <a:t>out-</a:t>
+              <a:t>over-</a:t>
             </a:r>
             <a:endParaRPr lang="en-US" sz="1300" dirty="0"/>
           </a:p>
@@ -38422,7 +38665,7 @@
                 <a:ea typeface="Trebuchet MS" pitchFamily="34" charset="-122"/>
                 <a:cs typeface="Trebuchet MS" pitchFamily="34" charset="-120"/>
               </a:rPr>
-              <a:t>-ing</a:t>
+              <a:t>-er</a:t>
             </a:r>
             <a:endParaRPr lang="en-US" sz="1300" dirty="0"/>
           </a:p>
@@ -38443,7 +38686,7 @@
             <a:avLst/>
           </a:prstGeom>
           <a:solidFill>
-            <a:srgbClr val="DDD6FE"/>
+            <a:srgbClr val="F8FAFC"/>
           </a:solidFill>
           <a:ln w="12700">
             <a:solidFill>
@@ -38455,18 +38698,68 @@
       </p:sp>
       <p:sp>
         <p:nvSpPr>
-          <p:cNvPr id="29" name="Text 27"/>
-          <p:cNvSpPr/>
-          <p:nvPr/>
-        </p:nvSpPr>
-        <p:spPr>
-          <a:xfrm>
-            <a:off x="640080" y="2670048"/>
+          <p:cNvPr id="29" name="Shape 27"/>
+          <p:cNvSpPr/>
+          <p:nvPr/>
+        </p:nvSpPr>
+        <p:spPr>
+          <a:xfrm>
+            <a:off x="3291840" y="2670048"/>
+            <a:ext cx="1645920" cy="420624"/>
+          </a:xfrm>
+          <a:prstGeom prst="rect">
+            <a:avLst/>
+          </a:prstGeom>
+          <a:solidFill>
+            <a:srgbClr val="F8FAFC"/>
+          </a:solidFill>
+          <a:ln w="12700">
+            <a:solidFill>
+              <a:srgbClr val="E5E7EB"/>
+            </a:solidFill>
+            <a:prstDash val="solid"/>
+          </a:ln>
+        </p:spPr>
+      </p:sp>
+      <p:sp>
+        <p:nvSpPr>
+          <p:cNvPr id="30" name="Shape 28"/>
+          <p:cNvSpPr/>
+          <p:nvPr/>
+        </p:nvSpPr>
+        <p:spPr>
+          <a:xfrm>
+            <a:off x="5943600" y="2670048"/>
             <a:ext cx="1463040" cy="420624"/>
           </a:xfrm>
           <a:prstGeom prst="rect">
             <a:avLst/>
           </a:prstGeom>
+          <a:solidFill>
+            <a:srgbClr val="FCE7F3"/>
+          </a:solidFill>
+          <a:ln w="12700">
+            <a:solidFill>
+              <a:srgbClr val="E5E7EB"/>
+            </a:solidFill>
+            <a:prstDash val="solid"/>
+          </a:ln>
+        </p:spPr>
+      </p:sp>
+      <p:sp>
+        <p:nvSpPr>
+          <p:cNvPr id="31" name="Text 29"/>
+          <p:cNvSpPr/>
+          <p:nvPr/>
+        </p:nvSpPr>
+        <p:spPr>
+          <a:xfrm>
+            <a:off x="5943600" y="2670048"/>
+            <a:ext cx="1463040" cy="420624"/>
+          </a:xfrm>
+          <a:prstGeom prst="rect">
+            <a:avLst/>
+          </a:prstGeom>
           <a:noFill/>
           <a:ln/>
         </p:spPr>
@@ -38480,13 +38773,13 @@
             <a:r>
               <a:rPr lang="en-US" sz="1300" b="1" dirty="0">
                 <a:solidFill>
-                  <a:srgbClr val="4C1D95"/>
+                  <a:srgbClr val="9D174D"/>
                 </a:solidFill>
                 <a:latin typeface="Trebuchet MS" pitchFamily="34" charset="0"/>
                 <a:ea typeface="Trebuchet MS" pitchFamily="34" charset="-122"/>
                 <a:cs typeface="Trebuchet MS" pitchFamily="34" charset="-120"/>
               </a:rPr>
-              <a:t>up-</a:t>
+              <a:t>-ing</a:t>
             </a:r>
             <a:endParaRPr lang="en-US" sz="1300" dirty="0"/>
           </a:p>
@@ -38494,20 +38787,45 @@
       </p:sp>
       <p:sp>
         <p:nvSpPr>
-          <p:cNvPr id="30" name="Shape 28"/>
-          <p:cNvSpPr/>
-          <p:nvPr/>
-        </p:nvSpPr>
-        <p:spPr>
-          <a:xfrm>
-            <a:off x="3291840" y="2670048"/>
+          <p:cNvPr id="32" name="Shape 30"/>
+          <p:cNvSpPr/>
+          <p:nvPr/>
+        </p:nvSpPr>
+        <p:spPr>
+          <a:xfrm>
+            <a:off x="640080" y="3127248"/>
+            <a:ext cx="1463040" cy="420624"/>
+          </a:xfrm>
+          <a:prstGeom prst="rect">
+            <a:avLst/>
+          </a:prstGeom>
+          <a:solidFill>
+            <a:srgbClr val="F1F5F9"/>
+          </a:solidFill>
+          <a:ln w="12700">
+            <a:solidFill>
+              <a:srgbClr val="E5E7EB"/>
+            </a:solidFill>
+            <a:prstDash val="solid"/>
+          </a:ln>
+        </p:spPr>
+      </p:sp>
+      <p:sp>
+        <p:nvSpPr>
+          <p:cNvPr id="33" name="Shape 31"/>
+          <p:cNvSpPr/>
+          <p:nvPr/>
+        </p:nvSpPr>
+        <p:spPr>
+          <a:xfrm>
+            <a:off x="3291840" y="3127248"/>
             <a:ext cx="1645920" cy="420624"/>
           </a:xfrm>
           <a:prstGeom prst="rect">
             <a:avLst/>
           </a:prstGeom>
           <a:solidFill>
-            <a:srgbClr val="F8FAFC"/>
+            <a:srgbClr val="F1F5F9"/>
           </a:solidFill>
           <a:ln w="12700">
             <a:solidFill>
@@ -38519,13 +38837,13 @@
       </p:sp>
       <p:sp>
         <p:nvSpPr>
-          <p:cNvPr id="31" name="Shape 29"/>
-          <p:cNvSpPr/>
-          <p:nvPr/>
-        </p:nvSpPr>
-        <p:spPr>
-          <a:xfrm>
-            <a:off x="5943600" y="2670048"/>
+          <p:cNvPr id="34" name="Shape 32"/>
+          <p:cNvSpPr/>
+          <p:nvPr/>
+        </p:nvSpPr>
+        <p:spPr>
+          <a:xfrm>
+            <a:off x="5943600" y="3127248"/>
             <a:ext cx="1463040" cy="420624"/>
           </a:xfrm>
           <a:prstGeom prst="rect">
@@ -38544,13 +38862,13 @@
       </p:sp>
       <p:sp>
         <p:nvSpPr>
-          <p:cNvPr id="32" name="Text 30"/>
-          <p:cNvSpPr/>
-          <p:nvPr/>
-        </p:nvSpPr>
-        <p:spPr>
-          <a:xfrm>
-            <a:off x="5943600" y="2670048"/>
+          <p:cNvPr id="35" name="Text 33"/>
+          <p:cNvSpPr/>
+          <p:nvPr/>
+        </p:nvSpPr>
+        <p:spPr>
+          <a:xfrm>
+            <a:off x="5943600" y="3127248"/>
             <a:ext cx="1463040" cy="420624"/>
           </a:xfrm>
           <a:prstGeom prst="rect">
@@ -38575,7 +38893,7 @@
                 <a:ea typeface="Trebuchet MS" pitchFamily="34" charset="-122"/>
                 <a:cs typeface="Trebuchet MS" pitchFamily="34" charset="-120"/>
               </a:rPr>
-              <a:t>-er</a:t>
+              <a:t>-s</a:t>
             </a:r>
             <a:endParaRPr lang="en-US" sz="1300" dirty="0"/>
           </a:p>
@@ -38583,319 +38901,13 @@
       </p:sp>
       <p:sp>
         <p:nvSpPr>
-          <p:cNvPr id="33" name="Shape 31"/>
-          <p:cNvSpPr/>
-          <p:nvPr/>
-        </p:nvSpPr>
-        <p:spPr>
-          <a:xfrm>
-            <a:off x="640080" y="3127248"/>
-            <a:ext cx="1463040" cy="420624"/>
-          </a:xfrm>
-          <a:prstGeom prst="rect">
-            <a:avLst/>
-          </a:prstGeom>
-          <a:solidFill>
-            <a:srgbClr val="DDD6FE"/>
-          </a:solidFill>
-          <a:ln w="12700">
-            <a:solidFill>
-              <a:srgbClr val="E5E7EB"/>
-            </a:solidFill>
-            <a:prstDash val="solid"/>
-          </a:ln>
-        </p:spPr>
-      </p:sp>
-      <p:sp>
-        <p:nvSpPr>
-          <p:cNvPr id="34" name="Text 32"/>
-          <p:cNvSpPr/>
-          <p:nvPr/>
-        </p:nvSpPr>
-        <p:spPr>
-          <a:xfrm>
-            <a:off x="640080" y="3127248"/>
-            <a:ext cx="1463040" cy="420624"/>
-          </a:xfrm>
-          <a:prstGeom prst="rect">
-            <a:avLst/>
-          </a:prstGeom>
-          <a:noFill/>
-          <a:ln/>
-        </p:spPr>
-        <p:txBody>
-          <a:bodyPr wrap="square" lIns="0" tIns="0" rIns="0" bIns="0" rtlCol="0" anchor="ctr"/>
-          <a:lstStyle/>
-          <a:p>
-            <a:pPr algn="ctr" indent="0" marL="0">
-              <a:buNone/>
-            </a:pPr>
-            <a:r>
-              <a:rPr lang="en-US" sz="1300" b="1" dirty="0">
-                <a:solidFill>
-                  <a:srgbClr val="4C1D95"/>
-                </a:solidFill>
-                <a:latin typeface="Trebuchet MS" pitchFamily="34" charset="0"/>
-                <a:ea typeface="Trebuchet MS" pitchFamily="34" charset="-122"/>
-                <a:cs typeface="Trebuchet MS" pitchFamily="34" charset="-120"/>
-              </a:rPr>
-              <a:t>waste-</a:t>
-            </a:r>
-            <a:endParaRPr lang="en-US" sz="1300" dirty="0"/>
-          </a:p>
-        </p:txBody>
-      </p:sp>
-      <p:sp>
-        <p:nvSpPr>
-          <p:cNvPr id="35" name="Shape 33"/>
-          <p:cNvSpPr/>
-          <p:nvPr/>
-        </p:nvSpPr>
-        <p:spPr>
-          <a:xfrm>
-            <a:off x="3291840" y="3127248"/>
-            <a:ext cx="1645920" cy="420624"/>
-          </a:xfrm>
-          <a:prstGeom prst="rect">
-            <a:avLst/>
-          </a:prstGeom>
-          <a:solidFill>
-            <a:srgbClr val="F1F5F9"/>
-          </a:solidFill>
-          <a:ln w="12700">
-            <a:solidFill>
-              <a:srgbClr val="E5E7EB"/>
-            </a:solidFill>
-            <a:prstDash val="solid"/>
-          </a:ln>
-        </p:spPr>
-      </p:sp>
-      <p:sp>
-        <p:nvSpPr>
-          <p:cNvPr id="36" name="Shape 34"/>
-          <p:cNvSpPr/>
-          <p:nvPr/>
-        </p:nvSpPr>
-        <p:spPr>
-          <a:xfrm>
-            <a:off x="5943600" y="3127248"/>
-            <a:ext cx="1463040" cy="420624"/>
-          </a:xfrm>
-          <a:prstGeom prst="rect">
-            <a:avLst/>
-          </a:prstGeom>
-          <a:solidFill>
-            <a:srgbClr val="FCE7F3"/>
-          </a:solidFill>
-          <a:ln w="12700">
-            <a:solidFill>
-              <a:srgbClr val="E5E7EB"/>
-            </a:solidFill>
-            <a:prstDash val="solid"/>
-          </a:ln>
-        </p:spPr>
-      </p:sp>
-      <p:sp>
-        <p:nvSpPr>
-          <p:cNvPr id="37" name="Text 35"/>
-          <p:cNvSpPr/>
-          <p:nvPr/>
-        </p:nvSpPr>
-        <p:spPr>
-          <a:xfrm>
-            <a:off x="5943600" y="3127248"/>
-            <a:ext cx="1463040" cy="420624"/>
-          </a:xfrm>
-          <a:prstGeom prst="rect">
-            <a:avLst/>
-          </a:prstGeom>
-          <a:noFill/>
-          <a:ln/>
-        </p:spPr>
-        <p:txBody>
-          <a:bodyPr wrap="square" lIns="0" tIns="0" rIns="0" bIns="0" rtlCol="0" anchor="ctr"/>
-          <a:lstStyle/>
-          <a:p>
-            <a:pPr algn="ctr" indent="0" marL="0">
-              <a:buNone/>
-            </a:pPr>
-            <a:r>
-              <a:rPr lang="en-US" sz="1300" b="1" dirty="0">
-                <a:solidFill>
-                  <a:srgbClr val="9D174D"/>
-                </a:solidFill>
-                <a:latin typeface="Trebuchet MS" pitchFamily="34" charset="0"/>
-                <a:ea typeface="Trebuchet MS" pitchFamily="34" charset="-122"/>
-                <a:cs typeface="Trebuchet MS" pitchFamily="34" charset="-120"/>
-              </a:rPr>
-              <a:t>-mark</a:t>
-            </a:r>
-            <a:endParaRPr lang="en-US" sz="1300" dirty="0"/>
-          </a:p>
-        </p:txBody>
-      </p:sp>
-      <p:sp>
-        <p:nvSpPr>
-          <p:cNvPr id="38" name="Shape 36"/>
-          <p:cNvSpPr/>
-          <p:nvPr/>
-        </p:nvSpPr>
-        <p:spPr>
-          <a:xfrm>
-            <a:off x="640080" y="3584448"/>
-            <a:ext cx="1463040" cy="420624"/>
-          </a:xfrm>
-          <a:prstGeom prst="rect">
-            <a:avLst/>
-          </a:prstGeom>
-          <a:solidFill>
-            <a:srgbClr val="DDD6FE"/>
-          </a:solidFill>
-          <a:ln w="12700">
-            <a:solidFill>
-              <a:srgbClr val="E5E7EB"/>
-            </a:solidFill>
-            <a:prstDash val="solid"/>
-          </a:ln>
-        </p:spPr>
-      </p:sp>
-      <p:sp>
-        <p:nvSpPr>
-          <p:cNvPr id="39" name="Text 37"/>
-          <p:cNvSpPr/>
-          <p:nvPr/>
-        </p:nvSpPr>
-        <p:spPr>
-          <a:xfrm>
-            <a:off x="640080" y="3584448"/>
-            <a:ext cx="1463040" cy="420624"/>
-          </a:xfrm>
-          <a:prstGeom prst="rect">
-            <a:avLst/>
-          </a:prstGeom>
-          <a:noFill/>
-          <a:ln/>
-        </p:spPr>
-        <p:txBody>
-          <a:bodyPr wrap="square" lIns="0" tIns="0" rIns="0" bIns="0" rtlCol="0" anchor="ctr"/>
-          <a:lstStyle/>
-          <a:p>
-            <a:pPr algn="ctr" indent="0" marL="0">
-              <a:buNone/>
-            </a:pPr>
-            <a:r>
-              <a:rPr lang="en-US" sz="1300" b="1" dirty="0">
-                <a:solidFill>
-                  <a:srgbClr val="4C1D95"/>
-                </a:solidFill>
-                <a:latin typeface="Trebuchet MS" pitchFamily="34" charset="0"/>
-                <a:ea typeface="Trebuchet MS" pitchFamily="34" charset="-122"/>
-                <a:cs typeface="Trebuchet MS" pitchFamily="34" charset="-120"/>
-              </a:rPr>
-              <a:t>farm-</a:t>
-            </a:r>
-            <a:endParaRPr lang="en-US" sz="1300" dirty="0"/>
-          </a:p>
-        </p:txBody>
-      </p:sp>
-      <p:sp>
-        <p:nvSpPr>
-          <p:cNvPr id="40" name="Shape 38"/>
-          <p:cNvSpPr/>
-          <p:nvPr/>
-        </p:nvSpPr>
-        <p:spPr>
-          <a:xfrm>
-            <a:off x="3291840" y="3584448"/>
-            <a:ext cx="1645920" cy="420624"/>
-          </a:xfrm>
-          <a:prstGeom prst="rect">
-            <a:avLst/>
-          </a:prstGeom>
-          <a:solidFill>
-            <a:srgbClr val="F8FAFC"/>
-          </a:solidFill>
-          <a:ln w="12700">
-            <a:solidFill>
-              <a:srgbClr val="E5E7EB"/>
-            </a:solidFill>
-            <a:prstDash val="solid"/>
-          </a:ln>
-        </p:spPr>
-      </p:sp>
-      <p:sp>
-        <p:nvSpPr>
-          <p:cNvPr id="41" name="Shape 39"/>
-          <p:cNvSpPr/>
-          <p:nvPr/>
-        </p:nvSpPr>
-        <p:spPr>
-          <a:xfrm>
-            <a:off x="5943600" y="3584448"/>
-            <a:ext cx="1463040" cy="420624"/>
-          </a:xfrm>
-          <a:prstGeom prst="rect">
-            <a:avLst/>
-          </a:prstGeom>
-          <a:solidFill>
-            <a:srgbClr val="FCE7F3"/>
-          </a:solidFill>
-          <a:ln w="12700">
-            <a:solidFill>
-              <a:srgbClr val="E5E7EB"/>
-            </a:solidFill>
-            <a:prstDash val="solid"/>
-          </a:ln>
-        </p:spPr>
-      </p:sp>
-      <p:sp>
-        <p:nvSpPr>
-          <p:cNvPr id="42" name="Text 40"/>
-          <p:cNvSpPr/>
-          <p:nvPr/>
-        </p:nvSpPr>
-        <p:spPr>
-          <a:xfrm>
-            <a:off x="5943600" y="3584448"/>
-            <a:ext cx="1463040" cy="420624"/>
-          </a:xfrm>
-          <a:prstGeom prst="rect">
-            <a:avLst/>
-          </a:prstGeom>
-          <a:noFill/>
-          <a:ln/>
-        </p:spPr>
-        <p:txBody>
-          <a:bodyPr wrap="square" lIns="0" tIns="0" rIns="0" bIns="0" rtlCol="0" anchor="ctr"/>
-          <a:lstStyle/>
-          <a:p>
-            <a:pPr algn="ctr" indent="0" marL="0">
-              <a:buNone/>
-            </a:pPr>
-            <a:r>
-              <a:rPr lang="en-US" sz="1300" b="1" dirty="0">
-                <a:solidFill>
-                  <a:srgbClr val="9D174D"/>
-                </a:solidFill>
-                <a:latin typeface="Trebuchet MS" pitchFamily="34" charset="0"/>
-                <a:ea typeface="Trebuchet MS" pitchFamily="34" charset="-122"/>
-                <a:cs typeface="Trebuchet MS" pitchFamily="34" charset="-120"/>
-              </a:rPr>
-              <a:t>-scape</a:t>
-            </a:r>
-            <a:endParaRPr lang="en-US" sz="1300" dirty="0"/>
-          </a:p>
-        </p:txBody>
-      </p:sp>
-      <p:sp>
-        <p:nvSpPr>
-          <p:cNvPr id="43" name="Text 41"/>
-          <p:cNvSpPr/>
-          <p:nvPr/>
-        </p:nvSpPr>
-        <p:spPr>
-          <a:xfrm>
-            <a:off x="365760" y="4178808"/>
+          <p:cNvPr id="36" name="Text 34"/>
+          <p:cNvSpPr/>
+          <p:nvPr/>
+        </p:nvSpPr>
+        <p:spPr>
+          <a:xfrm>
+            <a:off x="365760" y="3721608"/>
             <a:ext cx="1097280" cy="420624"/>
           </a:xfrm>
           <a:prstGeom prst="rect">
@@ -38928,14 +38940,14 @@
       </p:sp>
       <p:sp>
         <p:nvSpPr>
-          <p:cNvPr id="44" name="Shape 42"/>
-          <p:cNvSpPr/>
-          <p:nvPr/>
-        </p:nvSpPr>
-        <p:spPr>
-          <a:xfrm>
-            <a:off x="1508760" y="4178808"/>
-            <a:ext cx="1097280" cy="420624"/>
+          <p:cNvPr id="37" name="Shape 35"/>
+          <p:cNvSpPr/>
+          <p:nvPr/>
+        </p:nvSpPr>
+        <p:spPr>
+          <a:xfrm>
+            <a:off x="1508760" y="3721608"/>
+            <a:ext cx="950976" cy="420624"/>
           </a:xfrm>
           <a:prstGeom prst="rect">
             <a:avLst>
@@ -38962,14 +38974,14 @@
       </p:sp>
       <p:sp>
         <p:nvSpPr>
-          <p:cNvPr id="45" name="Text 43"/>
-          <p:cNvSpPr/>
-          <p:nvPr/>
-        </p:nvSpPr>
-        <p:spPr>
-          <a:xfrm>
-            <a:off x="1508760" y="4178808"/>
-            <a:ext cx="1097280" cy="420624"/>
+          <p:cNvPr id="38" name="Text 36"/>
+          <p:cNvSpPr/>
+          <p:nvPr/>
+        </p:nvSpPr>
+        <p:spPr>
+          <a:xfrm>
+            <a:off x="1508760" y="3721608"/>
+            <a:ext cx="950976" cy="420624"/>
           </a:xfrm>
           <a:prstGeom prst="rect">
             <a:avLst/>
@@ -38993,7 +39005,7 @@
                 <a:ea typeface="Trebuchet MS" pitchFamily="34" charset="-122"/>
                 <a:cs typeface="Trebuchet MS" pitchFamily="34" charset="-120"/>
               </a:rPr>
-              <a:t>over-</a:t>
+              <a:t>mid-</a:t>
             </a:r>
             <a:endParaRPr lang="en-US" sz="1300" dirty="0"/>
           </a:p>
@@ -39001,13 +39013,13 @@
       </p:sp>
       <p:sp>
         <p:nvSpPr>
-          <p:cNvPr id="46" name="Text 44"/>
-          <p:cNvSpPr/>
-          <p:nvPr/>
-        </p:nvSpPr>
-        <p:spPr>
-          <a:xfrm>
-            <a:off x="2633472" y="4178808"/>
+          <p:cNvPr id="39" name="Text 37"/>
+          <p:cNvSpPr/>
+          <p:nvPr/>
+        </p:nvSpPr>
+        <p:spPr>
+          <a:xfrm>
+            <a:off x="2487168" y="3721608"/>
             <a:ext cx="320040" cy="420624"/>
           </a:xfrm>
           <a:prstGeom prst="rect">
@@ -39040,13 +39052,13 @@
       </p:sp>
       <p:sp>
         <p:nvSpPr>
-          <p:cNvPr id="47" name="Shape 45"/>
-          <p:cNvSpPr/>
-          <p:nvPr/>
-        </p:nvSpPr>
-        <p:spPr>
-          <a:xfrm>
-            <a:off x="2980944" y="4178808"/>
+          <p:cNvPr id="40" name="Shape 38"/>
+          <p:cNvSpPr/>
+          <p:nvPr/>
+        </p:nvSpPr>
+        <p:spPr>
+          <a:xfrm>
+            <a:off x="2834640" y="3721608"/>
             <a:ext cx="1243584" cy="420624"/>
           </a:xfrm>
           <a:prstGeom prst="rect">
@@ -39074,13 +39086,13 @@
       </p:sp>
       <p:sp>
         <p:nvSpPr>
-          <p:cNvPr id="48" name="Text 46"/>
-          <p:cNvSpPr/>
-          <p:nvPr/>
-        </p:nvSpPr>
-        <p:spPr>
-          <a:xfrm>
-            <a:off x="2980944" y="4178808"/>
+          <p:cNvPr id="41" name="Text 39"/>
+          <p:cNvSpPr/>
+          <p:nvPr/>
+        </p:nvSpPr>
+        <p:spPr>
+          <a:xfrm>
+            <a:off x="2834640" y="3721608"/>
             <a:ext cx="1243584" cy="420624"/>
           </a:xfrm>
           <a:prstGeom prst="rect">
@@ -39113,13 +39125,13 @@
       </p:sp>
       <p:sp>
         <p:nvSpPr>
-          <p:cNvPr id="49" name="Text 47"/>
-          <p:cNvSpPr/>
-          <p:nvPr/>
-        </p:nvSpPr>
-        <p:spPr>
-          <a:xfrm>
-            <a:off x="4251960" y="4178808"/>
+          <p:cNvPr id="42" name="Text 40"/>
+          <p:cNvSpPr/>
+          <p:nvPr/>
+        </p:nvSpPr>
+        <p:spPr>
+          <a:xfrm>
+            <a:off x="4105656" y="3721608"/>
             <a:ext cx="320040" cy="420624"/>
           </a:xfrm>
           <a:prstGeom prst="rect">
@@ -39152,13 +39164,13 @@
       </p:sp>
       <p:sp>
         <p:nvSpPr>
-          <p:cNvPr id="50" name="Shape 48"/>
-          <p:cNvSpPr/>
-          <p:nvPr/>
-        </p:nvSpPr>
-        <p:spPr>
-          <a:xfrm>
-            <a:off x="4599432" y="4178808"/>
+          <p:cNvPr id="43" name="Shape 41"/>
+          <p:cNvSpPr/>
+          <p:nvPr/>
+        </p:nvSpPr>
+        <p:spPr>
+          <a:xfrm>
+            <a:off x="4453128" y="3721608"/>
             <a:ext cx="822960" cy="420624"/>
           </a:xfrm>
           <a:prstGeom prst="rect">
@@ -39186,13 +39198,13 @@
       </p:sp>
       <p:sp>
         <p:nvSpPr>
-          <p:cNvPr id="51" name="Text 49"/>
-          <p:cNvSpPr/>
-          <p:nvPr/>
-        </p:nvSpPr>
-        <p:spPr>
-          <a:xfrm>
-            <a:off x="4599432" y="4178808"/>
+          <p:cNvPr id="44" name="Text 42"/>
+          <p:cNvSpPr/>
+          <p:nvPr/>
+        </p:nvSpPr>
+        <p:spPr>
+          <a:xfrm>
+            <a:off x="4453128" y="3721608"/>
             <a:ext cx="822960" cy="420624"/>
           </a:xfrm>
           <a:prstGeom prst="rect">
@@ -39225,13 +39237,13 @@
       </p:sp>
       <p:sp>
         <p:nvSpPr>
-          <p:cNvPr id="52" name="Text 50"/>
-          <p:cNvSpPr/>
-          <p:nvPr/>
-        </p:nvSpPr>
-        <p:spPr>
-          <a:xfrm>
-            <a:off x="5495544" y="4178808"/>
+          <p:cNvPr id="45" name="Text 43"/>
+          <p:cNvSpPr/>
+          <p:nvPr/>
+        </p:nvSpPr>
+        <p:spPr>
+          <a:xfrm>
+            <a:off x="5349240" y="3721608"/>
             <a:ext cx="365760" cy="420624"/>
           </a:xfrm>
           <a:prstGeom prst="rect">
@@ -39264,13 +39276,13 @@
       </p:sp>
       <p:sp>
         <p:nvSpPr>
-          <p:cNvPr id="53" name="Shape 51"/>
-          <p:cNvSpPr/>
-          <p:nvPr/>
-        </p:nvSpPr>
-        <p:spPr>
-          <a:xfrm>
-            <a:off x="5907024" y="4178808"/>
+          <p:cNvPr id="46" name="Shape 44"/>
+          <p:cNvSpPr/>
+          <p:nvPr/>
+        </p:nvSpPr>
+        <p:spPr>
+          <a:xfrm>
+            <a:off x="5760720" y="3721608"/>
             <a:ext cx="2194560" cy="420624"/>
           </a:xfrm>
           <a:prstGeom prst="rect">
@@ -39291,13 +39303,13 @@
       </p:sp>
       <p:sp>
         <p:nvSpPr>
-          <p:cNvPr id="54" name="Text 52"/>
-          <p:cNvSpPr/>
-          <p:nvPr/>
-        </p:nvSpPr>
-        <p:spPr>
-          <a:xfrm>
-            <a:off x="5907024" y="4178808"/>
+          <p:cNvPr id="47" name="Text 45"/>
+          <p:cNvSpPr/>
+          <p:nvPr/>
+        </p:nvSpPr>
+        <p:spPr>
+          <a:xfrm>
+            <a:off x="5760720" y="3721608"/>
             <a:ext cx="2194560" cy="420624"/>
           </a:xfrm>
           <a:prstGeom prst="rect">
@@ -39322,7 +39334,7 @@
                 <a:ea typeface="Trebuchet MS" pitchFamily="34" charset="-122"/>
                 <a:cs typeface="Trebuchet MS" pitchFamily="34" charset="-120"/>
               </a:rPr>
-              <a:t>landlord</a:t>
+              <a:t>land</a:t>
             </a:r>
             <a:endParaRPr lang="en-US" sz="1400" dirty="0"/>
           </a:p>
@@ -39614,7 +39626,7 @@
                 <a:ea typeface="Calibri" pitchFamily="34" charset="-122"/>
                 <a:cs typeface="Calibri" pitchFamily="34" charset="-120"/>
               </a:rPr>
-              <a:t>Word Labs  •  wordlabs.app  •  Root: 'land' = ground, earth, territory</a:t>
+              <a:t>Word Labs  •  wordlabs.app  •  Root: 'land' = an area of ground; to arrive</a:t>
             </a:r>
             <a:endParaRPr lang="en-US" sz="800" dirty="0"/>
           </a:p>
@@ -39726,7 +39738,7 @@
                 <a:ea typeface="Trebuchet MS" pitchFamily="34" charset="-122"/>
                 <a:cs typeface="Trebuchet MS" pitchFamily="34" charset="-120"/>
               </a:rPr>
-              <a:t>landlord</a:t>
+              <a:t>land</a:t>
             </a:r>
             <a:endParaRPr lang="en-US" sz="1200" dirty="0"/>
           </a:p>
@@ -39792,7 +39804,7 @@
                 <a:ea typeface="Calibri" pitchFamily="34" charset="-122"/>
                 <a:cs typeface="Calibri" pitchFamily="34" charset="-120"/>
               </a:rPr>
-              <a:t>A person who owns a building or land and rents it to other people.</a:t>
+              <a:t>the solid ground, or to come down onto the ground</a:t>
             </a:r>
             <a:endParaRPr lang="en-US" sz="1200" dirty="0"/>
           </a:p>
@@ -39865,7 +39877,7 @@
                 <a:ea typeface="Trebuchet MS" pitchFamily="34" charset="-122"/>
                 <a:cs typeface="Trebuchet MS" pitchFamily="34" charset="-120"/>
               </a:rPr>
-              <a:t>landmark</a:t>
+              <a:t>lands</a:t>
             </a:r>
             <a:endParaRPr lang="en-US" sz="1200" dirty="0"/>
           </a:p>
@@ -39931,7 +39943,7 @@
                 <a:ea typeface="Calibri" pitchFamily="34" charset="-122"/>
                 <a:cs typeface="Calibri" pitchFamily="34" charset="-120"/>
               </a:rPr>
-              <a:t>A flat area of land that is low in height compared to the land around it.</a:t>
+              <a:t>arrives safely on the ground after being in the air</a:t>
             </a:r>
             <a:endParaRPr lang="en-US" sz="1200" dirty="0"/>
           </a:p>
@@ -40004,7 +40016,7 @@
                 <a:ea typeface="Trebuchet MS" pitchFamily="34" charset="-122"/>
                 <a:cs typeface="Trebuchet MS" pitchFamily="34" charset="-120"/>
               </a:rPr>
-              <a:t>landscape</a:t>
+              <a:t>landed</a:t>
             </a:r>
             <a:endParaRPr lang="en-US" sz="1200" dirty="0"/>
           </a:p>
@@ -40070,7 +40082,7 @@
                 <a:ea typeface="Calibri" pitchFamily="34" charset="-122"/>
                 <a:cs typeface="Calibri" pitchFamily="34" charset="-120"/>
               </a:rPr>
-              <a:t>Everything you can see when you look across an area of land, like hills, trees and fields.</a:t>
+              <a:t>came down onto the ground (past tense)</a:t>
             </a:r>
             <a:endParaRPr lang="en-US" sz="1200" dirty="0"/>
           </a:p>
@@ -40143,7 +40155,7 @@
                 <a:ea typeface="Trebuchet MS" pitchFamily="34" charset="-122"/>
                 <a:cs typeface="Trebuchet MS" pitchFamily="34" charset="-120"/>
               </a:rPr>
-              <a:t>overland</a:t>
+              <a:t>lander</a:t>
             </a:r>
             <a:endParaRPr lang="en-US" sz="1200" dirty="0"/>
           </a:p>
@@ -40209,7 +40221,7 @@
                 <a:ea typeface="Calibri" pitchFamily="34" charset="-122"/>
                 <a:cs typeface="Calibri" pitchFamily="34" charset="-120"/>
               </a:rPr>
-              <a:t>An area of high ground or hills far from the sea.</a:t>
+              <a:t>more than one spacecraft designed to land on a planet or moon</a:t>
             </a:r>
             <a:endParaRPr lang="en-US" sz="1200" dirty="0"/>
           </a:p>
@@ -40282,7 +40294,7 @@
                 <a:ea typeface="Trebuchet MS" pitchFamily="34" charset="-122"/>
                 <a:cs typeface="Trebuchet MS" pitchFamily="34" charset="-120"/>
               </a:rPr>
-              <a:t>upland</a:t>
+              <a:t>landers</a:t>
             </a:r>
             <a:endParaRPr lang="en-US" sz="1200" dirty="0"/>
           </a:p>
@@ -40348,285 +40360,7 @@
                 <a:ea typeface="Calibri" pitchFamily="34" charset="-122"/>
                 <a:cs typeface="Calibri" pitchFamily="34" charset="-120"/>
               </a:rPr>
-              <a:t>Travelling across land rather than by sea or air.</a:t>
-            </a:r>
-            <a:endParaRPr lang="en-US" sz="1200" dirty="0"/>
-          </a:p>
-        </p:txBody>
-      </p:sp>
-      <p:sp>
-        <p:nvSpPr>
-          <p:cNvPr id="31" name="Shape 29"/>
-          <p:cNvSpPr/>
-          <p:nvPr/>
-        </p:nvSpPr>
-        <p:spPr>
-          <a:xfrm>
-            <a:off x="365760" y="3840480"/>
-            <a:ext cx="2011680" cy="457200"/>
-          </a:xfrm>
-          <a:prstGeom prst="rect">
-            <a:avLst>
-              <a:gd name="adj" fmla="val 12000"/>
-            </a:avLst>
-          </a:prstGeom>
-          <a:solidFill>
-            <a:srgbClr val="EEF2FF"/>
-          </a:solidFill>
-          <a:ln w="12700">
-            <a:solidFill>
-              <a:srgbClr val="6366F1"/>
-            </a:solidFill>
-            <a:prstDash val="solid"/>
-          </a:ln>
-          <a:effectLst>
-            <a:outerShdw sx="100000" sy="100000" kx="0" ky="0" algn="bl" rotWithShape="0" blurRad="101600" dist="38100" dir="8100000">
-              <a:srgbClr val="000000">
-                <a:alpha val="12000"/>
-              </a:srgbClr>
-            </a:outerShdw>
-          </a:effectLst>
-        </p:spPr>
-      </p:sp>
-      <p:sp>
-        <p:nvSpPr>
-          <p:cNvPr id="32" name="Text 30"/>
-          <p:cNvSpPr/>
-          <p:nvPr/>
-        </p:nvSpPr>
-        <p:spPr>
-          <a:xfrm>
-            <a:off x="365760" y="3840480"/>
-            <a:ext cx="2011680" cy="457200"/>
-          </a:xfrm>
-          <a:prstGeom prst="rect">
-            <a:avLst/>
-          </a:prstGeom>
-          <a:noFill/>
-          <a:ln/>
-        </p:spPr>
-        <p:txBody>
-          <a:bodyPr wrap="square" lIns="0" tIns="0" rIns="0" bIns="0" rtlCol="0" anchor="ctr"/>
-          <a:lstStyle/>
-          <a:p>
-            <a:pPr algn="ctr" indent="0" marL="0">
-              <a:buNone/>
-            </a:pPr>
-            <a:r>
-              <a:rPr lang="en-US" sz="1200" b="1" dirty="0">
-                <a:solidFill>
-                  <a:srgbClr val="4338CA"/>
-                </a:solidFill>
-                <a:latin typeface="Trebuchet MS" pitchFamily="34" charset="0"/>
-                <a:ea typeface="Trebuchet MS" pitchFamily="34" charset="-122"/>
-                <a:cs typeface="Trebuchet MS" pitchFamily="34" charset="-120"/>
-              </a:rPr>
-              <a:t>landing</a:t>
-            </a:r>
-            <a:endParaRPr lang="en-US" sz="1200" dirty="0"/>
-          </a:p>
-        </p:txBody>
-      </p:sp>
-      <p:sp>
-        <p:nvSpPr>
-          <p:cNvPr id="33" name="Shape 31"/>
-          <p:cNvSpPr/>
-          <p:nvPr/>
-        </p:nvSpPr>
-        <p:spPr>
-          <a:xfrm>
-            <a:off x="2514600" y="3840480"/>
-            <a:ext cx="6263640" cy="457200"/>
-          </a:xfrm>
-          <a:prstGeom prst="rect">
-            <a:avLst>
-              <a:gd name="adj" fmla="val 12000"/>
-            </a:avLst>
-          </a:prstGeom>
-          <a:solidFill>
-            <a:srgbClr val="F8FAFC"/>
-          </a:solidFill>
-          <a:ln w="12700">
-            <a:solidFill>
-              <a:srgbClr val="E2E8F0"/>
-            </a:solidFill>
-            <a:prstDash val="solid"/>
-          </a:ln>
-        </p:spPr>
-      </p:sp>
-      <p:sp>
-        <p:nvSpPr>
-          <p:cNvPr id="34" name="Text 32"/>
-          <p:cNvSpPr/>
-          <p:nvPr/>
-        </p:nvSpPr>
-        <p:spPr>
-          <a:xfrm>
-            <a:off x="2651760" y="3840480"/>
-            <a:ext cx="6035040" cy="457200"/>
-          </a:xfrm>
-          <a:prstGeom prst="rect">
-            <a:avLst/>
-          </a:prstGeom>
-          <a:noFill/>
-          <a:ln/>
-        </p:spPr>
-        <p:txBody>
-          <a:bodyPr wrap="square" rtlCol="0" anchor="ctr"/>
-          <a:lstStyle/>
-          <a:p>
-            <a:pPr algn="l" indent="0" marL="0">
-              <a:buNone/>
-            </a:pPr>
-            <a:r>
-              <a:rPr lang="en-US" sz="1200" dirty="0">
-                <a:solidFill>
-                  <a:srgbClr val="0F172A"/>
-                </a:solidFill>
-                <a:latin typeface="Calibri" pitchFamily="34" charset="0"/>
-                <a:ea typeface="Calibri" pitchFamily="34" charset="-122"/>
-                <a:cs typeface="Calibri" pitchFamily="34" charset="-120"/>
-              </a:rPr>
-              <a:t>The act of coming down and touching the ground, like a plane landing at an airport.</a:t>
-            </a:r>
-            <a:endParaRPr lang="en-US" sz="1200" dirty="0"/>
-          </a:p>
-        </p:txBody>
-      </p:sp>
-      <p:sp>
-        <p:nvSpPr>
-          <p:cNvPr id="35" name="Shape 33"/>
-          <p:cNvSpPr/>
-          <p:nvPr/>
-        </p:nvSpPr>
-        <p:spPr>
-          <a:xfrm>
-            <a:off x="365760" y="4370832"/>
-            <a:ext cx="2011680" cy="457200"/>
-          </a:xfrm>
-          <a:prstGeom prst="rect">
-            <a:avLst>
-              <a:gd name="adj" fmla="val 12000"/>
-            </a:avLst>
-          </a:prstGeom>
-          <a:solidFill>
-            <a:srgbClr val="EEF2FF"/>
-          </a:solidFill>
-          <a:ln w="12700">
-            <a:solidFill>
-              <a:srgbClr val="6366F1"/>
-            </a:solidFill>
-            <a:prstDash val="solid"/>
-          </a:ln>
-          <a:effectLst>
-            <a:outerShdw sx="100000" sy="100000" kx="0" ky="0" algn="bl" rotWithShape="0" blurRad="101600" dist="38100" dir="8100000">
-              <a:srgbClr val="000000">
-                <a:alpha val="12000"/>
-              </a:srgbClr>
-            </a:outerShdw>
-          </a:effectLst>
-        </p:spPr>
-      </p:sp>
-      <p:sp>
-        <p:nvSpPr>
-          <p:cNvPr id="36" name="Text 34"/>
-          <p:cNvSpPr/>
-          <p:nvPr/>
-        </p:nvSpPr>
-        <p:spPr>
-          <a:xfrm>
-            <a:off x="365760" y="4370832"/>
-            <a:ext cx="2011680" cy="457200"/>
-          </a:xfrm>
-          <a:prstGeom prst="rect">
-            <a:avLst/>
-          </a:prstGeom>
-          <a:noFill/>
-          <a:ln/>
-        </p:spPr>
-        <p:txBody>
-          <a:bodyPr wrap="square" lIns="0" tIns="0" rIns="0" bIns="0" rtlCol="0" anchor="ctr"/>
-          <a:lstStyle/>
-          <a:p>
-            <a:pPr algn="ctr" indent="0" marL="0">
-              <a:buNone/>
-            </a:pPr>
-            <a:r>
-              <a:rPr lang="en-US" sz="1200" b="1" dirty="0">
-                <a:solidFill>
-                  <a:srgbClr val="4338CA"/>
-                </a:solidFill>
-                <a:latin typeface="Trebuchet MS" pitchFamily="34" charset="0"/>
-                <a:ea typeface="Trebuchet MS" pitchFamily="34" charset="-122"/>
-                <a:cs typeface="Trebuchet MS" pitchFamily="34" charset="-120"/>
-              </a:rPr>
-              <a:t>lowland</a:t>
-            </a:r>
-            <a:endParaRPr lang="en-US" sz="1200" dirty="0"/>
-          </a:p>
-        </p:txBody>
-      </p:sp>
-      <p:sp>
-        <p:nvSpPr>
-          <p:cNvPr id="37" name="Shape 35"/>
-          <p:cNvSpPr/>
-          <p:nvPr/>
-        </p:nvSpPr>
-        <p:spPr>
-          <a:xfrm>
-            <a:off x="2514600" y="4370832"/>
-            <a:ext cx="6263640" cy="457200"/>
-          </a:xfrm>
-          <a:prstGeom prst="rect">
-            <a:avLst>
-              <a:gd name="adj" fmla="val 12000"/>
-            </a:avLst>
-          </a:prstGeom>
-          <a:solidFill>
-            <a:srgbClr val="F8FAFC"/>
-          </a:solidFill>
-          <a:ln w="12700">
-            <a:solidFill>
-              <a:srgbClr val="E2E8F0"/>
-            </a:solidFill>
-            <a:prstDash val="solid"/>
-          </a:ln>
-        </p:spPr>
-      </p:sp>
-      <p:sp>
-        <p:nvSpPr>
-          <p:cNvPr id="38" name="Text 36"/>
-          <p:cNvSpPr/>
-          <p:nvPr/>
-        </p:nvSpPr>
-        <p:spPr>
-          <a:xfrm>
-            <a:off x="2651760" y="4370832"/>
-            <a:ext cx="6035040" cy="457200"/>
-          </a:xfrm>
-          <a:prstGeom prst="rect">
-            <a:avLst/>
-          </a:prstGeom>
-          <a:noFill/>
-          <a:ln/>
-        </p:spPr>
-        <p:txBody>
-          <a:bodyPr wrap="square" rtlCol="0" anchor="ctr"/>
-          <a:lstStyle/>
-          <a:p>
-            <a:pPr algn="l" indent="0" marL="0">
-              <a:buNone/>
-            </a:pPr>
-            <a:r>
-              <a:rPr lang="en-US" sz="1200" dirty="0">
-                <a:solidFill>
-                  <a:srgbClr val="0F172A"/>
-                </a:solidFill>
-                <a:latin typeface="Calibri" pitchFamily="34" charset="0"/>
-                <a:ea typeface="Calibri" pitchFamily="34" charset="-122"/>
-                <a:cs typeface="Calibri" pitchFamily="34" charset="-120"/>
-              </a:rPr>
-              <a:t>A well-known feature of the landscape, like a building or hill, that helps people find their way.</a:t>
+              <a:t>a spacecraft designed to land on a planet or moon</a:t>
             </a:r>
             <a:endParaRPr lang="en-US" sz="1200" dirty="0"/>
           </a:p>
@@ -40918,7 +40652,7 @@
                 <a:ea typeface="Calibri" pitchFamily="34" charset="-122"/>
                 <a:cs typeface="Calibri" pitchFamily="34" charset="-120"/>
               </a:rPr>
-              <a:t>Word Labs  •  wordlabs.app  •  Root: 'land' = ground, earth, territory</a:t>
+              <a:t>Word Labs  •  wordlabs.app  •  Root: 'land' = an area of ground; to arrive</a:t>
             </a:r>
             <a:endParaRPr lang="en-US" sz="800" dirty="0"/>
           </a:p>
@@ -41121,7 +40855,7 @@
                 <a:ea typeface="Calibri" pitchFamily="34" charset="-122"/>
                 <a:cs typeface="Calibri" pitchFamily="34" charset="-120"/>
               </a:rPr>
-              <a:t>The pilot made a smooth landing on the runway after the long flight from Sydney.</a:t>
+              <a:t>The plane began to land on the runway.</a:t>
             </a:r>
             <a:endParaRPr lang="en-US" sz="1500" dirty="0"/>
           </a:p>
@@ -41285,7 +41019,7 @@
                 <a:ea typeface="Calibri" pitchFamily="34" charset="-122"/>
                 <a:cs typeface="Calibri" pitchFamily="34" charset="-120"/>
               </a:rPr>
-              <a:t>We drove overland through the outback to reach the remote cattle station.</a:t>
+              <a:t>The eagle lands gracefully on the tallest branch.</a:t>
             </a:r>
             <a:endParaRPr lang="en-US" sz="1500" dirty="0"/>
           </a:p>
@@ -41449,7 +41183,7 @@
                 <a:ea typeface="Calibri" pitchFamily="34" charset="-122"/>
                 <a:cs typeface="Calibri" pitchFamily="34" charset="-120"/>
               </a:rPr>
-              <a:t>The old lighthouse is an important landmark that sailors have used for hundreds of years.</a:t>
+              <a:t>The plane landed safely despite the storm.</a:t>
             </a:r>
             <a:endParaRPr lang="en-US" sz="1500" dirty="0"/>
           </a:p>
